--- a/output/wordlabs-hope-3day.pptx
+++ b/output/wordlabs-hope-3day.pptx
@@ -4279,7 +4279,7 @@
                 <a:ea typeface="Calibri" pitchFamily="34" charset="-122"/>
                 <a:cs typeface="Calibri" pitchFamily="34" charset="-120"/>
               </a:rPr>
-              <a:t>Origin: Old English: hopa</a:t>
+              <a:t>Origin: Latin: sperare</a:t>
             </a:r>
             <a:endParaRPr lang="en-US" sz="1300" dirty="0"/>
           </a:p>
@@ -5622,7 +5622,7 @@
                 <a:ea typeface="Trebuchet MS" pitchFamily="34" charset="-122"/>
                 <a:cs typeface="Trebuchet MS" pitchFamily="34" charset="-120"/>
               </a:rPr>
-              <a:t>1</a:t>
+              <a:t>0</a:t>
             </a:r>
             <a:pPr algn="ctr" indent="0" marL="0">
               <a:buNone/>
@@ -6040,7 +6040,7 @@
                 <a:ea typeface="Calibri" pitchFamily="34" charset="-122"/>
                 <a:cs typeface="Calibri" pitchFamily="34" charset="-120"/>
               </a:rPr>
-              <a:t>She felt </a:t>
+              <a:t>The </a:t>
             </a:r>
             <a:pPr algn="l" indent="0" marL="0">
               <a:buNone/>
@@ -6071,7 +6071,7 @@
                 <a:ea typeface="Calibri" pitchFamily="34" charset="-122"/>
                 <a:cs typeface="Calibri" pitchFamily="34" charset="-120"/>
               </a:rPr>
-              <a:t> as she waited, </a:t>
+              <a:t> child was </a:t>
             </a:r>
             <a:pPr algn="l" indent="0" marL="0">
               <a:buNone/>
@@ -6102,7 +6102,7 @@
                 <a:ea typeface="Calibri" pitchFamily="34" charset="-122"/>
                 <a:cs typeface="Calibri" pitchFamily="34" charset="-120"/>
               </a:rPr>
-              <a:t> the results would be good.</a:t>
+              <a:t> her lost dog would find its way home.</a:t>
             </a:r>
             <a:endParaRPr lang="en-US" sz="1800" dirty="0"/>
           </a:p>
@@ -12480,7 +12480,7 @@
                 <a:ea typeface="Calibri" pitchFamily="34" charset="-122"/>
                 <a:cs typeface="Calibri" pitchFamily="34" charset="-120"/>
               </a:rPr>
-              <a:t>happening now</a:t>
+              <a:t>in the process of doing</a:t>
             </a:r>
             <a:endParaRPr lang="en-US" sz="850" dirty="0"/>
           </a:p>
@@ -13504,7 +13504,7 @@
                 <a:ea typeface="Calibri" pitchFamily="34" charset="-122"/>
                 <a:cs typeface="Calibri" pitchFamily="34" charset="-120"/>
               </a:rPr>
-              <a:t>happening now</a:t>
+              <a:t>in the process of doing</a:t>
             </a:r>
             <a:endParaRPr lang="en-US" sz="850" dirty="0"/>
           </a:p>
@@ -13663,7 +13663,7 @@
                 <a:ea typeface="Trebuchet MS" pitchFamily="34" charset="-122"/>
                 <a:cs typeface="Trebuchet MS" pitchFamily="34" charset="-120"/>
               </a:rPr>
-              <a:t>hop</a:t>
+              <a:t>ho</a:t>
             </a:r>
             <a:endParaRPr lang="en-US" sz="1400" dirty="0"/>
           </a:p>
@@ -13768,7 +13768,7 @@
                 <a:ea typeface="Trebuchet MS" pitchFamily="34" charset="-122"/>
                 <a:cs typeface="Trebuchet MS" pitchFamily="34" charset="-120"/>
               </a:rPr>
-              <a:t>ing</a:t>
+              <a:t>ping</a:t>
             </a:r>
             <a:endParaRPr lang="en-US" sz="1400" dirty="0"/>
           </a:p>
@@ -14925,7 +14925,7 @@
                 <a:ea typeface="Calibri" pitchFamily="34" charset="-122"/>
                 <a:cs typeface="Calibri" pitchFamily="34" charset="-120"/>
               </a:rPr>
-              <a:t>happening now</a:t>
+              <a:t>in the process of doing</a:t>
             </a:r>
             <a:endParaRPr lang="en-US" sz="850" dirty="0"/>
           </a:p>
@@ -15084,7 +15084,7 @@
                 <a:ea typeface="Trebuchet MS" pitchFamily="34" charset="-122"/>
                 <a:cs typeface="Trebuchet MS" pitchFamily="34" charset="-120"/>
               </a:rPr>
-              <a:t>hop</a:t>
+              <a:t>ho</a:t>
             </a:r>
             <a:endParaRPr lang="en-US" sz="1400" dirty="0"/>
           </a:p>
@@ -15189,7 +15189,7 @@
                 <a:ea typeface="Trebuchet MS" pitchFamily="34" charset="-122"/>
                 <a:cs typeface="Trebuchet MS" pitchFamily="34" charset="-120"/>
               </a:rPr>
-              <a:t>ing</a:t>
+              <a:t>ping</a:t>
             </a:r>
             <a:endParaRPr lang="en-US" sz="1400" dirty="0"/>
           </a:p>
@@ -16941,7 +16941,7 @@
                 <a:ea typeface="Calibri" pitchFamily="34" charset="-122"/>
                 <a:cs typeface="Calibri" pitchFamily="34" charset="-120"/>
               </a:rPr>
-              <a:t>Hopefully</a:t>
+              <a:t>Hopelessly</a:t>
             </a:r>
             <a:pPr algn="l" indent="0" marL="0">
               <a:buNone/>
@@ -16955,7 +16955,7 @@
                 <a:ea typeface="Calibri" pitchFamily="34" charset="-122"/>
                 <a:cs typeface="Calibri" pitchFamily="34" charset="-120"/>
               </a:rPr>
-              <a:t>, the </a:t>
+              <a:t> lost in the bush, the hiker </a:t>
             </a:r>
             <a:pPr algn="l" indent="0" marL="0">
               <a:buNone/>
@@ -16972,7 +16972,7 @@
                 <a:ea typeface="Calibri" pitchFamily="34" charset="-122"/>
                 <a:cs typeface="Calibri" pitchFamily="34" charset="-120"/>
               </a:rPr>
-              <a:t>hopeless</a:t>
+              <a:t>hoped</a:t>
             </a:r>
             <a:pPr algn="l" indent="0" marL="0">
               <a:buNone/>
@@ -16986,7 +16986,7 @@
                 <a:ea typeface="Calibri" pitchFamily="34" charset="-122"/>
                 <a:cs typeface="Calibri" pitchFamily="34" charset="-120"/>
               </a:rPr>
-              <a:t> situation would change, and she kept </a:t>
+              <a:t> for a sign, but felt a strange sense of </a:t>
             </a:r>
             <a:pPr algn="l" indent="0" marL="0">
               <a:buNone/>
@@ -17003,7 +17003,7 @@
                 <a:ea typeface="Calibri" pitchFamily="34" charset="-122"/>
                 <a:cs typeface="Calibri" pitchFamily="34" charset="-120"/>
               </a:rPr>
-              <a:t>hoping</a:t>
+              <a:t>hopelessness</a:t>
             </a:r>
             <a:pPr algn="l" indent="0" marL="0">
               <a:buNone/>
@@ -17017,7 +17017,7 @@
                 <a:ea typeface="Calibri" pitchFamily="34" charset="-122"/>
                 <a:cs typeface="Calibri" pitchFamily="34" charset="-120"/>
               </a:rPr>
-              <a:t> for the best.</a:t>
+              <a:t>.</a:t>
             </a:r>
             <a:endParaRPr lang="en-US" sz="1800" dirty="0"/>
           </a:p>
@@ -17172,7 +17172,7 @@
                 <a:ea typeface="Trebuchet MS" pitchFamily="34" charset="-122"/>
                 <a:cs typeface="Trebuchet MS" pitchFamily="34" charset="-120"/>
               </a:rPr>
-              <a:t>Hopefully</a:t>
+              <a:t>hopelessly</a:t>
             </a:r>
             <a:endParaRPr lang="en-US" sz="1400" dirty="0"/>
           </a:p>
@@ -17300,7 +17300,7 @@
                 <a:ea typeface="Trebuchet MS" pitchFamily="34" charset="-122"/>
                 <a:cs typeface="Trebuchet MS" pitchFamily="34" charset="-120"/>
               </a:rPr>
-              <a:t>hopeless</a:t>
+              <a:t>hoped</a:t>
             </a:r>
             <a:endParaRPr lang="en-US" sz="1400" dirty="0"/>
           </a:p>
@@ -17428,7 +17428,7 @@
                 <a:ea typeface="Trebuchet MS" pitchFamily="34" charset="-122"/>
                 <a:cs typeface="Trebuchet MS" pitchFamily="34" charset="-120"/>
               </a:rPr>
-              <a:t>hoping</a:t>
+              <a:t>hopelessness</a:t>
             </a:r>
             <a:endParaRPr lang="en-US" sz="1400" dirty="0"/>
           </a:p>
@@ -17898,7 +17898,7 @@
                 <a:ea typeface="Trebuchet MS" pitchFamily="34" charset="-122"/>
                 <a:cs typeface="Trebuchet MS" pitchFamily="34" charset="-120"/>
               </a:rPr>
-              <a:t>Hopefully</a:t>
+              <a:t>hopelessly</a:t>
             </a:r>
             <a:endParaRPr lang="en-US" sz="2800" dirty="0"/>
           </a:p>
@@ -18725,7 +18725,7 @@
                 <a:ea typeface="Trebuchet MS" pitchFamily="34" charset="-122"/>
                 <a:cs typeface="Trebuchet MS" pitchFamily="34" charset="-120"/>
               </a:rPr>
-              <a:t>Hopefully</a:t>
+              <a:t>hopelessly</a:t>
             </a:r>
             <a:endParaRPr lang="en-US" sz="2800" dirty="0"/>
           </a:p>
@@ -18926,11 +18926,11 @@
             </a:avLst>
           </a:prstGeom>
           <a:solidFill>
-            <a:srgbClr val="FCE7F3"/>
+            <a:srgbClr val="DDD6FE"/>
           </a:solidFill>
           <a:ln w="19050">
             <a:solidFill>
-              <a:srgbClr val="DB2777"/>
+              <a:srgbClr val="7C3AED"/>
             </a:solidFill>
             <a:prstDash val="solid"/>
           </a:ln>
@@ -18970,13 +18970,13 @@
             <a:r>
               <a:rPr lang="en-US" sz="1300" b="1" dirty="0">
                 <a:solidFill>
-                  <a:srgbClr val="9D174D"/>
+                  <a:srgbClr val="4C1D95"/>
                 </a:solidFill>
                 <a:latin typeface="Trebuchet MS" pitchFamily="34" charset="0"/>
                 <a:ea typeface="Trebuchet MS" pitchFamily="34" charset="-122"/>
                 <a:cs typeface="Trebuchet MS" pitchFamily="34" charset="-120"/>
               </a:rPr>
-              <a:t>ful</a:t>
+              <a:t>less</a:t>
             </a:r>
             <a:endParaRPr lang="en-US" sz="1300" dirty="0"/>
           </a:p>
@@ -19015,7 +19015,7 @@
                 <a:ea typeface="Calibri" pitchFamily="34" charset="-122"/>
                 <a:cs typeface="Calibri" pitchFamily="34" charset="-120"/>
               </a:rPr>
-              <a:t>full of</a:t>
+              <a:t>without</a:t>
             </a:r>
             <a:endParaRPr lang="en-US" sz="850" dirty="0"/>
           </a:p>
@@ -19127,7 +19127,7 @@
                 <a:ea typeface="Calibri" pitchFamily="34" charset="-122"/>
                 <a:cs typeface="Calibri" pitchFamily="34" charset="-120"/>
               </a:rPr>
-              <a:t>in that way</a:t>
+              <a:t>in a certain way</a:t>
             </a:r>
             <a:endParaRPr lang="en-US" sz="850" dirty="0"/>
           </a:p>
@@ -19822,7 +19822,7 @@
                 <a:ea typeface="Trebuchet MS" pitchFamily="34" charset="-122"/>
                 <a:cs typeface="Trebuchet MS" pitchFamily="34" charset="-120"/>
               </a:rPr>
-              <a:t>Hopefully</a:t>
+              <a:t>hopelessly</a:t>
             </a:r>
             <a:endParaRPr lang="en-US" sz="2800" dirty="0"/>
           </a:p>
@@ -20023,11 +20023,11 @@
             </a:avLst>
           </a:prstGeom>
           <a:solidFill>
-            <a:srgbClr val="FCE7F3"/>
+            <a:srgbClr val="DDD6FE"/>
           </a:solidFill>
           <a:ln w="19050">
             <a:solidFill>
-              <a:srgbClr val="DB2777"/>
+              <a:srgbClr val="7C3AED"/>
             </a:solidFill>
             <a:prstDash val="solid"/>
           </a:ln>
@@ -20067,13 +20067,13 @@
             <a:r>
               <a:rPr lang="en-US" sz="1300" b="1" dirty="0">
                 <a:solidFill>
-                  <a:srgbClr val="9D174D"/>
+                  <a:srgbClr val="4C1D95"/>
                 </a:solidFill>
                 <a:latin typeface="Trebuchet MS" pitchFamily="34" charset="0"/>
                 <a:ea typeface="Trebuchet MS" pitchFamily="34" charset="-122"/>
                 <a:cs typeface="Trebuchet MS" pitchFamily="34" charset="-120"/>
               </a:rPr>
-              <a:t>ful</a:t>
+              <a:t>less</a:t>
             </a:r>
             <a:endParaRPr lang="en-US" sz="1300" dirty="0"/>
           </a:p>
@@ -20112,7 +20112,7 @@
                 <a:ea typeface="Calibri" pitchFamily="34" charset="-122"/>
                 <a:cs typeface="Calibri" pitchFamily="34" charset="-120"/>
               </a:rPr>
-              <a:t>full of</a:t>
+              <a:t>without</a:t>
             </a:r>
             <a:endParaRPr lang="en-US" sz="850" dirty="0"/>
           </a:p>
@@ -20224,7 +20224,7 @@
                 <a:ea typeface="Calibri" pitchFamily="34" charset="-122"/>
                 <a:cs typeface="Calibri" pitchFamily="34" charset="-120"/>
               </a:rPr>
-              <a:t>in that way</a:t>
+              <a:t>in a certain way</a:t>
             </a:r>
             <a:endParaRPr lang="en-US" sz="850" dirty="0"/>
           </a:p>
@@ -20488,7 +20488,7 @@
                 <a:ea typeface="Trebuchet MS" pitchFamily="34" charset="-122"/>
                 <a:cs typeface="Trebuchet MS" pitchFamily="34" charset="-120"/>
               </a:rPr>
-              <a:t>ful</a:t>
+              <a:t>less</a:t>
             </a:r>
             <a:endParaRPr lang="en-US" sz="1400" dirty="0"/>
           </a:p>
@@ -21156,7 +21156,7 @@
                 <a:ea typeface="Trebuchet MS" pitchFamily="34" charset="-122"/>
                 <a:cs typeface="Trebuchet MS" pitchFamily="34" charset="-120"/>
               </a:rPr>
-              <a:t>Hopefully</a:t>
+              <a:t>hopelessly</a:t>
             </a:r>
             <a:endParaRPr lang="en-US" sz="2800" dirty="0"/>
           </a:p>
@@ -21357,11 +21357,11 @@
             </a:avLst>
           </a:prstGeom>
           <a:solidFill>
-            <a:srgbClr val="FCE7F3"/>
+            <a:srgbClr val="DDD6FE"/>
           </a:solidFill>
           <a:ln w="19050">
             <a:solidFill>
-              <a:srgbClr val="DB2777"/>
+              <a:srgbClr val="7C3AED"/>
             </a:solidFill>
             <a:prstDash val="solid"/>
           </a:ln>
@@ -21401,13 +21401,13 @@
             <a:r>
               <a:rPr lang="en-US" sz="1300" b="1" dirty="0">
                 <a:solidFill>
-                  <a:srgbClr val="9D174D"/>
+                  <a:srgbClr val="4C1D95"/>
                 </a:solidFill>
                 <a:latin typeface="Trebuchet MS" pitchFamily="34" charset="0"/>
                 <a:ea typeface="Trebuchet MS" pitchFamily="34" charset="-122"/>
                 <a:cs typeface="Trebuchet MS" pitchFamily="34" charset="-120"/>
               </a:rPr>
-              <a:t>ful</a:t>
+              <a:t>less</a:t>
             </a:r>
             <a:endParaRPr lang="en-US" sz="1300" dirty="0"/>
           </a:p>
@@ -21446,7 +21446,7 @@
                 <a:ea typeface="Calibri" pitchFamily="34" charset="-122"/>
                 <a:cs typeface="Calibri" pitchFamily="34" charset="-120"/>
               </a:rPr>
-              <a:t>full of</a:t>
+              <a:t>without</a:t>
             </a:r>
             <a:endParaRPr lang="en-US" sz="850" dirty="0"/>
           </a:p>
@@ -21558,7 +21558,7 @@
                 <a:ea typeface="Calibri" pitchFamily="34" charset="-122"/>
                 <a:cs typeface="Calibri" pitchFamily="34" charset="-120"/>
               </a:rPr>
-              <a:t>in that way</a:t>
+              <a:t>in a certain way</a:t>
             </a:r>
             <a:endParaRPr lang="en-US" sz="850" dirty="0"/>
           </a:p>
@@ -21822,7 +21822,7 @@
                 <a:ea typeface="Trebuchet MS" pitchFamily="34" charset="-122"/>
                 <a:cs typeface="Trebuchet MS" pitchFamily="34" charset="-120"/>
               </a:rPr>
-              <a:t>ful</a:t>
+              <a:t>less</a:t>
             </a:r>
             <a:endParaRPr lang="en-US" sz="1400" dirty="0"/>
           </a:p>
@@ -22350,7 +22350,7 @@
                 <a:ea typeface="Trebuchet MS" pitchFamily="34" charset="-122"/>
                 <a:cs typeface="Trebuchet MS" pitchFamily="34" charset="-120"/>
               </a:rPr>
-              <a:t>f</a:t>
+              <a:t>l</a:t>
             </a:r>
             <a:endParaRPr lang="en-US" sz="900" dirty="0"/>
           </a:p>
@@ -22416,7 +22416,7 @@
                 <a:ea typeface="Trebuchet MS" pitchFamily="34" charset="-122"/>
                 <a:cs typeface="Trebuchet MS" pitchFamily="34" charset="-120"/>
               </a:rPr>
-              <a:t>u</a:t>
+              <a:t>e</a:t>
             </a:r>
             <a:endParaRPr lang="en-US" sz="900" dirty="0"/>
           </a:p>
@@ -22482,7 +22482,7 @@
                 <a:ea typeface="Trebuchet MS" pitchFamily="34" charset="-122"/>
                 <a:cs typeface="Trebuchet MS" pitchFamily="34" charset="-120"/>
               </a:rPr>
-              <a:t>l</a:t>
+              <a:t>ss</a:t>
             </a:r>
             <a:endParaRPr lang="en-US" sz="900" dirty="0"/>
           </a:p>
@@ -22614,7 +22614,7 @@
                 <a:ea typeface="Trebuchet MS" pitchFamily="34" charset="-122"/>
                 <a:cs typeface="Trebuchet MS" pitchFamily="34" charset="-120"/>
               </a:rPr>
-              <a:t>y</a:t>
+              <a:t>ee</a:t>
             </a:r>
             <a:endParaRPr lang="en-US" sz="900" dirty="0"/>
           </a:p>
@@ -23045,7 +23045,7 @@
                 <a:ea typeface="Trebuchet MS" pitchFamily="34" charset="-122"/>
                 <a:cs typeface="Trebuchet MS" pitchFamily="34" charset="-120"/>
               </a:rPr>
-              <a:t>hopeless</a:t>
+              <a:t>hoped</a:t>
             </a:r>
             <a:endParaRPr lang="en-US" sz="2800" dirty="0"/>
           </a:p>
@@ -23872,7 +23872,7 @@
                 <a:ea typeface="Trebuchet MS" pitchFamily="34" charset="-122"/>
                 <a:cs typeface="Trebuchet MS" pitchFamily="34" charset="-120"/>
               </a:rPr>
-              <a:t>hopeless</a:t>
+              <a:t>hoped</a:t>
             </a:r>
             <a:endParaRPr lang="en-US" sz="2800" dirty="0"/>
           </a:p>
@@ -24058,7 +24058,46 @@
       </p:sp>
       <p:sp>
         <p:nvSpPr>
-          <p:cNvPr id="19" name="Shape 17"/>
+          <p:cNvPr id="19" name="Text 17"/>
+          <p:cNvSpPr/>
+          <p:nvPr/>
+        </p:nvSpPr>
+        <p:spPr>
+          <a:xfrm>
+            <a:off x="2938272" y="2752344"/>
+            <a:ext cx="1828800" cy="182880"/>
+          </a:xfrm>
+          <a:prstGeom prst="rect">
+            <a:avLst/>
+          </a:prstGeom>
+          <a:noFill/>
+          <a:ln/>
+        </p:spPr>
+        <p:txBody>
+          <a:bodyPr wrap="square" lIns="0" tIns="0" rIns="0" bIns="0" rtlCol="0" anchor="t"/>
+          <a:lstStyle/>
+          <a:p>
+            <a:pPr algn="ctr" indent="0" marL="0">
+              <a:buNone/>
+            </a:pPr>
+            <a:r>
+              <a:rPr lang="en-US" sz="700" i="1" dirty="0">
+                <a:solidFill>
+                  <a:srgbClr val="94A3B8"/>
+                </a:solidFill>
+                <a:latin typeface="Calibri" pitchFamily="34" charset="0"/>
+                <a:ea typeface="Calibri" pitchFamily="34" charset="-122"/>
+                <a:cs typeface="Calibri" pitchFamily="34" charset="-120"/>
+              </a:rPr>
+              <a:t>'e' dropped before vowel suffix</a:t>
+            </a:r>
+            <a:endParaRPr lang="en-US" sz="700" dirty="0"/>
+          </a:p>
+        </p:txBody>
+      </p:sp>
+      <p:sp>
+        <p:nvSpPr>
+          <p:cNvPr id="20" name="Shape 18"/>
           <p:cNvSpPr/>
           <p:nvPr/>
         </p:nvSpPr>
@@ -24073,11 +24112,11 @@
             </a:avLst>
           </a:prstGeom>
           <a:solidFill>
-            <a:srgbClr val="DDD6FE"/>
+            <a:srgbClr val="FCE7F3"/>
           </a:solidFill>
           <a:ln w="19050">
             <a:solidFill>
-              <a:srgbClr val="7C3AED"/>
+              <a:srgbClr val="DB2777"/>
             </a:solidFill>
             <a:prstDash val="solid"/>
           </a:ln>
@@ -24092,7 +24131,7 @@
       </p:sp>
       <p:sp>
         <p:nvSpPr>
-          <p:cNvPr id="20" name="Text 18"/>
+          <p:cNvPr id="21" name="Text 19"/>
           <p:cNvSpPr/>
           <p:nvPr/>
         </p:nvSpPr>
@@ -24117,13 +24156,13 @@
             <a:r>
               <a:rPr lang="en-US" sz="1300" b="1" dirty="0">
                 <a:solidFill>
-                  <a:srgbClr val="4C1D95"/>
+                  <a:srgbClr val="9D174D"/>
                 </a:solidFill>
                 <a:latin typeface="Trebuchet MS" pitchFamily="34" charset="0"/>
                 <a:ea typeface="Trebuchet MS" pitchFamily="34" charset="-122"/>
                 <a:cs typeface="Trebuchet MS" pitchFamily="34" charset="-120"/>
               </a:rPr>
-              <a:t>less</a:t>
+              <a:t>ed</a:t>
             </a:r>
             <a:endParaRPr lang="en-US" sz="1300" dirty="0"/>
           </a:p>
@@ -24131,7 +24170,7 @@
       </p:sp>
       <p:sp>
         <p:nvSpPr>
-          <p:cNvPr id="21" name="Text 19"/>
+          <p:cNvPr id="22" name="Text 20"/>
           <p:cNvSpPr/>
           <p:nvPr/>
         </p:nvSpPr>
@@ -24162,7 +24201,7 @@
                 <a:ea typeface="Calibri" pitchFamily="34" charset="-122"/>
                 <a:cs typeface="Calibri" pitchFamily="34" charset="-120"/>
               </a:rPr>
-              <a:t>without</a:t>
+              <a:t>in the past</a:t>
             </a:r>
             <a:endParaRPr lang="en-US" sz="850" dirty="0"/>
           </a:p>
@@ -24170,7 +24209,7 @@
       </p:sp>
       <p:sp>
         <p:nvSpPr>
-          <p:cNvPr id="22" name="Shape 20"/>
+          <p:cNvPr id="23" name="Shape 21"/>
           <p:cNvSpPr/>
           <p:nvPr/>
         </p:nvSpPr>
@@ -24197,7 +24236,7 @@
       </p:sp>
       <p:sp>
         <p:nvSpPr>
-          <p:cNvPr id="23" name="Text 21"/>
+          <p:cNvPr id="24" name="Text 22"/>
           <p:cNvSpPr/>
           <p:nvPr/>
         </p:nvSpPr>
@@ -24236,7 +24275,7 @@
       </p:sp>
       <p:sp>
         <p:nvSpPr>
-          <p:cNvPr id="24" name="Shape 22"/>
+          <p:cNvPr id="25" name="Shape 23"/>
           <p:cNvSpPr/>
           <p:nvPr/>
         </p:nvSpPr>
@@ -24263,7 +24302,7 @@
       </p:sp>
       <p:sp>
         <p:nvSpPr>
-          <p:cNvPr id="25" name="Text 23"/>
+          <p:cNvPr id="26" name="Text 24"/>
           <p:cNvSpPr/>
           <p:nvPr/>
         </p:nvSpPr>
@@ -24302,7 +24341,7 @@
       </p:sp>
       <p:sp>
         <p:nvSpPr>
-          <p:cNvPr id="26" name="Shape 24"/>
+          <p:cNvPr id="27" name="Shape 25"/>
           <p:cNvSpPr/>
           <p:nvPr/>
         </p:nvSpPr>
@@ -24329,7 +24368,7 @@
       </p:sp>
       <p:sp>
         <p:nvSpPr>
-          <p:cNvPr id="27" name="Text 25"/>
+          <p:cNvPr id="28" name="Text 26"/>
           <p:cNvSpPr/>
           <p:nvPr/>
         </p:nvSpPr>
@@ -24368,7 +24407,7 @@
       </p:sp>
       <p:sp>
         <p:nvSpPr>
-          <p:cNvPr id="28" name="Shape 26"/>
+          <p:cNvPr id="29" name="Shape 27"/>
           <p:cNvSpPr/>
           <p:nvPr/>
         </p:nvSpPr>
@@ -24395,7 +24434,7 @@
       </p:sp>
       <p:sp>
         <p:nvSpPr>
-          <p:cNvPr id="29" name="Text 27"/>
+          <p:cNvPr id="30" name="Text 28"/>
           <p:cNvSpPr/>
           <p:nvPr/>
         </p:nvSpPr>
@@ -25576,7 +25615,7 @@
                 <a:ea typeface="Trebuchet MS" pitchFamily="34" charset="-122"/>
                 <a:cs typeface="Trebuchet MS" pitchFamily="34" charset="-120"/>
               </a:rPr>
-              <a:t>hopeless</a:t>
+              <a:t>hoped</a:t>
             </a:r>
             <a:endParaRPr lang="en-US" sz="2800" dirty="0"/>
           </a:p>
@@ -25762,7 +25801,46 @@
       </p:sp>
       <p:sp>
         <p:nvSpPr>
-          <p:cNvPr id="19" name="Shape 17"/>
+          <p:cNvPr id="19" name="Text 17"/>
+          <p:cNvSpPr/>
+          <p:nvPr/>
+        </p:nvSpPr>
+        <p:spPr>
+          <a:xfrm>
+            <a:off x="2938272" y="2752344"/>
+            <a:ext cx="1828800" cy="182880"/>
+          </a:xfrm>
+          <a:prstGeom prst="rect">
+            <a:avLst/>
+          </a:prstGeom>
+          <a:noFill/>
+          <a:ln/>
+        </p:spPr>
+        <p:txBody>
+          <a:bodyPr wrap="square" lIns="0" tIns="0" rIns="0" bIns="0" rtlCol="0" anchor="t"/>
+          <a:lstStyle/>
+          <a:p>
+            <a:pPr algn="ctr" indent="0" marL="0">
+              <a:buNone/>
+            </a:pPr>
+            <a:r>
+              <a:rPr lang="en-US" sz="700" i="1" dirty="0">
+                <a:solidFill>
+                  <a:srgbClr val="94A3B8"/>
+                </a:solidFill>
+                <a:latin typeface="Calibri" pitchFamily="34" charset="0"/>
+                <a:ea typeface="Calibri" pitchFamily="34" charset="-122"/>
+                <a:cs typeface="Calibri" pitchFamily="34" charset="-120"/>
+              </a:rPr>
+              <a:t>'e' dropped before vowel suffix</a:t>
+            </a:r>
+            <a:endParaRPr lang="en-US" sz="700" dirty="0"/>
+          </a:p>
+        </p:txBody>
+      </p:sp>
+      <p:sp>
+        <p:nvSpPr>
+          <p:cNvPr id="20" name="Shape 18"/>
           <p:cNvSpPr/>
           <p:nvPr/>
         </p:nvSpPr>
@@ -25777,11 +25855,11 @@
             </a:avLst>
           </a:prstGeom>
           <a:solidFill>
-            <a:srgbClr val="DDD6FE"/>
+            <a:srgbClr val="FCE7F3"/>
           </a:solidFill>
           <a:ln w="19050">
             <a:solidFill>
-              <a:srgbClr val="7C3AED"/>
+              <a:srgbClr val="DB2777"/>
             </a:solidFill>
             <a:prstDash val="solid"/>
           </a:ln>
@@ -25796,7 +25874,7 @@
       </p:sp>
       <p:sp>
         <p:nvSpPr>
-          <p:cNvPr id="20" name="Text 18"/>
+          <p:cNvPr id="21" name="Text 19"/>
           <p:cNvSpPr/>
           <p:nvPr/>
         </p:nvSpPr>
@@ -25821,13 +25899,13 @@
             <a:r>
               <a:rPr lang="en-US" sz="1300" b="1" dirty="0">
                 <a:solidFill>
-                  <a:srgbClr val="4C1D95"/>
+                  <a:srgbClr val="9D174D"/>
                 </a:solidFill>
                 <a:latin typeface="Trebuchet MS" pitchFamily="34" charset="0"/>
                 <a:ea typeface="Trebuchet MS" pitchFamily="34" charset="-122"/>
                 <a:cs typeface="Trebuchet MS" pitchFamily="34" charset="-120"/>
               </a:rPr>
-              <a:t>less</a:t>
+              <a:t>ed</a:t>
             </a:r>
             <a:endParaRPr lang="en-US" sz="1300" dirty="0"/>
           </a:p>
@@ -25835,7 +25913,7 @@
       </p:sp>
       <p:sp>
         <p:nvSpPr>
-          <p:cNvPr id="21" name="Text 19"/>
+          <p:cNvPr id="22" name="Text 20"/>
           <p:cNvSpPr/>
           <p:nvPr/>
         </p:nvSpPr>
@@ -25866,7 +25944,7 @@
                 <a:ea typeface="Calibri" pitchFamily="34" charset="-122"/>
                 <a:cs typeface="Calibri" pitchFamily="34" charset="-120"/>
               </a:rPr>
-              <a:t>without</a:t>
+              <a:t>in the past</a:t>
             </a:r>
             <a:endParaRPr lang="en-US" sz="850" dirty="0"/>
           </a:p>
@@ -25874,7 +25952,7 @@
       </p:sp>
       <p:sp>
         <p:nvSpPr>
-          <p:cNvPr id="22" name="Shape 20"/>
+          <p:cNvPr id="23" name="Shape 21"/>
           <p:cNvSpPr/>
           <p:nvPr/>
         </p:nvSpPr>
@@ -25901,7 +25979,7 @@
       </p:sp>
       <p:sp>
         <p:nvSpPr>
-          <p:cNvPr id="23" name="Text 21"/>
+          <p:cNvPr id="24" name="Text 22"/>
           <p:cNvSpPr/>
           <p:nvPr/>
         </p:nvSpPr>
@@ -25940,7 +26018,7 @@
       </p:sp>
       <p:sp>
         <p:nvSpPr>
-          <p:cNvPr id="24" name="Shape 22"/>
+          <p:cNvPr id="25" name="Shape 23"/>
           <p:cNvSpPr/>
           <p:nvPr/>
         </p:nvSpPr>
@@ -25967,13 +26045,13 @@
       </p:sp>
       <p:sp>
         <p:nvSpPr>
-          <p:cNvPr id="25" name="Shape 23"/>
-          <p:cNvSpPr/>
-          <p:nvPr/>
-        </p:nvSpPr>
-        <p:spPr>
-          <a:xfrm>
-            <a:off x="2999232" y="3364992"/>
+          <p:cNvPr id="26" name="Shape 24"/>
+          <p:cNvSpPr/>
+          <p:nvPr/>
+        </p:nvSpPr>
+        <p:spPr>
+          <a:xfrm>
+            <a:off x="4370832" y="3364992"/>
             <a:ext cx="1645920" cy="475488"/>
           </a:xfrm>
           <a:prstGeom prst="rect">
@@ -25994,13 +26072,13 @@
       </p:sp>
       <p:sp>
         <p:nvSpPr>
-          <p:cNvPr id="26" name="Text 24"/>
-          <p:cNvSpPr/>
-          <p:nvPr/>
-        </p:nvSpPr>
-        <p:spPr>
-          <a:xfrm>
-            <a:off x="2999232" y="3364992"/>
+          <p:cNvPr id="27" name="Text 25"/>
+          <p:cNvSpPr/>
+          <p:nvPr/>
+        </p:nvSpPr>
+        <p:spPr>
+          <a:xfrm>
+            <a:off x="4370832" y="3364992"/>
             <a:ext cx="1645920" cy="475488"/>
           </a:xfrm>
           <a:prstGeom prst="rect">
@@ -26025,7 +26103,7 @@
                 <a:ea typeface="Trebuchet MS" pitchFamily="34" charset="-122"/>
                 <a:cs typeface="Trebuchet MS" pitchFamily="34" charset="-120"/>
               </a:rPr>
-              <a:t>hope</a:t>
+              <a:t>hoped</a:t>
             </a:r>
             <a:endParaRPr lang="en-US" sz="1400" dirty="0"/>
           </a:p>
@@ -26033,14 +26111,41 @@
       </p:sp>
       <p:sp>
         <p:nvSpPr>
-          <p:cNvPr id="27" name="Text 25"/>
-          <p:cNvSpPr/>
-          <p:nvPr/>
-        </p:nvSpPr>
-        <p:spPr>
-          <a:xfrm>
-            <a:off x="4645152" y="3364992"/>
-            <a:ext cx="1097280" cy="475488"/>
+          <p:cNvPr id="28" name="Shape 26"/>
+          <p:cNvSpPr/>
+          <p:nvPr/>
+        </p:nvSpPr>
+        <p:spPr>
+          <a:xfrm>
+            <a:off x="365760" y="4096512"/>
+            <a:ext cx="1371600" cy="804672"/>
+          </a:xfrm>
+          <a:prstGeom prst="rect">
+            <a:avLst>
+              <a:gd name="adj" fmla="val 6818"/>
+            </a:avLst>
+          </a:prstGeom>
+          <a:solidFill>
+            <a:srgbClr val="E2E8F0"/>
+          </a:solidFill>
+          <a:ln w="12700">
+            <a:solidFill>
+              <a:srgbClr val="E2E8F0"/>
+            </a:solidFill>
+            <a:prstDash val="solid"/>
+          </a:ln>
+        </p:spPr>
+      </p:sp>
+      <p:sp>
+        <p:nvSpPr>
+          <p:cNvPr id="29" name="Text 27"/>
+          <p:cNvSpPr/>
+          <p:nvPr/>
+        </p:nvSpPr>
+        <p:spPr>
+          <a:xfrm>
+            <a:off x="365760" y="4096512"/>
+            <a:ext cx="1371600" cy="804672"/>
           </a:xfrm>
           <a:prstGeom prst="rect">
             <a:avLst/>
@@ -26056,83 +26161,17 @@
               <a:buNone/>
             </a:pPr>
             <a:r>
-              <a:rPr lang="en-US" sz="1600" b="1" dirty="0">
-                <a:solidFill>
-                  <a:srgbClr val="0D9488"/>
+              <a:rPr lang="en-US" sz="1100" b="1" dirty="0">
+                <a:solidFill>
+                  <a:srgbClr val="475569"/>
                 </a:solidFill>
                 <a:latin typeface="Trebuchet MS" pitchFamily="34" charset="0"/>
                 <a:ea typeface="Trebuchet MS" pitchFamily="34" charset="-122"/>
                 <a:cs typeface="Trebuchet MS" pitchFamily="34" charset="-120"/>
               </a:rPr>
-              <a:t>·</a:t>
-            </a:r>
-            <a:endParaRPr lang="en-US" sz="1600" dirty="0"/>
-          </a:p>
-        </p:txBody>
-      </p:sp>
-      <p:sp>
-        <p:nvSpPr>
-          <p:cNvPr id="28" name="Shape 26"/>
-          <p:cNvSpPr/>
-          <p:nvPr/>
-        </p:nvSpPr>
-        <p:spPr>
-          <a:xfrm>
-            <a:off x="5742432" y="3364992"/>
-            <a:ext cx="1645920" cy="475488"/>
-          </a:xfrm>
-          <a:prstGeom prst="rect">
-            <a:avLst>
-              <a:gd name="adj" fmla="val 9615"/>
-            </a:avLst>
-          </a:prstGeom>
-          <a:solidFill>
-            <a:srgbClr val="FFFFFF"/>
-          </a:solidFill>
-          <a:ln w="12700">
-            <a:solidFill>
-              <a:srgbClr val="0D9488"/>
-            </a:solidFill>
-            <a:prstDash val="solid"/>
-          </a:ln>
-        </p:spPr>
-      </p:sp>
-      <p:sp>
-        <p:nvSpPr>
-          <p:cNvPr id="29" name="Text 27"/>
-          <p:cNvSpPr/>
-          <p:nvPr/>
-        </p:nvSpPr>
-        <p:spPr>
-          <a:xfrm>
-            <a:off x="5742432" y="3364992"/>
-            <a:ext cx="1645920" cy="475488"/>
-          </a:xfrm>
-          <a:prstGeom prst="rect">
-            <a:avLst/>
-          </a:prstGeom>
-          <a:noFill/>
-          <a:ln/>
-        </p:spPr>
-        <p:txBody>
-          <a:bodyPr wrap="square" lIns="0" tIns="0" rIns="0" bIns="0" rtlCol="0" anchor="ctr"/>
-          <a:lstStyle/>
-          <a:p>
-            <a:pPr algn="ctr" indent="0" marL="0">
-              <a:buNone/>
-            </a:pPr>
-            <a:r>
-              <a:rPr lang="en-US" sz="1400" b="1" dirty="0">
-                <a:solidFill>
-                  <a:srgbClr val="0D9488"/>
-                </a:solidFill>
-                <a:latin typeface="Trebuchet MS" pitchFamily="34" charset="0"/>
-                <a:ea typeface="Trebuchet MS" pitchFamily="34" charset="-122"/>
-                <a:cs typeface="Trebuchet MS" pitchFamily="34" charset="-120"/>
-              </a:rPr>
-              <a:t>less</a:t>
-            </a:r>
-            <a:endParaRPr lang="en-US" sz="1400" dirty="0"/>
+              <a:t>Phonemes</a:t>
+            </a:r>
+            <a:endParaRPr lang="en-US" sz="1100" dirty="0"/>
           </a:p>
         </p:txBody>
       </p:sp>
@@ -26144,8 +26183,8 @@
         </p:nvSpPr>
         <p:spPr>
           <a:xfrm>
-            <a:off x="365760" y="4096512"/>
-            <a:ext cx="1371600" cy="804672"/>
+            <a:off x="1874520" y="4096512"/>
+            <a:ext cx="6903720" cy="804672"/>
           </a:xfrm>
           <a:prstGeom prst="rect">
             <a:avLst>
@@ -26153,85 +26192,19 @@
             </a:avLst>
           </a:prstGeom>
           <a:solidFill>
-            <a:srgbClr val="E2E8F0"/>
+            <a:srgbClr val="F8FAFC"/>
           </a:solidFill>
           <a:ln w="12700">
             <a:solidFill>
               <a:srgbClr val="E2E8F0"/>
             </a:solidFill>
-            <a:prstDash val="solid"/>
+            <a:prstDash val="dash"/>
           </a:ln>
         </p:spPr>
       </p:sp>
       <p:sp>
         <p:nvSpPr>
           <p:cNvPr id="31" name="Text 29"/>
-          <p:cNvSpPr/>
-          <p:nvPr/>
-        </p:nvSpPr>
-        <p:spPr>
-          <a:xfrm>
-            <a:off x="365760" y="4096512"/>
-            <a:ext cx="1371600" cy="804672"/>
-          </a:xfrm>
-          <a:prstGeom prst="rect">
-            <a:avLst/>
-          </a:prstGeom>
-          <a:noFill/>
-          <a:ln/>
-        </p:spPr>
-        <p:txBody>
-          <a:bodyPr wrap="square" lIns="0" tIns="0" rIns="0" bIns="0" rtlCol="0" anchor="ctr"/>
-          <a:lstStyle/>
-          <a:p>
-            <a:pPr algn="ctr" indent="0" marL="0">
-              <a:buNone/>
-            </a:pPr>
-            <a:r>
-              <a:rPr lang="en-US" sz="1100" b="1" dirty="0">
-                <a:solidFill>
-                  <a:srgbClr val="475569"/>
-                </a:solidFill>
-                <a:latin typeface="Trebuchet MS" pitchFamily="34" charset="0"/>
-                <a:ea typeface="Trebuchet MS" pitchFamily="34" charset="-122"/>
-                <a:cs typeface="Trebuchet MS" pitchFamily="34" charset="-120"/>
-              </a:rPr>
-              <a:t>Phonemes</a:t>
-            </a:r>
-            <a:endParaRPr lang="en-US" sz="1100" dirty="0"/>
-          </a:p>
-        </p:txBody>
-      </p:sp>
-      <p:sp>
-        <p:nvSpPr>
-          <p:cNvPr id="32" name="Shape 30"/>
-          <p:cNvSpPr/>
-          <p:nvPr/>
-        </p:nvSpPr>
-        <p:spPr>
-          <a:xfrm>
-            <a:off x="1874520" y="4096512"/>
-            <a:ext cx="6903720" cy="804672"/>
-          </a:xfrm>
-          <a:prstGeom prst="rect">
-            <a:avLst>
-              <a:gd name="adj" fmla="val 6818"/>
-            </a:avLst>
-          </a:prstGeom>
-          <a:solidFill>
-            <a:srgbClr val="F8FAFC"/>
-          </a:solidFill>
-          <a:ln w="12700">
-            <a:solidFill>
-              <a:srgbClr val="E2E8F0"/>
-            </a:solidFill>
-            <a:prstDash val="dash"/>
-          </a:ln>
-        </p:spPr>
-      </p:sp>
-      <p:sp>
-        <p:nvSpPr>
-          <p:cNvPr id="33" name="Text 31"/>
           <p:cNvSpPr/>
           <p:nvPr/>
         </p:nvSpPr>
@@ -26693,7 +26666,7 @@
                 <a:ea typeface="Trebuchet MS" pitchFamily="34" charset="-122"/>
                 <a:cs typeface="Trebuchet MS" pitchFamily="34" charset="-120"/>
               </a:rPr>
-              <a:t>hopeless</a:t>
+              <a:t>hoped</a:t>
             </a:r>
             <a:endParaRPr lang="en-US" sz="2800" dirty="0"/>
           </a:p>
@@ -26879,7 +26852,46 @@
       </p:sp>
       <p:sp>
         <p:nvSpPr>
-          <p:cNvPr id="19" name="Shape 17"/>
+          <p:cNvPr id="19" name="Text 17"/>
+          <p:cNvSpPr/>
+          <p:nvPr/>
+        </p:nvSpPr>
+        <p:spPr>
+          <a:xfrm>
+            <a:off x="2938272" y="2752344"/>
+            <a:ext cx="1828800" cy="182880"/>
+          </a:xfrm>
+          <a:prstGeom prst="rect">
+            <a:avLst/>
+          </a:prstGeom>
+          <a:noFill/>
+          <a:ln/>
+        </p:spPr>
+        <p:txBody>
+          <a:bodyPr wrap="square" lIns="0" tIns="0" rIns="0" bIns="0" rtlCol="0" anchor="t"/>
+          <a:lstStyle/>
+          <a:p>
+            <a:pPr algn="ctr" indent="0" marL="0">
+              <a:buNone/>
+            </a:pPr>
+            <a:r>
+              <a:rPr lang="en-US" sz="700" i="1" dirty="0">
+                <a:solidFill>
+                  <a:srgbClr val="94A3B8"/>
+                </a:solidFill>
+                <a:latin typeface="Calibri" pitchFamily="34" charset="0"/>
+                <a:ea typeface="Calibri" pitchFamily="34" charset="-122"/>
+                <a:cs typeface="Calibri" pitchFamily="34" charset="-120"/>
+              </a:rPr>
+              <a:t>'e' dropped before vowel suffix</a:t>
+            </a:r>
+            <a:endParaRPr lang="en-US" sz="700" dirty="0"/>
+          </a:p>
+        </p:txBody>
+      </p:sp>
+      <p:sp>
+        <p:nvSpPr>
+          <p:cNvPr id="20" name="Shape 18"/>
           <p:cNvSpPr/>
           <p:nvPr/>
         </p:nvSpPr>
@@ -26894,11 +26906,11 @@
             </a:avLst>
           </a:prstGeom>
           <a:solidFill>
-            <a:srgbClr val="DDD6FE"/>
+            <a:srgbClr val="FCE7F3"/>
           </a:solidFill>
           <a:ln w="19050">
             <a:solidFill>
-              <a:srgbClr val="7C3AED"/>
+              <a:srgbClr val="DB2777"/>
             </a:solidFill>
             <a:prstDash val="solid"/>
           </a:ln>
@@ -26913,7 +26925,7 @@
       </p:sp>
       <p:sp>
         <p:nvSpPr>
-          <p:cNvPr id="20" name="Text 18"/>
+          <p:cNvPr id="21" name="Text 19"/>
           <p:cNvSpPr/>
           <p:nvPr/>
         </p:nvSpPr>
@@ -26938,13 +26950,13 @@
             <a:r>
               <a:rPr lang="en-US" sz="1300" b="1" dirty="0">
                 <a:solidFill>
-                  <a:srgbClr val="4C1D95"/>
+                  <a:srgbClr val="9D174D"/>
                 </a:solidFill>
                 <a:latin typeface="Trebuchet MS" pitchFamily="34" charset="0"/>
                 <a:ea typeface="Trebuchet MS" pitchFamily="34" charset="-122"/>
                 <a:cs typeface="Trebuchet MS" pitchFamily="34" charset="-120"/>
               </a:rPr>
-              <a:t>less</a:t>
+              <a:t>ed</a:t>
             </a:r>
             <a:endParaRPr lang="en-US" sz="1300" dirty="0"/>
           </a:p>
@@ -26952,7 +26964,7 @@
       </p:sp>
       <p:sp>
         <p:nvSpPr>
-          <p:cNvPr id="21" name="Text 19"/>
+          <p:cNvPr id="22" name="Text 20"/>
           <p:cNvSpPr/>
           <p:nvPr/>
         </p:nvSpPr>
@@ -26983,7 +26995,7 @@
                 <a:ea typeface="Calibri" pitchFamily="34" charset="-122"/>
                 <a:cs typeface="Calibri" pitchFamily="34" charset="-120"/>
               </a:rPr>
-              <a:t>without</a:t>
+              <a:t>in the past</a:t>
             </a:r>
             <a:endParaRPr lang="en-US" sz="850" dirty="0"/>
           </a:p>
@@ -26991,7 +27003,7 @@
       </p:sp>
       <p:sp>
         <p:nvSpPr>
-          <p:cNvPr id="22" name="Shape 20"/>
+          <p:cNvPr id="23" name="Shape 21"/>
           <p:cNvSpPr/>
           <p:nvPr/>
         </p:nvSpPr>
@@ -27018,7 +27030,7 @@
       </p:sp>
       <p:sp>
         <p:nvSpPr>
-          <p:cNvPr id="23" name="Text 21"/>
+          <p:cNvPr id="24" name="Text 22"/>
           <p:cNvSpPr/>
           <p:nvPr/>
         </p:nvSpPr>
@@ -27057,7 +27069,7 @@
       </p:sp>
       <p:sp>
         <p:nvSpPr>
-          <p:cNvPr id="24" name="Shape 22"/>
+          <p:cNvPr id="25" name="Shape 23"/>
           <p:cNvSpPr/>
           <p:nvPr/>
         </p:nvSpPr>
@@ -27084,13 +27096,13 @@
       </p:sp>
       <p:sp>
         <p:nvSpPr>
-          <p:cNvPr id="25" name="Shape 23"/>
-          <p:cNvSpPr/>
-          <p:nvPr/>
-        </p:nvSpPr>
-        <p:spPr>
-          <a:xfrm>
-            <a:off x="2999232" y="3364992"/>
+          <p:cNvPr id="26" name="Shape 24"/>
+          <p:cNvSpPr/>
+          <p:nvPr/>
+        </p:nvSpPr>
+        <p:spPr>
+          <a:xfrm>
+            <a:off x="4370832" y="3364992"/>
             <a:ext cx="1645920" cy="475488"/>
           </a:xfrm>
           <a:prstGeom prst="rect">
@@ -27111,13 +27123,13 @@
       </p:sp>
       <p:sp>
         <p:nvSpPr>
-          <p:cNvPr id="26" name="Text 24"/>
-          <p:cNvSpPr/>
-          <p:nvPr/>
-        </p:nvSpPr>
-        <p:spPr>
-          <a:xfrm>
-            <a:off x="2999232" y="3364992"/>
+          <p:cNvPr id="27" name="Text 25"/>
+          <p:cNvSpPr/>
+          <p:nvPr/>
+        </p:nvSpPr>
+        <p:spPr>
+          <a:xfrm>
+            <a:off x="4370832" y="3364992"/>
             <a:ext cx="1645920" cy="475488"/>
           </a:xfrm>
           <a:prstGeom prst="rect">
@@ -27142,7 +27154,7 @@
                 <a:ea typeface="Trebuchet MS" pitchFamily="34" charset="-122"/>
                 <a:cs typeface="Trebuchet MS" pitchFamily="34" charset="-120"/>
               </a:rPr>
-              <a:t>hope</a:t>
+              <a:t>hoped</a:t>
             </a:r>
             <a:endParaRPr lang="en-US" sz="1400" dirty="0"/>
           </a:p>
@@ -27150,14 +27162,41 @@
       </p:sp>
       <p:sp>
         <p:nvSpPr>
-          <p:cNvPr id="27" name="Text 25"/>
-          <p:cNvSpPr/>
-          <p:nvPr/>
-        </p:nvSpPr>
-        <p:spPr>
-          <a:xfrm>
-            <a:off x="4645152" y="3364992"/>
-            <a:ext cx="1097280" cy="475488"/>
+          <p:cNvPr id="28" name="Shape 26"/>
+          <p:cNvSpPr/>
+          <p:nvPr/>
+        </p:nvSpPr>
+        <p:spPr>
+          <a:xfrm>
+            <a:off x="365760" y="4096512"/>
+            <a:ext cx="1371600" cy="804672"/>
+          </a:xfrm>
+          <a:prstGeom prst="rect">
+            <a:avLst>
+              <a:gd name="adj" fmla="val 6818"/>
+            </a:avLst>
+          </a:prstGeom>
+          <a:solidFill>
+            <a:srgbClr val="E2E8F0"/>
+          </a:solidFill>
+          <a:ln w="12700">
+            <a:solidFill>
+              <a:srgbClr val="E2E8F0"/>
+            </a:solidFill>
+            <a:prstDash val="solid"/>
+          </a:ln>
+        </p:spPr>
+      </p:sp>
+      <p:sp>
+        <p:nvSpPr>
+          <p:cNvPr id="29" name="Text 27"/>
+          <p:cNvSpPr/>
+          <p:nvPr/>
+        </p:nvSpPr>
+        <p:spPr>
+          <a:xfrm>
+            <a:off x="365760" y="4096512"/>
+            <a:ext cx="1371600" cy="804672"/>
           </a:xfrm>
           <a:prstGeom prst="rect">
             <a:avLst/>
@@ -27173,57 +27212,84 @@
               <a:buNone/>
             </a:pPr>
             <a:r>
-              <a:rPr lang="en-US" sz="1600" b="1" dirty="0">
-                <a:solidFill>
-                  <a:srgbClr val="0D9488"/>
+              <a:rPr lang="en-US" sz="1100" b="1" dirty="0">
+                <a:solidFill>
+                  <a:srgbClr val="475569"/>
                 </a:solidFill>
                 <a:latin typeface="Trebuchet MS" pitchFamily="34" charset="0"/>
                 <a:ea typeface="Trebuchet MS" pitchFamily="34" charset="-122"/>
                 <a:cs typeface="Trebuchet MS" pitchFamily="34" charset="-120"/>
               </a:rPr>
-              <a:t>·</a:t>
-            </a:r>
-            <a:endParaRPr lang="en-US" sz="1600" dirty="0"/>
-          </a:p>
-        </p:txBody>
-      </p:sp>
-      <p:sp>
-        <p:nvSpPr>
-          <p:cNvPr id="28" name="Shape 26"/>
-          <p:cNvSpPr/>
-          <p:nvPr/>
-        </p:nvSpPr>
-        <p:spPr>
-          <a:xfrm>
-            <a:off x="5742432" y="3364992"/>
-            <a:ext cx="1645920" cy="475488"/>
+              <a:t>Phonemes</a:t>
+            </a:r>
+            <a:endParaRPr lang="en-US" sz="1100" dirty="0"/>
+          </a:p>
+        </p:txBody>
+      </p:sp>
+      <p:sp>
+        <p:nvSpPr>
+          <p:cNvPr id="30" name="Shape 28"/>
+          <p:cNvSpPr/>
+          <p:nvPr/>
+        </p:nvSpPr>
+        <p:spPr>
+          <a:xfrm>
+            <a:off x="1874520" y="4096512"/>
+            <a:ext cx="6903720" cy="804672"/>
           </a:xfrm>
           <a:prstGeom prst="rect">
             <a:avLst>
-              <a:gd name="adj" fmla="val 9615"/>
+              <a:gd name="adj" fmla="val 6818"/>
             </a:avLst>
           </a:prstGeom>
           <a:solidFill>
+            <a:srgbClr val="FCE7F3"/>
+          </a:solidFill>
+          <a:ln w="12700">
+            <a:solidFill>
+              <a:srgbClr val="DB2777"/>
+            </a:solidFill>
+            <a:prstDash val="solid"/>
+          </a:ln>
+        </p:spPr>
+      </p:sp>
+      <p:sp>
+        <p:nvSpPr>
+          <p:cNvPr id="31" name="Shape 29"/>
+          <p:cNvSpPr/>
+          <p:nvPr/>
+        </p:nvSpPr>
+        <p:spPr>
+          <a:xfrm>
+            <a:off x="2670048" y="4169664"/>
+            <a:ext cx="685800" cy="384048"/>
+          </a:xfrm>
+          <a:prstGeom prst="rect">
+            <a:avLst>
+              <a:gd name="adj" fmla="val 9524"/>
+            </a:avLst>
+          </a:prstGeom>
+          <a:solidFill>
             <a:srgbClr val="FFFFFF"/>
           </a:solidFill>
           <a:ln w="12700">
             <a:solidFill>
-              <a:srgbClr val="0D9488"/>
-            </a:solidFill>
-            <a:prstDash val="solid"/>
-          </a:ln>
-        </p:spPr>
-      </p:sp>
-      <p:sp>
-        <p:nvSpPr>
-          <p:cNvPr id="29" name="Text 27"/>
-          <p:cNvSpPr/>
-          <p:nvPr/>
-        </p:nvSpPr>
-        <p:spPr>
-          <a:xfrm>
-            <a:off x="5742432" y="3364992"/>
-            <a:ext cx="1645920" cy="475488"/>
+              <a:srgbClr val="DB2777"/>
+            </a:solidFill>
+            <a:prstDash val="solid"/>
+          </a:ln>
+        </p:spPr>
+      </p:sp>
+      <p:sp>
+        <p:nvSpPr>
+          <p:cNvPr id="32" name="Text 30"/>
+          <p:cNvSpPr/>
+          <p:nvPr/>
+        </p:nvSpPr>
+        <p:spPr>
+          <a:xfrm>
+            <a:off x="2670048" y="4169664"/>
+            <a:ext cx="685800" cy="384048"/>
           </a:xfrm>
           <a:prstGeom prst="rect">
             <a:avLst/>
@@ -27239,57 +27305,57 @@
               <a:buNone/>
             </a:pPr>
             <a:r>
-              <a:rPr lang="en-US" sz="1400" b="1" dirty="0">
-                <a:solidFill>
-                  <a:srgbClr val="0D9488"/>
+              <a:rPr lang="en-US" sz="900" b="1" dirty="0">
+                <a:solidFill>
+                  <a:srgbClr val="9D174D"/>
                 </a:solidFill>
                 <a:latin typeface="Trebuchet MS" pitchFamily="34" charset="0"/>
                 <a:ea typeface="Trebuchet MS" pitchFamily="34" charset="-122"/>
                 <a:cs typeface="Trebuchet MS" pitchFamily="34" charset="-120"/>
               </a:rPr>
-              <a:t>less</a:t>
-            </a:r>
-            <a:endParaRPr lang="en-US" sz="1400" dirty="0"/>
-          </a:p>
-        </p:txBody>
-      </p:sp>
-      <p:sp>
-        <p:nvSpPr>
-          <p:cNvPr id="30" name="Shape 28"/>
-          <p:cNvSpPr/>
-          <p:nvPr/>
-        </p:nvSpPr>
-        <p:spPr>
-          <a:xfrm>
-            <a:off x="365760" y="4096512"/>
-            <a:ext cx="1371600" cy="804672"/>
+              <a:t>h</a:t>
+            </a:r>
+            <a:endParaRPr lang="en-US" sz="900" dirty="0"/>
+          </a:p>
+        </p:txBody>
+      </p:sp>
+      <p:sp>
+        <p:nvSpPr>
+          <p:cNvPr id="33" name="Shape 31"/>
+          <p:cNvSpPr/>
+          <p:nvPr/>
+        </p:nvSpPr>
+        <p:spPr>
+          <a:xfrm>
+            <a:off x="4123944" y="4169664"/>
+            <a:ext cx="685800" cy="384048"/>
           </a:xfrm>
           <a:prstGeom prst="rect">
             <a:avLst>
-              <a:gd name="adj" fmla="val 6818"/>
+              <a:gd name="adj" fmla="val 9524"/>
             </a:avLst>
           </a:prstGeom>
           <a:solidFill>
-            <a:srgbClr val="E2E8F0"/>
-          </a:solidFill>
-          <a:ln w="12700">
-            <a:solidFill>
-              <a:srgbClr val="E2E8F0"/>
-            </a:solidFill>
-            <a:prstDash val="solid"/>
-          </a:ln>
-        </p:spPr>
-      </p:sp>
-      <p:sp>
-        <p:nvSpPr>
-          <p:cNvPr id="31" name="Text 29"/>
-          <p:cNvSpPr/>
-          <p:nvPr/>
-        </p:nvSpPr>
-        <p:spPr>
-          <a:xfrm>
-            <a:off x="365760" y="4096512"/>
-            <a:ext cx="1371600" cy="804672"/>
+            <a:srgbClr val="FFFFFF"/>
+          </a:solidFill>
+          <a:ln w="12700">
+            <a:solidFill>
+              <a:srgbClr val="DB2777"/>
+            </a:solidFill>
+            <a:prstDash val="solid"/>
+          </a:ln>
+        </p:spPr>
+      </p:sp>
+      <p:sp>
+        <p:nvSpPr>
+          <p:cNvPr id="34" name="Text 32"/>
+          <p:cNvSpPr/>
+          <p:nvPr/>
+        </p:nvSpPr>
+        <p:spPr>
+          <a:xfrm>
+            <a:off x="4123944" y="4169664"/>
+            <a:ext cx="685800" cy="384048"/>
           </a:xfrm>
           <a:prstGeom prst="rect">
             <a:avLst/>
@@ -27305,38 +27371,38 @@
               <a:buNone/>
             </a:pPr>
             <a:r>
-              <a:rPr lang="en-US" sz="1100" b="1" dirty="0">
-                <a:solidFill>
-                  <a:srgbClr val="475569"/>
+              <a:rPr lang="en-US" sz="900" b="1" dirty="0">
+                <a:solidFill>
+                  <a:srgbClr val="9D174D"/>
                 </a:solidFill>
                 <a:latin typeface="Trebuchet MS" pitchFamily="34" charset="0"/>
                 <a:ea typeface="Trebuchet MS" pitchFamily="34" charset="-122"/>
                 <a:cs typeface="Trebuchet MS" pitchFamily="34" charset="-120"/>
               </a:rPr>
-              <a:t>Phonemes</a:t>
-            </a:r>
-            <a:endParaRPr lang="en-US" sz="1100" dirty="0"/>
-          </a:p>
-        </p:txBody>
-      </p:sp>
-      <p:sp>
-        <p:nvSpPr>
-          <p:cNvPr id="32" name="Shape 30"/>
-          <p:cNvSpPr/>
-          <p:nvPr/>
-        </p:nvSpPr>
-        <p:spPr>
-          <a:xfrm>
-            <a:off x="1874520" y="4096512"/>
-            <a:ext cx="6903720" cy="658368"/>
+              <a:t>o</a:t>
+            </a:r>
+            <a:endParaRPr lang="en-US" sz="900" dirty="0"/>
+          </a:p>
+        </p:txBody>
+      </p:sp>
+      <p:sp>
+        <p:nvSpPr>
+          <p:cNvPr id="35" name="Shape 33"/>
+          <p:cNvSpPr/>
+          <p:nvPr/>
+        </p:nvSpPr>
+        <p:spPr>
+          <a:xfrm>
+            <a:off x="5577840" y="4169664"/>
+            <a:ext cx="685800" cy="384048"/>
           </a:xfrm>
           <a:prstGeom prst="rect">
             <a:avLst>
-              <a:gd name="adj" fmla="val 8333"/>
+              <a:gd name="adj" fmla="val 9524"/>
             </a:avLst>
           </a:prstGeom>
           <a:solidFill>
-            <a:srgbClr val="FCE7F3"/>
+            <a:srgbClr val="FFFFFF"/>
           </a:solidFill>
           <a:ln w="12700">
             <a:solidFill>
@@ -27348,41 +27414,14 @@
       </p:sp>
       <p:sp>
         <p:nvSpPr>
-          <p:cNvPr id="33" name="Shape 31"/>
-          <p:cNvSpPr/>
-          <p:nvPr/>
-        </p:nvSpPr>
-        <p:spPr>
-          <a:xfrm>
-            <a:off x="2124837" y="4169664"/>
-            <a:ext cx="685800" cy="475488"/>
-          </a:xfrm>
-          <a:prstGeom prst="rect">
-            <a:avLst>
-              <a:gd name="adj" fmla="val 7692"/>
-            </a:avLst>
-          </a:prstGeom>
-          <a:solidFill>
-            <a:srgbClr val="FFFFFF"/>
-          </a:solidFill>
-          <a:ln w="12700">
-            <a:solidFill>
-              <a:srgbClr val="DB2777"/>
-            </a:solidFill>
-            <a:prstDash val="solid"/>
-          </a:ln>
-        </p:spPr>
-      </p:sp>
-      <p:sp>
-        <p:nvSpPr>
-          <p:cNvPr id="34" name="Text 32"/>
-          <p:cNvSpPr/>
-          <p:nvPr/>
-        </p:nvSpPr>
-        <p:spPr>
-          <a:xfrm>
-            <a:off x="2124837" y="4169664"/>
-            <a:ext cx="685800" cy="475488"/>
+          <p:cNvPr id="36" name="Text 34"/>
+          <p:cNvSpPr/>
+          <p:nvPr/>
+        </p:nvSpPr>
+        <p:spPr>
+          <a:xfrm>
+            <a:off x="5577840" y="4169664"/>
+            <a:ext cx="685800" cy="384048"/>
           </a:xfrm>
           <a:prstGeom prst="rect">
             <a:avLst/>
@@ -27406,7 +27445,7 @@
                 <a:ea typeface="Trebuchet MS" pitchFamily="34" charset="-122"/>
                 <a:cs typeface="Trebuchet MS" pitchFamily="34" charset="-120"/>
               </a:rPr>
-              <a:t>h</a:t>
+              <a:t>p</a:t>
             </a:r>
             <a:endParaRPr lang="en-US" sz="900" dirty="0"/>
           </a:p>
@@ -27414,18 +27453,18 @@
       </p:sp>
       <p:sp>
         <p:nvSpPr>
-          <p:cNvPr id="35" name="Shape 33"/>
-          <p:cNvSpPr/>
-          <p:nvPr/>
-        </p:nvSpPr>
-        <p:spPr>
-          <a:xfrm>
-            <a:off x="3033522" y="4169664"/>
-            <a:ext cx="685800" cy="475488"/>
+          <p:cNvPr id="37" name="Shape 35"/>
+          <p:cNvSpPr/>
+          <p:nvPr/>
+        </p:nvSpPr>
+        <p:spPr>
+          <a:xfrm>
+            <a:off x="7031736" y="4169664"/>
+            <a:ext cx="685800" cy="384048"/>
           </a:xfrm>
           <a:prstGeom prst="rect">
             <a:avLst>
-              <a:gd name="adj" fmla="val 7692"/>
+              <a:gd name="adj" fmla="val 9524"/>
             </a:avLst>
           </a:prstGeom>
           <a:solidFill>
@@ -27441,14 +27480,14 @@
       </p:sp>
       <p:sp>
         <p:nvSpPr>
-          <p:cNvPr id="36" name="Text 34"/>
-          <p:cNvSpPr/>
-          <p:nvPr/>
-        </p:nvSpPr>
-        <p:spPr>
-          <a:xfrm>
-            <a:off x="3033522" y="4169664"/>
-            <a:ext cx="685800" cy="475488"/>
+          <p:cNvPr id="38" name="Text 36"/>
+          <p:cNvSpPr/>
+          <p:nvPr/>
+        </p:nvSpPr>
+        <p:spPr>
+          <a:xfrm>
+            <a:off x="7031736" y="4169664"/>
+            <a:ext cx="685800" cy="384048"/>
           </a:xfrm>
           <a:prstGeom prst="rect">
             <a:avLst/>
@@ -27472,7 +27511,7 @@
                 <a:ea typeface="Trebuchet MS" pitchFamily="34" charset="-122"/>
                 <a:cs typeface="Trebuchet MS" pitchFamily="34" charset="-120"/>
               </a:rPr>
-              <a:t>o</a:t>
+              <a:t>t</a:t>
             </a:r>
             <a:endParaRPr lang="en-US" sz="900" dirty="0"/>
           </a:p>
@@ -27480,331 +27519,40 @@
       </p:sp>
       <p:sp>
         <p:nvSpPr>
-          <p:cNvPr id="37" name="Shape 35"/>
-          <p:cNvSpPr/>
-          <p:nvPr/>
-        </p:nvSpPr>
-        <p:spPr>
-          <a:xfrm>
-            <a:off x="3942207" y="4169664"/>
-            <a:ext cx="685800" cy="475488"/>
-          </a:xfrm>
-          <a:prstGeom prst="rect">
-            <a:avLst>
-              <a:gd name="adj" fmla="val 7692"/>
-            </a:avLst>
-          </a:prstGeom>
-          <a:solidFill>
-            <a:srgbClr val="FFFFFF"/>
-          </a:solidFill>
-          <a:ln w="12700">
-            <a:solidFill>
-              <a:srgbClr val="DB2777"/>
-            </a:solidFill>
-            <a:prstDash val="solid"/>
-          </a:ln>
-        </p:spPr>
-      </p:sp>
-      <p:sp>
-        <p:nvSpPr>
-          <p:cNvPr id="38" name="Text 36"/>
-          <p:cNvSpPr/>
-          <p:nvPr/>
-        </p:nvSpPr>
-        <p:spPr>
-          <a:xfrm>
-            <a:off x="3942207" y="4169664"/>
-            <a:ext cx="685800" cy="475488"/>
-          </a:xfrm>
-          <a:prstGeom prst="rect">
-            <a:avLst/>
-          </a:prstGeom>
-          <a:noFill/>
-          <a:ln/>
-        </p:spPr>
-        <p:txBody>
-          <a:bodyPr wrap="square" lIns="0" tIns="0" rIns="0" bIns="0" rtlCol="0" anchor="ctr"/>
-          <a:lstStyle/>
-          <a:p>
-            <a:pPr algn="ctr" indent="0" marL="0">
-              <a:buNone/>
-            </a:pPr>
-            <a:r>
-              <a:rPr lang="en-US" sz="900" b="1" dirty="0">
-                <a:solidFill>
-                  <a:srgbClr val="9D174D"/>
-                </a:solidFill>
-                <a:latin typeface="Trebuchet MS" pitchFamily="34" charset="0"/>
-                <a:ea typeface="Trebuchet MS" pitchFamily="34" charset="-122"/>
-                <a:cs typeface="Trebuchet MS" pitchFamily="34" charset="-120"/>
-              </a:rPr>
-              <a:t>p</a:t>
-            </a:r>
-            <a:endParaRPr lang="en-US" sz="900" dirty="0"/>
-          </a:p>
-        </p:txBody>
-      </p:sp>
-      <p:sp>
-        <p:nvSpPr>
-          <p:cNvPr id="39" name="Shape 37"/>
-          <p:cNvSpPr/>
-          <p:nvPr/>
-        </p:nvSpPr>
-        <p:spPr>
-          <a:xfrm>
-            <a:off x="4850892" y="4169664"/>
-            <a:ext cx="685800" cy="475488"/>
-          </a:xfrm>
-          <a:prstGeom prst="rect">
-            <a:avLst>
-              <a:gd name="adj" fmla="val 7692"/>
-            </a:avLst>
-          </a:prstGeom>
-          <a:solidFill>
-            <a:srgbClr val="FFFFFF"/>
-          </a:solidFill>
-          <a:ln w="12700">
-            <a:solidFill>
-              <a:srgbClr val="DB2777"/>
-            </a:solidFill>
-            <a:prstDash val="solid"/>
-          </a:ln>
-        </p:spPr>
-      </p:sp>
-      <p:sp>
-        <p:nvSpPr>
-          <p:cNvPr id="40" name="Text 38"/>
-          <p:cNvSpPr/>
-          <p:nvPr/>
-        </p:nvSpPr>
-        <p:spPr>
-          <a:xfrm>
-            <a:off x="4850892" y="4169664"/>
-            <a:ext cx="685800" cy="475488"/>
-          </a:xfrm>
-          <a:prstGeom prst="rect">
-            <a:avLst/>
-          </a:prstGeom>
-          <a:noFill/>
-          <a:ln/>
-        </p:spPr>
-        <p:txBody>
-          <a:bodyPr wrap="square" lIns="0" tIns="0" rIns="0" bIns="0" rtlCol="0" anchor="ctr"/>
-          <a:lstStyle/>
-          <a:p>
-            <a:pPr algn="ctr" indent="0" marL="0">
-              <a:buNone/>
-            </a:pPr>
-            <a:r>
-              <a:rPr lang="en-US" sz="900" b="1" dirty="0">
-                <a:solidFill>
-                  <a:srgbClr val="9D174D"/>
-                </a:solidFill>
-                <a:latin typeface="Trebuchet MS" pitchFamily="34" charset="0"/>
-                <a:ea typeface="Trebuchet MS" pitchFamily="34" charset="-122"/>
-                <a:cs typeface="Trebuchet MS" pitchFamily="34" charset="-120"/>
-              </a:rPr>
-              <a:t>e</a:t>
-            </a:r>
-            <a:endParaRPr lang="en-US" sz="900" dirty="0"/>
-          </a:p>
-        </p:txBody>
-      </p:sp>
-      <p:sp>
-        <p:nvSpPr>
-          <p:cNvPr id="41" name="Shape 39"/>
-          <p:cNvSpPr/>
-          <p:nvPr/>
-        </p:nvSpPr>
-        <p:spPr>
-          <a:xfrm>
-            <a:off x="5759577" y="4169664"/>
-            <a:ext cx="685800" cy="475488"/>
-          </a:xfrm>
-          <a:prstGeom prst="rect">
-            <a:avLst>
-              <a:gd name="adj" fmla="val 7692"/>
-            </a:avLst>
-          </a:prstGeom>
-          <a:solidFill>
-            <a:srgbClr val="FFFFFF"/>
-          </a:solidFill>
-          <a:ln w="12700">
-            <a:solidFill>
-              <a:srgbClr val="DB2777"/>
-            </a:solidFill>
-            <a:prstDash val="solid"/>
-          </a:ln>
-        </p:spPr>
-      </p:sp>
-      <p:sp>
-        <p:nvSpPr>
-          <p:cNvPr id="42" name="Text 40"/>
-          <p:cNvSpPr/>
-          <p:nvPr/>
-        </p:nvSpPr>
-        <p:spPr>
-          <a:xfrm>
-            <a:off x="5759577" y="4169664"/>
-            <a:ext cx="685800" cy="475488"/>
-          </a:xfrm>
-          <a:prstGeom prst="rect">
-            <a:avLst/>
-          </a:prstGeom>
-          <a:noFill/>
-          <a:ln/>
-        </p:spPr>
-        <p:txBody>
-          <a:bodyPr wrap="square" lIns="0" tIns="0" rIns="0" bIns="0" rtlCol="0" anchor="ctr"/>
-          <a:lstStyle/>
-          <a:p>
-            <a:pPr algn="ctr" indent="0" marL="0">
-              <a:buNone/>
-            </a:pPr>
-            <a:r>
-              <a:rPr lang="en-US" sz="900" b="1" dirty="0">
-                <a:solidFill>
-                  <a:srgbClr val="9D174D"/>
-                </a:solidFill>
-                <a:latin typeface="Trebuchet MS" pitchFamily="34" charset="0"/>
-                <a:ea typeface="Trebuchet MS" pitchFamily="34" charset="-122"/>
-                <a:cs typeface="Trebuchet MS" pitchFamily="34" charset="-120"/>
-              </a:rPr>
-              <a:t>l</a:t>
-            </a:r>
-            <a:endParaRPr lang="en-US" sz="900" dirty="0"/>
-          </a:p>
-        </p:txBody>
-      </p:sp>
-      <p:sp>
-        <p:nvSpPr>
-          <p:cNvPr id="43" name="Shape 41"/>
-          <p:cNvSpPr/>
-          <p:nvPr/>
-        </p:nvSpPr>
-        <p:spPr>
-          <a:xfrm>
-            <a:off x="6668262" y="4169664"/>
-            <a:ext cx="685800" cy="475488"/>
-          </a:xfrm>
-          <a:prstGeom prst="rect">
-            <a:avLst>
-              <a:gd name="adj" fmla="val 7692"/>
-            </a:avLst>
-          </a:prstGeom>
-          <a:solidFill>
-            <a:srgbClr val="FFFFFF"/>
-          </a:solidFill>
-          <a:ln w="12700">
-            <a:solidFill>
-              <a:srgbClr val="DB2777"/>
-            </a:solidFill>
-            <a:prstDash val="solid"/>
-          </a:ln>
-        </p:spPr>
-      </p:sp>
-      <p:sp>
-        <p:nvSpPr>
-          <p:cNvPr id="44" name="Text 42"/>
-          <p:cNvSpPr/>
-          <p:nvPr/>
-        </p:nvSpPr>
-        <p:spPr>
-          <a:xfrm>
-            <a:off x="6668262" y="4169664"/>
-            <a:ext cx="685800" cy="475488"/>
-          </a:xfrm>
-          <a:prstGeom prst="rect">
-            <a:avLst/>
-          </a:prstGeom>
-          <a:noFill/>
-          <a:ln/>
-        </p:spPr>
-        <p:txBody>
-          <a:bodyPr wrap="square" lIns="0" tIns="0" rIns="0" bIns="0" rtlCol="0" anchor="ctr"/>
-          <a:lstStyle/>
-          <a:p>
-            <a:pPr algn="ctr" indent="0" marL="0">
-              <a:buNone/>
-            </a:pPr>
-            <a:r>
-              <a:rPr lang="en-US" sz="900" b="1" dirty="0">
-                <a:solidFill>
-                  <a:srgbClr val="9D174D"/>
-                </a:solidFill>
-                <a:latin typeface="Trebuchet MS" pitchFamily="34" charset="0"/>
-                <a:ea typeface="Trebuchet MS" pitchFamily="34" charset="-122"/>
-                <a:cs typeface="Trebuchet MS" pitchFamily="34" charset="-120"/>
-              </a:rPr>
-              <a:t>e</a:t>
-            </a:r>
-            <a:endParaRPr lang="en-US" sz="900" dirty="0"/>
-          </a:p>
-        </p:txBody>
-      </p:sp>
-      <p:sp>
-        <p:nvSpPr>
-          <p:cNvPr id="45" name="Shape 43"/>
-          <p:cNvSpPr/>
-          <p:nvPr/>
-        </p:nvSpPr>
-        <p:spPr>
-          <a:xfrm>
-            <a:off x="7576947" y="4169664"/>
-            <a:ext cx="685800" cy="475488"/>
-          </a:xfrm>
-          <a:prstGeom prst="rect">
-            <a:avLst>
-              <a:gd name="adj" fmla="val 7692"/>
-            </a:avLst>
-          </a:prstGeom>
-          <a:solidFill>
-            <a:srgbClr val="FFFFFF"/>
-          </a:solidFill>
-          <a:ln w="12700">
-            <a:solidFill>
-              <a:srgbClr val="DB2777"/>
-            </a:solidFill>
-            <a:prstDash val="solid"/>
-          </a:ln>
-        </p:spPr>
-      </p:sp>
-      <p:sp>
-        <p:nvSpPr>
-          <p:cNvPr id="46" name="Text 44"/>
-          <p:cNvSpPr/>
-          <p:nvPr/>
-        </p:nvSpPr>
-        <p:spPr>
-          <a:xfrm>
-            <a:off x="7576947" y="4169664"/>
-            <a:ext cx="685800" cy="475488"/>
-          </a:xfrm>
-          <a:prstGeom prst="rect">
-            <a:avLst/>
-          </a:prstGeom>
-          <a:noFill/>
-          <a:ln/>
-        </p:spPr>
-        <p:txBody>
-          <a:bodyPr wrap="square" lIns="0" tIns="0" rIns="0" bIns="0" rtlCol="0" anchor="ctr"/>
-          <a:lstStyle/>
-          <a:p>
-            <a:pPr algn="ctr" indent="0" marL="0">
-              <a:buNone/>
-            </a:pPr>
-            <a:r>
-              <a:rPr lang="en-US" sz="900" b="1" dirty="0">
-                <a:solidFill>
-                  <a:srgbClr val="9D174D"/>
-                </a:solidFill>
-                <a:latin typeface="Trebuchet MS" pitchFamily="34" charset="0"/>
-                <a:ea typeface="Trebuchet MS" pitchFamily="34" charset="-122"/>
-                <a:cs typeface="Trebuchet MS" pitchFamily="34" charset="-120"/>
-              </a:rPr>
-              <a:t>ss</a:t>
-            </a:r>
-            <a:endParaRPr lang="en-US" sz="900" dirty="0"/>
+          <p:cNvPr id="39" name="Text 37"/>
+          <p:cNvSpPr/>
+          <p:nvPr/>
+        </p:nvSpPr>
+        <p:spPr>
+          <a:xfrm>
+            <a:off x="7031736" y="4572000"/>
+            <a:ext cx="685800" cy="219456"/>
+          </a:xfrm>
+          <a:prstGeom prst="rect">
+            <a:avLst/>
+          </a:prstGeom>
+          <a:noFill/>
+          <a:ln/>
+        </p:spPr>
+        <p:txBody>
+          <a:bodyPr wrap="square" lIns="0" tIns="0" rIns="0" bIns="0" rtlCol="0" anchor="t"/>
+          <a:lstStyle/>
+          <a:p>
+            <a:pPr algn="ctr" indent="0" marL="0">
+              <a:buNone/>
+            </a:pPr>
+            <a:r>
+              <a:rPr lang="en-US" sz="750" i="1" dirty="0">
+                <a:solidFill>
+                  <a:srgbClr val="94A3B8"/>
+                </a:solidFill>
+                <a:latin typeface="Calibri" pitchFamily="34" charset="0"/>
+                <a:ea typeface="Calibri" pitchFamily="34" charset="-122"/>
+                <a:cs typeface="Calibri" pitchFamily="34" charset="-120"/>
+              </a:rPr>
+              <a:t>/t/</a:t>
+            </a:r>
+            <a:endParaRPr lang="en-US" sz="750" dirty="0"/>
           </a:p>
         </p:txBody>
       </p:sp>
@@ -28233,7 +27981,7 @@
                 <a:ea typeface="Trebuchet MS" pitchFamily="34" charset="-122"/>
                 <a:cs typeface="Trebuchet MS" pitchFamily="34" charset="-120"/>
               </a:rPr>
-              <a:t>hoping</a:t>
+              <a:t>hopelessness</a:t>
             </a:r>
             <a:endParaRPr lang="en-US" sz="2800" dirty="0"/>
           </a:p>
@@ -29060,7 +28808,7 @@
                 <a:ea typeface="Trebuchet MS" pitchFamily="34" charset="-122"/>
                 <a:cs typeface="Trebuchet MS" pitchFamily="34" charset="-120"/>
               </a:rPr>
-              <a:t>hoping</a:t>
+              <a:t>hopelessness</a:t>
             </a:r>
             <a:endParaRPr lang="en-US" sz="2800" dirty="0"/>
           </a:p>
@@ -29140,7 +28888,7 @@
         </p:nvSpPr>
         <p:spPr>
           <a:xfrm>
-            <a:off x="2938272" y="2258568"/>
+            <a:off x="2221992" y="2258568"/>
             <a:ext cx="1828800" cy="292608"/>
           </a:xfrm>
           <a:prstGeom prst="rect">
@@ -29174,7 +28922,7 @@
         </p:nvSpPr>
         <p:spPr>
           <a:xfrm>
-            <a:off x="2938272" y="2258568"/>
+            <a:off x="2221992" y="2258568"/>
             <a:ext cx="1828800" cy="292608"/>
           </a:xfrm>
           <a:prstGeom prst="rect">
@@ -29213,7 +28961,7 @@
         </p:nvSpPr>
         <p:spPr>
           <a:xfrm>
-            <a:off x="2938272" y="2569464"/>
+            <a:off x="2221992" y="2569464"/>
             <a:ext cx="1828800" cy="201168"/>
           </a:xfrm>
           <a:prstGeom prst="rect">
@@ -29246,52 +28994,13 @@
       </p:sp>
       <p:sp>
         <p:nvSpPr>
-          <p:cNvPr id="19" name="Text 17"/>
-          <p:cNvSpPr/>
-          <p:nvPr/>
-        </p:nvSpPr>
-        <p:spPr>
-          <a:xfrm>
-            <a:off x="2938272" y="2752344"/>
-            <a:ext cx="1828800" cy="182880"/>
-          </a:xfrm>
-          <a:prstGeom prst="rect">
-            <a:avLst/>
-          </a:prstGeom>
-          <a:noFill/>
-          <a:ln/>
-        </p:spPr>
-        <p:txBody>
-          <a:bodyPr wrap="square" lIns="0" tIns="0" rIns="0" bIns="0" rtlCol="0" anchor="t"/>
-          <a:lstStyle/>
-          <a:p>
-            <a:pPr algn="ctr" indent="0" marL="0">
-              <a:buNone/>
-            </a:pPr>
-            <a:r>
-              <a:rPr lang="en-US" sz="700" i="1" dirty="0">
-                <a:solidFill>
-                  <a:srgbClr val="94A3B8"/>
-                </a:solidFill>
-                <a:latin typeface="Calibri" pitchFamily="34" charset="0"/>
-                <a:ea typeface="Calibri" pitchFamily="34" charset="-122"/>
-                <a:cs typeface="Calibri" pitchFamily="34" charset="-120"/>
-              </a:rPr>
-              <a:t>'e' dropped before vowel suffix</a:t>
-            </a:r>
-            <a:endParaRPr lang="en-US" sz="700" dirty="0"/>
-          </a:p>
-        </p:txBody>
-      </p:sp>
-      <p:sp>
-        <p:nvSpPr>
-          <p:cNvPr id="20" name="Shape 18"/>
-          <p:cNvSpPr/>
-          <p:nvPr/>
-        </p:nvSpPr>
-        <p:spPr>
-          <a:xfrm>
-            <a:off x="5803392" y="2258568"/>
+          <p:cNvPr id="19" name="Shape 17"/>
+          <p:cNvSpPr/>
+          <p:nvPr/>
+        </p:nvSpPr>
+        <p:spPr>
+          <a:xfrm>
+            <a:off x="4370832" y="2258568"/>
             <a:ext cx="1828800" cy="292608"/>
           </a:xfrm>
           <a:prstGeom prst="rect">
@@ -29300,11 +29009,11 @@
             </a:avLst>
           </a:prstGeom>
           <a:solidFill>
-            <a:srgbClr val="FCE7F3"/>
+            <a:srgbClr val="DDD6FE"/>
           </a:solidFill>
           <a:ln w="19050">
             <a:solidFill>
-              <a:srgbClr val="DB2777"/>
+              <a:srgbClr val="7C3AED"/>
             </a:solidFill>
             <a:prstDash val="solid"/>
           </a:ln>
@@ -29319,13 +29028,13 @@
       </p:sp>
       <p:sp>
         <p:nvSpPr>
-          <p:cNvPr id="21" name="Text 19"/>
-          <p:cNvSpPr/>
-          <p:nvPr/>
-        </p:nvSpPr>
-        <p:spPr>
-          <a:xfrm>
-            <a:off x="5803392" y="2258568"/>
+          <p:cNvPr id="20" name="Text 18"/>
+          <p:cNvSpPr/>
+          <p:nvPr/>
+        </p:nvSpPr>
+        <p:spPr>
+          <a:xfrm>
+            <a:off x="4370832" y="2258568"/>
             <a:ext cx="1828800" cy="292608"/>
           </a:xfrm>
           <a:prstGeom prst="rect">
@@ -29344,13 +29053,13 @@
             <a:r>
               <a:rPr lang="en-US" sz="1300" b="1" dirty="0">
                 <a:solidFill>
-                  <a:srgbClr val="9D174D"/>
+                  <a:srgbClr val="4C1D95"/>
                 </a:solidFill>
                 <a:latin typeface="Trebuchet MS" pitchFamily="34" charset="0"/>
                 <a:ea typeface="Trebuchet MS" pitchFamily="34" charset="-122"/>
                 <a:cs typeface="Trebuchet MS" pitchFamily="34" charset="-120"/>
               </a:rPr>
-              <a:t>ing</a:t>
+              <a:t>less</a:t>
             </a:r>
             <a:endParaRPr lang="en-US" sz="1300" dirty="0"/>
           </a:p>
@@ -29358,13 +29067,13 @@
       </p:sp>
       <p:sp>
         <p:nvSpPr>
-          <p:cNvPr id="22" name="Text 20"/>
-          <p:cNvSpPr/>
-          <p:nvPr/>
-        </p:nvSpPr>
-        <p:spPr>
-          <a:xfrm>
-            <a:off x="5803392" y="2569464"/>
+          <p:cNvPr id="21" name="Text 19"/>
+          <p:cNvSpPr/>
+          <p:nvPr/>
+        </p:nvSpPr>
+        <p:spPr>
+          <a:xfrm>
+            <a:off x="4370832" y="2569464"/>
             <a:ext cx="1828800" cy="201168"/>
           </a:xfrm>
           <a:prstGeom prst="rect">
@@ -29389,7 +29098,7 @@
                 <a:ea typeface="Calibri" pitchFamily="34" charset="-122"/>
                 <a:cs typeface="Calibri" pitchFamily="34" charset="-120"/>
               </a:rPr>
-              <a:t>happening now</a:t>
+              <a:t>without</a:t>
             </a:r>
             <a:endParaRPr lang="en-US" sz="850" dirty="0"/>
           </a:p>
@@ -29397,7 +29106,119 @@
       </p:sp>
       <p:sp>
         <p:nvSpPr>
-          <p:cNvPr id="23" name="Shape 21"/>
+          <p:cNvPr id="22" name="Shape 20"/>
+          <p:cNvSpPr/>
+          <p:nvPr/>
+        </p:nvSpPr>
+        <p:spPr>
+          <a:xfrm>
+            <a:off x="6519672" y="2258568"/>
+            <a:ext cx="1828800" cy="292608"/>
+          </a:xfrm>
+          <a:prstGeom prst="rect">
+            <a:avLst>
+              <a:gd name="adj" fmla="val 25000"/>
+            </a:avLst>
+          </a:prstGeom>
+          <a:solidFill>
+            <a:srgbClr val="FCE7F3"/>
+          </a:solidFill>
+          <a:ln w="19050">
+            <a:solidFill>
+              <a:srgbClr val="DB2777"/>
+            </a:solidFill>
+            <a:prstDash val="solid"/>
+          </a:ln>
+          <a:effectLst>
+            <a:outerShdw sx="100000" sy="100000" kx="0" ky="0" algn="bl" rotWithShape="0" blurRad="101600" dist="38100" dir="8100000">
+              <a:srgbClr val="000000">
+                <a:alpha val="12000"/>
+              </a:srgbClr>
+            </a:outerShdw>
+          </a:effectLst>
+        </p:spPr>
+      </p:sp>
+      <p:sp>
+        <p:nvSpPr>
+          <p:cNvPr id="23" name="Text 21"/>
+          <p:cNvSpPr/>
+          <p:nvPr/>
+        </p:nvSpPr>
+        <p:spPr>
+          <a:xfrm>
+            <a:off x="6519672" y="2258568"/>
+            <a:ext cx="1828800" cy="292608"/>
+          </a:xfrm>
+          <a:prstGeom prst="rect">
+            <a:avLst/>
+          </a:prstGeom>
+          <a:noFill/>
+          <a:ln/>
+        </p:spPr>
+        <p:txBody>
+          <a:bodyPr wrap="square" lIns="0" tIns="0" rIns="0" bIns="0" rtlCol="0" anchor="ctr"/>
+          <a:lstStyle/>
+          <a:p>
+            <a:pPr algn="ctr" indent="0" marL="0">
+              <a:buNone/>
+            </a:pPr>
+            <a:r>
+              <a:rPr lang="en-US" sz="1300" b="1" dirty="0">
+                <a:solidFill>
+                  <a:srgbClr val="9D174D"/>
+                </a:solidFill>
+                <a:latin typeface="Trebuchet MS" pitchFamily="34" charset="0"/>
+                <a:ea typeface="Trebuchet MS" pitchFamily="34" charset="-122"/>
+                <a:cs typeface="Trebuchet MS" pitchFamily="34" charset="-120"/>
+              </a:rPr>
+              <a:t>ness</a:t>
+            </a:r>
+            <a:endParaRPr lang="en-US" sz="1300" dirty="0"/>
+          </a:p>
+        </p:txBody>
+      </p:sp>
+      <p:sp>
+        <p:nvSpPr>
+          <p:cNvPr id="24" name="Text 22"/>
+          <p:cNvSpPr/>
+          <p:nvPr/>
+        </p:nvSpPr>
+        <p:spPr>
+          <a:xfrm>
+            <a:off x="6519672" y="2569464"/>
+            <a:ext cx="1828800" cy="201168"/>
+          </a:xfrm>
+          <a:prstGeom prst="rect">
+            <a:avLst/>
+          </a:prstGeom>
+          <a:noFill/>
+          <a:ln/>
+        </p:spPr>
+        <p:txBody>
+          <a:bodyPr wrap="square" lIns="0" tIns="0" rIns="0" bIns="0" rtlCol="0" anchor="t"/>
+          <a:lstStyle/>
+          <a:p>
+            <a:pPr algn="ctr" indent="0" marL="0">
+              <a:buNone/>
+            </a:pPr>
+            <a:r>
+              <a:rPr lang="en-US" sz="850" dirty="0">
+                <a:solidFill>
+                  <a:srgbClr val="475569"/>
+                </a:solidFill>
+                <a:latin typeface="Calibri" pitchFamily="34" charset="0"/>
+                <a:ea typeface="Calibri" pitchFamily="34" charset="-122"/>
+                <a:cs typeface="Calibri" pitchFamily="34" charset="-120"/>
+              </a:rPr>
+              <a:t>state or quality of</a:t>
+            </a:r>
+            <a:endParaRPr lang="en-US" sz="850" dirty="0"/>
+          </a:p>
+        </p:txBody>
+      </p:sp>
+      <p:sp>
+        <p:nvSpPr>
+          <p:cNvPr id="25" name="Shape 23"/>
           <p:cNvSpPr/>
           <p:nvPr/>
         </p:nvSpPr>
@@ -29424,7 +29245,7 @@
       </p:sp>
       <p:sp>
         <p:nvSpPr>
-          <p:cNvPr id="24" name="Text 22"/>
+          <p:cNvPr id="26" name="Text 24"/>
           <p:cNvSpPr/>
           <p:nvPr/>
         </p:nvSpPr>
@@ -29463,7 +29284,7 @@
       </p:sp>
       <p:sp>
         <p:nvSpPr>
-          <p:cNvPr id="25" name="Shape 23"/>
+          <p:cNvPr id="27" name="Shape 25"/>
           <p:cNvSpPr/>
           <p:nvPr/>
         </p:nvSpPr>
@@ -29490,7 +29311,7 @@
       </p:sp>
       <p:sp>
         <p:nvSpPr>
-          <p:cNvPr id="26" name="Text 24"/>
+          <p:cNvPr id="28" name="Text 26"/>
           <p:cNvSpPr/>
           <p:nvPr/>
         </p:nvSpPr>
@@ -29529,7 +29350,7 @@
       </p:sp>
       <p:sp>
         <p:nvSpPr>
-          <p:cNvPr id="27" name="Shape 25"/>
+          <p:cNvPr id="29" name="Shape 27"/>
           <p:cNvSpPr/>
           <p:nvPr/>
         </p:nvSpPr>
@@ -29556,7 +29377,7 @@
       </p:sp>
       <p:sp>
         <p:nvSpPr>
-          <p:cNvPr id="28" name="Text 26"/>
+          <p:cNvPr id="30" name="Text 28"/>
           <p:cNvSpPr/>
           <p:nvPr/>
         </p:nvSpPr>
@@ -29595,7 +29416,7 @@
       </p:sp>
       <p:sp>
         <p:nvSpPr>
-          <p:cNvPr id="29" name="Shape 27"/>
+          <p:cNvPr id="31" name="Shape 29"/>
           <p:cNvSpPr/>
           <p:nvPr/>
         </p:nvSpPr>
@@ -29622,7 +29443,7 @@
       </p:sp>
       <p:sp>
         <p:nvSpPr>
-          <p:cNvPr id="30" name="Text 28"/>
+          <p:cNvPr id="32" name="Text 30"/>
           <p:cNvSpPr/>
           <p:nvPr/>
         </p:nvSpPr>
@@ -30084,7 +29905,7 @@
                 <a:ea typeface="Trebuchet MS" pitchFamily="34" charset="-122"/>
                 <a:cs typeface="Trebuchet MS" pitchFamily="34" charset="-120"/>
               </a:rPr>
-              <a:t>hoping</a:t>
+              <a:t>hopelessness</a:t>
             </a:r>
             <a:endParaRPr lang="en-US" sz="2800" dirty="0"/>
           </a:p>
@@ -30164,7 +29985,7 @@
         </p:nvSpPr>
         <p:spPr>
           <a:xfrm>
-            <a:off x="2938272" y="2258568"/>
+            <a:off x="2221992" y="2258568"/>
             <a:ext cx="1828800" cy="292608"/>
           </a:xfrm>
           <a:prstGeom prst="rect">
@@ -30198,7 +30019,7 @@
         </p:nvSpPr>
         <p:spPr>
           <a:xfrm>
-            <a:off x="2938272" y="2258568"/>
+            <a:off x="2221992" y="2258568"/>
             <a:ext cx="1828800" cy="292608"/>
           </a:xfrm>
           <a:prstGeom prst="rect">
@@ -30237,7 +30058,7 @@
         </p:nvSpPr>
         <p:spPr>
           <a:xfrm>
-            <a:off x="2938272" y="2569464"/>
+            <a:off x="2221992" y="2569464"/>
             <a:ext cx="1828800" cy="201168"/>
           </a:xfrm>
           <a:prstGeom prst="rect">
@@ -30270,52 +30091,13 @@
       </p:sp>
       <p:sp>
         <p:nvSpPr>
-          <p:cNvPr id="19" name="Text 17"/>
-          <p:cNvSpPr/>
-          <p:nvPr/>
-        </p:nvSpPr>
-        <p:spPr>
-          <a:xfrm>
-            <a:off x="2938272" y="2752344"/>
-            <a:ext cx="1828800" cy="182880"/>
-          </a:xfrm>
-          <a:prstGeom prst="rect">
-            <a:avLst/>
-          </a:prstGeom>
-          <a:noFill/>
-          <a:ln/>
-        </p:spPr>
-        <p:txBody>
-          <a:bodyPr wrap="square" lIns="0" tIns="0" rIns="0" bIns="0" rtlCol="0" anchor="t"/>
-          <a:lstStyle/>
-          <a:p>
-            <a:pPr algn="ctr" indent="0" marL="0">
-              <a:buNone/>
-            </a:pPr>
-            <a:r>
-              <a:rPr lang="en-US" sz="700" i="1" dirty="0">
-                <a:solidFill>
-                  <a:srgbClr val="94A3B8"/>
-                </a:solidFill>
-                <a:latin typeface="Calibri" pitchFamily="34" charset="0"/>
-                <a:ea typeface="Calibri" pitchFamily="34" charset="-122"/>
-                <a:cs typeface="Calibri" pitchFamily="34" charset="-120"/>
-              </a:rPr>
-              <a:t>'e' dropped before vowel suffix</a:t>
-            </a:r>
-            <a:endParaRPr lang="en-US" sz="700" dirty="0"/>
-          </a:p>
-        </p:txBody>
-      </p:sp>
-      <p:sp>
-        <p:nvSpPr>
-          <p:cNvPr id="20" name="Shape 18"/>
-          <p:cNvSpPr/>
-          <p:nvPr/>
-        </p:nvSpPr>
-        <p:spPr>
-          <a:xfrm>
-            <a:off x="5803392" y="2258568"/>
+          <p:cNvPr id="19" name="Shape 17"/>
+          <p:cNvSpPr/>
+          <p:nvPr/>
+        </p:nvSpPr>
+        <p:spPr>
+          <a:xfrm>
+            <a:off x="4370832" y="2258568"/>
             <a:ext cx="1828800" cy="292608"/>
           </a:xfrm>
           <a:prstGeom prst="rect">
@@ -30324,11 +30106,11 @@
             </a:avLst>
           </a:prstGeom>
           <a:solidFill>
-            <a:srgbClr val="FCE7F3"/>
+            <a:srgbClr val="DDD6FE"/>
           </a:solidFill>
           <a:ln w="19050">
             <a:solidFill>
-              <a:srgbClr val="DB2777"/>
+              <a:srgbClr val="7C3AED"/>
             </a:solidFill>
             <a:prstDash val="solid"/>
           </a:ln>
@@ -30343,13 +30125,13 @@
       </p:sp>
       <p:sp>
         <p:nvSpPr>
-          <p:cNvPr id="21" name="Text 19"/>
-          <p:cNvSpPr/>
-          <p:nvPr/>
-        </p:nvSpPr>
-        <p:spPr>
-          <a:xfrm>
-            <a:off x="5803392" y="2258568"/>
+          <p:cNvPr id="20" name="Text 18"/>
+          <p:cNvSpPr/>
+          <p:nvPr/>
+        </p:nvSpPr>
+        <p:spPr>
+          <a:xfrm>
+            <a:off x="4370832" y="2258568"/>
             <a:ext cx="1828800" cy="292608"/>
           </a:xfrm>
           <a:prstGeom prst="rect">
@@ -30368,13 +30150,13 @@
             <a:r>
               <a:rPr lang="en-US" sz="1300" b="1" dirty="0">
                 <a:solidFill>
-                  <a:srgbClr val="9D174D"/>
+                  <a:srgbClr val="4C1D95"/>
                 </a:solidFill>
                 <a:latin typeface="Trebuchet MS" pitchFamily="34" charset="0"/>
                 <a:ea typeface="Trebuchet MS" pitchFamily="34" charset="-122"/>
                 <a:cs typeface="Trebuchet MS" pitchFamily="34" charset="-120"/>
               </a:rPr>
-              <a:t>ing</a:t>
+              <a:t>less</a:t>
             </a:r>
             <a:endParaRPr lang="en-US" sz="1300" dirty="0"/>
           </a:p>
@@ -30382,13 +30164,13 @@
       </p:sp>
       <p:sp>
         <p:nvSpPr>
-          <p:cNvPr id="22" name="Text 20"/>
-          <p:cNvSpPr/>
-          <p:nvPr/>
-        </p:nvSpPr>
-        <p:spPr>
-          <a:xfrm>
-            <a:off x="5803392" y="2569464"/>
+          <p:cNvPr id="21" name="Text 19"/>
+          <p:cNvSpPr/>
+          <p:nvPr/>
+        </p:nvSpPr>
+        <p:spPr>
+          <a:xfrm>
+            <a:off x="4370832" y="2569464"/>
             <a:ext cx="1828800" cy="201168"/>
           </a:xfrm>
           <a:prstGeom prst="rect">
@@ -30413,7 +30195,7 @@
                 <a:ea typeface="Calibri" pitchFamily="34" charset="-122"/>
                 <a:cs typeface="Calibri" pitchFamily="34" charset="-120"/>
               </a:rPr>
-              <a:t>happening now</a:t>
+              <a:t>without</a:t>
             </a:r>
             <a:endParaRPr lang="en-US" sz="850" dirty="0"/>
           </a:p>
@@ -30421,7 +30203,119 @@
       </p:sp>
       <p:sp>
         <p:nvSpPr>
-          <p:cNvPr id="23" name="Shape 21"/>
+          <p:cNvPr id="22" name="Shape 20"/>
+          <p:cNvSpPr/>
+          <p:nvPr/>
+        </p:nvSpPr>
+        <p:spPr>
+          <a:xfrm>
+            <a:off x="6519672" y="2258568"/>
+            <a:ext cx="1828800" cy="292608"/>
+          </a:xfrm>
+          <a:prstGeom prst="rect">
+            <a:avLst>
+              <a:gd name="adj" fmla="val 25000"/>
+            </a:avLst>
+          </a:prstGeom>
+          <a:solidFill>
+            <a:srgbClr val="FCE7F3"/>
+          </a:solidFill>
+          <a:ln w="19050">
+            <a:solidFill>
+              <a:srgbClr val="DB2777"/>
+            </a:solidFill>
+            <a:prstDash val="solid"/>
+          </a:ln>
+          <a:effectLst>
+            <a:outerShdw sx="100000" sy="100000" kx="0" ky="0" algn="bl" rotWithShape="0" blurRad="101600" dist="38100" dir="8100000">
+              <a:srgbClr val="000000">
+                <a:alpha val="12000"/>
+              </a:srgbClr>
+            </a:outerShdw>
+          </a:effectLst>
+        </p:spPr>
+      </p:sp>
+      <p:sp>
+        <p:nvSpPr>
+          <p:cNvPr id="23" name="Text 21"/>
+          <p:cNvSpPr/>
+          <p:nvPr/>
+        </p:nvSpPr>
+        <p:spPr>
+          <a:xfrm>
+            <a:off x="6519672" y="2258568"/>
+            <a:ext cx="1828800" cy="292608"/>
+          </a:xfrm>
+          <a:prstGeom prst="rect">
+            <a:avLst/>
+          </a:prstGeom>
+          <a:noFill/>
+          <a:ln/>
+        </p:spPr>
+        <p:txBody>
+          <a:bodyPr wrap="square" lIns="0" tIns="0" rIns="0" bIns="0" rtlCol="0" anchor="ctr"/>
+          <a:lstStyle/>
+          <a:p>
+            <a:pPr algn="ctr" indent="0" marL="0">
+              <a:buNone/>
+            </a:pPr>
+            <a:r>
+              <a:rPr lang="en-US" sz="1300" b="1" dirty="0">
+                <a:solidFill>
+                  <a:srgbClr val="9D174D"/>
+                </a:solidFill>
+                <a:latin typeface="Trebuchet MS" pitchFamily="34" charset="0"/>
+                <a:ea typeface="Trebuchet MS" pitchFamily="34" charset="-122"/>
+                <a:cs typeface="Trebuchet MS" pitchFamily="34" charset="-120"/>
+              </a:rPr>
+              <a:t>ness</a:t>
+            </a:r>
+            <a:endParaRPr lang="en-US" sz="1300" dirty="0"/>
+          </a:p>
+        </p:txBody>
+      </p:sp>
+      <p:sp>
+        <p:nvSpPr>
+          <p:cNvPr id="24" name="Text 22"/>
+          <p:cNvSpPr/>
+          <p:nvPr/>
+        </p:nvSpPr>
+        <p:spPr>
+          <a:xfrm>
+            <a:off x="6519672" y="2569464"/>
+            <a:ext cx="1828800" cy="201168"/>
+          </a:xfrm>
+          <a:prstGeom prst="rect">
+            <a:avLst/>
+          </a:prstGeom>
+          <a:noFill/>
+          <a:ln/>
+        </p:spPr>
+        <p:txBody>
+          <a:bodyPr wrap="square" lIns="0" tIns="0" rIns="0" bIns="0" rtlCol="0" anchor="t"/>
+          <a:lstStyle/>
+          <a:p>
+            <a:pPr algn="ctr" indent="0" marL="0">
+              <a:buNone/>
+            </a:pPr>
+            <a:r>
+              <a:rPr lang="en-US" sz="850" dirty="0">
+                <a:solidFill>
+                  <a:srgbClr val="475569"/>
+                </a:solidFill>
+                <a:latin typeface="Calibri" pitchFamily="34" charset="0"/>
+                <a:ea typeface="Calibri" pitchFamily="34" charset="-122"/>
+                <a:cs typeface="Calibri" pitchFamily="34" charset="-120"/>
+              </a:rPr>
+              <a:t>state or quality of</a:t>
+            </a:r>
+            <a:endParaRPr lang="en-US" sz="850" dirty="0"/>
+          </a:p>
+        </p:txBody>
+      </p:sp>
+      <p:sp>
+        <p:nvSpPr>
+          <p:cNvPr id="25" name="Shape 23"/>
           <p:cNvSpPr/>
           <p:nvPr/>
         </p:nvSpPr>
@@ -30448,7 +30342,7 @@
       </p:sp>
       <p:sp>
         <p:nvSpPr>
-          <p:cNvPr id="24" name="Text 22"/>
+          <p:cNvPr id="26" name="Text 24"/>
           <p:cNvSpPr/>
           <p:nvPr/>
         </p:nvSpPr>
@@ -30487,7 +30381,7 @@
       </p:sp>
       <p:sp>
         <p:nvSpPr>
-          <p:cNvPr id="25" name="Shape 23"/>
+          <p:cNvPr id="27" name="Shape 25"/>
           <p:cNvSpPr/>
           <p:nvPr/>
         </p:nvSpPr>
@@ -30514,13 +30408,13 @@
       </p:sp>
       <p:sp>
         <p:nvSpPr>
-          <p:cNvPr id="26" name="Shape 24"/>
-          <p:cNvSpPr/>
-          <p:nvPr/>
-        </p:nvSpPr>
-        <p:spPr>
-          <a:xfrm>
-            <a:off x="2999232" y="3364992"/>
+          <p:cNvPr id="28" name="Shape 26"/>
+          <p:cNvSpPr/>
+          <p:nvPr/>
+        </p:nvSpPr>
+        <p:spPr>
+          <a:xfrm>
+            <a:off x="2313432" y="3364992"/>
             <a:ext cx="1645920" cy="475488"/>
           </a:xfrm>
           <a:prstGeom prst="rect">
@@ -30541,13 +30435,13 @@
       </p:sp>
       <p:sp>
         <p:nvSpPr>
-          <p:cNvPr id="27" name="Text 25"/>
-          <p:cNvSpPr/>
-          <p:nvPr/>
-        </p:nvSpPr>
-        <p:spPr>
-          <a:xfrm>
-            <a:off x="2999232" y="3364992"/>
+          <p:cNvPr id="29" name="Text 27"/>
+          <p:cNvSpPr/>
+          <p:nvPr/>
+        </p:nvSpPr>
+        <p:spPr>
+          <a:xfrm>
+            <a:off x="2313432" y="3364992"/>
             <a:ext cx="1645920" cy="475488"/>
           </a:xfrm>
           <a:prstGeom prst="rect">
@@ -30572,7 +30466,7 @@
                 <a:ea typeface="Trebuchet MS" pitchFamily="34" charset="-122"/>
                 <a:cs typeface="Trebuchet MS" pitchFamily="34" charset="-120"/>
               </a:rPr>
-              <a:t>hop</a:t>
+              <a:t>hope</a:t>
             </a:r>
             <a:endParaRPr lang="en-US" sz="1400" dirty="0"/>
           </a:p>
@@ -30580,14 +30474,14 @@
       </p:sp>
       <p:sp>
         <p:nvSpPr>
-          <p:cNvPr id="28" name="Text 26"/>
-          <p:cNvSpPr/>
-          <p:nvPr/>
-        </p:nvSpPr>
-        <p:spPr>
-          <a:xfrm>
-            <a:off x="4645152" y="3364992"/>
-            <a:ext cx="1097280" cy="475488"/>
+          <p:cNvPr id="30" name="Text 28"/>
+          <p:cNvSpPr/>
+          <p:nvPr/>
+        </p:nvSpPr>
+        <p:spPr>
+          <a:xfrm>
+            <a:off x="3959352" y="3364992"/>
+            <a:ext cx="411480" cy="475488"/>
           </a:xfrm>
           <a:prstGeom prst="rect">
             <a:avLst/>
@@ -30619,13 +30513,13 @@
       </p:sp>
       <p:sp>
         <p:nvSpPr>
-          <p:cNvPr id="29" name="Shape 27"/>
-          <p:cNvSpPr/>
-          <p:nvPr/>
-        </p:nvSpPr>
-        <p:spPr>
-          <a:xfrm>
-            <a:off x="5742432" y="3364992"/>
+          <p:cNvPr id="31" name="Shape 29"/>
+          <p:cNvSpPr/>
+          <p:nvPr/>
+        </p:nvSpPr>
+        <p:spPr>
+          <a:xfrm>
+            <a:off x="4370832" y="3364992"/>
             <a:ext cx="1645920" cy="475488"/>
           </a:xfrm>
           <a:prstGeom prst="rect">
@@ -30646,13 +30540,13 @@
       </p:sp>
       <p:sp>
         <p:nvSpPr>
-          <p:cNvPr id="30" name="Text 28"/>
-          <p:cNvSpPr/>
-          <p:nvPr/>
-        </p:nvSpPr>
-        <p:spPr>
-          <a:xfrm>
-            <a:off x="5742432" y="3364992"/>
+          <p:cNvPr id="32" name="Text 30"/>
+          <p:cNvSpPr/>
+          <p:nvPr/>
+        </p:nvSpPr>
+        <p:spPr>
+          <a:xfrm>
+            <a:off x="4370832" y="3364992"/>
             <a:ext cx="1645920" cy="475488"/>
           </a:xfrm>
           <a:prstGeom prst="rect">
@@ -30677,7 +30571,7 @@
                 <a:ea typeface="Trebuchet MS" pitchFamily="34" charset="-122"/>
                 <a:cs typeface="Trebuchet MS" pitchFamily="34" charset="-120"/>
               </a:rPr>
-              <a:t>ing</a:t>
+              <a:t>less</a:t>
             </a:r>
             <a:endParaRPr lang="en-US" sz="1400" dirty="0"/>
           </a:p>
@@ -30685,7 +30579,112 @@
       </p:sp>
       <p:sp>
         <p:nvSpPr>
-          <p:cNvPr id="31" name="Shape 29"/>
+          <p:cNvPr id="33" name="Text 31"/>
+          <p:cNvSpPr/>
+          <p:nvPr/>
+        </p:nvSpPr>
+        <p:spPr>
+          <a:xfrm>
+            <a:off x="6016752" y="3364992"/>
+            <a:ext cx="411480" cy="475488"/>
+          </a:xfrm>
+          <a:prstGeom prst="rect">
+            <a:avLst/>
+          </a:prstGeom>
+          <a:noFill/>
+          <a:ln/>
+        </p:spPr>
+        <p:txBody>
+          <a:bodyPr wrap="square" lIns="0" tIns="0" rIns="0" bIns="0" rtlCol="0" anchor="ctr"/>
+          <a:lstStyle/>
+          <a:p>
+            <a:pPr algn="ctr" indent="0" marL="0">
+              <a:buNone/>
+            </a:pPr>
+            <a:r>
+              <a:rPr lang="en-US" sz="1600" b="1" dirty="0">
+                <a:solidFill>
+                  <a:srgbClr val="0D9488"/>
+                </a:solidFill>
+                <a:latin typeface="Trebuchet MS" pitchFamily="34" charset="0"/>
+                <a:ea typeface="Trebuchet MS" pitchFamily="34" charset="-122"/>
+                <a:cs typeface="Trebuchet MS" pitchFamily="34" charset="-120"/>
+              </a:rPr>
+              <a:t>·</a:t>
+            </a:r>
+            <a:endParaRPr lang="en-US" sz="1600" dirty="0"/>
+          </a:p>
+        </p:txBody>
+      </p:sp>
+      <p:sp>
+        <p:nvSpPr>
+          <p:cNvPr id="34" name="Shape 32"/>
+          <p:cNvSpPr/>
+          <p:nvPr/>
+        </p:nvSpPr>
+        <p:spPr>
+          <a:xfrm>
+            <a:off x="6428232" y="3364992"/>
+            <a:ext cx="1645920" cy="475488"/>
+          </a:xfrm>
+          <a:prstGeom prst="rect">
+            <a:avLst>
+              <a:gd name="adj" fmla="val 9615"/>
+            </a:avLst>
+          </a:prstGeom>
+          <a:solidFill>
+            <a:srgbClr val="FFFFFF"/>
+          </a:solidFill>
+          <a:ln w="12700">
+            <a:solidFill>
+              <a:srgbClr val="0D9488"/>
+            </a:solidFill>
+            <a:prstDash val="solid"/>
+          </a:ln>
+        </p:spPr>
+      </p:sp>
+      <p:sp>
+        <p:nvSpPr>
+          <p:cNvPr id="35" name="Text 33"/>
+          <p:cNvSpPr/>
+          <p:nvPr/>
+        </p:nvSpPr>
+        <p:spPr>
+          <a:xfrm>
+            <a:off x="6428232" y="3364992"/>
+            <a:ext cx="1645920" cy="475488"/>
+          </a:xfrm>
+          <a:prstGeom prst="rect">
+            <a:avLst/>
+          </a:prstGeom>
+          <a:noFill/>
+          <a:ln/>
+        </p:spPr>
+        <p:txBody>
+          <a:bodyPr wrap="square" lIns="0" tIns="0" rIns="0" bIns="0" rtlCol="0" anchor="ctr"/>
+          <a:lstStyle/>
+          <a:p>
+            <a:pPr algn="ctr" indent="0" marL="0">
+              <a:buNone/>
+            </a:pPr>
+            <a:r>
+              <a:rPr lang="en-US" sz="1400" b="1" dirty="0">
+                <a:solidFill>
+                  <a:srgbClr val="0D9488"/>
+                </a:solidFill>
+                <a:latin typeface="Trebuchet MS" pitchFamily="34" charset="0"/>
+                <a:ea typeface="Trebuchet MS" pitchFamily="34" charset="-122"/>
+                <a:cs typeface="Trebuchet MS" pitchFamily="34" charset="-120"/>
+              </a:rPr>
+              <a:t>ness</a:t>
+            </a:r>
+            <a:endParaRPr lang="en-US" sz="1400" dirty="0"/>
+          </a:p>
+        </p:txBody>
+      </p:sp>
+      <p:sp>
+        <p:nvSpPr>
+          <p:cNvPr id="36" name="Shape 34"/>
           <p:cNvSpPr/>
           <p:nvPr/>
         </p:nvSpPr>
@@ -30712,7 +30711,7 @@
       </p:sp>
       <p:sp>
         <p:nvSpPr>
-          <p:cNvPr id="32" name="Text 30"/>
+          <p:cNvPr id="37" name="Text 35"/>
           <p:cNvSpPr/>
           <p:nvPr/>
         </p:nvSpPr>
@@ -30751,7 +30750,7 @@
       </p:sp>
       <p:sp>
         <p:nvSpPr>
-          <p:cNvPr id="33" name="Shape 31"/>
+          <p:cNvPr id="38" name="Shape 36"/>
           <p:cNvSpPr/>
           <p:nvPr/>
         </p:nvSpPr>
@@ -30778,7 +30777,7 @@
       </p:sp>
       <p:sp>
         <p:nvSpPr>
-          <p:cNvPr id="34" name="Text 32"/>
+          <p:cNvPr id="39" name="Text 37"/>
           <p:cNvSpPr/>
           <p:nvPr/>
         </p:nvSpPr>
@@ -31240,7 +31239,7 @@
                 <a:ea typeface="Trebuchet MS" pitchFamily="34" charset="-122"/>
                 <a:cs typeface="Trebuchet MS" pitchFamily="34" charset="-120"/>
               </a:rPr>
-              <a:t>hoping</a:t>
+              <a:t>hopelessness</a:t>
             </a:r>
             <a:endParaRPr lang="en-US" sz="2800" dirty="0"/>
           </a:p>
@@ -31320,7 +31319,7 @@
         </p:nvSpPr>
         <p:spPr>
           <a:xfrm>
-            <a:off x="2938272" y="2258568"/>
+            <a:off x="2221992" y="2258568"/>
             <a:ext cx="1828800" cy="292608"/>
           </a:xfrm>
           <a:prstGeom prst="rect">
@@ -31354,7 +31353,7 @@
         </p:nvSpPr>
         <p:spPr>
           <a:xfrm>
-            <a:off x="2938272" y="2258568"/>
+            <a:off x="2221992" y="2258568"/>
             <a:ext cx="1828800" cy="292608"/>
           </a:xfrm>
           <a:prstGeom prst="rect">
@@ -31393,7 +31392,7 @@
         </p:nvSpPr>
         <p:spPr>
           <a:xfrm>
-            <a:off x="2938272" y="2569464"/>
+            <a:off x="2221992" y="2569464"/>
             <a:ext cx="1828800" cy="201168"/>
           </a:xfrm>
           <a:prstGeom prst="rect">
@@ -31426,52 +31425,13 @@
       </p:sp>
       <p:sp>
         <p:nvSpPr>
-          <p:cNvPr id="19" name="Text 17"/>
-          <p:cNvSpPr/>
-          <p:nvPr/>
-        </p:nvSpPr>
-        <p:spPr>
-          <a:xfrm>
-            <a:off x="2938272" y="2752344"/>
-            <a:ext cx="1828800" cy="182880"/>
-          </a:xfrm>
-          <a:prstGeom prst="rect">
-            <a:avLst/>
-          </a:prstGeom>
-          <a:noFill/>
-          <a:ln/>
-        </p:spPr>
-        <p:txBody>
-          <a:bodyPr wrap="square" lIns="0" tIns="0" rIns="0" bIns="0" rtlCol="0" anchor="t"/>
-          <a:lstStyle/>
-          <a:p>
-            <a:pPr algn="ctr" indent="0" marL="0">
-              <a:buNone/>
-            </a:pPr>
-            <a:r>
-              <a:rPr lang="en-US" sz="700" i="1" dirty="0">
-                <a:solidFill>
-                  <a:srgbClr val="94A3B8"/>
-                </a:solidFill>
-                <a:latin typeface="Calibri" pitchFamily="34" charset="0"/>
-                <a:ea typeface="Calibri" pitchFamily="34" charset="-122"/>
-                <a:cs typeface="Calibri" pitchFamily="34" charset="-120"/>
-              </a:rPr>
-              <a:t>'e' dropped before vowel suffix</a:t>
-            </a:r>
-            <a:endParaRPr lang="en-US" sz="700" dirty="0"/>
-          </a:p>
-        </p:txBody>
-      </p:sp>
-      <p:sp>
-        <p:nvSpPr>
-          <p:cNvPr id="20" name="Shape 18"/>
-          <p:cNvSpPr/>
-          <p:nvPr/>
-        </p:nvSpPr>
-        <p:spPr>
-          <a:xfrm>
-            <a:off x="5803392" y="2258568"/>
+          <p:cNvPr id="19" name="Shape 17"/>
+          <p:cNvSpPr/>
+          <p:nvPr/>
+        </p:nvSpPr>
+        <p:spPr>
+          <a:xfrm>
+            <a:off x="4370832" y="2258568"/>
             <a:ext cx="1828800" cy="292608"/>
           </a:xfrm>
           <a:prstGeom prst="rect">
@@ -31480,11 +31440,11 @@
             </a:avLst>
           </a:prstGeom>
           <a:solidFill>
-            <a:srgbClr val="FCE7F3"/>
+            <a:srgbClr val="DDD6FE"/>
           </a:solidFill>
           <a:ln w="19050">
             <a:solidFill>
-              <a:srgbClr val="DB2777"/>
+              <a:srgbClr val="7C3AED"/>
             </a:solidFill>
             <a:prstDash val="solid"/>
           </a:ln>
@@ -31499,13 +31459,13 @@
       </p:sp>
       <p:sp>
         <p:nvSpPr>
-          <p:cNvPr id="21" name="Text 19"/>
-          <p:cNvSpPr/>
-          <p:nvPr/>
-        </p:nvSpPr>
-        <p:spPr>
-          <a:xfrm>
-            <a:off x="5803392" y="2258568"/>
+          <p:cNvPr id="20" name="Text 18"/>
+          <p:cNvSpPr/>
+          <p:nvPr/>
+        </p:nvSpPr>
+        <p:spPr>
+          <a:xfrm>
+            <a:off x="4370832" y="2258568"/>
             <a:ext cx="1828800" cy="292608"/>
           </a:xfrm>
           <a:prstGeom prst="rect">
@@ -31524,13 +31484,13 @@
             <a:r>
               <a:rPr lang="en-US" sz="1300" b="1" dirty="0">
                 <a:solidFill>
-                  <a:srgbClr val="9D174D"/>
+                  <a:srgbClr val="4C1D95"/>
                 </a:solidFill>
                 <a:latin typeface="Trebuchet MS" pitchFamily="34" charset="0"/>
                 <a:ea typeface="Trebuchet MS" pitchFamily="34" charset="-122"/>
                 <a:cs typeface="Trebuchet MS" pitchFamily="34" charset="-120"/>
               </a:rPr>
-              <a:t>ing</a:t>
+              <a:t>less</a:t>
             </a:r>
             <a:endParaRPr lang="en-US" sz="1300" dirty="0"/>
           </a:p>
@@ -31538,13 +31498,13 @@
       </p:sp>
       <p:sp>
         <p:nvSpPr>
-          <p:cNvPr id="22" name="Text 20"/>
-          <p:cNvSpPr/>
-          <p:nvPr/>
-        </p:nvSpPr>
-        <p:spPr>
-          <a:xfrm>
-            <a:off x="5803392" y="2569464"/>
+          <p:cNvPr id="21" name="Text 19"/>
+          <p:cNvSpPr/>
+          <p:nvPr/>
+        </p:nvSpPr>
+        <p:spPr>
+          <a:xfrm>
+            <a:off x="4370832" y="2569464"/>
             <a:ext cx="1828800" cy="201168"/>
           </a:xfrm>
           <a:prstGeom prst="rect">
@@ -31569,7 +31529,7 @@
                 <a:ea typeface="Calibri" pitchFamily="34" charset="-122"/>
                 <a:cs typeface="Calibri" pitchFamily="34" charset="-120"/>
               </a:rPr>
-              <a:t>happening now</a:t>
+              <a:t>without</a:t>
             </a:r>
             <a:endParaRPr lang="en-US" sz="850" dirty="0"/>
           </a:p>
@@ -31577,7 +31537,119 @@
       </p:sp>
       <p:sp>
         <p:nvSpPr>
-          <p:cNvPr id="23" name="Shape 21"/>
+          <p:cNvPr id="22" name="Shape 20"/>
+          <p:cNvSpPr/>
+          <p:nvPr/>
+        </p:nvSpPr>
+        <p:spPr>
+          <a:xfrm>
+            <a:off x="6519672" y="2258568"/>
+            <a:ext cx="1828800" cy="292608"/>
+          </a:xfrm>
+          <a:prstGeom prst="rect">
+            <a:avLst>
+              <a:gd name="adj" fmla="val 25000"/>
+            </a:avLst>
+          </a:prstGeom>
+          <a:solidFill>
+            <a:srgbClr val="FCE7F3"/>
+          </a:solidFill>
+          <a:ln w="19050">
+            <a:solidFill>
+              <a:srgbClr val="DB2777"/>
+            </a:solidFill>
+            <a:prstDash val="solid"/>
+          </a:ln>
+          <a:effectLst>
+            <a:outerShdw sx="100000" sy="100000" kx="0" ky="0" algn="bl" rotWithShape="0" blurRad="101600" dist="38100" dir="8100000">
+              <a:srgbClr val="000000">
+                <a:alpha val="12000"/>
+              </a:srgbClr>
+            </a:outerShdw>
+          </a:effectLst>
+        </p:spPr>
+      </p:sp>
+      <p:sp>
+        <p:nvSpPr>
+          <p:cNvPr id="23" name="Text 21"/>
+          <p:cNvSpPr/>
+          <p:nvPr/>
+        </p:nvSpPr>
+        <p:spPr>
+          <a:xfrm>
+            <a:off x="6519672" y="2258568"/>
+            <a:ext cx="1828800" cy="292608"/>
+          </a:xfrm>
+          <a:prstGeom prst="rect">
+            <a:avLst/>
+          </a:prstGeom>
+          <a:noFill/>
+          <a:ln/>
+        </p:spPr>
+        <p:txBody>
+          <a:bodyPr wrap="square" lIns="0" tIns="0" rIns="0" bIns="0" rtlCol="0" anchor="ctr"/>
+          <a:lstStyle/>
+          <a:p>
+            <a:pPr algn="ctr" indent="0" marL="0">
+              <a:buNone/>
+            </a:pPr>
+            <a:r>
+              <a:rPr lang="en-US" sz="1300" b="1" dirty="0">
+                <a:solidFill>
+                  <a:srgbClr val="9D174D"/>
+                </a:solidFill>
+                <a:latin typeface="Trebuchet MS" pitchFamily="34" charset="0"/>
+                <a:ea typeface="Trebuchet MS" pitchFamily="34" charset="-122"/>
+                <a:cs typeface="Trebuchet MS" pitchFamily="34" charset="-120"/>
+              </a:rPr>
+              <a:t>ness</a:t>
+            </a:r>
+            <a:endParaRPr lang="en-US" sz="1300" dirty="0"/>
+          </a:p>
+        </p:txBody>
+      </p:sp>
+      <p:sp>
+        <p:nvSpPr>
+          <p:cNvPr id="24" name="Text 22"/>
+          <p:cNvSpPr/>
+          <p:nvPr/>
+        </p:nvSpPr>
+        <p:spPr>
+          <a:xfrm>
+            <a:off x="6519672" y="2569464"/>
+            <a:ext cx="1828800" cy="201168"/>
+          </a:xfrm>
+          <a:prstGeom prst="rect">
+            <a:avLst/>
+          </a:prstGeom>
+          <a:noFill/>
+          <a:ln/>
+        </p:spPr>
+        <p:txBody>
+          <a:bodyPr wrap="square" lIns="0" tIns="0" rIns="0" bIns="0" rtlCol="0" anchor="t"/>
+          <a:lstStyle/>
+          <a:p>
+            <a:pPr algn="ctr" indent="0" marL="0">
+              <a:buNone/>
+            </a:pPr>
+            <a:r>
+              <a:rPr lang="en-US" sz="850" dirty="0">
+                <a:solidFill>
+                  <a:srgbClr val="475569"/>
+                </a:solidFill>
+                <a:latin typeface="Calibri" pitchFamily="34" charset="0"/>
+                <a:ea typeface="Calibri" pitchFamily="34" charset="-122"/>
+                <a:cs typeface="Calibri" pitchFamily="34" charset="-120"/>
+              </a:rPr>
+              <a:t>state or quality of</a:t>
+            </a:r>
+            <a:endParaRPr lang="en-US" sz="850" dirty="0"/>
+          </a:p>
+        </p:txBody>
+      </p:sp>
+      <p:sp>
+        <p:nvSpPr>
+          <p:cNvPr id="25" name="Shape 23"/>
           <p:cNvSpPr/>
           <p:nvPr/>
         </p:nvSpPr>
@@ -31604,7 +31676,7 @@
       </p:sp>
       <p:sp>
         <p:nvSpPr>
-          <p:cNvPr id="24" name="Text 22"/>
+          <p:cNvPr id="26" name="Text 24"/>
           <p:cNvSpPr/>
           <p:nvPr/>
         </p:nvSpPr>
@@ -31643,7 +31715,7 @@
       </p:sp>
       <p:sp>
         <p:nvSpPr>
-          <p:cNvPr id="25" name="Shape 23"/>
+          <p:cNvPr id="27" name="Shape 25"/>
           <p:cNvSpPr/>
           <p:nvPr/>
         </p:nvSpPr>
@@ -31670,13 +31742,13 @@
       </p:sp>
       <p:sp>
         <p:nvSpPr>
-          <p:cNvPr id="26" name="Shape 24"/>
-          <p:cNvSpPr/>
-          <p:nvPr/>
-        </p:nvSpPr>
-        <p:spPr>
-          <a:xfrm>
-            <a:off x="2999232" y="3364992"/>
+          <p:cNvPr id="28" name="Shape 26"/>
+          <p:cNvSpPr/>
+          <p:nvPr/>
+        </p:nvSpPr>
+        <p:spPr>
+          <a:xfrm>
+            <a:off x="2313432" y="3364992"/>
             <a:ext cx="1645920" cy="475488"/>
           </a:xfrm>
           <a:prstGeom prst="rect">
@@ -31697,13 +31769,13 @@
       </p:sp>
       <p:sp>
         <p:nvSpPr>
-          <p:cNvPr id="27" name="Text 25"/>
-          <p:cNvSpPr/>
-          <p:nvPr/>
-        </p:nvSpPr>
-        <p:spPr>
-          <a:xfrm>
-            <a:off x="2999232" y="3364992"/>
+          <p:cNvPr id="29" name="Text 27"/>
+          <p:cNvSpPr/>
+          <p:nvPr/>
+        </p:nvSpPr>
+        <p:spPr>
+          <a:xfrm>
+            <a:off x="2313432" y="3364992"/>
             <a:ext cx="1645920" cy="475488"/>
           </a:xfrm>
           <a:prstGeom prst="rect">
@@ -31728,7 +31800,7 @@
                 <a:ea typeface="Trebuchet MS" pitchFamily="34" charset="-122"/>
                 <a:cs typeface="Trebuchet MS" pitchFamily="34" charset="-120"/>
               </a:rPr>
-              <a:t>hop</a:t>
+              <a:t>hope</a:t>
             </a:r>
             <a:endParaRPr lang="en-US" sz="1400" dirty="0"/>
           </a:p>
@@ -31736,14 +31808,14 @@
       </p:sp>
       <p:sp>
         <p:nvSpPr>
-          <p:cNvPr id="28" name="Text 26"/>
-          <p:cNvSpPr/>
-          <p:nvPr/>
-        </p:nvSpPr>
-        <p:spPr>
-          <a:xfrm>
-            <a:off x="4645152" y="3364992"/>
-            <a:ext cx="1097280" cy="475488"/>
+          <p:cNvPr id="30" name="Text 28"/>
+          <p:cNvSpPr/>
+          <p:nvPr/>
+        </p:nvSpPr>
+        <p:spPr>
+          <a:xfrm>
+            <a:off x="3959352" y="3364992"/>
+            <a:ext cx="411480" cy="475488"/>
           </a:xfrm>
           <a:prstGeom prst="rect">
             <a:avLst/>
@@ -31775,13 +31847,13 @@
       </p:sp>
       <p:sp>
         <p:nvSpPr>
-          <p:cNvPr id="29" name="Shape 27"/>
-          <p:cNvSpPr/>
-          <p:nvPr/>
-        </p:nvSpPr>
-        <p:spPr>
-          <a:xfrm>
-            <a:off x="5742432" y="3364992"/>
+          <p:cNvPr id="31" name="Shape 29"/>
+          <p:cNvSpPr/>
+          <p:nvPr/>
+        </p:nvSpPr>
+        <p:spPr>
+          <a:xfrm>
+            <a:off x="4370832" y="3364992"/>
             <a:ext cx="1645920" cy="475488"/>
           </a:xfrm>
           <a:prstGeom prst="rect">
@@ -31802,13 +31874,13 @@
       </p:sp>
       <p:sp>
         <p:nvSpPr>
-          <p:cNvPr id="30" name="Text 28"/>
-          <p:cNvSpPr/>
-          <p:nvPr/>
-        </p:nvSpPr>
-        <p:spPr>
-          <a:xfrm>
-            <a:off x="5742432" y="3364992"/>
+          <p:cNvPr id="32" name="Text 30"/>
+          <p:cNvSpPr/>
+          <p:nvPr/>
+        </p:nvSpPr>
+        <p:spPr>
+          <a:xfrm>
+            <a:off x="4370832" y="3364992"/>
             <a:ext cx="1645920" cy="475488"/>
           </a:xfrm>
           <a:prstGeom prst="rect">
@@ -31833,7 +31905,7 @@
                 <a:ea typeface="Trebuchet MS" pitchFamily="34" charset="-122"/>
                 <a:cs typeface="Trebuchet MS" pitchFamily="34" charset="-120"/>
               </a:rPr>
-              <a:t>ing</a:t>
+              <a:t>less</a:t>
             </a:r>
             <a:endParaRPr lang="en-US" sz="1400" dirty="0"/>
           </a:p>
@@ -31841,7 +31913,112 @@
       </p:sp>
       <p:sp>
         <p:nvSpPr>
-          <p:cNvPr id="31" name="Shape 29"/>
+          <p:cNvPr id="33" name="Text 31"/>
+          <p:cNvSpPr/>
+          <p:nvPr/>
+        </p:nvSpPr>
+        <p:spPr>
+          <a:xfrm>
+            <a:off x="6016752" y="3364992"/>
+            <a:ext cx="411480" cy="475488"/>
+          </a:xfrm>
+          <a:prstGeom prst="rect">
+            <a:avLst/>
+          </a:prstGeom>
+          <a:noFill/>
+          <a:ln/>
+        </p:spPr>
+        <p:txBody>
+          <a:bodyPr wrap="square" lIns="0" tIns="0" rIns="0" bIns="0" rtlCol="0" anchor="ctr"/>
+          <a:lstStyle/>
+          <a:p>
+            <a:pPr algn="ctr" indent="0" marL="0">
+              <a:buNone/>
+            </a:pPr>
+            <a:r>
+              <a:rPr lang="en-US" sz="1600" b="1" dirty="0">
+                <a:solidFill>
+                  <a:srgbClr val="0D9488"/>
+                </a:solidFill>
+                <a:latin typeface="Trebuchet MS" pitchFamily="34" charset="0"/>
+                <a:ea typeface="Trebuchet MS" pitchFamily="34" charset="-122"/>
+                <a:cs typeface="Trebuchet MS" pitchFamily="34" charset="-120"/>
+              </a:rPr>
+              <a:t>·</a:t>
+            </a:r>
+            <a:endParaRPr lang="en-US" sz="1600" dirty="0"/>
+          </a:p>
+        </p:txBody>
+      </p:sp>
+      <p:sp>
+        <p:nvSpPr>
+          <p:cNvPr id="34" name="Shape 32"/>
+          <p:cNvSpPr/>
+          <p:nvPr/>
+        </p:nvSpPr>
+        <p:spPr>
+          <a:xfrm>
+            <a:off x="6428232" y="3364992"/>
+            <a:ext cx="1645920" cy="475488"/>
+          </a:xfrm>
+          <a:prstGeom prst="rect">
+            <a:avLst>
+              <a:gd name="adj" fmla="val 9615"/>
+            </a:avLst>
+          </a:prstGeom>
+          <a:solidFill>
+            <a:srgbClr val="FFFFFF"/>
+          </a:solidFill>
+          <a:ln w="12700">
+            <a:solidFill>
+              <a:srgbClr val="0D9488"/>
+            </a:solidFill>
+            <a:prstDash val="solid"/>
+          </a:ln>
+        </p:spPr>
+      </p:sp>
+      <p:sp>
+        <p:nvSpPr>
+          <p:cNvPr id="35" name="Text 33"/>
+          <p:cNvSpPr/>
+          <p:nvPr/>
+        </p:nvSpPr>
+        <p:spPr>
+          <a:xfrm>
+            <a:off x="6428232" y="3364992"/>
+            <a:ext cx="1645920" cy="475488"/>
+          </a:xfrm>
+          <a:prstGeom prst="rect">
+            <a:avLst/>
+          </a:prstGeom>
+          <a:noFill/>
+          <a:ln/>
+        </p:spPr>
+        <p:txBody>
+          <a:bodyPr wrap="square" lIns="0" tIns="0" rIns="0" bIns="0" rtlCol="0" anchor="ctr"/>
+          <a:lstStyle/>
+          <a:p>
+            <a:pPr algn="ctr" indent="0" marL="0">
+              <a:buNone/>
+            </a:pPr>
+            <a:r>
+              <a:rPr lang="en-US" sz="1400" b="1" dirty="0">
+                <a:solidFill>
+                  <a:srgbClr val="0D9488"/>
+                </a:solidFill>
+                <a:latin typeface="Trebuchet MS" pitchFamily="34" charset="0"/>
+                <a:ea typeface="Trebuchet MS" pitchFamily="34" charset="-122"/>
+                <a:cs typeface="Trebuchet MS" pitchFamily="34" charset="-120"/>
+              </a:rPr>
+              <a:t>ness</a:t>
+            </a:r>
+            <a:endParaRPr lang="en-US" sz="1400" dirty="0"/>
+          </a:p>
+        </p:txBody>
+      </p:sp>
+      <p:sp>
+        <p:nvSpPr>
+          <p:cNvPr id="36" name="Shape 34"/>
           <p:cNvSpPr/>
           <p:nvPr/>
         </p:nvSpPr>
@@ -31868,7 +32045,7 @@
       </p:sp>
       <p:sp>
         <p:nvSpPr>
-          <p:cNvPr id="32" name="Text 30"/>
+          <p:cNvPr id="37" name="Text 35"/>
           <p:cNvSpPr/>
           <p:nvPr/>
         </p:nvSpPr>
@@ -31907,7 +32084,7 @@
       </p:sp>
       <p:sp>
         <p:nvSpPr>
-          <p:cNvPr id="33" name="Shape 31"/>
+          <p:cNvPr id="38" name="Shape 36"/>
           <p:cNvSpPr/>
           <p:nvPr/>
         </p:nvSpPr>
@@ -31934,14 +32111,14 @@
       </p:sp>
       <p:sp>
         <p:nvSpPr>
-          <p:cNvPr id="34" name="Shape 32"/>
-          <p:cNvSpPr/>
-          <p:nvPr/>
-        </p:nvSpPr>
-        <p:spPr>
-          <a:xfrm>
-            <a:off x="2427732" y="4169664"/>
-            <a:ext cx="685800" cy="475488"/>
+          <p:cNvPr id="39" name="Shape 37"/>
+          <p:cNvSpPr/>
+          <p:nvPr/>
+        </p:nvSpPr>
+        <p:spPr>
+          <a:xfrm>
+            <a:off x="1951828" y="4169664"/>
+            <a:ext cx="603504" cy="475488"/>
           </a:xfrm>
           <a:prstGeom prst="rect">
             <a:avLst>
@@ -31961,14 +32138,14 @@
       </p:sp>
       <p:sp>
         <p:nvSpPr>
-          <p:cNvPr id="35" name="Text 33"/>
-          <p:cNvSpPr/>
-          <p:nvPr/>
-        </p:nvSpPr>
-        <p:spPr>
-          <a:xfrm>
-            <a:off x="2427732" y="4169664"/>
-            <a:ext cx="685800" cy="475488"/>
+          <p:cNvPr id="40" name="Text 38"/>
+          <p:cNvSpPr/>
+          <p:nvPr/>
+        </p:nvSpPr>
+        <p:spPr>
+          <a:xfrm>
+            <a:off x="1951828" y="4169664"/>
+            <a:ext cx="603504" cy="475488"/>
           </a:xfrm>
           <a:prstGeom prst="rect">
             <a:avLst/>
@@ -32000,14 +32177,14 @@
       </p:sp>
       <p:sp>
         <p:nvSpPr>
-          <p:cNvPr id="36" name="Shape 34"/>
-          <p:cNvSpPr/>
-          <p:nvPr/>
-        </p:nvSpPr>
-        <p:spPr>
-          <a:xfrm>
-            <a:off x="3639312" y="4169664"/>
-            <a:ext cx="685800" cy="475488"/>
+          <p:cNvPr id="41" name="Shape 39"/>
+          <p:cNvSpPr/>
+          <p:nvPr/>
+        </p:nvSpPr>
+        <p:spPr>
+          <a:xfrm>
+            <a:off x="2605209" y="4169664"/>
+            <a:ext cx="603504" cy="475488"/>
           </a:xfrm>
           <a:prstGeom prst="rect">
             <a:avLst>
@@ -32027,14 +32204,14 @@
       </p:sp>
       <p:sp>
         <p:nvSpPr>
-          <p:cNvPr id="37" name="Text 35"/>
-          <p:cNvSpPr/>
-          <p:nvPr/>
-        </p:nvSpPr>
-        <p:spPr>
-          <a:xfrm>
-            <a:off x="3639312" y="4169664"/>
-            <a:ext cx="685800" cy="475488"/>
+          <p:cNvPr id="42" name="Text 40"/>
+          <p:cNvSpPr/>
+          <p:nvPr/>
+        </p:nvSpPr>
+        <p:spPr>
+          <a:xfrm>
+            <a:off x="2605209" y="4169664"/>
+            <a:ext cx="603504" cy="475488"/>
           </a:xfrm>
           <a:prstGeom prst="rect">
             <a:avLst/>
@@ -32066,14 +32243,14 @@
       </p:sp>
       <p:sp>
         <p:nvSpPr>
-          <p:cNvPr id="38" name="Shape 36"/>
-          <p:cNvSpPr/>
-          <p:nvPr/>
-        </p:nvSpPr>
-        <p:spPr>
-          <a:xfrm>
-            <a:off x="4850892" y="4169664"/>
-            <a:ext cx="685800" cy="475488"/>
+          <p:cNvPr id="43" name="Shape 41"/>
+          <p:cNvSpPr/>
+          <p:nvPr/>
+        </p:nvSpPr>
+        <p:spPr>
+          <a:xfrm>
+            <a:off x="3258589" y="4169664"/>
+            <a:ext cx="603504" cy="475488"/>
           </a:xfrm>
           <a:prstGeom prst="rect">
             <a:avLst>
@@ -32093,14 +32270,14 @@
       </p:sp>
       <p:sp>
         <p:nvSpPr>
-          <p:cNvPr id="39" name="Text 37"/>
-          <p:cNvSpPr/>
-          <p:nvPr/>
-        </p:nvSpPr>
-        <p:spPr>
-          <a:xfrm>
-            <a:off x="4850892" y="4169664"/>
-            <a:ext cx="685800" cy="475488"/>
+          <p:cNvPr id="44" name="Text 42"/>
+          <p:cNvSpPr/>
+          <p:nvPr/>
+        </p:nvSpPr>
+        <p:spPr>
+          <a:xfrm>
+            <a:off x="3258589" y="4169664"/>
+            <a:ext cx="603504" cy="475488"/>
           </a:xfrm>
           <a:prstGeom prst="rect">
             <a:avLst/>
@@ -32132,14 +32309,14 @@
       </p:sp>
       <p:sp>
         <p:nvSpPr>
-          <p:cNvPr id="40" name="Shape 38"/>
-          <p:cNvSpPr/>
-          <p:nvPr/>
-        </p:nvSpPr>
-        <p:spPr>
-          <a:xfrm>
-            <a:off x="6062472" y="4169664"/>
-            <a:ext cx="685800" cy="475488"/>
+          <p:cNvPr id="45" name="Shape 43"/>
+          <p:cNvSpPr/>
+          <p:nvPr/>
+        </p:nvSpPr>
+        <p:spPr>
+          <a:xfrm>
+            <a:off x="3911969" y="4169664"/>
+            <a:ext cx="603504" cy="475488"/>
           </a:xfrm>
           <a:prstGeom prst="rect">
             <a:avLst>
@@ -32159,14 +32336,14 @@
       </p:sp>
       <p:sp>
         <p:nvSpPr>
-          <p:cNvPr id="41" name="Text 39"/>
-          <p:cNvSpPr/>
-          <p:nvPr/>
-        </p:nvSpPr>
-        <p:spPr>
-          <a:xfrm>
-            <a:off x="6062472" y="4169664"/>
-            <a:ext cx="685800" cy="475488"/>
+          <p:cNvPr id="46" name="Text 44"/>
+          <p:cNvSpPr/>
+          <p:nvPr/>
+        </p:nvSpPr>
+        <p:spPr>
+          <a:xfrm>
+            <a:off x="3911969" y="4169664"/>
+            <a:ext cx="603504" cy="475488"/>
           </a:xfrm>
           <a:prstGeom prst="rect">
             <a:avLst/>
@@ -32190,7 +32367,7 @@
                 <a:ea typeface="Trebuchet MS" pitchFamily="34" charset="-122"/>
                 <a:cs typeface="Trebuchet MS" pitchFamily="34" charset="-120"/>
               </a:rPr>
-              <a:t>i</a:t>
+              <a:t>e</a:t>
             </a:r>
             <a:endParaRPr lang="en-US" sz="900" dirty="0"/>
           </a:p>
@@ -32198,14 +32375,14 @@
       </p:sp>
       <p:sp>
         <p:nvSpPr>
-          <p:cNvPr id="42" name="Shape 40"/>
-          <p:cNvSpPr/>
-          <p:nvPr/>
-        </p:nvSpPr>
-        <p:spPr>
-          <a:xfrm>
-            <a:off x="7274052" y="4169664"/>
-            <a:ext cx="685800" cy="475488"/>
+          <p:cNvPr id="47" name="Shape 45"/>
+          <p:cNvSpPr/>
+          <p:nvPr/>
+        </p:nvSpPr>
+        <p:spPr>
+          <a:xfrm>
+            <a:off x="4565350" y="4169664"/>
+            <a:ext cx="603504" cy="475488"/>
           </a:xfrm>
           <a:prstGeom prst="rect">
             <a:avLst>
@@ -32225,14 +32402,14 @@
       </p:sp>
       <p:sp>
         <p:nvSpPr>
-          <p:cNvPr id="43" name="Text 41"/>
-          <p:cNvSpPr/>
-          <p:nvPr/>
-        </p:nvSpPr>
-        <p:spPr>
-          <a:xfrm>
-            <a:off x="7274052" y="4169664"/>
-            <a:ext cx="685800" cy="475488"/>
+          <p:cNvPr id="48" name="Text 46"/>
+          <p:cNvSpPr/>
+          <p:nvPr/>
+        </p:nvSpPr>
+        <p:spPr>
+          <a:xfrm>
+            <a:off x="4565350" y="4169664"/>
+            <a:ext cx="603504" cy="475488"/>
           </a:xfrm>
           <a:prstGeom prst="rect">
             <a:avLst/>
@@ -32256,7 +32433,337 @@
                 <a:ea typeface="Trebuchet MS" pitchFamily="34" charset="-122"/>
                 <a:cs typeface="Trebuchet MS" pitchFamily="34" charset="-120"/>
               </a:rPr>
-              <a:t>ng</a:t>
+              <a:t>l</a:t>
+            </a:r>
+            <a:endParaRPr lang="en-US" sz="900" dirty="0"/>
+          </a:p>
+        </p:txBody>
+      </p:sp>
+      <p:sp>
+        <p:nvSpPr>
+          <p:cNvPr id="49" name="Shape 47"/>
+          <p:cNvSpPr/>
+          <p:nvPr/>
+        </p:nvSpPr>
+        <p:spPr>
+          <a:xfrm>
+            <a:off x="5218730" y="4169664"/>
+            <a:ext cx="603504" cy="475488"/>
+          </a:xfrm>
+          <a:prstGeom prst="rect">
+            <a:avLst>
+              <a:gd name="adj" fmla="val 7692"/>
+            </a:avLst>
+          </a:prstGeom>
+          <a:solidFill>
+            <a:srgbClr val="FFFFFF"/>
+          </a:solidFill>
+          <a:ln w="12700">
+            <a:solidFill>
+              <a:srgbClr val="DB2777"/>
+            </a:solidFill>
+            <a:prstDash val="solid"/>
+          </a:ln>
+        </p:spPr>
+      </p:sp>
+      <p:sp>
+        <p:nvSpPr>
+          <p:cNvPr id="50" name="Text 48"/>
+          <p:cNvSpPr/>
+          <p:nvPr/>
+        </p:nvSpPr>
+        <p:spPr>
+          <a:xfrm>
+            <a:off x="5218730" y="4169664"/>
+            <a:ext cx="603504" cy="475488"/>
+          </a:xfrm>
+          <a:prstGeom prst="rect">
+            <a:avLst/>
+          </a:prstGeom>
+          <a:noFill/>
+          <a:ln/>
+        </p:spPr>
+        <p:txBody>
+          <a:bodyPr wrap="square" lIns="0" tIns="0" rIns="0" bIns="0" rtlCol="0" anchor="ctr"/>
+          <a:lstStyle/>
+          <a:p>
+            <a:pPr algn="ctr" indent="0" marL="0">
+              <a:buNone/>
+            </a:pPr>
+            <a:r>
+              <a:rPr lang="en-US" sz="900" b="1" dirty="0">
+                <a:solidFill>
+                  <a:srgbClr val="9D174D"/>
+                </a:solidFill>
+                <a:latin typeface="Trebuchet MS" pitchFamily="34" charset="0"/>
+                <a:ea typeface="Trebuchet MS" pitchFamily="34" charset="-122"/>
+                <a:cs typeface="Trebuchet MS" pitchFamily="34" charset="-120"/>
+              </a:rPr>
+              <a:t>e</a:t>
+            </a:r>
+            <a:endParaRPr lang="en-US" sz="900" dirty="0"/>
+          </a:p>
+        </p:txBody>
+      </p:sp>
+      <p:sp>
+        <p:nvSpPr>
+          <p:cNvPr id="51" name="Shape 49"/>
+          <p:cNvSpPr/>
+          <p:nvPr/>
+        </p:nvSpPr>
+        <p:spPr>
+          <a:xfrm>
+            <a:off x="5872111" y="4169664"/>
+            <a:ext cx="603504" cy="475488"/>
+          </a:xfrm>
+          <a:prstGeom prst="rect">
+            <a:avLst>
+              <a:gd name="adj" fmla="val 7692"/>
+            </a:avLst>
+          </a:prstGeom>
+          <a:solidFill>
+            <a:srgbClr val="FFFFFF"/>
+          </a:solidFill>
+          <a:ln w="12700">
+            <a:solidFill>
+              <a:srgbClr val="DB2777"/>
+            </a:solidFill>
+            <a:prstDash val="solid"/>
+          </a:ln>
+        </p:spPr>
+      </p:sp>
+      <p:sp>
+        <p:nvSpPr>
+          <p:cNvPr id="52" name="Text 50"/>
+          <p:cNvSpPr/>
+          <p:nvPr/>
+        </p:nvSpPr>
+        <p:spPr>
+          <a:xfrm>
+            <a:off x="5872111" y="4169664"/>
+            <a:ext cx="603504" cy="475488"/>
+          </a:xfrm>
+          <a:prstGeom prst="rect">
+            <a:avLst/>
+          </a:prstGeom>
+          <a:noFill/>
+          <a:ln/>
+        </p:spPr>
+        <p:txBody>
+          <a:bodyPr wrap="square" lIns="0" tIns="0" rIns="0" bIns="0" rtlCol="0" anchor="ctr"/>
+          <a:lstStyle/>
+          <a:p>
+            <a:pPr algn="ctr" indent="0" marL="0">
+              <a:buNone/>
+            </a:pPr>
+            <a:r>
+              <a:rPr lang="en-US" sz="900" b="1" dirty="0">
+                <a:solidFill>
+                  <a:srgbClr val="9D174D"/>
+                </a:solidFill>
+                <a:latin typeface="Trebuchet MS" pitchFamily="34" charset="0"/>
+                <a:ea typeface="Trebuchet MS" pitchFamily="34" charset="-122"/>
+                <a:cs typeface="Trebuchet MS" pitchFamily="34" charset="-120"/>
+              </a:rPr>
+              <a:t>ss</a:t>
+            </a:r>
+            <a:endParaRPr lang="en-US" sz="900" dirty="0"/>
+          </a:p>
+        </p:txBody>
+      </p:sp>
+      <p:sp>
+        <p:nvSpPr>
+          <p:cNvPr id="53" name="Shape 51"/>
+          <p:cNvSpPr/>
+          <p:nvPr/>
+        </p:nvSpPr>
+        <p:spPr>
+          <a:xfrm>
+            <a:off x="6525491" y="4169664"/>
+            <a:ext cx="603504" cy="475488"/>
+          </a:xfrm>
+          <a:prstGeom prst="rect">
+            <a:avLst>
+              <a:gd name="adj" fmla="val 7692"/>
+            </a:avLst>
+          </a:prstGeom>
+          <a:solidFill>
+            <a:srgbClr val="FFFFFF"/>
+          </a:solidFill>
+          <a:ln w="12700">
+            <a:solidFill>
+              <a:srgbClr val="DB2777"/>
+            </a:solidFill>
+            <a:prstDash val="solid"/>
+          </a:ln>
+        </p:spPr>
+      </p:sp>
+      <p:sp>
+        <p:nvSpPr>
+          <p:cNvPr id="54" name="Text 52"/>
+          <p:cNvSpPr/>
+          <p:nvPr/>
+        </p:nvSpPr>
+        <p:spPr>
+          <a:xfrm>
+            <a:off x="6525491" y="4169664"/>
+            <a:ext cx="603504" cy="475488"/>
+          </a:xfrm>
+          <a:prstGeom prst="rect">
+            <a:avLst/>
+          </a:prstGeom>
+          <a:noFill/>
+          <a:ln/>
+        </p:spPr>
+        <p:txBody>
+          <a:bodyPr wrap="square" lIns="0" tIns="0" rIns="0" bIns="0" rtlCol="0" anchor="ctr"/>
+          <a:lstStyle/>
+          <a:p>
+            <a:pPr algn="ctr" indent="0" marL="0">
+              <a:buNone/>
+            </a:pPr>
+            <a:r>
+              <a:rPr lang="en-US" sz="900" b="1" dirty="0">
+                <a:solidFill>
+                  <a:srgbClr val="9D174D"/>
+                </a:solidFill>
+                <a:latin typeface="Trebuchet MS" pitchFamily="34" charset="0"/>
+                <a:ea typeface="Trebuchet MS" pitchFamily="34" charset="-122"/>
+                <a:cs typeface="Trebuchet MS" pitchFamily="34" charset="-120"/>
+              </a:rPr>
+              <a:t>n</a:t>
+            </a:r>
+            <a:endParaRPr lang="en-US" sz="900" dirty="0"/>
+          </a:p>
+        </p:txBody>
+      </p:sp>
+      <p:sp>
+        <p:nvSpPr>
+          <p:cNvPr id="55" name="Shape 53"/>
+          <p:cNvSpPr/>
+          <p:nvPr/>
+        </p:nvSpPr>
+        <p:spPr>
+          <a:xfrm>
+            <a:off x="7178871" y="4169664"/>
+            <a:ext cx="603504" cy="475488"/>
+          </a:xfrm>
+          <a:prstGeom prst="rect">
+            <a:avLst>
+              <a:gd name="adj" fmla="val 7692"/>
+            </a:avLst>
+          </a:prstGeom>
+          <a:solidFill>
+            <a:srgbClr val="FFFFFF"/>
+          </a:solidFill>
+          <a:ln w="12700">
+            <a:solidFill>
+              <a:srgbClr val="DB2777"/>
+            </a:solidFill>
+            <a:prstDash val="solid"/>
+          </a:ln>
+        </p:spPr>
+      </p:sp>
+      <p:sp>
+        <p:nvSpPr>
+          <p:cNvPr id="56" name="Text 54"/>
+          <p:cNvSpPr/>
+          <p:nvPr/>
+        </p:nvSpPr>
+        <p:spPr>
+          <a:xfrm>
+            <a:off x="7178871" y="4169664"/>
+            <a:ext cx="603504" cy="475488"/>
+          </a:xfrm>
+          <a:prstGeom prst="rect">
+            <a:avLst/>
+          </a:prstGeom>
+          <a:noFill/>
+          <a:ln/>
+        </p:spPr>
+        <p:txBody>
+          <a:bodyPr wrap="square" lIns="0" tIns="0" rIns="0" bIns="0" rtlCol="0" anchor="ctr"/>
+          <a:lstStyle/>
+          <a:p>
+            <a:pPr algn="ctr" indent="0" marL="0">
+              <a:buNone/>
+            </a:pPr>
+            <a:r>
+              <a:rPr lang="en-US" sz="900" b="1" dirty="0">
+                <a:solidFill>
+                  <a:srgbClr val="9D174D"/>
+                </a:solidFill>
+                <a:latin typeface="Trebuchet MS" pitchFamily="34" charset="0"/>
+                <a:ea typeface="Trebuchet MS" pitchFamily="34" charset="-122"/>
+                <a:cs typeface="Trebuchet MS" pitchFamily="34" charset="-120"/>
+              </a:rPr>
+              <a:t>e</a:t>
+            </a:r>
+            <a:endParaRPr lang="en-US" sz="900" dirty="0"/>
+          </a:p>
+        </p:txBody>
+      </p:sp>
+      <p:sp>
+        <p:nvSpPr>
+          <p:cNvPr id="57" name="Shape 55"/>
+          <p:cNvSpPr/>
+          <p:nvPr/>
+        </p:nvSpPr>
+        <p:spPr>
+          <a:xfrm>
+            <a:off x="7832252" y="4169664"/>
+            <a:ext cx="603504" cy="475488"/>
+          </a:xfrm>
+          <a:prstGeom prst="rect">
+            <a:avLst>
+              <a:gd name="adj" fmla="val 7692"/>
+            </a:avLst>
+          </a:prstGeom>
+          <a:solidFill>
+            <a:srgbClr val="FFFFFF"/>
+          </a:solidFill>
+          <a:ln w="12700">
+            <a:solidFill>
+              <a:srgbClr val="DB2777"/>
+            </a:solidFill>
+            <a:prstDash val="solid"/>
+          </a:ln>
+        </p:spPr>
+      </p:sp>
+      <p:sp>
+        <p:nvSpPr>
+          <p:cNvPr id="58" name="Text 56"/>
+          <p:cNvSpPr/>
+          <p:nvPr/>
+        </p:nvSpPr>
+        <p:spPr>
+          <a:xfrm>
+            <a:off x="7832252" y="4169664"/>
+            <a:ext cx="603504" cy="475488"/>
+          </a:xfrm>
+          <a:prstGeom prst="rect">
+            <a:avLst/>
+          </a:prstGeom>
+          <a:noFill/>
+          <a:ln/>
+        </p:spPr>
+        <p:txBody>
+          <a:bodyPr wrap="square" lIns="0" tIns="0" rIns="0" bIns="0" rtlCol="0" anchor="ctr"/>
+          <a:lstStyle/>
+          <a:p>
+            <a:pPr algn="ctr" indent="0" marL="0">
+              <a:buNone/>
+            </a:pPr>
+            <a:r>
+              <a:rPr lang="en-US" sz="900" b="1" dirty="0">
+                <a:solidFill>
+                  <a:srgbClr val="9D174D"/>
+                </a:solidFill>
+                <a:latin typeface="Trebuchet MS" pitchFamily="34" charset="0"/>
+                <a:ea typeface="Trebuchet MS" pitchFamily="34" charset="-122"/>
+                <a:cs typeface="Trebuchet MS" pitchFamily="34" charset="-120"/>
+              </a:rPr>
+              <a:t>ss</a:t>
             </a:r>
             <a:endParaRPr lang="en-US" sz="900" dirty="0"/>
           </a:p>
@@ -36513,7 +37020,7 @@
                 <a:ea typeface="Calibri" pitchFamily="34" charset="-122"/>
                 <a:cs typeface="Calibri" pitchFamily="34" charset="-120"/>
               </a:rPr>
-              <a:t>1.  The word 'hopeful' contains the root 'hope' plus the suffix '-ful'.</a:t>
+              <a:t>1.  The word 'hopefully' contains both a root and two suffixes.</a:t>
             </a:r>
             <a:endParaRPr lang="en-US" sz="1300" dirty="0"/>
           </a:p>
@@ -36652,7 +37159,7 @@
                 <a:ea typeface="Calibri" pitchFamily="34" charset="-122"/>
                 <a:cs typeface="Calibri" pitchFamily="34" charset="-120"/>
               </a:rPr>
-              <a:t>2.  The word 'hopeless' means the same thing as 'hopeful'.</a:t>
+              <a:t>2.  The root 'hope' comes from the ancient Greek word for light.</a:t>
             </a:r>
             <a:endParaRPr lang="en-US" sz="1300" dirty="0"/>
           </a:p>
@@ -36791,7 +37298,7 @@
                 <a:ea typeface="Calibri" pitchFamily="34" charset="-122"/>
                 <a:cs typeface="Calibri" pitchFamily="34" charset="-120"/>
               </a:rPr>
-              <a:t>3.  Adding '-less' to 'hope' makes a word that means without hope.</a:t>
+              <a:t>3.  The suffix '-less' means full of something.</a:t>
             </a:r>
             <a:endParaRPr lang="en-US" sz="1300" dirty="0"/>
           </a:p>
@@ -36814,11 +37321,11 @@
             </a:avLst>
           </a:prstGeom>
           <a:solidFill>
-            <a:srgbClr val="DCFCE7"/>
-          </a:solidFill>
-          <a:ln w="12700">
-            <a:solidFill>
-              <a:srgbClr val="16A34A"/>
+            <a:srgbClr val="FEE2E2"/>
+          </a:solidFill>
+          <a:ln w="12700">
+            <a:solidFill>
+              <a:srgbClr val="DC2626"/>
             </a:solidFill>
             <a:prstDash val="solid"/>
           </a:ln>
@@ -36851,13 +37358,13 @@
             <a:r>
               <a:rPr lang="en-US" sz="1100" b="1" dirty="0">
                 <a:solidFill>
-                  <a:srgbClr val="16A34A"/>
+                  <a:srgbClr val="DC2626"/>
                 </a:solidFill>
                 <a:latin typeface="Trebuchet MS" pitchFamily="34" charset="0"/>
                 <a:ea typeface="Trebuchet MS" pitchFamily="34" charset="-122"/>
                 <a:cs typeface="Trebuchet MS" pitchFamily="34" charset="-120"/>
               </a:rPr>
-              <a:t>TRUE</a:t>
+              <a:t>FALSE</a:t>
             </a:r>
             <a:endParaRPr lang="en-US" sz="1100" dirty="0"/>
           </a:p>
@@ -36930,7 +37437,7 @@
                 <a:ea typeface="Calibri" pitchFamily="34" charset="-122"/>
                 <a:cs typeface="Calibri" pitchFamily="34" charset="-120"/>
               </a:rPr>
-              <a:t>4.  The root 'hope' means to wish for something good.</a:t>
+              <a:t>4.  'Hopeless' means there is no hope at all.</a:t>
             </a:r>
             <a:endParaRPr lang="en-US" sz="1300" dirty="0"/>
           </a:p>
@@ -37069,7 +37576,7 @@
                 <a:ea typeface="Calibri" pitchFamily="34" charset="-122"/>
                 <a:cs typeface="Calibri" pitchFamily="34" charset="-120"/>
               </a:rPr>
-              <a:t>5.  The prefix 'un-' in 'unhoped' means 'again'.</a:t>
+              <a:t>5.  The word 'hopeful' contains the root 'hope'.</a:t>
             </a:r>
             <a:endParaRPr lang="en-US" sz="1300" dirty="0"/>
           </a:p>
@@ -37092,11 +37599,11 @@
             </a:avLst>
           </a:prstGeom>
           <a:solidFill>
-            <a:srgbClr val="FEE2E2"/>
-          </a:solidFill>
-          <a:ln w="12700">
-            <a:solidFill>
-              <a:srgbClr val="DC2626"/>
+            <a:srgbClr val="DCFCE7"/>
+          </a:solidFill>
+          <a:ln w="12700">
+            <a:solidFill>
+              <a:srgbClr val="16A34A"/>
             </a:solidFill>
             <a:prstDash val="solid"/>
           </a:ln>
@@ -37129,13 +37636,13 @@
             <a:r>
               <a:rPr lang="en-US" sz="1100" b="1" dirty="0">
                 <a:solidFill>
-                  <a:srgbClr val="DC2626"/>
+                  <a:srgbClr val="16A34A"/>
                 </a:solidFill>
                 <a:latin typeface="Trebuchet MS" pitchFamily="34" charset="0"/>
                 <a:ea typeface="Trebuchet MS" pitchFamily="34" charset="-122"/>
                 <a:cs typeface="Trebuchet MS" pitchFamily="34" charset="-120"/>
               </a:rPr>
-              <a:t>FALSE</a:t>
+              <a:t>TRUE</a:t>
             </a:r>
             <a:endParaRPr lang="en-US" sz="1100" dirty="0"/>
           </a:p>
@@ -37603,7 +38110,7 @@
                 <a:ea typeface="Calibri" pitchFamily="34" charset="-122"/>
                 <a:cs typeface="Calibri" pitchFamily="34" charset="-120"/>
               </a:rPr>
-              <a:t>Origin: Old English: hopa</a:t>
+              <a:t>Origin: Latin: sperare</a:t>
             </a:r>
             <a:endParaRPr lang="en-US" sz="1100" dirty="0"/>
           </a:p>
@@ -40348,7 +40855,7 @@
                 <a:ea typeface="Calibri" pitchFamily="34" charset="-122"/>
                 <a:cs typeface="Calibri" pitchFamily="34" charset="-120"/>
               </a:rPr>
-              <a:t>Not hoped for; unexpected and surprising.</a:t>
+              <a:t>Something that was not expected or wished for.</a:t>
             </a:r>
             <a:endParaRPr lang="en-US" sz="1200" dirty="0"/>
           </a:p>
@@ -40487,7 +40994,7 @@
                 <a:ea typeface="Calibri" pitchFamily="34" charset="-122"/>
                 <a:cs typeface="Calibri" pitchFamily="34" charset="-120"/>
               </a:rPr>
-              <a:t>In a hopeful way; used when you wish something will happen.</a:t>
+              <a:t>In a way that shows you want something good to happen.</a:t>
             </a:r>
             <a:endParaRPr lang="en-US" sz="1200" dirty="0"/>
           </a:p>
@@ -40765,7 +41272,7 @@
                 <a:ea typeface="Calibri" pitchFamily="34" charset="-122"/>
                 <a:cs typeface="Calibri" pitchFamily="34" charset="-120"/>
               </a:rPr>
-              <a:t>In a way that shows there is no hope at all.</a:t>
+              <a:t>In a way that shows there is no chance of things getting better.</a:t>
             </a:r>
             <a:endParaRPr lang="en-US" sz="1200" dirty="0"/>
           </a:p>
@@ -41043,7 +41550,7 @@
                 <a:ea typeface="Calibri" pitchFamily="34" charset="-122"/>
                 <a:cs typeface="Calibri" pitchFamily="34" charset="-120"/>
               </a:rPr>
-              <a:t>Wished for something good to happen in the past.</a:t>
+              <a:t>Wished that something good would happen in the past.</a:t>
             </a:r>
             <a:endParaRPr lang="en-US" sz="1200" dirty="0"/>
           </a:p>
@@ -41182,7 +41689,7 @@
                 <a:ea typeface="Calibri" pitchFamily="34" charset="-122"/>
                 <a:cs typeface="Calibri" pitchFamily="34" charset="-120"/>
               </a:rPr>
-              <a:t>Feeling like nothing good will happen; without hope.</a:t>
+              <a:t>Having no chance of success or improvement.</a:t>
             </a:r>
             <a:endParaRPr lang="en-US" sz="1200" dirty="0"/>
           </a:p>
@@ -41677,7 +42184,7 @@
                 <a:ea typeface="Calibri" pitchFamily="34" charset="-122"/>
                 <a:cs typeface="Calibri" pitchFamily="34" charset="-120"/>
               </a:rPr>
-              <a:t>She was hopeful that the rain would stop before the school sports carnival.</a:t>
+              <a:t>The hopeful students waited nervously to hear who had won the science competition.</a:t>
             </a:r>
             <a:endParaRPr lang="en-US" sz="1500" dirty="0"/>
           </a:p>
@@ -41841,7 +42348,7 @@
                 <a:ea typeface="Calibri" pitchFamily="34" charset="-122"/>
                 <a:cs typeface="Calibri" pitchFamily="34" charset="-120"/>
               </a:rPr>
-              <a:t>The lost puppy looked so hopeless sitting alone in the cold.</a:t>
+              <a:t>After weeks of rain, the farmers were hoping that the sunny weather would last.</a:t>
             </a:r>
             <a:endParaRPr lang="en-US" sz="1500" dirty="0"/>
           </a:p>
@@ -42005,7 +42512,7 @@
                 <a:ea typeface="Calibri" pitchFamily="34" charset="-122"/>
                 <a:cs typeface="Calibri" pitchFamily="34" charset="-120"/>
               </a:rPr>
-              <a:t>He hoped his best friend would come to his birthday party.</a:t>
+              <a:t>The coach gave a hopeless sigh when the team missed another goal in the final minutes.</a:t>
             </a:r>
             <a:endParaRPr lang="en-US" sz="1500" dirty="0"/>
           </a:p>

--- a/output/wordlabs-hope-3day.pptx
+++ b/output/wordlabs-hope-3day.pptx
@@ -22614,7 +22614,7 @@
                 <a:ea typeface="Trebuchet MS" pitchFamily="34" charset="-122"/>
                 <a:cs typeface="Trebuchet MS" pitchFamily="34" charset="-120"/>
               </a:rPr>
-              <a:t>ee</a:t>
+              <a:t>y</a:t>
             </a:r>
             <a:endParaRPr lang="en-US" sz="900" dirty="0"/>
           </a:p>
@@ -27235,11 +27235,11 @@
         <p:spPr>
           <a:xfrm>
             <a:off x="1874520" y="4096512"/>
-            <a:ext cx="6903720" cy="804672"/>
+            <a:ext cx="6903720" cy="658368"/>
           </a:xfrm>
           <a:prstGeom prst="rect">
             <a:avLst>
-              <a:gd name="adj" fmla="val 6818"/>
+              <a:gd name="adj" fmla="val 8333"/>
             </a:avLst>
           </a:prstGeom>
           <a:solidFill>
@@ -27261,12 +27261,12 @@
         </p:nvSpPr>
         <p:spPr>
           <a:xfrm>
-            <a:off x="2670048" y="4169664"/>
-            <a:ext cx="685800" cy="384048"/>
+            <a:off x="2427732" y="4169664"/>
+            <a:ext cx="685800" cy="475488"/>
           </a:xfrm>
           <a:prstGeom prst="rect">
             <a:avLst>
-              <a:gd name="adj" fmla="val 9524"/>
+              <a:gd name="adj" fmla="val 7692"/>
             </a:avLst>
           </a:prstGeom>
           <a:solidFill>
@@ -27288,8 +27288,8 @@
         </p:nvSpPr>
         <p:spPr>
           <a:xfrm>
-            <a:off x="2670048" y="4169664"/>
-            <a:ext cx="685800" cy="384048"/>
+            <a:off x="2427732" y="4169664"/>
+            <a:ext cx="685800" cy="475488"/>
           </a:xfrm>
           <a:prstGeom prst="rect">
             <a:avLst/>
@@ -27327,12 +27327,12 @@
         </p:nvSpPr>
         <p:spPr>
           <a:xfrm>
-            <a:off x="4123944" y="4169664"/>
-            <a:ext cx="685800" cy="384048"/>
+            <a:off x="3639312" y="4169664"/>
+            <a:ext cx="685800" cy="475488"/>
           </a:xfrm>
           <a:prstGeom prst="rect">
             <a:avLst>
-              <a:gd name="adj" fmla="val 9524"/>
+              <a:gd name="adj" fmla="val 7692"/>
             </a:avLst>
           </a:prstGeom>
           <a:solidFill>
@@ -27354,8 +27354,8 @@
         </p:nvSpPr>
         <p:spPr>
           <a:xfrm>
-            <a:off x="4123944" y="4169664"/>
-            <a:ext cx="685800" cy="384048"/>
+            <a:off x="3639312" y="4169664"/>
+            <a:ext cx="685800" cy="475488"/>
           </a:xfrm>
           <a:prstGeom prst="rect">
             <a:avLst/>
@@ -27393,12 +27393,12 @@
         </p:nvSpPr>
         <p:spPr>
           <a:xfrm>
-            <a:off x="5577840" y="4169664"/>
-            <a:ext cx="685800" cy="384048"/>
+            <a:off x="4850892" y="4169664"/>
+            <a:ext cx="685800" cy="475488"/>
           </a:xfrm>
           <a:prstGeom prst="rect">
             <a:avLst>
-              <a:gd name="adj" fmla="val 9524"/>
+              <a:gd name="adj" fmla="val 7692"/>
             </a:avLst>
           </a:prstGeom>
           <a:solidFill>
@@ -27420,8 +27420,8 @@
         </p:nvSpPr>
         <p:spPr>
           <a:xfrm>
-            <a:off x="5577840" y="4169664"/>
-            <a:ext cx="685800" cy="384048"/>
+            <a:off x="4850892" y="4169664"/>
+            <a:ext cx="685800" cy="475488"/>
           </a:xfrm>
           <a:prstGeom prst="rect">
             <a:avLst/>
@@ -27459,12 +27459,12 @@
         </p:nvSpPr>
         <p:spPr>
           <a:xfrm>
-            <a:off x="7031736" y="4169664"/>
-            <a:ext cx="685800" cy="384048"/>
+            <a:off x="6062472" y="4169664"/>
+            <a:ext cx="685800" cy="475488"/>
           </a:xfrm>
           <a:prstGeom prst="rect">
             <a:avLst>
-              <a:gd name="adj" fmla="val 9524"/>
+              <a:gd name="adj" fmla="val 7692"/>
             </a:avLst>
           </a:prstGeom>
           <a:solidFill>
@@ -27486,8 +27486,8 @@
         </p:nvSpPr>
         <p:spPr>
           <a:xfrm>
-            <a:off x="7031736" y="4169664"/>
-            <a:ext cx="685800" cy="384048"/>
+            <a:off x="6062472" y="4169664"/>
+            <a:ext cx="685800" cy="475488"/>
           </a:xfrm>
           <a:prstGeom prst="rect">
             <a:avLst/>
@@ -27511,7 +27511,7 @@
                 <a:ea typeface="Trebuchet MS" pitchFamily="34" charset="-122"/>
                 <a:cs typeface="Trebuchet MS" pitchFamily="34" charset="-120"/>
               </a:rPr>
-              <a:t>t</a:t>
+              <a:t>e</a:t>
             </a:r>
             <a:endParaRPr lang="en-US" sz="900" dirty="0"/>
           </a:p>
@@ -27519,40 +27519,67 @@
       </p:sp>
       <p:sp>
         <p:nvSpPr>
-          <p:cNvPr id="39" name="Text 37"/>
-          <p:cNvSpPr/>
-          <p:nvPr/>
-        </p:nvSpPr>
-        <p:spPr>
-          <a:xfrm>
-            <a:off x="7031736" y="4572000"/>
-            <a:ext cx="685800" cy="219456"/>
-          </a:xfrm>
-          <a:prstGeom prst="rect">
-            <a:avLst/>
-          </a:prstGeom>
-          <a:noFill/>
-          <a:ln/>
-        </p:spPr>
-        <p:txBody>
-          <a:bodyPr wrap="square" lIns="0" tIns="0" rIns="0" bIns="0" rtlCol="0" anchor="t"/>
-          <a:lstStyle/>
-          <a:p>
-            <a:pPr algn="ctr" indent="0" marL="0">
-              <a:buNone/>
-            </a:pPr>
-            <a:r>
-              <a:rPr lang="en-US" sz="750" i="1" dirty="0">
-                <a:solidFill>
-                  <a:srgbClr val="94A3B8"/>
-                </a:solidFill>
-                <a:latin typeface="Calibri" pitchFamily="34" charset="0"/>
-                <a:ea typeface="Calibri" pitchFamily="34" charset="-122"/>
-                <a:cs typeface="Calibri" pitchFamily="34" charset="-120"/>
-              </a:rPr>
-              <a:t>/t/</a:t>
-            </a:r>
-            <a:endParaRPr lang="en-US" sz="750" dirty="0"/>
+          <p:cNvPr id="39" name="Shape 37"/>
+          <p:cNvSpPr/>
+          <p:nvPr/>
+        </p:nvSpPr>
+        <p:spPr>
+          <a:xfrm>
+            <a:off x="7274052" y="4169664"/>
+            <a:ext cx="685800" cy="475488"/>
+          </a:xfrm>
+          <a:prstGeom prst="rect">
+            <a:avLst>
+              <a:gd name="adj" fmla="val 7692"/>
+            </a:avLst>
+          </a:prstGeom>
+          <a:solidFill>
+            <a:srgbClr val="FFFFFF"/>
+          </a:solidFill>
+          <a:ln w="12700">
+            <a:solidFill>
+              <a:srgbClr val="DB2777"/>
+            </a:solidFill>
+            <a:prstDash val="solid"/>
+          </a:ln>
+        </p:spPr>
+      </p:sp>
+      <p:sp>
+        <p:nvSpPr>
+          <p:cNvPr id="40" name="Text 38"/>
+          <p:cNvSpPr/>
+          <p:nvPr/>
+        </p:nvSpPr>
+        <p:spPr>
+          <a:xfrm>
+            <a:off x="7274052" y="4169664"/>
+            <a:ext cx="685800" cy="475488"/>
+          </a:xfrm>
+          <a:prstGeom prst="rect">
+            <a:avLst/>
+          </a:prstGeom>
+          <a:noFill/>
+          <a:ln/>
+        </p:spPr>
+        <p:txBody>
+          <a:bodyPr wrap="square" lIns="0" tIns="0" rIns="0" bIns="0" rtlCol="0" anchor="ctr"/>
+          <a:lstStyle/>
+          <a:p>
+            <a:pPr algn="ctr" indent="0" marL="0">
+              <a:buNone/>
+            </a:pPr>
+            <a:r>
+              <a:rPr lang="en-US" sz="900" b="1" dirty="0">
+                <a:solidFill>
+                  <a:srgbClr val="9D174D"/>
+                </a:solidFill>
+                <a:latin typeface="Trebuchet MS" pitchFamily="34" charset="0"/>
+                <a:ea typeface="Trebuchet MS" pitchFamily="34" charset="-122"/>
+                <a:cs typeface="Trebuchet MS" pitchFamily="34" charset="-120"/>
+              </a:rPr>
+              <a:t>d</a:t>
+            </a:r>
+            <a:endParaRPr lang="en-US" sz="900" dirty="0"/>
           </a:p>
         </p:txBody>
       </p:sp>
@@ -37020,7 +37047,7 @@
                 <a:ea typeface="Calibri" pitchFamily="34" charset="-122"/>
                 <a:cs typeface="Calibri" pitchFamily="34" charset="-120"/>
               </a:rPr>
-              <a:t>1.  The word 'hopefully' contains both a root and two suffixes.</a:t>
+              <a:t>1.  'Hopeless' means there is no hope at all.</a:t>
             </a:r>
             <a:endParaRPr lang="en-US" sz="1300" dirty="0"/>
           </a:p>
@@ -37159,7 +37186,7 @@
                 <a:ea typeface="Calibri" pitchFamily="34" charset="-122"/>
                 <a:cs typeface="Calibri" pitchFamily="34" charset="-120"/>
               </a:rPr>
-              <a:t>2.  The root 'hope' comes from the ancient Greek word for light.</a:t>
+              <a:t>2.  The word 'hopefully' contains both a root and two suffixes.</a:t>
             </a:r>
             <a:endParaRPr lang="en-US" sz="1300" dirty="0"/>
           </a:p>
@@ -37182,11 +37209,11 @@
             </a:avLst>
           </a:prstGeom>
           <a:solidFill>
-            <a:srgbClr val="FEE2E2"/>
-          </a:solidFill>
-          <a:ln w="12700">
-            <a:solidFill>
-              <a:srgbClr val="DC2626"/>
+            <a:srgbClr val="DCFCE7"/>
+          </a:solidFill>
+          <a:ln w="12700">
+            <a:solidFill>
+              <a:srgbClr val="16A34A"/>
             </a:solidFill>
             <a:prstDash val="solid"/>
           </a:ln>
@@ -37219,13 +37246,13 @@
             <a:r>
               <a:rPr lang="en-US" sz="1100" b="1" dirty="0">
                 <a:solidFill>
-                  <a:srgbClr val="DC2626"/>
+                  <a:srgbClr val="16A34A"/>
                 </a:solidFill>
                 <a:latin typeface="Trebuchet MS" pitchFamily="34" charset="0"/>
                 <a:ea typeface="Trebuchet MS" pitchFamily="34" charset="-122"/>
                 <a:cs typeface="Trebuchet MS" pitchFamily="34" charset="-120"/>
               </a:rPr>
-              <a:t>FALSE</a:t>
+              <a:t>TRUE</a:t>
             </a:r>
             <a:endParaRPr lang="en-US" sz="1100" dirty="0"/>
           </a:p>
@@ -37298,7 +37325,7 @@
                 <a:ea typeface="Calibri" pitchFamily="34" charset="-122"/>
                 <a:cs typeface="Calibri" pitchFamily="34" charset="-120"/>
               </a:rPr>
-              <a:t>3.  The suffix '-less' means full of something.</a:t>
+              <a:t>3.  The word 'hopeful' contains the root 'hope'.</a:t>
             </a:r>
             <a:endParaRPr lang="en-US" sz="1300" dirty="0"/>
           </a:p>
@@ -37321,11 +37348,11 @@
             </a:avLst>
           </a:prstGeom>
           <a:solidFill>
-            <a:srgbClr val="FEE2E2"/>
-          </a:solidFill>
-          <a:ln w="12700">
-            <a:solidFill>
-              <a:srgbClr val="DC2626"/>
+            <a:srgbClr val="DCFCE7"/>
+          </a:solidFill>
+          <a:ln w="12700">
+            <a:solidFill>
+              <a:srgbClr val="16A34A"/>
             </a:solidFill>
             <a:prstDash val="solid"/>
           </a:ln>
@@ -37358,13 +37385,13 @@
             <a:r>
               <a:rPr lang="en-US" sz="1100" b="1" dirty="0">
                 <a:solidFill>
-                  <a:srgbClr val="DC2626"/>
+                  <a:srgbClr val="16A34A"/>
                 </a:solidFill>
                 <a:latin typeface="Trebuchet MS" pitchFamily="34" charset="0"/>
                 <a:ea typeface="Trebuchet MS" pitchFamily="34" charset="-122"/>
                 <a:cs typeface="Trebuchet MS" pitchFamily="34" charset="-120"/>
               </a:rPr>
-              <a:t>FALSE</a:t>
+              <a:t>TRUE</a:t>
             </a:r>
             <a:endParaRPr lang="en-US" sz="1100" dirty="0"/>
           </a:p>
@@ -37437,7 +37464,7 @@
                 <a:ea typeface="Calibri" pitchFamily="34" charset="-122"/>
                 <a:cs typeface="Calibri" pitchFamily="34" charset="-120"/>
               </a:rPr>
-              <a:t>4.  'Hopeless' means there is no hope at all.</a:t>
+              <a:t>4.  The suffix '-less' means full of something.</a:t>
             </a:r>
             <a:endParaRPr lang="en-US" sz="1300" dirty="0"/>
           </a:p>
@@ -37460,11 +37487,11 @@
             </a:avLst>
           </a:prstGeom>
           <a:solidFill>
-            <a:srgbClr val="DCFCE7"/>
-          </a:solidFill>
-          <a:ln w="12700">
-            <a:solidFill>
-              <a:srgbClr val="16A34A"/>
+            <a:srgbClr val="FEE2E2"/>
+          </a:solidFill>
+          <a:ln w="12700">
+            <a:solidFill>
+              <a:srgbClr val="DC2626"/>
             </a:solidFill>
             <a:prstDash val="solid"/>
           </a:ln>
@@ -37497,13 +37524,13 @@
             <a:r>
               <a:rPr lang="en-US" sz="1100" b="1" dirty="0">
                 <a:solidFill>
-                  <a:srgbClr val="16A34A"/>
+                  <a:srgbClr val="DC2626"/>
                 </a:solidFill>
                 <a:latin typeface="Trebuchet MS" pitchFamily="34" charset="0"/>
                 <a:ea typeface="Trebuchet MS" pitchFamily="34" charset="-122"/>
                 <a:cs typeface="Trebuchet MS" pitchFamily="34" charset="-120"/>
               </a:rPr>
-              <a:t>TRUE</a:t>
+              <a:t>FALSE</a:t>
             </a:r>
             <a:endParaRPr lang="en-US" sz="1100" dirty="0"/>
           </a:p>
@@ -37576,7 +37603,7 @@
                 <a:ea typeface="Calibri" pitchFamily="34" charset="-122"/>
                 <a:cs typeface="Calibri" pitchFamily="34" charset="-120"/>
               </a:rPr>
-              <a:t>5.  The word 'hopeful' contains the root 'hope'.</a:t>
+              <a:t>5.  The root 'hope' comes from the ancient Greek word for light.</a:t>
             </a:r>
             <a:endParaRPr lang="en-US" sz="1300" dirty="0"/>
           </a:p>
@@ -37599,11 +37626,11 @@
             </a:avLst>
           </a:prstGeom>
           <a:solidFill>
-            <a:srgbClr val="DCFCE7"/>
-          </a:solidFill>
-          <a:ln w="12700">
-            <a:solidFill>
-              <a:srgbClr val="16A34A"/>
+            <a:srgbClr val="FEE2E2"/>
+          </a:solidFill>
+          <a:ln w="12700">
+            <a:solidFill>
+              <a:srgbClr val="DC2626"/>
             </a:solidFill>
             <a:prstDash val="solid"/>
           </a:ln>
@@ -37636,13 +37663,13 @@
             <a:r>
               <a:rPr lang="en-US" sz="1100" b="1" dirty="0">
                 <a:solidFill>
-                  <a:srgbClr val="16A34A"/>
+                  <a:srgbClr val="DC2626"/>
                 </a:solidFill>
                 <a:latin typeface="Trebuchet MS" pitchFamily="34" charset="0"/>
                 <a:ea typeface="Trebuchet MS" pitchFamily="34" charset="-122"/>
                 <a:cs typeface="Trebuchet MS" pitchFamily="34" charset="-120"/>
               </a:rPr>
-              <a:t>TRUE</a:t>
+              <a:t>FALSE</a:t>
             </a:r>
             <a:endParaRPr lang="en-US" sz="1100" dirty="0"/>
           </a:p>

--- a/output/wordlabs-hope-3day.pptx
+++ b/output/wordlabs-hope-3day.pptx
@@ -4240,7 +4240,7 @@
                 <a:ea typeface="Calibri" pitchFamily="34" charset="-122"/>
                 <a:cs typeface="Calibri" pitchFamily="34" charset="-120"/>
               </a:rPr>
-              <a:t>"wish for something good"</a:t>
+              <a:t>"to wish for something good"</a:t>
             </a:r>
             <a:endParaRPr lang="en-US" sz="2200" dirty="0"/>
           </a:p>
@@ -4279,7 +4279,7 @@
                 <a:ea typeface="Calibri" pitchFamily="34" charset="-122"/>
                 <a:cs typeface="Calibri" pitchFamily="34" charset="-120"/>
               </a:rPr>
-              <a:t>Origin: Latin: sperare</a:t>
+              <a:t>Origin: Anglo-Saxon (Old English) root</a:t>
             </a:r>
             <a:endParaRPr lang="en-US" sz="1300" dirty="0"/>
           </a:p>
@@ -5288,7 +5288,7 @@
                 <a:ea typeface="Calibri" pitchFamily="34" charset="-122"/>
                 <a:cs typeface="Calibri" pitchFamily="34" charset="-120"/>
               </a:rPr>
-              <a:t>Word Labs  •  wordlabs.app  •  Root: 'hope' = wish for something good</a:t>
+              <a:t>Word Labs  •  wordlabs.app  •  Root: 'hope' = to wish for something good</a:t>
             </a:r>
             <a:endParaRPr lang="en-US" sz="800" dirty="0"/>
           </a:p>
@@ -5622,7 +5622,7 @@
                 <a:ea typeface="Trebuchet MS" pitchFamily="34" charset="-122"/>
                 <a:cs typeface="Trebuchet MS" pitchFamily="34" charset="-120"/>
               </a:rPr>
-              <a:t>0</a:t>
+              <a:t>1</a:t>
             </a:r>
             <a:pPr algn="ctr" indent="0" marL="0">
               <a:buNone/>
@@ -5928,7 +5928,7 @@
                 <a:ea typeface="Calibri" pitchFamily="34" charset="-122"/>
                 <a:cs typeface="Calibri" pitchFamily="34" charset="-120"/>
               </a:rPr>
-              <a:t>Word Labs  •  wordlabs.app  •  Root: 'hope' = wish for something good</a:t>
+              <a:t>Word Labs  •  wordlabs.app  •  Root: 'hope' = to wish for something good</a:t>
             </a:r>
             <a:endParaRPr lang="en-US" sz="800" dirty="0"/>
           </a:p>
@@ -6040,7 +6040,7 @@
                 <a:ea typeface="Calibri" pitchFamily="34" charset="-122"/>
                 <a:cs typeface="Calibri" pitchFamily="34" charset="-120"/>
               </a:rPr>
-              <a:t>The </a:t>
+              <a:t>The situation seemed </a:t>
             </a:r>
             <a:pPr algn="l" indent="0" marL="0">
               <a:buNone/>
@@ -6057,7 +6057,7 @@
                 <a:ea typeface="Calibri" pitchFamily="34" charset="-122"/>
                 <a:cs typeface="Calibri" pitchFamily="34" charset="-120"/>
               </a:rPr>
-              <a:t>hopeful</a:t>
+              <a:t>hopeless</a:t>
             </a:r>
             <a:pPr algn="l" indent="0" marL="0">
               <a:buNone/>
@@ -6071,7 +6071,7 @@
                 <a:ea typeface="Calibri" pitchFamily="34" charset="-122"/>
                 <a:cs typeface="Calibri" pitchFamily="34" charset="-120"/>
               </a:rPr>
-              <a:t> child was </a:t>
+              <a:t> after they lost the last two matches. </a:t>
             </a:r>
             <a:pPr algn="l" indent="0" marL="0">
               <a:buNone/>
@@ -6088,7 +6088,7 @@
                 <a:ea typeface="Calibri" pitchFamily="34" charset="-122"/>
                 <a:cs typeface="Calibri" pitchFamily="34" charset="-120"/>
               </a:rPr>
-              <a:t>hoping</a:t>
+              <a:t>Hopefully</a:t>
             </a:r>
             <a:pPr algn="l" indent="0" marL="0">
               <a:buNone/>
@@ -6102,7 +6102,7 @@
                 <a:ea typeface="Calibri" pitchFamily="34" charset="-122"/>
                 <a:cs typeface="Calibri" pitchFamily="34" charset="-120"/>
               </a:rPr>
-              <a:t> her lost dog would find its way home.</a:t>
+              <a:t>, the weather will be sunny for the school fete.</a:t>
             </a:r>
             <a:endParaRPr lang="en-US" sz="1800" dirty="0"/>
           </a:p>
@@ -6257,7 +6257,7 @@
                 <a:ea typeface="Trebuchet MS" pitchFamily="34" charset="-122"/>
                 <a:cs typeface="Trebuchet MS" pitchFamily="34" charset="-120"/>
               </a:rPr>
-              <a:t>hopeful</a:t>
+              <a:t>hopeless</a:t>
             </a:r>
             <a:endParaRPr lang="en-US" sz="1400" dirty="0"/>
           </a:p>
@@ -6385,7 +6385,7 @@
                 <a:ea typeface="Trebuchet MS" pitchFamily="34" charset="-122"/>
                 <a:cs typeface="Trebuchet MS" pitchFamily="34" charset="-120"/>
               </a:rPr>
-              <a:t>hoping</a:t>
+              <a:t>hopefully</a:t>
             </a:r>
             <a:endParaRPr lang="en-US" sz="1400" dirty="0"/>
           </a:p>
@@ -6716,7 +6716,7 @@
                 <a:ea typeface="Calibri" pitchFamily="34" charset="-122"/>
                 <a:cs typeface="Calibri" pitchFamily="34" charset="-120"/>
               </a:rPr>
-              <a:t>Word Labs  •  wordlabs.app  •  Root: 'hope' = wish for something good</a:t>
+              <a:t>Word Labs  •  wordlabs.app  •  Root: 'hope' = to wish for something good</a:t>
             </a:r>
             <a:endParaRPr lang="en-US" sz="800" dirty="0"/>
           </a:p>
@@ -6855,7 +6855,7 @@
                 <a:ea typeface="Trebuchet MS" pitchFamily="34" charset="-122"/>
                 <a:cs typeface="Trebuchet MS" pitchFamily="34" charset="-120"/>
               </a:rPr>
-              <a:t>hopeful</a:t>
+              <a:t>hopeless</a:t>
             </a:r>
             <a:endParaRPr lang="en-US" sz="2800" dirty="0"/>
           </a:p>
@@ -7543,7 +7543,7 @@
                 <a:ea typeface="Calibri" pitchFamily="34" charset="-122"/>
                 <a:cs typeface="Calibri" pitchFamily="34" charset="-120"/>
               </a:rPr>
-              <a:t>Word Labs  •  wordlabs.app  •  Root: 'hope' = wish for something good</a:t>
+              <a:t>Word Labs  •  wordlabs.app  •  Root: 'hope' = to wish for something good</a:t>
             </a:r>
             <a:endParaRPr lang="en-US" sz="800" dirty="0"/>
           </a:p>
@@ -7682,7 +7682,7 @@
                 <a:ea typeface="Trebuchet MS" pitchFamily="34" charset="-122"/>
                 <a:cs typeface="Trebuchet MS" pitchFamily="34" charset="-120"/>
               </a:rPr>
-              <a:t>hopeful</a:t>
+              <a:t>hopeless</a:t>
             </a:r>
             <a:endParaRPr lang="en-US" sz="2800" dirty="0"/>
           </a:p>
@@ -7860,7 +7860,7 @@
                 <a:ea typeface="Calibri" pitchFamily="34" charset="-122"/>
                 <a:cs typeface="Calibri" pitchFamily="34" charset="-120"/>
               </a:rPr>
-              <a:t>wish for something good</a:t>
+              <a:t>to wish for something good</a:t>
             </a:r>
             <a:endParaRPr lang="en-US" sz="850" dirty="0"/>
           </a:p>
@@ -7883,11 +7883,11 @@
             </a:avLst>
           </a:prstGeom>
           <a:solidFill>
-            <a:srgbClr val="FCE7F3"/>
+            <a:srgbClr val="DDD6FE"/>
           </a:solidFill>
           <a:ln w="19050">
             <a:solidFill>
-              <a:srgbClr val="DB2777"/>
+              <a:srgbClr val="7C3AED"/>
             </a:solidFill>
             <a:prstDash val="solid"/>
           </a:ln>
@@ -7927,13 +7927,13 @@
             <a:r>
               <a:rPr lang="en-US" sz="1300" b="1" dirty="0">
                 <a:solidFill>
-                  <a:srgbClr val="9D174D"/>
+                  <a:srgbClr val="4C1D95"/>
                 </a:solidFill>
                 <a:latin typeface="Trebuchet MS" pitchFamily="34" charset="0"/>
                 <a:ea typeface="Trebuchet MS" pitchFamily="34" charset="-122"/>
                 <a:cs typeface="Trebuchet MS" pitchFamily="34" charset="-120"/>
               </a:rPr>
-              <a:t>ful</a:t>
+              <a:t>less</a:t>
             </a:r>
             <a:endParaRPr lang="en-US" sz="1300" dirty="0"/>
           </a:p>
@@ -7972,7 +7972,7 @@
                 <a:ea typeface="Calibri" pitchFamily="34" charset="-122"/>
                 <a:cs typeface="Calibri" pitchFamily="34" charset="-120"/>
               </a:rPr>
-              <a:t>full of</a:t>
+              <a:t>without</a:t>
             </a:r>
             <a:endParaRPr lang="en-US" sz="850" dirty="0"/>
           </a:p>
@@ -8528,7 +8528,7 @@
                 <a:ea typeface="Calibri" pitchFamily="34" charset="-122"/>
                 <a:cs typeface="Calibri" pitchFamily="34" charset="-120"/>
               </a:rPr>
-              <a:t>Word Labs  •  wordlabs.app  •  Root: 'hope' = wish for something good</a:t>
+              <a:t>Word Labs  •  wordlabs.app  •  Root: 'hope' = to wish for something good</a:t>
             </a:r>
             <a:endParaRPr lang="en-US" sz="800" dirty="0"/>
           </a:p>
@@ -8667,7 +8667,7 @@
                 <a:ea typeface="Trebuchet MS" pitchFamily="34" charset="-122"/>
                 <a:cs typeface="Trebuchet MS" pitchFamily="34" charset="-120"/>
               </a:rPr>
-              <a:t>hopeful</a:t>
+              <a:t>hopeless</a:t>
             </a:r>
             <a:endParaRPr lang="en-US" sz="2800" dirty="0"/>
           </a:p>
@@ -8845,7 +8845,7 @@
                 <a:ea typeface="Calibri" pitchFamily="34" charset="-122"/>
                 <a:cs typeface="Calibri" pitchFamily="34" charset="-120"/>
               </a:rPr>
-              <a:t>wish for something good</a:t>
+              <a:t>to wish for something good</a:t>
             </a:r>
             <a:endParaRPr lang="en-US" sz="850" dirty="0"/>
           </a:p>
@@ -8868,11 +8868,11 @@
             </a:avLst>
           </a:prstGeom>
           <a:solidFill>
-            <a:srgbClr val="FCE7F3"/>
+            <a:srgbClr val="DDD6FE"/>
           </a:solidFill>
           <a:ln w="19050">
             <a:solidFill>
-              <a:srgbClr val="DB2777"/>
+              <a:srgbClr val="7C3AED"/>
             </a:solidFill>
             <a:prstDash val="solid"/>
           </a:ln>
@@ -8912,13 +8912,13 @@
             <a:r>
               <a:rPr lang="en-US" sz="1300" b="1" dirty="0">
                 <a:solidFill>
-                  <a:srgbClr val="9D174D"/>
+                  <a:srgbClr val="4C1D95"/>
                 </a:solidFill>
                 <a:latin typeface="Trebuchet MS" pitchFamily="34" charset="0"/>
                 <a:ea typeface="Trebuchet MS" pitchFamily="34" charset="-122"/>
                 <a:cs typeface="Trebuchet MS" pitchFamily="34" charset="-120"/>
               </a:rPr>
-              <a:t>ful</a:t>
+              <a:t>less</a:t>
             </a:r>
             <a:endParaRPr lang="en-US" sz="1300" dirty="0"/>
           </a:p>
@@ -8957,7 +8957,7 @@
                 <a:ea typeface="Calibri" pitchFamily="34" charset="-122"/>
                 <a:cs typeface="Calibri" pitchFamily="34" charset="-120"/>
               </a:rPr>
-              <a:t>full of</a:t>
+              <a:t>without</a:t>
             </a:r>
             <a:endParaRPr lang="en-US" sz="850" dirty="0"/>
           </a:p>
@@ -9221,7 +9221,7 @@
                 <a:ea typeface="Trebuchet MS" pitchFamily="34" charset="-122"/>
                 <a:cs typeface="Trebuchet MS" pitchFamily="34" charset="-120"/>
               </a:rPr>
-              <a:t>ful</a:t>
+              <a:t>less</a:t>
             </a:r>
             <a:endParaRPr lang="en-US" sz="1400" dirty="0"/>
           </a:p>
@@ -9645,7 +9645,7 @@
                 <a:ea typeface="Calibri" pitchFamily="34" charset="-122"/>
                 <a:cs typeface="Calibri" pitchFamily="34" charset="-120"/>
               </a:rPr>
-              <a:t>Word Labs  •  wordlabs.app  •  Root: 'hope' = wish for something good</a:t>
+              <a:t>Word Labs  •  wordlabs.app  •  Root: 'hope' = to wish for something good</a:t>
             </a:r>
             <a:endParaRPr lang="en-US" sz="800" dirty="0"/>
           </a:p>
@@ -9784,7 +9784,7 @@
                 <a:ea typeface="Trebuchet MS" pitchFamily="34" charset="-122"/>
                 <a:cs typeface="Trebuchet MS" pitchFamily="34" charset="-120"/>
               </a:rPr>
-              <a:t>hopeful</a:t>
+              <a:t>hopeless</a:t>
             </a:r>
             <a:endParaRPr lang="en-US" sz="2800" dirty="0"/>
           </a:p>
@@ -9962,7 +9962,7 @@
                 <a:ea typeface="Calibri" pitchFamily="34" charset="-122"/>
                 <a:cs typeface="Calibri" pitchFamily="34" charset="-120"/>
               </a:rPr>
-              <a:t>wish for something good</a:t>
+              <a:t>to wish for something good</a:t>
             </a:r>
             <a:endParaRPr lang="en-US" sz="850" dirty="0"/>
           </a:p>
@@ -9985,11 +9985,11 @@
             </a:avLst>
           </a:prstGeom>
           <a:solidFill>
-            <a:srgbClr val="FCE7F3"/>
+            <a:srgbClr val="DDD6FE"/>
           </a:solidFill>
           <a:ln w="19050">
             <a:solidFill>
-              <a:srgbClr val="DB2777"/>
+              <a:srgbClr val="7C3AED"/>
             </a:solidFill>
             <a:prstDash val="solid"/>
           </a:ln>
@@ -10029,13 +10029,13 @@
             <a:r>
               <a:rPr lang="en-US" sz="1300" b="1" dirty="0">
                 <a:solidFill>
-                  <a:srgbClr val="9D174D"/>
+                  <a:srgbClr val="4C1D95"/>
                 </a:solidFill>
                 <a:latin typeface="Trebuchet MS" pitchFamily="34" charset="0"/>
                 <a:ea typeface="Trebuchet MS" pitchFamily="34" charset="-122"/>
                 <a:cs typeface="Trebuchet MS" pitchFamily="34" charset="-120"/>
               </a:rPr>
-              <a:t>ful</a:t>
+              <a:t>less</a:t>
             </a:r>
             <a:endParaRPr lang="en-US" sz="1300" dirty="0"/>
           </a:p>
@@ -10074,7 +10074,7 @@
                 <a:ea typeface="Calibri" pitchFamily="34" charset="-122"/>
                 <a:cs typeface="Calibri" pitchFamily="34" charset="-120"/>
               </a:rPr>
-              <a:t>full of</a:t>
+              <a:t>without</a:t>
             </a:r>
             <a:endParaRPr lang="en-US" sz="850" dirty="0"/>
           </a:p>
@@ -10338,7 +10338,7 @@
                 <a:ea typeface="Trebuchet MS" pitchFamily="34" charset="-122"/>
                 <a:cs typeface="Trebuchet MS" pitchFamily="34" charset="-120"/>
               </a:rPr>
-              <a:t>ful</a:t>
+              <a:t>less</a:t>
             </a:r>
             <a:endParaRPr lang="en-US" sz="1400" dirty="0"/>
           </a:p>
@@ -10563,7 +10563,7 @@
                 <a:ea typeface="Trebuchet MS" pitchFamily="34" charset="-122"/>
                 <a:cs typeface="Trebuchet MS" pitchFamily="34" charset="-120"/>
               </a:rPr>
-              <a:t>o</a:t>
+              <a:t>o_e</a:t>
             </a:r>
             <a:endParaRPr lang="en-US" sz="900" dirty="0"/>
           </a:p>
@@ -10695,7 +10695,7 @@
                 <a:ea typeface="Trebuchet MS" pitchFamily="34" charset="-122"/>
                 <a:cs typeface="Trebuchet MS" pitchFamily="34" charset="-120"/>
               </a:rPr>
-              <a:t>e</a:t>
+              <a:t>l</a:t>
             </a:r>
             <a:endParaRPr lang="en-US" sz="900" dirty="0"/>
           </a:p>
@@ -10761,7 +10761,7 @@
                 <a:ea typeface="Trebuchet MS" pitchFamily="34" charset="-122"/>
                 <a:cs typeface="Trebuchet MS" pitchFamily="34" charset="-120"/>
               </a:rPr>
-              <a:t>f</a:t>
+              <a:t>e</a:t>
             </a:r>
             <a:endParaRPr lang="en-US" sz="900" dirty="0"/>
           </a:p>
@@ -10827,7 +10827,7 @@
                 <a:ea typeface="Trebuchet MS" pitchFamily="34" charset="-122"/>
                 <a:cs typeface="Trebuchet MS" pitchFamily="34" charset="-120"/>
               </a:rPr>
-              <a:t>u</a:t>
+              <a:t>s</a:t>
             </a:r>
             <a:endParaRPr lang="en-US" sz="900" dirty="0"/>
           </a:p>
@@ -10893,7 +10893,7 @@
                 <a:ea typeface="Trebuchet MS" pitchFamily="34" charset="-122"/>
                 <a:cs typeface="Trebuchet MS" pitchFamily="34" charset="-120"/>
               </a:rPr>
-              <a:t>l</a:t>
+              <a:t>s</a:t>
             </a:r>
             <a:endParaRPr lang="en-US" sz="900" dirty="0"/>
           </a:p>
@@ -11185,7 +11185,7 @@
                 <a:ea typeface="Calibri" pitchFamily="34" charset="-122"/>
                 <a:cs typeface="Calibri" pitchFamily="34" charset="-120"/>
               </a:rPr>
-              <a:t>Word Labs  •  wordlabs.app  •  Root: 'hope' = wish for something good</a:t>
+              <a:t>Word Labs  •  wordlabs.app  •  Root: 'hope' = to wish for something good</a:t>
             </a:r>
             <a:endParaRPr lang="en-US" sz="800" dirty="0"/>
           </a:p>
@@ -11324,7 +11324,7 @@
                 <a:ea typeface="Trebuchet MS" pitchFamily="34" charset="-122"/>
                 <a:cs typeface="Trebuchet MS" pitchFamily="34" charset="-120"/>
               </a:rPr>
-              <a:t>hoping</a:t>
+              <a:t>hopefully</a:t>
             </a:r>
             <a:endParaRPr lang="en-US" sz="2800" dirty="0"/>
           </a:p>
@@ -12012,7 +12012,7 @@
                 <a:ea typeface="Calibri" pitchFamily="34" charset="-122"/>
                 <a:cs typeface="Calibri" pitchFamily="34" charset="-120"/>
               </a:rPr>
-              <a:t>Word Labs  •  wordlabs.app  •  Root: 'hope' = wish for something good</a:t>
+              <a:t>Word Labs  •  wordlabs.app  •  Root: 'hope' = to wish for something good</a:t>
             </a:r>
             <a:endParaRPr lang="en-US" sz="800" dirty="0"/>
           </a:p>
@@ -12151,7 +12151,7 @@
                 <a:ea typeface="Trebuchet MS" pitchFamily="34" charset="-122"/>
                 <a:cs typeface="Trebuchet MS" pitchFamily="34" charset="-120"/>
               </a:rPr>
-              <a:t>hoping</a:t>
+              <a:t>hopefully</a:t>
             </a:r>
             <a:endParaRPr lang="en-US" sz="2800" dirty="0"/>
           </a:p>
@@ -12231,7 +12231,7 @@
         </p:nvSpPr>
         <p:spPr>
           <a:xfrm>
-            <a:off x="2938272" y="2258568"/>
+            <a:off x="2221992" y="2258568"/>
             <a:ext cx="1828800" cy="292608"/>
           </a:xfrm>
           <a:prstGeom prst="rect">
@@ -12265,7 +12265,7 @@
         </p:nvSpPr>
         <p:spPr>
           <a:xfrm>
-            <a:off x="2938272" y="2258568"/>
+            <a:off x="2221992" y="2258568"/>
             <a:ext cx="1828800" cy="292608"/>
           </a:xfrm>
           <a:prstGeom prst="rect">
@@ -12304,7 +12304,7 @@
         </p:nvSpPr>
         <p:spPr>
           <a:xfrm>
-            <a:off x="2938272" y="2569464"/>
+            <a:off x="2221992" y="2569464"/>
             <a:ext cx="1828800" cy="201168"/>
           </a:xfrm>
           <a:prstGeom prst="rect">
@@ -12329,7 +12329,7 @@
                 <a:ea typeface="Calibri" pitchFamily="34" charset="-122"/>
                 <a:cs typeface="Calibri" pitchFamily="34" charset="-120"/>
               </a:rPr>
-              <a:t>wish for something good</a:t>
+              <a:t>to wish for something good</a:t>
             </a:r>
             <a:endParaRPr lang="en-US" sz="850" dirty="0"/>
           </a:p>
@@ -12337,52 +12337,13 @@
       </p:sp>
       <p:sp>
         <p:nvSpPr>
-          <p:cNvPr id="19" name="Text 17"/>
-          <p:cNvSpPr/>
-          <p:nvPr/>
-        </p:nvSpPr>
-        <p:spPr>
-          <a:xfrm>
-            <a:off x="2938272" y="2752344"/>
-            <a:ext cx="1828800" cy="182880"/>
-          </a:xfrm>
-          <a:prstGeom prst="rect">
-            <a:avLst/>
-          </a:prstGeom>
-          <a:noFill/>
-          <a:ln/>
-        </p:spPr>
-        <p:txBody>
-          <a:bodyPr wrap="square" lIns="0" tIns="0" rIns="0" bIns="0" rtlCol="0" anchor="t"/>
-          <a:lstStyle/>
-          <a:p>
-            <a:pPr algn="ctr" indent="0" marL="0">
-              <a:buNone/>
-            </a:pPr>
-            <a:r>
-              <a:rPr lang="en-US" sz="700" i="1" dirty="0">
-                <a:solidFill>
-                  <a:srgbClr val="94A3B8"/>
-                </a:solidFill>
-                <a:latin typeface="Calibri" pitchFamily="34" charset="0"/>
-                <a:ea typeface="Calibri" pitchFamily="34" charset="-122"/>
-                <a:cs typeface="Calibri" pitchFamily="34" charset="-120"/>
-              </a:rPr>
-              <a:t>'e' dropped before vowel suffix</a:t>
-            </a:r>
-            <a:endParaRPr lang="en-US" sz="700" dirty="0"/>
-          </a:p>
-        </p:txBody>
-      </p:sp>
-      <p:sp>
-        <p:nvSpPr>
-          <p:cNvPr id="20" name="Shape 18"/>
-          <p:cNvSpPr/>
-          <p:nvPr/>
-        </p:nvSpPr>
-        <p:spPr>
-          <a:xfrm>
-            <a:off x="5803392" y="2258568"/>
+          <p:cNvPr id="19" name="Shape 17"/>
+          <p:cNvSpPr/>
+          <p:nvPr/>
+        </p:nvSpPr>
+        <p:spPr>
+          <a:xfrm>
+            <a:off x="4370832" y="2258568"/>
             <a:ext cx="1828800" cy="292608"/>
           </a:xfrm>
           <a:prstGeom prst="rect">
@@ -12410,13 +12371,13 @@
       </p:sp>
       <p:sp>
         <p:nvSpPr>
-          <p:cNvPr id="21" name="Text 19"/>
-          <p:cNvSpPr/>
-          <p:nvPr/>
-        </p:nvSpPr>
-        <p:spPr>
-          <a:xfrm>
-            <a:off x="5803392" y="2258568"/>
+          <p:cNvPr id="20" name="Text 18"/>
+          <p:cNvSpPr/>
+          <p:nvPr/>
+        </p:nvSpPr>
+        <p:spPr>
+          <a:xfrm>
+            <a:off x="4370832" y="2258568"/>
             <a:ext cx="1828800" cy="292608"/>
           </a:xfrm>
           <a:prstGeom prst="rect">
@@ -12441,7 +12402,7 @@
                 <a:ea typeface="Trebuchet MS" pitchFamily="34" charset="-122"/>
                 <a:cs typeface="Trebuchet MS" pitchFamily="34" charset="-120"/>
               </a:rPr>
-              <a:t>ing</a:t>
+              <a:t>ful</a:t>
             </a:r>
             <a:endParaRPr lang="en-US" sz="1300" dirty="0"/>
           </a:p>
@@ -12449,13 +12410,13 @@
       </p:sp>
       <p:sp>
         <p:nvSpPr>
-          <p:cNvPr id="22" name="Text 20"/>
-          <p:cNvSpPr/>
-          <p:nvPr/>
-        </p:nvSpPr>
-        <p:spPr>
-          <a:xfrm>
-            <a:off x="5803392" y="2569464"/>
+          <p:cNvPr id="21" name="Text 19"/>
+          <p:cNvSpPr/>
+          <p:nvPr/>
+        </p:nvSpPr>
+        <p:spPr>
+          <a:xfrm>
+            <a:off x="4370832" y="2569464"/>
             <a:ext cx="1828800" cy="201168"/>
           </a:xfrm>
           <a:prstGeom prst="rect">
@@ -12480,7 +12441,7 @@
                 <a:ea typeface="Calibri" pitchFamily="34" charset="-122"/>
                 <a:cs typeface="Calibri" pitchFamily="34" charset="-120"/>
               </a:rPr>
-              <a:t>in the process of doing</a:t>
+              <a:t>full of</a:t>
             </a:r>
             <a:endParaRPr lang="en-US" sz="850" dirty="0"/>
           </a:p>
@@ -12488,7 +12449,119 @@
       </p:sp>
       <p:sp>
         <p:nvSpPr>
-          <p:cNvPr id="23" name="Shape 21"/>
+          <p:cNvPr id="22" name="Shape 20"/>
+          <p:cNvSpPr/>
+          <p:nvPr/>
+        </p:nvSpPr>
+        <p:spPr>
+          <a:xfrm>
+            <a:off x="6519672" y="2258568"/>
+            <a:ext cx="1828800" cy="292608"/>
+          </a:xfrm>
+          <a:prstGeom prst="rect">
+            <a:avLst>
+              <a:gd name="adj" fmla="val 25000"/>
+            </a:avLst>
+          </a:prstGeom>
+          <a:solidFill>
+            <a:srgbClr val="FCE7F3"/>
+          </a:solidFill>
+          <a:ln w="19050">
+            <a:solidFill>
+              <a:srgbClr val="DB2777"/>
+            </a:solidFill>
+            <a:prstDash val="solid"/>
+          </a:ln>
+          <a:effectLst>
+            <a:outerShdw sx="100000" sy="100000" kx="0" ky="0" algn="bl" rotWithShape="0" blurRad="101600" dist="38100" dir="8100000">
+              <a:srgbClr val="000000">
+                <a:alpha val="12000"/>
+              </a:srgbClr>
+            </a:outerShdw>
+          </a:effectLst>
+        </p:spPr>
+      </p:sp>
+      <p:sp>
+        <p:nvSpPr>
+          <p:cNvPr id="23" name="Text 21"/>
+          <p:cNvSpPr/>
+          <p:nvPr/>
+        </p:nvSpPr>
+        <p:spPr>
+          <a:xfrm>
+            <a:off x="6519672" y="2258568"/>
+            <a:ext cx="1828800" cy="292608"/>
+          </a:xfrm>
+          <a:prstGeom prst="rect">
+            <a:avLst/>
+          </a:prstGeom>
+          <a:noFill/>
+          <a:ln/>
+        </p:spPr>
+        <p:txBody>
+          <a:bodyPr wrap="square" lIns="0" tIns="0" rIns="0" bIns="0" rtlCol="0" anchor="ctr"/>
+          <a:lstStyle/>
+          <a:p>
+            <a:pPr algn="ctr" indent="0" marL="0">
+              <a:buNone/>
+            </a:pPr>
+            <a:r>
+              <a:rPr lang="en-US" sz="1300" b="1" dirty="0">
+                <a:solidFill>
+                  <a:srgbClr val="9D174D"/>
+                </a:solidFill>
+                <a:latin typeface="Trebuchet MS" pitchFamily="34" charset="0"/>
+                <a:ea typeface="Trebuchet MS" pitchFamily="34" charset="-122"/>
+                <a:cs typeface="Trebuchet MS" pitchFamily="34" charset="-120"/>
+              </a:rPr>
+              <a:t>ly</a:t>
+            </a:r>
+            <a:endParaRPr lang="en-US" sz="1300" dirty="0"/>
+          </a:p>
+        </p:txBody>
+      </p:sp>
+      <p:sp>
+        <p:nvSpPr>
+          <p:cNvPr id="24" name="Text 22"/>
+          <p:cNvSpPr/>
+          <p:nvPr/>
+        </p:nvSpPr>
+        <p:spPr>
+          <a:xfrm>
+            <a:off x="6519672" y="2569464"/>
+            <a:ext cx="1828800" cy="201168"/>
+          </a:xfrm>
+          <a:prstGeom prst="rect">
+            <a:avLst/>
+          </a:prstGeom>
+          <a:noFill/>
+          <a:ln/>
+        </p:spPr>
+        <p:txBody>
+          <a:bodyPr wrap="square" lIns="0" tIns="0" rIns="0" bIns="0" rtlCol="0" anchor="t"/>
+          <a:lstStyle/>
+          <a:p>
+            <a:pPr algn="ctr" indent="0" marL="0">
+              <a:buNone/>
+            </a:pPr>
+            <a:r>
+              <a:rPr lang="en-US" sz="850" dirty="0">
+                <a:solidFill>
+                  <a:srgbClr val="475569"/>
+                </a:solidFill>
+                <a:latin typeface="Calibri" pitchFamily="34" charset="0"/>
+                <a:ea typeface="Calibri" pitchFamily="34" charset="-122"/>
+                <a:cs typeface="Calibri" pitchFamily="34" charset="-120"/>
+              </a:rPr>
+              <a:t>in a way</a:t>
+            </a:r>
+            <a:endParaRPr lang="en-US" sz="850" dirty="0"/>
+          </a:p>
+        </p:txBody>
+      </p:sp>
+      <p:sp>
+        <p:nvSpPr>
+          <p:cNvPr id="25" name="Shape 23"/>
           <p:cNvSpPr/>
           <p:nvPr/>
         </p:nvSpPr>
@@ -12515,7 +12588,7 @@
       </p:sp>
       <p:sp>
         <p:nvSpPr>
-          <p:cNvPr id="24" name="Text 22"/>
+          <p:cNvPr id="26" name="Text 24"/>
           <p:cNvSpPr/>
           <p:nvPr/>
         </p:nvSpPr>
@@ -12554,7 +12627,7 @@
       </p:sp>
       <p:sp>
         <p:nvSpPr>
-          <p:cNvPr id="25" name="Shape 23"/>
+          <p:cNvPr id="27" name="Shape 25"/>
           <p:cNvSpPr/>
           <p:nvPr/>
         </p:nvSpPr>
@@ -12581,7 +12654,7 @@
       </p:sp>
       <p:sp>
         <p:nvSpPr>
-          <p:cNvPr id="26" name="Text 24"/>
+          <p:cNvPr id="28" name="Text 26"/>
           <p:cNvSpPr/>
           <p:nvPr/>
         </p:nvSpPr>
@@ -12620,7 +12693,7 @@
       </p:sp>
       <p:sp>
         <p:nvSpPr>
-          <p:cNvPr id="27" name="Shape 25"/>
+          <p:cNvPr id="29" name="Shape 27"/>
           <p:cNvSpPr/>
           <p:nvPr/>
         </p:nvSpPr>
@@ -12647,7 +12720,7 @@
       </p:sp>
       <p:sp>
         <p:nvSpPr>
-          <p:cNvPr id="28" name="Text 26"/>
+          <p:cNvPr id="30" name="Text 28"/>
           <p:cNvSpPr/>
           <p:nvPr/>
         </p:nvSpPr>
@@ -12686,7 +12759,7 @@
       </p:sp>
       <p:sp>
         <p:nvSpPr>
-          <p:cNvPr id="29" name="Shape 27"/>
+          <p:cNvPr id="31" name="Shape 29"/>
           <p:cNvSpPr/>
           <p:nvPr/>
         </p:nvSpPr>
@@ -12713,7 +12786,7 @@
       </p:sp>
       <p:sp>
         <p:nvSpPr>
-          <p:cNvPr id="30" name="Text 28"/>
+          <p:cNvPr id="32" name="Text 30"/>
           <p:cNvSpPr/>
           <p:nvPr/>
         </p:nvSpPr>
@@ -13036,7 +13109,7 @@
                 <a:ea typeface="Calibri" pitchFamily="34" charset="-122"/>
                 <a:cs typeface="Calibri" pitchFamily="34" charset="-120"/>
               </a:rPr>
-              <a:t>Word Labs  •  wordlabs.app  •  Root: 'hope' = wish for something good</a:t>
+              <a:t>Word Labs  •  wordlabs.app  •  Root: 'hope' = to wish for something good</a:t>
             </a:r>
             <a:endParaRPr lang="en-US" sz="800" dirty="0"/>
           </a:p>
@@ -13175,7 +13248,7 @@
                 <a:ea typeface="Trebuchet MS" pitchFamily="34" charset="-122"/>
                 <a:cs typeface="Trebuchet MS" pitchFamily="34" charset="-120"/>
               </a:rPr>
-              <a:t>hoping</a:t>
+              <a:t>hopefully</a:t>
             </a:r>
             <a:endParaRPr lang="en-US" sz="2800" dirty="0"/>
           </a:p>
@@ -13255,7 +13328,7 @@
         </p:nvSpPr>
         <p:spPr>
           <a:xfrm>
-            <a:off x="2938272" y="2258568"/>
+            <a:off x="2221992" y="2258568"/>
             <a:ext cx="1828800" cy="292608"/>
           </a:xfrm>
           <a:prstGeom prst="rect">
@@ -13289,7 +13362,7 @@
         </p:nvSpPr>
         <p:spPr>
           <a:xfrm>
-            <a:off x="2938272" y="2258568"/>
+            <a:off x="2221992" y="2258568"/>
             <a:ext cx="1828800" cy="292608"/>
           </a:xfrm>
           <a:prstGeom prst="rect">
@@ -13328,7 +13401,7 @@
         </p:nvSpPr>
         <p:spPr>
           <a:xfrm>
-            <a:off x="2938272" y="2569464"/>
+            <a:off x="2221992" y="2569464"/>
             <a:ext cx="1828800" cy="201168"/>
           </a:xfrm>
           <a:prstGeom prst="rect">
@@ -13353,7 +13426,7 @@
                 <a:ea typeface="Calibri" pitchFamily="34" charset="-122"/>
                 <a:cs typeface="Calibri" pitchFamily="34" charset="-120"/>
               </a:rPr>
-              <a:t>wish for something good</a:t>
+              <a:t>to wish for something good</a:t>
             </a:r>
             <a:endParaRPr lang="en-US" sz="850" dirty="0"/>
           </a:p>
@@ -13361,52 +13434,13 @@
       </p:sp>
       <p:sp>
         <p:nvSpPr>
-          <p:cNvPr id="19" name="Text 17"/>
-          <p:cNvSpPr/>
-          <p:nvPr/>
-        </p:nvSpPr>
-        <p:spPr>
-          <a:xfrm>
-            <a:off x="2938272" y="2752344"/>
-            <a:ext cx="1828800" cy="182880"/>
-          </a:xfrm>
-          <a:prstGeom prst="rect">
-            <a:avLst/>
-          </a:prstGeom>
-          <a:noFill/>
-          <a:ln/>
-        </p:spPr>
-        <p:txBody>
-          <a:bodyPr wrap="square" lIns="0" tIns="0" rIns="0" bIns="0" rtlCol="0" anchor="t"/>
-          <a:lstStyle/>
-          <a:p>
-            <a:pPr algn="ctr" indent="0" marL="0">
-              <a:buNone/>
-            </a:pPr>
-            <a:r>
-              <a:rPr lang="en-US" sz="700" i="1" dirty="0">
-                <a:solidFill>
-                  <a:srgbClr val="94A3B8"/>
-                </a:solidFill>
-                <a:latin typeface="Calibri" pitchFamily="34" charset="0"/>
-                <a:ea typeface="Calibri" pitchFamily="34" charset="-122"/>
-                <a:cs typeface="Calibri" pitchFamily="34" charset="-120"/>
-              </a:rPr>
-              <a:t>'e' dropped before vowel suffix</a:t>
-            </a:r>
-            <a:endParaRPr lang="en-US" sz="700" dirty="0"/>
-          </a:p>
-        </p:txBody>
-      </p:sp>
-      <p:sp>
-        <p:nvSpPr>
-          <p:cNvPr id="20" name="Shape 18"/>
-          <p:cNvSpPr/>
-          <p:nvPr/>
-        </p:nvSpPr>
-        <p:spPr>
-          <a:xfrm>
-            <a:off x="5803392" y="2258568"/>
+          <p:cNvPr id="19" name="Shape 17"/>
+          <p:cNvSpPr/>
+          <p:nvPr/>
+        </p:nvSpPr>
+        <p:spPr>
+          <a:xfrm>
+            <a:off x="4370832" y="2258568"/>
             <a:ext cx="1828800" cy="292608"/>
           </a:xfrm>
           <a:prstGeom prst="rect">
@@ -13434,13 +13468,13 @@
       </p:sp>
       <p:sp>
         <p:nvSpPr>
-          <p:cNvPr id="21" name="Text 19"/>
-          <p:cNvSpPr/>
-          <p:nvPr/>
-        </p:nvSpPr>
-        <p:spPr>
-          <a:xfrm>
-            <a:off x="5803392" y="2258568"/>
+          <p:cNvPr id="20" name="Text 18"/>
+          <p:cNvSpPr/>
+          <p:nvPr/>
+        </p:nvSpPr>
+        <p:spPr>
+          <a:xfrm>
+            <a:off x="4370832" y="2258568"/>
             <a:ext cx="1828800" cy="292608"/>
           </a:xfrm>
           <a:prstGeom prst="rect">
@@ -13465,7 +13499,7 @@
                 <a:ea typeface="Trebuchet MS" pitchFamily="34" charset="-122"/>
                 <a:cs typeface="Trebuchet MS" pitchFamily="34" charset="-120"/>
               </a:rPr>
-              <a:t>ing</a:t>
+              <a:t>ful</a:t>
             </a:r>
             <a:endParaRPr lang="en-US" sz="1300" dirty="0"/>
           </a:p>
@@ -13473,13 +13507,13 @@
       </p:sp>
       <p:sp>
         <p:nvSpPr>
-          <p:cNvPr id="22" name="Text 20"/>
-          <p:cNvSpPr/>
-          <p:nvPr/>
-        </p:nvSpPr>
-        <p:spPr>
-          <a:xfrm>
-            <a:off x="5803392" y="2569464"/>
+          <p:cNvPr id="21" name="Text 19"/>
+          <p:cNvSpPr/>
+          <p:nvPr/>
+        </p:nvSpPr>
+        <p:spPr>
+          <a:xfrm>
+            <a:off x="4370832" y="2569464"/>
             <a:ext cx="1828800" cy="201168"/>
           </a:xfrm>
           <a:prstGeom prst="rect">
@@ -13504,7 +13538,7 @@
                 <a:ea typeface="Calibri" pitchFamily="34" charset="-122"/>
                 <a:cs typeface="Calibri" pitchFamily="34" charset="-120"/>
               </a:rPr>
-              <a:t>in the process of doing</a:t>
+              <a:t>full of</a:t>
             </a:r>
             <a:endParaRPr lang="en-US" sz="850" dirty="0"/>
           </a:p>
@@ -13512,7 +13546,119 @@
       </p:sp>
       <p:sp>
         <p:nvSpPr>
-          <p:cNvPr id="23" name="Shape 21"/>
+          <p:cNvPr id="22" name="Shape 20"/>
+          <p:cNvSpPr/>
+          <p:nvPr/>
+        </p:nvSpPr>
+        <p:spPr>
+          <a:xfrm>
+            <a:off x="6519672" y="2258568"/>
+            <a:ext cx="1828800" cy="292608"/>
+          </a:xfrm>
+          <a:prstGeom prst="rect">
+            <a:avLst>
+              <a:gd name="adj" fmla="val 25000"/>
+            </a:avLst>
+          </a:prstGeom>
+          <a:solidFill>
+            <a:srgbClr val="FCE7F3"/>
+          </a:solidFill>
+          <a:ln w="19050">
+            <a:solidFill>
+              <a:srgbClr val="DB2777"/>
+            </a:solidFill>
+            <a:prstDash val="solid"/>
+          </a:ln>
+          <a:effectLst>
+            <a:outerShdw sx="100000" sy="100000" kx="0" ky="0" algn="bl" rotWithShape="0" blurRad="101600" dist="38100" dir="8100000">
+              <a:srgbClr val="000000">
+                <a:alpha val="12000"/>
+              </a:srgbClr>
+            </a:outerShdw>
+          </a:effectLst>
+        </p:spPr>
+      </p:sp>
+      <p:sp>
+        <p:nvSpPr>
+          <p:cNvPr id="23" name="Text 21"/>
+          <p:cNvSpPr/>
+          <p:nvPr/>
+        </p:nvSpPr>
+        <p:spPr>
+          <a:xfrm>
+            <a:off x="6519672" y="2258568"/>
+            <a:ext cx="1828800" cy="292608"/>
+          </a:xfrm>
+          <a:prstGeom prst="rect">
+            <a:avLst/>
+          </a:prstGeom>
+          <a:noFill/>
+          <a:ln/>
+        </p:spPr>
+        <p:txBody>
+          <a:bodyPr wrap="square" lIns="0" tIns="0" rIns="0" bIns="0" rtlCol="0" anchor="ctr"/>
+          <a:lstStyle/>
+          <a:p>
+            <a:pPr algn="ctr" indent="0" marL="0">
+              <a:buNone/>
+            </a:pPr>
+            <a:r>
+              <a:rPr lang="en-US" sz="1300" b="1" dirty="0">
+                <a:solidFill>
+                  <a:srgbClr val="9D174D"/>
+                </a:solidFill>
+                <a:latin typeface="Trebuchet MS" pitchFamily="34" charset="0"/>
+                <a:ea typeface="Trebuchet MS" pitchFamily="34" charset="-122"/>
+                <a:cs typeface="Trebuchet MS" pitchFamily="34" charset="-120"/>
+              </a:rPr>
+              <a:t>ly</a:t>
+            </a:r>
+            <a:endParaRPr lang="en-US" sz="1300" dirty="0"/>
+          </a:p>
+        </p:txBody>
+      </p:sp>
+      <p:sp>
+        <p:nvSpPr>
+          <p:cNvPr id="24" name="Text 22"/>
+          <p:cNvSpPr/>
+          <p:nvPr/>
+        </p:nvSpPr>
+        <p:spPr>
+          <a:xfrm>
+            <a:off x="6519672" y="2569464"/>
+            <a:ext cx="1828800" cy="201168"/>
+          </a:xfrm>
+          <a:prstGeom prst="rect">
+            <a:avLst/>
+          </a:prstGeom>
+          <a:noFill/>
+          <a:ln/>
+        </p:spPr>
+        <p:txBody>
+          <a:bodyPr wrap="square" lIns="0" tIns="0" rIns="0" bIns="0" rtlCol="0" anchor="t"/>
+          <a:lstStyle/>
+          <a:p>
+            <a:pPr algn="ctr" indent="0" marL="0">
+              <a:buNone/>
+            </a:pPr>
+            <a:r>
+              <a:rPr lang="en-US" sz="850" dirty="0">
+                <a:solidFill>
+                  <a:srgbClr val="475569"/>
+                </a:solidFill>
+                <a:latin typeface="Calibri" pitchFamily="34" charset="0"/>
+                <a:ea typeface="Calibri" pitchFamily="34" charset="-122"/>
+                <a:cs typeface="Calibri" pitchFamily="34" charset="-120"/>
+              </a:rPr>
+              <a:t>in a way</a:t>
+            </a:r>
+            <a:endParaRPr lang="en-US" sz="850" dirty="0"/>
+          </a:p>
+        </p:txBody>
+      </p:sp>
+      <p:sp>
+        <p:nvSpPr>
+          <p:cNvPr id="25" name="Shape 23"/>
           <p:cNvSpPr/>
           <p:nvPr/>
         </p:nvSpPr>
@@ -13539,7 +13685,7 @@
       </p:sp>
       <p:sp>
         <p:nvSpPr>
-          <p:cNvPr id="24" name="Text 22"/>
+          <p:cNvPr id="26" name="Text 24"/>
           <p:cNvSpPr/>
           <p:nvPr/>
         </p:nvSpPr>
@@ -13578,7 +13724,7 @@
       </p:sp>
       <p:sp>
         <p:nvSpPr>
-          <p:cNvPr id="25" name="Shape 23"/>
+          <p:cNvPr id="27" name="Shape 25"/>
           <p:cNvSpPr/>
           <p:nvPr/>
         </p:nvSpPr>
@@ -13605,13 +13751,13 @@
       </p:sp>
       <p:sp>
         <p:nvSpPr>
-          <p:cNvPr id="26" name="Shape 24"/>
-          <p:cNvSpPr/>
-          <p:nvPr/>
-        </p:nvSpPr>
-        <p:spPr>
-          <a:xfrm>
-            <a:off x="2999232" y="3364992"/>
+          <p:cNvPr id="28" name="Shape 26"/>
+          <p:cNvSpPr/>
+          <p:nvPr/>
+        </p:nvSpPr>
+        <p:spPr>
+          <a:xfrm>
+            <a:off x="2313432" y="3364992"/>
             <a:ext cx="1645920" cy="475488"/>
           </a:xfrm>
           <a:prstGeom prst="rect">
@@ -13632,13 +13778,13 @@
       </p:sp>
       <p:sp>
         <p:nvSpPr>
-          <p:cNvPr id="27" name="Text 25"/>
-          <p:cNvSpPr/>
-          <p:nvPr/>
-        </p:nvSpPr>
-        <p:spPr>
-          <a:xfrm>
-            <a:off x="2999232" y="3364992"/>
+          <p:cNvPr id="29" name="Text 27"/>
+          <p:cNvSpPr/>
+          <p:nvPr/>
+        </p:nvSpPr>
+        <p:spPr>
+          <a:xfrm>
+            <a:off x="2313432" y="3364992"/>
             <a:ext cx="1645920" cy="475488"/>
           </a:xfrm>
           <a:prstGeom prst="rect">
@@ -13663,7 +13809,7 @@
                 <a:ea typeface="Trebuchet MS" pitchFamily="34" charset="-122"/>
                 <a:cs typeface="Trebuchet MS" pitchFamily="34" charset="-120"/>
               </a:rPr>
-              <a:t>ho</a:t>
+              <a:t>hope</a:t>
             </a:r>
             <a:endParaRPr lang="en-US" sz="1400" dirty="0"/>
           </a:p>
@@ -13671,14 +13817,14 @@
       </p:sp>
       <p:sp>
         <p:nvSpPr>
-          <p:cNvPr id="28" name="Text 26"/>
-          <p:cNvSpPr/>
-          <p:nvPr/>
-        </p:nvSpPr>
-        <p:spPr>
-          <a:xfrm>
-            <a:off x="4645152" y="3364992"/>
-            <a:ext cx="1097280" cy="475488"/>
+          <p:cNvPr id="30" name="Text 28"/>
+          <p:cNvSpPr/>
+          <p:nvPr/>
+        </p:nvSpPr>
+        <p:spPr>
+          <a:xfrm>
+            <a:off x="3959352" y="3364992"/>
+            <a:ext cx="411480" cy="475488"/>
           </a:xfrm>
           <a:prstGeom prst="rect">
             <a:avLst/>
@@ -13710,13 +13856,13 @@
       </p:sp>
       <p:sp>
         <p:nvSpPr>
-          <p:cNvPr id="29" name="Shape 27"/>
-          <p:cNvSpPr/>
-          <p:nvPr/>
-        </p:nvSpPr>
-        <p:spPr>
-          <a:xfrm>
-            <a:off x="5742432" y="3364992"/>
+          <p:cNvPr id="31" name="Shape 29"/>
+          <p:cNvSpPr/>
+          <p:nvPr/>
+        </p:nvSpPr>
+        <p:spPr>
+          <a:xfrm>
+            <a:off x="4370832" y="3364992"/>
             <a:ext cx="1645920" cy="475488"/>
           </a:xfrm>
           <a:prstGeom prst="rect">
@@ -13737,13 +13883,13 @@
       </p:sp>
       <p:sp>
         <p:nvSpPr>
-          <p:cNvPr id="30" name="Text 28"/>
-          <p:cNvSpPr/>
-          <p:nvPr/>
-        </p:nvSpPr>
-        <p:spPr>
-          <a:xfrm>
-            <a:off x="5742432" y="3364992"/>
+          <p:cNvPr id="32" name="Text 30"/>
+          <p:cNvSpPr/>
+          <p:nvPr/>
+        </p:nvSpPr>
+        <p:spPr>
+          <a:xfrm>
+            <a:off x="4370832" y="3364992"/>
             <a:ext cx="1645920" cy="475488"/>
           </a:xfrm>
           <a:prstGeom prst="rect">
@@ -13768,7 +13914,7 @@
                 <a:ea typeface="Trebuchet MS" pitchFamily="34" charset="-122"/>
                 <a:cs typeface="Trebuchet MS" pitchFamily="34" charset="-120"/>
               </a:rPr>
-              <a:t>ping</a:t>
+              <a:t>ful</a:t>
             </a:r>
             <a:endParaRPr lang="en-US" sz="1400" dirty="0"/>
           </a:p>
@@ -13776,7 +13922,112 @@
       </p:sp>
       <p:sp>
         <p:nvSpPr>
-          <p:cNvPr id="31" name="Shape 29"/>
+          <p:cNvPr id="33" name="Text 31"/>
+          <p:cNvSpPr/>
+          <p:nvPr/>
+        </p:nvSpPr>
+        <p:spPr>
+          <a:xfrm>
+            <a:off x="6016752" y="3364992"/>
+            <a:ext cx="411480" cy="475488"/>
+          </a:xfrm>
+          <a:prstGeom prst="rect">
+            <a:avLst/>
+          </a:prstGeom>
+          <a:noFill/>
+          <a:ln/>
+        </p:spPr>
+        <p:txBody>
+          <a:bodyPr wrap="square" lIns="0" tIns="0" rIns="0" bIns="0" rtlCol="0" anchor="ctr"/>
+          <a:lstStyle/>
+          <a:p>
+            <a:pPr algn="ctr" indent="0" marL="0">
+              <a:buNone/>
+            </a:pPr>
+            <a:r>
+              <a:rPr lang="en-US" sz="1600" b="1" dirty="0">
+                <a:solidFill>
+                  <a:srgbClr val="0D9488"/>
+                </a:solidFill>
+                <a:latin typeface="Trebuchet MS" pitchFamily="34" charset="0"/>
+                <a:ea typeface="Trebuchet MS" pitchFamily="34" charset="-122"/>
+                <a:cs typeface="Trebuchet MS" pitchFamily="34" charset="-120"/>
+              </a:rPr>
+              <a:t>·</a:t>
+            </a:r>
+            <a:endParaRPr lang="en-US" sz="1600" dirty="0"/>
+          </a:p>
+        </p:txBody>
+      </p:sp>
+      <p:sp>
+        <p:nvSpPr>
+          <p:cNvPr id="34" name="Shape 32"/>
+          <p:cNvSpPr/>
+          <p:nvPr/>
+        </p:nvSpPr>
+        <p:spPr>
+          <a:xfrm>
+            <a:off x="6428232" y="3364992"/>
+            <a:ext cx="1645920" cy="475488"/>
+          </a:xfrm>
+          <a:prstGeom prst="rect">
+            <a:avLst>
+              <a:gd name="adj" fmla="val 9615"/>
+            </a:avLst>
+          </a:prstGeom>
+          <a:solidFill>
+            <a:srgbClr val="FFFFFF"/>
+          </a:solidFill>
+          <a:ln w="12700">
+            <a:solidFill>
+              <a:srgbClr val="0D9488"/>
+            </a:solidFill>
+            <a:prstDash val="solid"/>
+          </a:ln>
+        </p:spPr>
+      </p:sp>
+      <p:sp>
+        <p:nvSpPr>
+          <p:cNvPr id="35" name="Text 33"/>
+          <p:cNvSpPr/>
+          <p:nvPr/>
+        </p:nvSpPr>
+        <p:spPr>
+          <a:xfrm>
+            <a:off x="6428232" y="3364992"/>
+            <a:ext cx="1645920" cy="475488"/>
+          </a:xfrm>
+          <a:prstGeom prst="rect">
+            <a:avLst/>
+          </a:prstGeom>
+          <a:noFill/>
+          <a:ln/>
+        </p:spPr>
+        <p:txBody>
+          <a:bodyPr wrap="square" lIns="0" tIns="0" rIns="0" bIns="0" rtlCol="0" anchor="ctr"/>
+          <a:lstStyle/>
+          <a:p>
+            <a:pPr algn="ctr" indent="0" marL="0">
+              <a:buNone/>
+            </a:pPr>
+            <a:r>
+              <a:rPr lang="en-US" sz="1400" b="1" dirty="0">
+                <a:solidFill>
+                  <a:srgbClr val="0D9488"/>
+                </a:solidFill>
+                <a:latin typeface="Trebuchet MS" pitchFamily="34" charset="0"/>
+                <a:ea typeface="Trebuchet MS" pitchFamily="34" charset="-122"/>
+                <a:cs typeface="Trebuchet MS" pitchFamily="34" charset="-120"/>
+              </a:rPr>
+              <a:t>ly</a:t>
+            </a:r>
+            <a:endParaRPr lang="en-US" sz="1400" dirty="0"/>
+          </a:p>
+        </p:txBody>
+      </p:sp>
+      <p:sp>
+        <p:nvSpPr>
+          <p:cNvPr id="36" name="Shape 34"/>
           <p:cNvSpPr/>
           <p:nvPr/>
         </p:nvSpPr>
@@ -13803,7 +14054,7 @@
       </p:sp>
       <p:sp>
         <p:nvSpPr>
-          <p:cNvPr id="32" name="Text 30"/>
+          <p:cNvPr id="37" name="Text 35"/>
           <p:cNvSpPr/>
           <p:nvPr/>
         </p:nvSpPr>
@@ -13842,7 +14093,7 @@
       </p:sp>
       <p:sp>
         <p:nvSpPr>
-          <p:cNvPr id="33" name="Shape 31"/>
+          <p:cNvPr id="38" name="Shape 36"/>
           <p:cNvSpPr/>
           <p:nvPr/>
         </p:nvSpPr>
@@ -13869,7 +14120,7 @@
       </p:sp>
       <p:sp>
         <p:nvSpPr>
-          <p:cNvPr id="34" name="Text 32"/>
+          <p:cNvPr id="39" name="Text 37"/>
           <p:cNvSpPr/>
           <p:nvPr/>
         </p:nvSpPr>
@@ -14101,7 +14352,7 @@
                 <a:ea typeface="Calibri" pitchFamily="34" charset="-122"/>
                 <a:cs typeface="Calibri" pitchFamily="34" charset="-120"/>
               </a:rPr>
-              <a:t>Root 'hope' — wish for something good</a:t>
+              <a:t>Root 'hope' — to wish for something good</a:t>
             </a:r>
             <a:endParaRPr lang="en-US" sz="1600" dirty="0"/>
           </a:p>
@@ -14457,7 +14708,7 @@
                 <a:ea typeface="Calibri" pitchFamily="34" charset="-122"/>
                 <a:cs typeface="Calibri" pitchFamily="34" charset="-120"/>
               </a:rPr>
-              <a:t>Word Labs  •  wordlabs.app  •  Root: 'hope' = wish for something good</a:t>
+              <a:t>Word Labs  •  wordlabs.app  •  Root: 'hope' = to wish for something good</a:t>
             </a:r>
             <a:endParaRPr lang="en-US" sz="800" dirty="0"/>
           </a:p>
@@ -14596,7 +14847,7 @@
                 <a:ea typeface="Trebuchet MS" pitchFamily="34" charset="-122"/>
                 <a:cs typeface="Trebuchet MS" pitchFamily="34" charset="-120"/>
               </a:rPr>
-              <a:t>hoping</a:t>
+              <a:t>hopefully</a:t>
             </a:r>
             <a:endParaRPr lang="en-US" sz="2800" dirty="0"/>
           </a:p>
@@ -14676,7 +14927,7 @@
         </p:nvSpPr>
         <p:spPr>
           <a:xfrm>
-            <a:off x="2938272" y="2258568"/>
+            <a:off x="2221992" y="2258568"/>
             <a:ext cx="1828800" cy="292608"/>
           </a:xfrm>
           <a:prstGeom prst="rect">
@@ -14710,7 +14961,7 @@
         </p:nvSpPr>
         <p:spPr>
           <a:xfrm>
-            <a:off x="2938272" y="2258568"/>
+            <a:off x="2221992" y="2258568"/>
             <a:ext cx="1828800" cy="292608"/>
           </a:xfrm>
           <a:prstGeom prst="rect">
@@ -14749,7 +15000,7 @@
         </p:nvSpPr>
         <p:spPr>
           <a:xfrm>
-            <a:off x="2938272" y="2569464"/>
+            <a:off x="2221992" y="2569464"/>
             <a:ext cx="1828800" cy="201168"/>
           </a:xfrm>
           <a:prstGeom prst="rect">
@@ -14774,7 +15025,7 @@
                 <a:ea typeface="Calibri" pitchFamily="34" charset="-122"/>
                 <a:cs typeface="Calibri" pitchFamily="34" charset="-120"/>
               </a:rPr>
-              <a:t>wish for something good</a:t>
+              <a:t>to wish for something good</a:t>
             </a:r>
             <a:endParaRPr lang="en-US" sz="850" dirty="0"/>
           </a:p>
@@ -14782,52 +15033,13 @@
       </p:sp>
       <p:sp>
         <p:nvSpPr>
-          <p:cNvPr id="19" name="Text 17"/>
-          <p:cNvSpPr/>
-          <p:nvPr/>
-        </p:nvSpPr>
-        <p:spPr>
-          <a:xfrm>
-            <a:off x="2938272" y="2752344"/>
-            <a:ext cx="1828800" cy="182880"/>
-          </a:xfrm>
-          <a:prstGeom prst="rect">
-            <a:avLst/>
-          </a:prstGeom>
-          <a:noFill/>
-          <a:ln/>
-        </p:spPr>
-        <p:txBody>
-          <a:bodyPr wrap="square" lIns="0" tIns="0" rIns="0" bIns="0" rtlCol="0" anchor="t"/>
-          <a:lstStyle/>
-          <a:p>
-            <a:pPr algn="ctr" indent="0" marL="0">
-              <a:buNone/>
-            </a:pPr>
-            <a:r>
-              <a:rPr lang="en-US" sz="700" i="1" dirty="0">
-                <a:solidFill>
-                  <a:srgbClr val="94A3B8"/>
-                </a:solidFill>
-                <a:latin typeface="Calibri" pitchFamily="34" charset="0"/>
-                <a:ea typeface="Calibri" pitchFamily="34" charset="-122"/>
-                <a:cs typeface="Calibri" pitchFamily="34" charset="-120"/>
-              </a:rPr>
-              <a:t>'e' dropped before vowel suffix</a:t>
-            </a:r>
-            <a:endParaRPr lang="en-US" sz="700" dirty="0"/>
-          </a:p>
-        </p:txBody>
-      </p:sp>
-      <p:sp>
-        <p:nvSpPr>
-          <p:cNvPr id="20" name="Shape 18"/>
-          <p:cNvSpPr/>
-          <p:nvPr/>
-        </p:nvSpPr>
-        <p:spPr>
-          <a:xfrm>
-            <a:off x="5803392" y="2258568"/>
+          <p:cNvPr id="19" name="Shape 17"/>
+          <p:cNvSpPr/>
+          <p:nvPr/>
+        </p:nvSpPr>
+        <p:spPr>
+          <a:xfrm>
+            <a:off x="4370832" y="2258568"/>
             <a:ext cx="1828800" cy="292608"/>
           </a:xfrm>
           <a:prstGeom prst="rect">
@@ -14855,13 +15067,13 @@
       </p:sp>
       <p:sp>
         <p:nvSpPr>
-          <p:cNvPr id="21" name="Text 19"/>
-          <p:cNvSpPr/>
-          <p:nvPr/>
-        </p:nvSpPr>
-        <p:spPr>
-          <a:xfrm>
-            <a:off x="5803392" y="2258568"/>
+          <p:cNvPr id="20" name="Text 18"/>
+          <p:cNvSpPr/>
+          <p:nvPr/>
+        </p:nvSpPr>
+        <p:spPr>
+          <a:xfrm>
+            <a:off x="4370832" y="2258568"/>
             <a:ext cx="1828800" cy="292608"/>
           </a:xfrm>
           <a:prstGeom prst="rect">
@@ -14886,7 +15098,7 @@
                 <a:ea typeface="Trebuchet MS" pitchFamily="34" charset="-122"/>
                 <a:cs typeface="Trebuchet MS" pitchFamily="34" charset="-120"/>
               </a:rPr>
-              <a:t>ing</a:t>
+              <a:t>ful</a:t>
             </a:r>
             <a:endParaRPr lang="en-US" sz="1300" dirty="0"/>
           </a:p>
@@ -14894,13 +15106,13 @@
       </p:sp>
       <p:sp>
         <p:nvSpPr>
-          <p:cNvPr id="22" name="Text 20"/>
-          <p:cNvSpPr/>
-          <p:nvPr/>
-        </p:nvSpPr>
-        <p:spPr>
-          <a:xfrm>
-            <a:off x="5803392" y="2569464"/>
+          <p:cNvPr id="21" name="Text 19"/>
+          <p:cNvSpPr/>
+          <p:nvPr/>
+        </p:nvSpPr>
+        <p:spPr>
+          <a:xfrm>
+            <a:off x="4370832" y="2569464"/>
             <a:ext cx="1828800" cy="201168"/>
           </a:xfrm>
           <a:prstGeom prst="rect">
@@ -14925,7 +15137,7 @@
                 <a:ea typeface="Calibri" pitchFamily="34" charset="-122"/>
                 <a:cs typeface="Calibri" pitchFamily="34" charset="-120"/>
               </a:rPr>
-              <a:t>in the process of doing</a:t>
+              <a:t>full of</a:t>
             </a:r>
             <a:endParaRPr lang="en-US" sz="850" dirty="0"/>
           </a:p>
@@ -14933,7 +15145,119 @@
       </p:sp>
       <p:sp>
         <p:nvSpPr>
-          <p:cNvPr id="23" name="Shape 21"/>
+          <p:cNvPr id="22" name="Shape 20"/>
+          <p:cNvSpPr/>
+          <p:nvPr/>
+        </p:nvSpPr>
+        <p:spPr>
+          <a:xfrm>
+            <a:off x="6519672" y="2258568"/>
+            <a:ext cx="1828800" cy="292608"/>
+          </a:xfrm>
+          <a:prstGeom prst="rect">
+            <a:avLst>
+              <a:gd name="adj" fmla="val 25000"/>
+            </a:avLst>
+          </a:prstGeom>
+          <a:solidFill>
+            <a:srgbClr val="FCE7F3"/>
+          </a:solidFill>
+          <a:ln w="19050">
+            <a:solidFill>
+              <a:srgbClr val="DB2777"/>
+            </a:solidFill>
+            <a:prstDash val="solid"/>
+          </a:ln>
+          <a:effectLst>
+            <a:outerShdw sx="100000" sy="100000" kx="0" ky="0" algn="bl" rotWithShape="0" blurRad="101600" dist="38100" dir="8100000">
+              <a:srgbClr val="000000">
+                <a:alpha val="12000"/>
+              </a:srgbClr>
+            </a:outerShdw>
+          </a:effectLst>
+        </p:spPr>
+      </p:sp>
+      <p:sp>
+        <p:nvSpPr>
+          <p:cNvPr id="23" name="Text 21"/>
+          <p:cNvSpPr/>
+          <p:nvPr/>
+        </p:nvSpPr>
+        <p:spPr>
+          <a:xfrm>
+            <a:off x="6519672" y="2258568"/>
+            <a:ext cx="1828800" cy="292608"/>
+          </a:xfrm>
+          <a:prstGeom prst="rect">
+            <a:avLst/>
+          </a:prstGeom>
+          <a:noFill/>
+          <a:ln/>
+        </p:spPr>
+        <p:txBody>
+          <a:bodyPr wrap="square" lIns="0" tIns="0" rIns="0" bIns="0" rtlCol="0" anchor="ctr"/>
+          <a:lstStyle/>
+          <a:p>
+            <a:pPr algn="ctr" indent="0" marL="0">
+              <a:buNone/>
+            </a:pPr>
+            <a:r>
+              <a:rPr lang="en-US" sz="1300" b="1" dirty="0">
+                <a:solidFill>
+                  <a:srgbClr val="9D174D"/>
+                </a:solidFill>
+                <a:latin typeface="Trebuchet MS" pitchFamily="34" charset="0"/>
+                <a:ea typeface="Trebuchet MS" pitchFamily="34" charset="-122"/>
+                <a:cs typeface="Trebuchet MS" pitchFamily="34" charset="-120"/>
+              </a:rPr>
+              <a:t>ly</a:t>
+            </a:r>
+            <a:endParaRPr lang="en-US" sz="1300" dirty="0"/>
+          </a:p>
+        </p:txBody>
+      </p:sp>
+      <p:sp>
+        <p:nvSpPr>
+          <p:cNvPr id="24" name="Text 22"/>
+          <p:cNvSpPr/>
+          <p:nvPr/>
+        </p:nvSpPr>
+        <p:spPr>
+          <a:xfrm>
+            <a:off x="6519672" y="2569464"/>
+            <a:ext cx="1828800" cy="201168"/>
+          </a:xfrm>
+          <a:prstGeom prst="rect">
+            <a:avLst/>
+          </a:prstGeom>
+          <a:noFill/>
+          <a:ln/>
+        </p:spPr>
+        <p:txBody>
+          <a:bodyPr wrap="square" lIns="0" tIns="0" rIns="0" bIns="0" rtlCol="0" anchor="t"/>
+          <a:lstStyle/>
+          <a:p>
+            <a:pPr algn="ctr" indent="0" marL="0">
+              <a:buNone/>
+            </a:pPr>
+            <a:r>
+              <a:rPr lang="en-US" sz="850" dirty="0">
+                <a:solidFill>
+                  <a:srgbClr val="475569"/>
+                </a:solidFill>
+                <a:latin typeface="Calibri" pitchFamily="34" charset="0"/>
+                <a:ea typeface="Calibri" pitchFamily="34" charset="-122"/>
+                <a:cs typeface="Calibri" pitchFamily="34" charset="-120"/>
+              </a:rPr>
+              <a:t>in a way</a:t>
+            </a:r>
+            <a:endParaRPr lang="en-US" sz="850" dirty="0"/>
+          </a:p>
+        </p:txBody>
+      </p:sp>
+      <p:sp>
+        <p:nvSpPr>
+          <p:cNvPr id="25" name="Shape 23"/>
           <p:cNvSpPr/>
           <p:nvPr/>
         </p:nvSpPr>
@@ -14960,7 +15284,7 @@
       </p:sp>
       <p:sp>
         <p:nvSpPr>
-          <p:cNvPr id="24" name="Text 22"/>
+          <p:cNvPr id="26" name="Text 24"/>
           <p:cNvSpPr/>
           <p:nvPr/>
         </p:nvSpPr>
@@ -14999,7 +15323,7 @@
       </p:sp>
       <p:sp>
         <p:nvSpPr>
-          <p:cNvPr id="25" name="Shape 23"/>
+          <p:cNvPr id="27" name="Shape 25"/>
           <p:cNvSpPr/>
           <p:nvPr/>
         </p:nvSpPr>
@@ -15026,13 +15350,13 @@
       </p:sp>
       <p:sp>
         <p:nvSpPr>
-          <p:cNvPr id="26" name="Shape 24"/>
-          <p:cNvSpPr/>
-          <p:nvPr/>
-        </p:nvSpPr>
-        <p:spPr>
-          <a:xfrm>
-            <a:off x="2999232" y="3364992"/>
+          <p:cNvPr id="28" name="Shape 26"/>
+          <p:cNvSpPr/>
+          <p:nvPr/>
+        </p:nvSpPr>
+        <p:spPr>
+          <a:xfrm>
+            <a:off x="2313432" y="3364992"/>
             <a:ext cx="1645920" cy="475488"/>
           </a:xfrm>
           <a:prstGeom prst="rect">
@@ -15053,13 +15377,13 @@
       </p:sp>
       <p:sp>
         <p:nvSpPr>
-          <p:cNvPr id="27" name="Text 25"/>
-          <p:cNvSpPr/>
-          <p:nvPr/>
-        </p:nvSpPr>
-        <p:spPr>
-          <a:xfrm>
-            <a:off x="2999232" y="3364992"/>
+          <p:cNvPr id="29" name="Text 27"/>
+          <p:cNvSpPr/>
+          <p:nvPr/>
+        </p:nvSpPr>
+        <p:spPr>
+          <a:xfrm>
+            <a:off x="2313432" y="3364992"/>
             <a:ext cx="1645920" cy="475488"/>
           </a:xfrm>
           <a:prstGeom prst="rect">
@@ -15084,7 +15408,7 @@
                 <a:ea typeface="Trebuchet MS" pitchFamily="34" charset="-122"/>
                 <a:cs typeface="Trebuchet MS" pitchFamily="34" charset="-120"/>
               </a:rPr>
-              <a:t>ho</a:t>
+              <a:t>hope</a:t>
             </a:r>
             <a:endParaRPr lang="en-US" sz="1400" dirty="0"/>
           </a:p>
@@ -15092,14 +15416,14 @@
       </p:sp>
       <p:sp>
         <p:nvSpPr>
-          <p:cNvPr id="28" name="Text 26"/>
-          <p:cNvSpPr/>
-          <p:nvPr/>
-        </p:nvSpPr>
-        <p:spPr>
-          <a:xfrm>
-            <a:off x="4645152" y="3364992"/>
-            <a:ext cx="1097280" cy="475488"/>
+          <p:cNvPr id="30" name="Text 28"/>
+          <p:cNvSpPr/>
+          <p:nvPr/>
+        </p:nvSpPr>
+        <p:spPr>
+          <a:xfrm>
+            <a:off x="3959352" y="3364992"/>
+            <a:ext cx="411480" cy="475488"/>
           </a:xfrm>
           <a:prstGeom prst="rect">
             <a:avLst/>
@@ -15131,13 +15455,13 @@
       </p:sp>
       <p:sp>
         <p:nvSpPr>
-          <p:cNvPr id="29" name="Shape 27"/>
-          <p:cNvSpPr/>
-          <p:nvPr/>
-        </p:nvSpPr>
-        <p:spPr>
-          <a:xfrm>
-            <a:off x="5742432" y="3364992"/>
+          <p:cNvPr id="31" name="Shape 29"/>
+          <p:cNvSpPr/>
+          <p:nvPr/>
+        </p:nvSpPr>
+        <p:spPr>
+          <a:xfrm>
+            <a:off x="4370832" y="3364992"/>
             <a:ext cx="1645920" cy="475488"/>
           </a:xfrm>
           <a:prstGeom prst="rect">
@@ -15158,13 +15482,13 @@
       </p:sp>
       <p:sp>
         <p:nvSpPr>
-          <p:cNvPr id="30" name="Text 28"/>
-          <p:cNvSpPr/>
-          <p:nvPr/>
-        </p:nvSpPr>
-        <p:spPr>
-          <a:xfrm>
-            <a:off x="5742432" y="3364992"/>
+          <p:cNvPr id="32" name="Text 30"/>
+          <p:cNvSpPr/>
+          <p:nvPr/>
+        </p:nvSpPr>
+        <p:spPr>
+          <a:xfrm>
+            <a:off x="4370832" y="3364992"/>
             <a:ext cx="1645920" cy="475488"/>
           </a:xfrm>
           <a:prstGeom prst="rect">
@@ -15189,7 +15513,7 @@
                 <a:ea typeface="Trebuchet MS" pitchFamily="34" charset="-122"/>
                 <a:cs typeface="Trebuchet MS" pitchFamily="34" charset="-120"/>
               </a:rPr>
-              <a:t>ping</a:t>
+              <a:t>ful</a:t>
             </a:r>
             <a:endParaRPr lang="en-US" sz="1400" dirty="0"/>
           </a:p>
@@ -15197,7 +15521,112 @@
       </p:sp>
       <p:sp>
         <p:nvSpPr>
-          <p:cNvPr id="31" name="Shape 29"/>
+          <p:cNvPr id="33" name="Text 31"/>
+          <p:cNvSpPr/>
+          <p:nvPr/>
+        </p:nvSpPr>
+        <p:spPr>
+          <a:xfrm>
+            <a:off x="6016752" y="3364992"/>
+            <a:ext cx="411480" cy="475488"/>
+          </a:xfrm>
+          <a:prstGeom prst="rect">
+            <a:avLst/>
+          </a:prstGeom>
+          <a:noFill/>
+          <a:ln/>
+        </p:spPr>
+        <p:txBody>
+          <a:bodyPr wrap="square" lIns="0" tIns="0" rIns="0" bIns="0" rtlCol="0" anchor="ctr"/>
+          <a:lstStyle/>
+          <a:p>
+            <a:pPr algn="ctr" indent="0" marL="0">
+              <a:buNone/>
+            </a:pPr>
+            <a:r>
+              <a:rPr lang="en-US" sz="1600" b="1" dirty="0">
+                <a:solidFill>
+                  <a:srgbClr val="0D9488"/>
+                </a:solidFill>
+                <a:latin typeface="Trebuchet MS" pitchFamily="34" charset="0"/>
+                <a:ea typeface="Trebuchet MS" pitchFamily="34" charset="-122"/>
+                <a:cs typeface="Trebuchet MS" pitchFamily="34" charset="-120"/>
+              </a:rPr>
+              <a:t>·</a:t>
+            </a:r>
+            <a:endParaRPr lang="en-US" sz="1600" dirty="0"/>
+          </a:p>
+        </p:txBody>
+      </p:sp>
+      <p:sp>
+        <p:nvSpPr>
+          <p:cNvPr id="34" name="Shape 32"/>
+          <p:cNvSpPr/>
+          <p:nvPr/>
+        </p:nvSpPr>
+        <p:spPr>
+          <a:xfrm>
+            <a:off x="6428232" y="3364992"/>
+            <a:ext cx="1645920" cy="475488"/>
+          </a:xfrm>
+          <a:prstGeom prst="rect">
+            <a:avLst>
+              <a:gd name="adj" fmla="val 9615"/>
+            </a:avLst>
+          </a:prstGeom>
+          <a:solidFill>
+            <a:srgbClr val="FFFFFF"/>
+          </a:solidFill>
+          <a:ln w="12700">
+            <a:solidFill>
+              <a:srgbClr val="0D9488"/>
+            </a:solidFill>
+            <a:prstDash val="solid"/>
+          </a:ln>
+        </p:spPr>
+      </p:sp>
+      <p:sp>
+        <p:nvSpPr>
+          <p:cNvPr id="35" name="Text 33"/>
+          <p:cNvSpPr/>
+          <p:nvPr/>
+        </p:nvSpPr>
+        <p:spPr>
+          <a:xfrm>
+            <a:off x="6428232" y="3364992"/>
+            <a:ext cx="1645920" cy="475488"/>
+          </a:xfrm>
+          <a:prstGeom prst="rect">
+            <a:avLst/>
+          </a:prstGeom>
+          <a:noFill/>
+          <a:ln/>
+        </p:spPr>
+        <p:txBody>
+          <a:bodyPr wrap="square" lIns="0" tIns="0" rIns="0" bIns="0" rtlCol="0" anchor="ctr"/>
+          <a:lstStyle/>
+          <a:p>
+            <a:pPr algn="ctr" indent="0" marL="0">
+              <a:buNone/>
+            </a:pPr>
+            <a:r>
+              <a:rPr lang="en-US" sz="1400" b="1" dirty="0">
+                <a:solidFill>
+                  <a:srgbClr val="0D9488"/>
+                </a:solidFill>
+                <a:latin typeface="Trebuchet MS" pitchFamily="34" charset="0"/>
+                <a:ea typeface="Trebuchet MS" pitchFamily="34" charset="-122"/>
+                <a:cs typeface="Trebuchet MS" pitchFamily="34" charset="-120"/>
+              </a:rPr>
+              <a:t>ly</a:t>
+            </a:r>
+            <a:endParaRPr lang="en-US" sz="1400" dirty="0"/>
+          </a:p>
+        </p:txBody>
+      </p:sp>
+      <p:sp>
+        <p:nvSpPr>
+          <p:cNvPr id="36" name="Shape 34"/>
           <p:cNvSpPr/>
           <p:nvPr/>
         </p:nvSpPr>
@@ -15224,7 +15653,7 @@
       </p:sp>
       <p:sp>
         <p:nvSpPr>
-          <p:cNvPr id="32" name="Text 30"/>
+          <p:cNvPr id="37" name="Text 35"/>
           <p:cNvSpPr/>
           <p:nvPr/>
         </p:nvSpPr>
@@ -15263,7 +15692,7 @@
       </p:sp>
       <p:sp>
         <p:nvSpPr>
-          <p:cNvPr id="33" name="Shape 31"/>
+          <p:cNvPr id="38" name="Shape 36"/>
           <p:cNvSpPr/>
           <p:nvPr/>
         </p:nvSpPr>
@@ -15290,13 +15719,13 @@
       </p:sp>
       <p:sp>
         <p:nvSpPr>
-          <p:cNvPr id="34" name="Shape 32"/>
-          <p:cNvSpPr/>
-          <p:nvPr/>
-        </p:nvSpPr>
-        <p:spPr>
-          <a:xfrm>
-            <a:off x="2427732" y="4169664"/>
+          <p:cNvPr id="39" name="Shape 37"/>
+          <p:cNvSpPr/>
+          <p:nvPr/>
+        </p:nvSpPr>
+        <p:spPr>
+          <a:xfrm>
+            <a:off x="2023872" y="4169664"/>
             <a:ext cx="685800" cy="475488"/>
           </a:xfrm>
           <a:prstGeom prst="rect">
@@ -15317,13 +15746,13 @@
       </p:sp>
       <p:sp>
         <p:nvSpPr>
-          <p:cNvPr id="35" name="Text 33"/>
-          <p:cNvSpPr/>
-          <p:nvPr/>
-        </p:nvSpPr>
-        <p:spPr>
-          <a:xfrm>
-            <a:off x="2427732" y="4169664"/>
+          <p:cNvPr id="40" name="Text 38"/>
+          <p:cNvSpPr/>
+          <p:nvPr/>
+        </p:nvSpPr>
+        <p:spPr>
+          <a:xfrm>
+            <a:off x="2023872" y="4169664"/>
             <a:ext cx="685800" cy="475488"/>
           </a:xfrm>
           <a:prstGeom prst="rect">
@@ -15356,13 +15785,13 @@
       </p:sp>
       <p:sp>
         <p:nvSpPr>
-          <p:cNvPr id="36" name="Shape 34"/>
-          <p:cNvSpPr/>
-          <p:nvPr/>
-        </p:nvSpPr>
-        <p:spPr>
-          <a:xfrm>
-            <a:off x="3639312" y="4169664"/>
+          <p:cNvPr id="41" name="Shape 39"/>
+          <p:cNvSpPr/>
+          <p:nvPr/>
+        </p:nvSpPr>
+        <p:spPr>
+          <a:xfrm>
+            <a:off x="2831592" y="4169664"/>
             <a:ext cx="685800" cy="475488"/>
           </a:xfrm>
           <a:prstGeom prst="rect">
@@ -15383,13 +15812,13 @@
       </p:sp>
       <p:sp>
         <p:nvSpPr>
-          <p:cNvPr id="37" name="Text 35"/>
-          <p:cNvSpPr/>
-          <p:nvPr/>
-        </p:nvSpPr>
-        <p:spPr>
-          <a:xfrm>
-            <a:off x="3639312" y="4169664"/>
+          <p:cNvPr id="42" name="Text 40"/>
+          <p:cNvSpPr/>
+          <p:nvPr/>
+        </p:nvSpPr>
+        <p:spPr>
+          <a:xfrm>
+            <a:off x="2831592" y="4169664"/>
             <a:ext cx="685800" cy="475488"/>
           </a:xfrm>
           <a:prstGeom prst="rect">
@@ -15414,7 +15843,7 @@
                 <a:ea typeface="Trebuchet MS" pitchFamily="34" charset="-122"/>
                 <a:cs typeface="Trebuchet MS" pitchFamily="34" charset="-120"/>
               </a:rPr>
-              <a:t>o</a:t>
+              <a:t>o_e</a:t>
             </a:r>
             <a:endParaRPr lang="en-US" sz="900" dirty="0"/>
           </a:p>
@@ -15422,13 +15851,13 @@
       </p:sp>
       <p:sp>
         <p:nvSpPr>
-          <p:cNvPr id="38" name="Shape 36"/>
-          <p:cNvSpPr/>
-          <p:nvPr/>
-        </p:nvSpPr>
-        <p:spPr>
-          <a:xfrm>
-            <a:off x="4850892" y="4169664"/>
+          <p:cNvPr id="43" name="Shape 41"/>
+          <p:cNvSpPr/>
+          <p:nvPr/>
+        </p:nvSpPr>
+        <p:spPr>
+          <a:xfrm>
+            <a:off x="3639312" y="4169664"/>
             <a:ext cx="685800" cy="475488"/>
           </a:xfrm>
           <a:prstGeom prst="rect">
@@ -15449,13 +15878,13 @@
       </p:sp>
       <p:sp>
         <p:nvSpPr>
-          <p:cNvPr id="39" name="Text 37"/>
-          <p:cNvSpPr/>
-          <p:nvPr/>
-        </p:nvSpPr>
-        <p:spPr>
-          <a:xfrm>
-            <a:off x="4850892" y="4169664"/>
+          <p:cNvPr id="44" name="Text 42"/>
+          <p:cNvSpPr/>
+          <p:nvPr/>
+        </p:nvSpPr>
+        <p:spPr>
+          <a:xfrm>
+            <a:off x="3639312" y="4169664"/>
             <a:ext cx="685800" cy="475488"/>
           </a:xfrm>
           <a:prstGeom prst="rect">
@@ -15488,13 +15917,13 @@
       </p:sp>
       <p:sp>
         <p:nvSpPr>
-          <p:cNvPr id="40" name="Shape 38"/>
-          <p:cNvSpPr/>
-          <p:nvPr/>
-        </p:nvSpPr>
-        <p:spPr>
-          <a:xfrm>
-            <a:off x="6062472" y="4169664"/>
+          <p:cNvPr id="45" name="Shape 43"/>
+          <p:cNvSpPr/>
+          <p:nvPr/>
+        </p:nvSpPr>
+        <p:spPr>
+          <a:xfrm>
+            <a:off x="4447032" y="4169664"/>
             <a:ext cx="685800" cy="475488"/>
           </a:xfrm>
           <a:prstGeom prst="rect">
@@ -15515,13 +15944,13 @@
       </p:sp>
       <p:sp>
         <p:nvSpPr>
-          <p:cNvPr id="41" name="Text 39"/>
-          <p:cNvSpPr/>
-          <p:nvPr/>
-        </p:nvSpPr>
-        <p:spPr>
-          <a:xfrm>
-            <a:off x="6062472" y="4169664"/>
+          <p:cNvPr id="46" name="Text 44"/>
+          <p:cNvSpPr/>
+          <p:nvPr/>
+        </p:nvSpPr>
+        <p:spPr>
+          <a:xfrm>
+            <a:off x="4447032" y="4169664"/>
             <a:ext cx="685800" cy="475488"/>
           </a:xfrm>
           <a:prstGeom prst="rect">
@@ -15546,7 +15975,7 @@
                 <a:ea typeface="Trebuchet MS" pitchFamily="34" charset="-122"/>
                 <a:cs typeface="Trebuchet MS" pitchFamily="34" charset="-120"/>
               </a:rPr>
-              <a:t>i</a:t>
+              <a:t>f</a:t>
             </a:r>
             <a:endParaRPr lang="en-US" sz="900" dirty="0"/>
           </a:p>
@@ -15554,13 +15983,13 @@
       </p:sp>
       <p:sp>
         <p:nvSpPr>
-          <p:cNvPr id="42" name="Shape 40"/>
-          <p:cNvSpPr/>
-          <p:nvPr/>
-        </p:nvSpPr>
-        <p:spPr>
-          <a:xfrm>
-            <a:off x="7274052" y="4169664"/>
+          <p:cNvPr id="47" name="Shape 45"/>
+          <p:cNvSpPr/>
+          <p:nvPr/>
+        </p:nvSpPr>
+        <p:spPr>
+          <a:xfrm>
+            <a:off x="5254752" y="4169664"/>
             <a:ext cx="685800" cy="475488"/>
           </a:xfrm>
           <a:prstGeom prst="rect">
@@ -15581,13 +16010,13 @@
       </p:sp>
       <p:sp>
         <p:nvSpPr>
-          <p:cNvPr id="43" name="Text 41"/>
-          <p:cNvSpPr/>
-          <p:nvPr/>
-        </p:nvSpPr>
-        <p:spPr>
-          <a:xfrm>
-            <a:off x="7274052" y="4169664"/>
+          <p:cNvPr id="48" name="Text 46"/>
+          <p:cNvSpPr/>
+          <p:nvPr/>
+        </p:nvSpPr>
+        <p:spPr>
+          <a:xfrm>
+            <a:off x="5254752" y="4169664"/>
             <a:ext cx="685800" cy="475488"/>
           </a:xfrm>
           <a:prstGeom prst="rect">
@@ -15612,7 +16041,205 @@
                 <a:ea typeface="Trebuchet MS" pitchFamily="34" charset="-122"/>
                 <a:cs typeface="Trebuchet MS" pitchFamily="34" charset="-120"/>
               </a:rPr>
-              <a:t>ng</a:t>
+              <a:t>u</a:t>
+            </a:r>
+            <a:endParaRPr lang="en-US" sz="900" dirty="0"/>
+          </a:p>
+        </p:txBody>
+      </p:sp>
+      <p:sp>
+        <p:nvSpPr>
+          <p:cNvPr id="49" name="Shape 47"/>
+          <p:cNvSpPr/>
+          <p:nvPr/>
+        </p:nvSpPr>
+        <p:spPr>
+          <a:xfrm>
+            <a:off x="6062472" y="4169664"/>
+            <a:ext cx="685800" cy="475488"/>
+          </a:xfrm>
+          <a:prstGeom prst="rect">
+            <a:avLst>
+              <a:gd name="adj" fmla="val 7692"/>
+            </a:avLst>
+          </a:prstGeom>
+          <a:solidFill>
+            <a:srgbClr val="FFFFFF"/>
+          </a:solidFill>
+          <a:ln w="12700">
+            <a:solidFill>
+              <a:srgbClr val="DB2777"/>
+            </a:solidFill>
+            <a:prstDash val="solid"/>
+          </a:ln>
+        </p:spPr>
+      </p:sp>
+      <p:sp>
+        <p:nvSpPr>
+          <p:cNvPr id="50" name="Text 48"/>
+          <p:cNvSpPr/>
+          <p:nvPr/>
+        </p:nvSpPr>
+        <p:spPr>
+          <a:xfrm>
+            <a:off x="6062472" y="4169664"/>
+            <a:ext cx="685800" cy="475488"/>
+          </a:xfrm>
+          <a:prstGeom prst="rect">
+            <a:avLst/>
+          </a:prstGeom>
+          <a:noFill/>
+          <a:ln/>
+        </p:spPr>
+        <p:txBody>
+          <a:bodyPr wrap="square" lIns="0" tIns="0" rIns="0" bIns="0" rtlCol="0" anchor="ctr"/>
+          <a:lstStyle/>
+          <a:p>
+            <a:pPr algn="ctr" indent="0" marL="0">
+              <a:buNone/>
+            </a:pPr>
+            <a:r>
+              <a:rPr lang="en-US" sz="900" b="1" dirty="0">
+                <a:solidFill>
+                  <a:srgbClr val="9D174D"/>
+                </a:solidFill>
+                <a:latin typeface="Trebuchet MS" pitchFamily="34" charset="0"/>
+                <a:ea typeface="Trebuchet MS" pitchFamily="34" charset="-122"/>
+                <a:cs typeface="Trebuchet MS" pitchFamily="34" charset="-120"/>
+              </a:rPr>
+              <a:t>l</a:t>
+            </a:r>
+            <a:endParaRPr lang="en-US" sz="900" dirty="0"/>
+          </a:p>
+        </p:txBody>
+      </p:sp>
+      <p:sp>
+        <p:nvSpPr>
+          <p:cNvPr id="51" name="Shape 49"/>
+          <p:cNvSpPr/>
+          <p:nvPr/>
+        </p:nvSpPr>
+        <p:spPr>
+          <a:xfrm>
+            <a:off x="6870192" y="4169664"/>
+            <a:ext cx="685800" cy="475488"/>
+          </a:xfrm>
+          <a:prstGeom prst="rect">
+            <a:avLst>
+              <a:gd name="adj" fmla="val 7692"/>
+            </a:avLst>
+          </a:prstGeom>
+          <a:solidFill>
+            <a:srgbClr val="FFFFFF"/>
+          </a:solidFill>
+          <a:ln w="12700">
+            <a:solidFill>
+              <a:srgbClr val="DB2777"/>
+            </a:solidFill>
+            <a:prstDash val="solid"/>
+          </a:ln>
+        </p:spPr>
+      </p:sp>
+      <p:sp>
+        <p:nvSpPr>
+          <p:cNvPr id="52" name="Text 50"/>
+          <p:cNvSpPr/>
+          <p:nvPr/>
+        </p:nvSpPr>
+        <p:spPr>
+          <a:xfrm>
+            <a:off x="6870192" y="4169664"/>
+            <a:ext cx="685800" cy="475488"/>
+          </a:xfrm>
+          <a:prstGeom prst="rect">
+            <a:avLst/>
+          </a:prstGeom>
+          <a:noFill/>
+          <a:ln/>
+        </p:spPr>
+        <p:txBody>
+          <a:bodyPr wrap="square" lIns="0" tIns="0" rIns="0" bIns="0" rtlCol="0" anchor="ctr"/>
+          <a:lstStyle/>
+          <a:p>
+            <a:pPr algn="ctr" indent="0" marL="0">
+              <a:buNone/>
+            </a:pPr>
+            <a:r>
+              <a:rPr lang="en-US" sz="900" b="1" dirty="0">
+                <a:solidFill>
+                  <a:srgbClr val="9D174D"/>
+                </a:solidFill>
+                <a:latin typeface="Trebuchet MS" pitchFamily="34" charset="0"/>
+                <a:ea typeface="Trebuchet MS" pitchFamily="34" charset="-122"/>
+                <a:cs typeface="Trebuchet MS" pitchFamily="34" charset="-120"/>
+              </a:rPr>
+              <a:t>l</a:t>
+            </a:r>
+            <a:endParaRPr lang="en-US" sz="900" dirty="0"/>
+          </a:p>
+        </p:txBody>
+      </p:sp>
+      <p:sp>
+        <p:nvSpPr>
+          <p:cNvPr id="53" name="Shape 51"/>
+          <p:cNvSpPr/>
+          <p:nvPr/>
+        </p:nvSpPr>
+        <p:spPr>
+          <a:xfrm>
+            <a:off x="7677912" y="4169664"/>
+            <a:ext cx="685800" cy="475488"/>
+          </a:xfrm>
+          <a:prstGeom prst="rect">
+            <a:avLst>
+              <a:gd name="adj" fmla="val 7692"/>
+            </a:avLst>
+          </a:prstGeom>
+          <a:solidFill>
+            <a:srgbClr val="FFFFFF"/>
+          </a:solidFill>
+          <a:ln w="12700">
+            <a:solidFill>
+              <a:srgbClr val="DB2777"/>
+            </a:solidFill>
+            <a:prstDash val="solid"/>
+          </a:ln>
+        </p:spPr>
+      </p:sp>
+      <p:sp>
+        <p:nvSpPr>
+          <p:cNvPr id="54" name="Text 52"/>
+          <p:cNvSpPr/>
+          <p:nvPr/>
+        </p:nvSpPr>
+        <p:spPr>
+          <a:xfrm>
+            <a:off x="7677912" y="4169664"/>
+            <a:ext cx="685800" cy="475488"/>
+          </a:xfrm>
+          <a:prstGeom prst="rect">
+            <a:avLst/>
+          </a:prstGeom>
+          <a:noFill/>
+          <a:ln/>
+        </p:spPr>
+        <p:txBody>
+          <a:bodyPr wrap="square" lIns="0" tIns="0" rIns="0" bIns="0" rtlCol="0" anchor="ctr"/>
+          <a:lstStyle/>
+          <a:p>
+            <a:pPr algn="ctr" indent="0" marL="0">
+              <a:buNone/>
+            </a:pPr>
+            <a:r>
+              <a:rPr lang="en-US" sz="900" b="1" dirty="0">
+                <a:solidFill>
+                  <a:srgbClr val="9D174D"/>
+                </a:solidFill>
+                <a:latin typeface="Trebuchet MS" pitchFamily="34" charset="0"/>
+                <a:ea typeface="Trebuchet MS" pitchFamily="34" charset="-122"/>
+                <a:cs typeface="Trebuchet MS" pitchFamily="34" charset="-120"/>
+              </a:rPr>
+              <a:t>y</a:t>
             </a:r>
             <a:endParaRPr lang="en-US" sz="900" dirty="0"/>
           </a:p>
@@ -16186,7 +16813,7 @@
                 <a:ea typeface="Calibri" pitchFamily="34" charset="-122"/>
                 <a:cs typeface="Calibri" pitchFamily="34" charset="-120"/>
               </a:rPr>
-              <a:t>Word Labs  •  wordlabs.app  •  Root: 'hope' = wish for something good</a:t>
+              <a:t>Word Labs  •  wordlabs.app  •  Root: 'hope' = to wish for something good</a:t>
             </a:r>
             <a:endParaRPr lang="en-US" sz="800" dirty="0"/>
           </a:p>
@@ -16520,7 +17147,7 @@
                 <a:ea typeface="Trebuchet MS" pitchFamily="34" charset="-122"/>
                 <a:cs typeface="Trebuchet MS" pitchFamily="34" charset="-120"/>
               </a:rPr>
-              <a:t>2</a:t>
+              <a:t>0</a:t>
             </a:r>
             <a:pPr algn="ctr" indent="0" marL="0">
               <a:buNone/>
@@ -16534,7 +17161,7 @@
                 <a:ea typeface="Trebuchet MS" pitchFamily="34" charset="-122"/>
                 <a:cs typeface="Trebuchet MS" pitchFamily="34" charset="-120"/>
               </a:rPr>
-              <a:t>  punctuation marks</a:t>
+              <a:t>  punctuation mark</a:t>
             </a:r>
             <a:endParaRPr lang="en-US" sz="2800" dirty="0"/>
           </a:p>
@@ -16826,7 +17453,7 @@
                 <a:ea typeface="Calibri" pitchFamily="34" charset="-122"/>
                 <a:cs typeface="Calibri" pitchFamily="34" charset="-120"/>
               </a:rPr>
-              <a:t>Word Labs  •  wordlabs.app  •  Root: 'hope' = wish for something good</a:t>
+              <a:t>Word Labs  •  wordlabs.app  •  Root: 'hope' = to wish for something good</a:t>
             </a:r>
             <a:endParaRPr lang="en-US" sz="800" dirty="0"/>
           </a:p>
@@ -16930,6 +17557,20 @@
               <a:buNone/>
             </a:pPr>
             <a:r>
+              <a:rPr lang="en-US" sz="1800" dirty="0">
+                <a:solidFill>
+                  <a:srgbClr val="0F172A"/>
+                </a:solidFill>
+                <a:latin typeface="Calibri" pitchFamily="34" charset="0"/>
+                <a:ea typeface="Calibri" pitchFamily="34" charset="-122"/>
+                <a:cs typeface="Calibri" pitchFamily="34" charset="-120"/>
+              </a:rPr>
+              <a:t>The car was </a:t>
+            </a:r>
+            <a:pPr algn="l" indent="0" marL="0">
+              <a:buNone/>
+            </a:pPr>
+            <a:r>
               <a:rPr lang="en-US" sz="1800" b="1" dirty="0">
                 <a:solidFill>
                   <a:srgbClr val="0D9488"/>
@@ -16941,7 +17582,7 @@
                 <a:ea typeface="Calibri" pitchFamily="34" charset="-122"/>
                 <a:cs typeface="Calibri" pitchFamily="34" charset="-120"/>
               </a:rPr>
-              <a:t>Hopelessly</a:t>
+              <a:t>hopelessly</a:t>
             </a:r>
             <a:pPr algn="l" indent="0" marL="0">
               <a:buNone/>
@@ -16955,7 +17596,7 @@
                 <a:ea typeface="Calibri" pitchFamily="34" charset="-122"/>
                 <a:cs typeface="Calibri" pitchFamily="34" charset="-120"/>
               </a:rPr>
-              <a:t> lost in the bush, the hiker </a:t>
+              <a:t> stuck in the mud after the storm. There was a sense of </a:t>
             </a:r>
             <a:pPr algn="l" indent="0" marL="0">
               <a:buNone/>
@@ -16972,7 +17613,7 @@
                 <a:ea typeface="Calibri" pitchFamily="34" charset="-122"/>
                 <a:cs typeface="Calibri" pitchFamily="34" charset="-120"/>
               </a:rPr>
-              <a:t>hoped</a:t>
+              <a:t>hopefulness</a:t>
             </a:r>
             <a:pPr algn="l" indent="0" marL="0">
               <a:buNone/>
@@ -16986,7 +17627,7 @@
                 <a:ea typeface="Calibri" pitchFamily="34" charset="-122"/>
                 <a:cs typeface="Calibri" pitchFamily="34" charset="-120"/>
               </a:rPr>
-              <a:t> for a sign, but felt a strange sense of </a:t>
+              <a:t> in the classroom before the results came out. A sense of </a:t>
             </a:r>
             <a:pPr algn="l" indent="0" marL="0">
               <a:buNone/>
@@ -17017,7 +17658,7 @@
                 <a:ea typeface="Calibri" pitchFamily="34" charset="-122"/>
                 <a:cs typeface="Calibri" pitchFamily="34" charset="-120"/>
               </a:rPr>
-              <a:t>.</a:t>
+              <a:t> spread through the team after conceding the final goal.</a:t>
             </a:r>
             <a:endParaRPr lang="en-US" sz="1800" dirty="0"/>
           </a:p>
@@ -17300,7 +17941,7 @@
                 <a:ea typeface="Trebuchet MS" pitchFamily="34" charset="-122"/>
                 <a:cs typeface="Trebuchet MS" pitchFamily="34" charset="-120"/>
               </a:rPr>
-              <a:t>hoped</a:t>
+              <a:t>hopefulness</a:t>
             </a:r>
             <a:endParaRPr lang="en-US" sz="1400" dirty="0"/>
           </a:p>
@@ -17759,7 +18400,7 @@
                 <a:ea typeface="Calibri" pitchFamily="34" charset="-122"/>
                 <a:cs typeface="Calibri" pitchFamily="34" charset="-120"/>
               </a:rPr>
-              <a:t>Word Labs  •  wordlabs.app  •  Root: 'hope' = wish for something good</a:t>
+              <a:t>Word Labs  •  wordlabs.app  •  Root: 'hope' = to wish for something good</a:t>
             </a:r>
             <a:endParaRPr lang="en-US" sz="800" dirty="0"/>
           </a:p>
@@ -18586,7 +19227,7 @@
                 <a:ea typeface="Calibri" pitchFamily="34" charset="-122"/>
                 <a:cs typeface="Calibri" pitchFamily="34" charset="-120"/>
               </a:rPr>
-              <a:t>Word Labs  •  wordlabs.app  •  Root: 'hope' = wish for something good</a:t>
+              <a:t>Word Labs  •  wordlabs.app  •  Root: 'hope' = to wish for something good</a:t>
             </a:r>
             <a:endParaRPr lang="en-US" sz="800" dirty="0"/>
           </a:p>
@@ -18903,7 +19544,7 @@
                 <a:ea typeface="Calibri" pitchFamily="34" charset="-122"/>
                 <a:cs typeface="Calibri" pitchFamily="34" charset="-120"/>
               </a:rPr>
-              <a:t>wish for something good</a:t>
+              <a:t>to wish for something good</a:t>
             </a:r>
             <a:endParaRPr lang="en-US" sz="850" dirty="0"/>
           </a:p>
@@ -19127,7 +19768,7 @@
                 <a:ea typeface="Calibri" pitchFamily="34" charset="-122"/>
                 <a:cs typeface="Calibri" pitchFamily="34" charset="-120"/>
               </a:rPr>
-              <a:t>in a certain way</a:t>
+              <a:t>in a way</a:t>
             </a:r>
             <a:endParaRPr lang="en-US" sz="850" dirty="0"/>
           </a:p>
@@ -19683,7 +20324,7 @@
                 <a:ea typeface="Calibri" pitchFamily="34" charset="-122"/>
                 <a:cs typeface="Calibri" pitchFamily="34" charset="-120"/>
               </a:rPr>
-              <a:t>Word Labs  •  wordlabs.app  •  Root: 'hope' = wish for something good</a:t>
+              <a:t>Word Labs  •  wordlabs.app  •  Root: 'hope' = to wish for something good</a:t>
             </a:r>
             <a:endParaRPr lang="en-US" sz="800" dirty="0"/>
           </a:p>
@@ -20000,7 +20641,7 @@
                 <a:ea typeface="Calibri" pitchFamily="34" charset="-122"/>
                 <a:cs typeface="Calibri" pitchFamily="34" charset="-120"/>
               </a:rPr>
-              <a:t>wish for something good</a:t>
+              <a:t>to wish for something good</a:t>
             </a:r>
             <a:endParaRPr lang="en-US" sz="850" dirty="0"/>
           </a:p>
@@ -20224,7 +20865,7 @@
                 <a:ea typeface="Calibri" pitchFamily="34" charset="-122"/>
                 <a:cs typeface="Calibri" pitchFamily="34" charset="-120"/>
               </a:rPr>
-              <a:t>in a certain way</a:t>
+              <a:t>in a way</a:t>
             </a:r>
             <a:endParaRPr lang="en-US" sz="850" dirty="0"/>
           </a:p>
@@ -21017,7 +21658,7 @@
                 <a:ea typeface="Calibri" pitchFamily="34" charset="-122"/>
                 <a:cs typeface="Calibri" pitchFamily="34" charset="-120"/>
               </a:rPr>
-              <a:t>Word Labs  •  wordlabs.app  •  Root: 'hope' = wish for something good</a:t>
+              <a:t>Word Labs  •  wordlabs.app  •  Root: 'hope' = to wish for something good</a:t>
             </a:r>
             <a:endParaRPr lang="en-US" sz="800" dirty="0"/>
           </a:p>
@@ -21334,7 +21975,7 @@
                 <a:ea typeface="Calibri" pitchFamily="34" charset="-122"/>
                 <a:cs typeface="Calibri" pitchFamily="34" charset="-120"/>
               </a:rPr>
-              <a:t>wish for something good</a:t>
+              <a:t>to wish for something good</a:t>
             </a:r>
             <a:endParaRPr lang="en-US" sz="850" dirty="0"/>
           </a:p>
@@ -21558,7 +22199,7 @@
                 <a:ea typeface="Calibri" pitchFamily="34" charset="-122"/>
                 <a:cs typeface="Calibri" pitchFamily="34" charset="-120"/>
               </a:rPr>
-              <a:t>in a certain way</a:t>
+              <a:t>in a way</a:t>
             </a:r>
             <a:endParaRPr lang="en-US" sz="850" dirty="0"/>
           </a:p>
@@ -22152,7 +22793,7 @@
                 <a:ea typeface="Trebuchet MS" pitchFamily="34" charset="-122"/>
                 <a:cs typeface="Trebuchet MS" pitchFamily="34" charset="-120"/>
               </a:rPr>
-              <a:t>o</a:t>
+              <a:t>o_e</a:t>
             </a:r>
             <a:endParaRPr lang="en-US" sz="900" dirty="0"/>
           </a:p>
@@ -22284,7 +22925,7 @@
                 <a:ea typeface="Trebuchet MS" pitchFamily="34" charset="-122"/>
                 <a:cs typeface="Trebuchet MS" pitchFamily="34" charset="-120"/>
               </a:rPr>
-              <a:t>e</a:t>
+              <a:t>l</a:t>
             </a:r>
             <a:endParaRPr lang="en-US" sz="900" dirty="0"/>
           </a:p>
@@ -22350,7 +22991,7 @@
                 <a:ea typeface="Trebuchet MS" pitchFamily="34" charset="-122"/>
                 <a:cs typeface="Trebuchet MS" pitchFamily="34" charset="-120"/>
               </a:rPr>
-              <a:t>l</a:t>
+              <a:t>e</a:t>
             </a:r>
             <a:endParaRPr lang="en-US" sz="900" dirty="0"/>
           </a:p>
@@ -22416,7 +23057,7 @@
                 <a:ea typeface="Trebuchet MS" pitchFamily="34" charset="-122"/>
                 <a:cs typeface="Trebuchet MS" pitchFamily="34" charset="-120"/>
               </a:rPr>
-              <a:t>e</a:t>
+              <a:t>s</a:t>
             </a:r>
             <a:endParaRPr lang="en-US" sz="900" dirty="0"/>
           </a:p>
@@ -22482,7 +23123,7 @@
                 <a:ea typeface="Trebuchet MS" pitchFamily="34" charset="-122"/>
                 <a:cs typeface="Trebuchet MS" pitchFamily="34" charset="-120"/>
               </a:rPr>
-              <a:t>ss</a:t>
+              <a:t>s</a:t>
             </a:r>
             <a:endParaRPr lang="en-US" sz="900" dirty="0"/>
           </a:p>
@@ -22906,7 +23547,7 @@
                 <a:ea typeface="Calibri" pitchFamily="34" charset="-122"/>
                 <a:cs typeface="Calibri" pitchFamily="34" charset="-120"/>
               </a:rPr>
-              <a:t>Word Labs  •  wordlabs.app  •  Root: 'hope' = wish for something good</a:t>
+              <a:t>Word Labs  •  wordlabs.app  •  Root: 'hope' = to wish for something good</a:t>
             </a:r>
             <a:endParaRPr lang="en-US" sz="800" dirty="0"/>
           </a:p>
@@ -23045,7 +23686,7 @@
                 <a:ea typeface="Trebuchet MS" pitchFamily="34" charset="-122"/>
                 <a:cs typeface="Trebuchet MS" pitchFamily="34" charset="-120"/>
               </a:rPr>
-              <a:t>hoped</a:t>
+              <a:t>hopefulness</a:t>
             </a:r>
             <a:endParaRPr lang="en-US" sz="2800" dirty="0"/>
           </a:p>
@@ -23733,7 +24374,7 @@
                 <a:ea typeface="Calibri" pitchFamily="34" charset="-122"/>
                 <a:cs typeface="Calibri" pitchFamily="34" charset="-120"/>
               </a:rPr>
-              <a:t>Word Labs  •  wordlabs.app  •  Root: 'hope' = wish for something good</a:t>
+              <a:t>Word Labs  •  wordlabs.app  •  Root: 'hope' = to wish for something good</a:t>
             </a:r>
             <a:endParaRPr lang="en-US" sz="800" dirty="0"/>
           </a:p>
@@ -23872,7 +24513,7 @@
                 <a:ea typeface="Trebuchet MS" pitchFamily="34" charset="-122"/>
                 <a:cs typeface="Trebuchet MS" pitchFamily="34" charset="-120"/>
               </a:rPr>
-              <a:t>hoped</a:t>
+              <a:t>hopefulness</a:t>
             </a:r>
             <a:endParaRPr lang="en-US" sz="2800" dirty="0"/>
           </a:p>
@@ -23952,7 +24593,7 @@
         </p:nvSpPr>
         <p:spPr>
           <a:xfrm>
-            <a:off x="2938272" y="2258568"/>
+            <a:off x="2221992" y="2258568"/>
             <a:ext cx="1828800" cy="292608"/>
           </a:xfrm>
           <a:prstGeom prst="rect">
@@ -23986,7 +24627,7 @@
         </p:nvSpPr>
         <p:spPr>
           <a:xfrm>
-            <a:off x="2938272" y="2258568"/>
+            <a:off x="2221992" y="2258568"/>
             <a:ext cx="1828800" cy="292608"/>
           </a:xfrm>
           <a:prstGeom prst="rect">
@@ -24025,7 +24666,7 @@
         </p:nvSpPr>
         <p:spPr>
           <a:xfrm>
-            <a:off x="2938272" y="2569464"/>
+            <a:off x="2221992" y="2569464"/>
             <a:ext cx="1828800" cy="201168"/>
           </a:xfrm>
           <a:prstGeom prst="rect">
@@ -24050,7 +24691,7 @@
                 <a:ea typeface="Calibri" pitchFamily="34" charset="-122"/>
                 <a:cs typeface="Calibri" pitchFamily="34" charset="-120"/>
               </a:rPr>
-              <a:t>wish for something good</a:t>
+              <a:t>to wish for something good</a:t>
             </a:r>
             <a:endParaRPr lang="en-US" sz="850" dirty="0"/>
           </a:p>
@@ -24058,52 +24699,13 @@
       </p:sp>
       <p:sp>
         <p:nvSpPr>
-          <p:cNvPr id="19" name="Text 17"/>
-          <p:cNvSpPr/>
-          <p:nvPr/>
-        </p:nvSpPr>
-        <p:spPr>
-          <a:xfrm>
-            <a:off x="2938272" y="2752344"/>
-            <a:ext cx="1828800" cy="182880"/>
-          </a:xfrm>
-          <a:prstGeom prst="rect">
-            <a:avLst/>
-          </a:prstGeom>
-          <a:noFill/>
-          <a:ln/>
-        </p:spPr>
-        <p:txBody>
-          <a:bodyPr wrap="square" lIns="0" tIns="0" rIns="0" bIns="0" rtlCol="0" anchor="t"/>
-          <a:lstStyle/>
-          <a:p>
-            <a:pPr algn="ctr" indent="0" marL="0">
-              <a:buNone/>
-            </a:pPr>
-            <a:r>
-              <a:rPr lang="en-US" sz="700" i="1" dirty="0">
-                <a:solidFill>
-                  <a:srgbClr val="94A3B8"/>
-                </a:solidFill>
-                <a:latin typeface="Calibri" pitchFamily="34" charset="0"/>
-                <a:ea typeface="Calibri" pitchFamily="34" charset="-122"/>
-                <a:cs typeface="Calibri" pitchFamily="34" charset="-120"/>
-              </a:rPr>
-              <a:t>'e' dropped before vowel suffix</a:t>
-            </a:r>
-            <a:endParaRPr lang="en-US" sz="700" dirty="0"/>
-          </a:p>
-        </p:txBody>
-      </p:sp>
-      <p:sp>
-        <p:nvSpPr>
-          <p:cNvPr id="20" name="Shape 18"/>
-          <p:cNvSpPr/>
-          <p:nvPr/>
-        </p:nvSpPr>
-        <p:spPr>
-          <a:xfrm>
-            <a:off x="5803392" y="2258568"/>
+          <p:cNvPr id="19" name="Shape 17"/>
+          <p:cNvSpPr/>
+          <p:nvPr/>
+        </p:nvSpPr>
+        <p:spPr>
+          <a:xfrm>
+            <a:off x="4370832" y="2258568"/>
             <a:ext cx="1828800" cy="292608"/>
           </a:xfrm>
           <a:prstGeom prst="rect">
@@ -24131,13 +24733,13 @@
       </p:sp>
       <p:sp>
         <p:nvSpPr>
-          <p:cNvPr id="21" name="Text 19"/>
-          <p:cNvSpPr/>
-          <p:nvPr/>
-        </p:nvSpPr>
-        <p:spPr>
-          <a:xfrm>
-            <a:off x="5803392" y="2258568"/>
+          <p:cNvPr id="20" name="Text 18"/>
+          <p:cNvSpPr/>
+          <p:nvPr/>
+        </p:nvSpPr>
+        <p:spPr>
+          <a:xfrm>
+            <a:off x="4370832" y="2258568"/>
             <a:ext cx="1828800" cy="292608"/>
           </a:xfrm>
           <a:prstGeom prst="rect">
@@ -24162,7 +24764,7 @@
                 <a:ea typeface="Trebuchet MS" pitchFamily="34" charset="-122"/>
                 <a:cs typeface="Trebuchet MS" pitchFamily="34" charset="-120"/>
               </a:rPr>
-              <a:t>ed</a:t>
+              <a:t>ful</a:t>
             </a:r>
             <a:endParaRPr lang="en-US" sz="1300" dirty="0"/>
           </a:p>
@@ -24170,13 +24772,13 @@
       </p:sp>
       <p:sp>
         <p:nvSpPr>
-          <p:cNvPr id="22" name="Text 20"/>
-          <p:cNvSpPr/>
-          <p:nvPr/>
-        </p:nvSpPr>
-        <p:spPr>
-          <a:xfrm>
-            <a:off x="5803392" y="2569464"/>
+          <p:cNvPr id="21" name="Text 19"/>
+          <p:cNvSpPr/>
+          <p:nvPr/>
+        </p:nvSpPr>
+        <p:spPr>
+          <a:xfrm>
+            <a:off x="4370832" y="2569464"/>
             <a:ext cx="1828800" cy="201168"/>
           </a:xfrm>
           <a:prstGeom prst="rect">
@@ -24201,7 +24803,7 @@
                 <a:ea typeface="Calibri" pitchFamily="34" charset="-122"/>
                 <a:cs typeface="Calibri" pitchFamily="34" charset="-120"/>
               </a:rPr>
-              <a:t>in the past</a:t>
+              <a:t>full of</a:t>
             </a:r>
             <a:endParaRPr lang="en-US" sz="850" dirty="0"/>
           </a:p>
@@ -24209,7 +24811,119 @@
       </p:sp>
       <p:sp>
         <p:nvSpPr>
-          <p:cNvPr id="23" name="Shape 21"/>
+          <p:cNvPr id="22" name="Shape 20"/>
+          <p:cNvSpPr/>
+          <p:nvPr/>
+        </p:nvSpPr>
+        <p:spPr>
+          <a:xfrm>
+            <a:off x="6519672" y="2258568"/>
+            <a:ext cx="1828800" cy="292608"/>
+          </a:xfrm>
+          <a:prstGeom prst="rect">
+            <a:avLst>
+              <a:gd name="adj" fmla="val 25000"/>
+            </a:avLst>
+          </a:prstGeom>
+          <a:solidFill>
+            <a:srgbClr val="FCE7F3"/>
+          </a:solidFill>
+          <a:ln w="19050">
+            <a:solidFill>
+              <a:srgbClr val="DB2777"/>
+            </a:solidFill>
+            <a:prstDash val="solid"/>
+          </a:ln>
+          <a:effectLst>
+            <a:outerShdw sx="100000" sy="100000" kx="0" ky="0" algn="bl" rotWithShape="0" blurRad="101600" dist="38100" dir="8100000">
+              <a:srgbClr val="000000">
+                <a:alpha val="12000"/>
+              </a:srgbClr>
+            </a:outerShdw>
+          </a:effectLst>
+        </p:spPr>
+      </p:sp>
+      <p:sp>
+        <p:nvSpPr>
+          <p:cNvPr id="23" name="Text 21"/>
+          <p:cNvSpPr/>
+          <p:nvPr/>
+        </p:nvSpPr>
+        <p:spPr>
+          <a:xfrm>
+            <a:off x="6519672" y="2258568"/>
+            <a:ext cx="1828800" cy="292608"/>
+          </a:xfrm>
+          <a:prstGeom prst="rect">
+            <a:avLst/>
+          </a:prstGeom>
+          <a:noFill/>
+          <a:ln/>
+        </p:spPr>
+        <p:txBody>
+          <a:bodyPr wrap="square" lIns="0" tIns="0" rIns="0" bIns="0" rtlCol="0" anchor="ctr"/>
+          <a:lstStyle/>
+          <a:p>
+            <a:pPr algn="ctr" indent="0" marL="0">
+              <a:buNone/>
+            </a:pPr>
+            <a:r>
+              <a:rPr lang="en-US" sz="1300" b="1" dirty="0">
+                <a:solidFill>
+                  <a:srgbClr val="9D174D"/>
+                </a:solidFill>
+                <a:latin typeface="Trebuchet MS" pitchFamily="34" charset="0"/>
+                <a:ea typeface="Trebuchet MS" pitchFamily="34" charset="-122"/>
+                <a:cs typeface="Trebuchet MS" pitchFamily="34" charset="-120"/>
+              </a:rPr>
+              <a:t>ness</a:t>
+            </a:r>
+            <a:endParaRPr lang="en-US" sz="1300" dirty="0"/>
+          </a:p>
+        </p:txBody>
+      </p:sp>
+      <p:sp>
+        <p:nvSpPr>
+          <p:cNvPr id="24" name="Text 22"/>
+          <p:cNvSpPr/>
+          <p:nvPr/>
+        </p:nvSpPr>
+        <p:spPr>
+          <a:xfrm>
+            <a:off x="6519672" y="2569464"/>
+            <a:ext cx="1828800" cy="201168"/>
+          </a:xfrm>
+          <a:prstGeom prst="rect">
+            <a:avLst/>
+          </a:prstGeom>
+          <a:noFill/>
+          <a:ln/>
+        </p:spPr>
+        <p:txBody>
+          <a:bodyPr wrap="square" lIns="0" tIns="0" rIns="0" bIns="0" rtlCol="0" anchor="t"/>
+          <a:lstStyle/>
+          <a:p>
+            <a:pPr algn="ctr" indent="0" marL="0">
+              <a:buNone/>
+            </a:pPr>
+            <a:r>
+              <a:rPr lang="en-US" sz="850" dirty="0">
+                <a:solidFill>
+                  <a:srgbClr val="475569"/>
+                </a:solidFill>
+                <a:latin typeface="Calibri" pitchFamily="34" charset="0"/>
+                <a:ea typeface="Calibri" pitchFamily="34" charset="-122"/>
+                <a:cs typeface="Calibri" pitchFamily="34" charset="-120"/>
+              </a:rPr>
+              <a:t>state of</a:t>
+            </a:r>
+            <a:endParaRPr lang="en-US" sz="850" dirty="0"/>
+          </a:p>
+        </p:txBody>
+      </p:sp>
+      <p:sp>
+        <p:nvSpPr>
+          <p:cNvPr id="25" name="Shape 23"/>
           <p:cNvSpPr/>
           <p:nvPr/>
         </p:nvSpPr>
@@ -24236,7 +24950,7 @@
       </p:sp>
       <p:sp>
         <p:nvSpPr>
-          <p:cNvPr id="24" name="Text 22"/>
+          <p:cNvPr id="26" name="Text 24"/>
           <p:cNvSpPr/>
           <p:nvPr/>
         </p:nvSpPr>
@@ -24275,7 +24989,7 @@
       </p:sp>
       <p:sp>
         <p:nvSpPr>
-          <p:cNvPr id="25" name="Shape 23"/>
+          <p:cNvPr id="27" name="Shape 25"/>
           <p:cNvSpPr/>
           <p:nvPr/>
         </p:nvSpPr>
@@ -24302,7 +25016,7 @@
       </p:sp>
       <p:sp>
         <p:nvSpPr>
-          <p:cNvPr id="26" name="Text 24"/>
+          <p:cNvPr id="28" name="Text 26"/>
           <p:cNvSpPr/>
           <p:nvPr/>
         </p:nvSpPr>
@@ -24341,7 +25055,7 @@
       </p:sp>
       <p:sp>
         <p:nvSpPr>
-          <p:cNvPr id="27" name="Shape 25"/>
+          <p:cNvPr id="29" name="Shape 27"/>
           <p:cNvSpPr/>
           <p:nvPr/>
         </p:nvSpPr>
@@ -24368,7 +25082,7 @@
       </p:sp>
       <p:sp>
         <p:nvSpPr>
-          <p:cNvPr id="28" name="Text 26"/>
+          <p:cNvPr id="30" name="Text 28"/>
           <p:cNvSpPr/>
           <p:nvPr/>
         </p:nvSpPr>
@@ -24407,7 +25121,7 @@
       </p:sp>
       <p:sp>
         <p:nvSpPr>
-          <p:cNvPr id="29" name="Shape 27"/>
+          <p:cNvPr id="31" name="Shape 29"/>
           <p:cNvSpPr/>
           <p:nvPr/>
         </p:nvSpPr>
@@ -24434,7 +25148,7 @@
       </p:sp>
       <p:sp>
         <p:nvSpPr>
-          <p:cNvPr id="30" name="Text 28"/>
+          <p:cNvPr id="32" name="Text 30"/>
           <p:cNvSpPr/>
           <p:nvPr/>
         </p:nvSpPr>
@@ -24757,7 +25471,7 @@
                 <a:ea typeface="Calibri" pitchFamily="34" charset="-122"/>
                 <a:cs typeface="Calibri" pitchFamily="34" charset="-120"/>
               </a:rPr>
-              <a:t>Word Labs  •  wordlabs.app  •  Root: 'hope' = wish for something good</a:t>
+              <a:t>Word Labs  •  wordlabs.app  •  Root: 'hope' = to wish for something good</a:t>
             </a:r>
             <a:endParaRPr lang="en-US" sz="800" dirty="0"/>
           </a:p>
@@ -24830,7 +25544,7 @@
                 <a:ea typeface="Trebuchet MS" pitchFamily="34" charset="-122"/>
                 <a:cs typeface="Trebuchet MS" pitchFamily="34" charset="-120"/>
               </a:rPr>
-              <a:t>We are learning that the root 'hope' means 'wish for something good'.</a:t>
+              <a:t>We are learning that the root 'hope' means 'to wish for something good'.</a:t>
             </a:r>
             <a:endParaRPr lang="en-US" sz="2000" dirty="0"/>
           </a:p>
@@ -25476,7 +26190,7 @@
                 <a:ea typeface="Calibri" pitchFamily="34" charset="-122"/>
                 <a:cs typeface="Calibri" pitchFamily="34" charset="-120"/>
               </a:rPr>
-              <a:t>Word Labs  •  wordlabs.app  •  Root: 'hope' = wish for something good</a:t>
+              <a:t>Word Labs  •  wordlabs.app  •  Root: 'hope' = to wish for something good</a:t>
             </a:r>
             <a:endParaRPr lang="en-US" sz="800" dirty="0"/>
           </a:p>
@@ -25615,7 +26329,7 @@
                 <a:ea typeface="Trebuchet MS" pitchFamily="34" charset="-122"/>
                 <a:cs typeface="Trebuchet MS" pitchFamily="34" charset="-120"/>
               </a:rPr>
-              <a:t>hoped</a:t>
+              <a:t>hopefulness</a:t>
             </a:r>
             <a:endParaRPr lang="en-US" sz="2800" dirty="0"/>
           </a:p>
@@ -25695,7 +26409,7 @@
         </p:nvSpPr>
         <p:spPr>
           <a:xfrm>
-            <a:off x="2938272" y="2258568"/>
+            <a:off x="2221992" y="2258568"/>
             <a:ext cx="1828800" cy="292608"/>
           </a:xfrm>
           <a:prstGeom prst="rect">
@@ -25729,7 +26443,7 @@
         </p:nvSpPr>
         <p:spPr>
           <a:xfrm>
-            <a:off x="2938272" y="2258568"/>
+            <a:off x="2221992" y="2258568"/>
             <a:ext cx="1828800" cy="292608"/>
           </a:xfrm>
           <a:prstGeom prst="rect">
@@ -25768,7 +26482,7 @@
         </p:nvSpPr>
         <p:spPr>
           <a:xfrm>
-            <a:off x="2938272" y="2569464"/>
+            <a:off x="2221992" y="2569464"/>
             <a:ext cx="1828800" cy="201168"/>
           </a:xfrm>
           <a:prstGeom prst="rect">
@@ -25793,7 +26507,7 @@
                 <a:ea typeface="Calibri" pitchFamily="34" charset="-122"/>
                 <a:cs typeface="Calibri" pitchFamily="34" charset="-120"/>
               </a:rPr>
-              <a:t>wish for something good</a:t>
+              <a:t>to wish for something good</a:t>
             </a:r>
             <a:endParaRPr lang="en-US" sz="850" dirty="0"/>
           </a:p>
@@ -25801,52 +26515,13 @@
       </p:sp>
       <p:sp>
         <p:nvSpPr>
-          <p:cNvPr id="19" name="Text 17"/>
-          <p:cNvSpPr/>
-          <p:nvPr/>
-        </p:nvSpPr>
-        <p:spPr>
-          <a:xfrm>
-            <a:off x="2938272" y="2752344"/>
-            <a:ext cx="1828800" cy="182880"/>
-          </a:xfrm>
-          <a:prstGeom prst="rect">
-            <a:avLst/>
-          </a:prstGeom>
-          <a:noFill/>
-          <a:ln/>
-        </p:spPr>
-        <p:txBody>
-          <a:bodyPr wrap="square" lIns="0" tIns="0" rIns="0" bIns="0" rtlCol="0" anchor="t"/>
-          <a:lstStyle/>
-          <a:p>
-            <a:pPr algn="ctr" indent="0" marL="0">
-              <a:buNone/>
-            </a:pPr>
-            <a:r>
-              <a:rPr lang="en-US" sz="700" i="1" dirty="0">
-                <a:solidFill>
-                  <a:srgbClr val="94A3B8"/>
-                </a:solidFill>
-                <a:latin typeface="Calibri" pitchFamily="34" charset="0"/>
-                <a:ea typeface="Calibri" pitchFamily="34" charset="-122"/>
-                <a:cs typeface="Calibri" pitchFamily="34" charset="-120"/>
-              </a:rPr>
-              <a:t>'e' dropped before vowel suffix</a:t>
-            </a:r>
-            <a:endParaRPr lang="en-US" sz="700" dirty="0"/>
-          </a:p>
-        </p:txBody>
-      </p:sp>
-      <p:sp>
-        <p:nvSpPr>
-          <p:cNvPr id="20" name="Shape 18"/>
-          <p:cNvSpPr/>
-          <p:nvPr/>
-        </p:nvSpPr>
-        <p:spPr>
-          <a:xfrm>
-            <a:off x="5803392" y="2258568"/>
+          <p:cNvPr id="19" name="Shape 17"/>
+          <p:cNvSpPr/>
+          <p:nvPr/>
+        </p:nvSpPr>
+        <p:spPr>
+          <a:xfrm>
+            <a:off x="4370832" y="2258568"/>
             <a:ext cx="1828800" cy="292608"/>
           </a:xfrm>
           <a:prstGeom prst="rect">
@@ -25874,13 +26549,13 @@
       </p:sp>
       <p:sp>
         <p:nvSpPr>
-          <p:cNvPr id="21" name="Text 19"/>
-          <p:cNvSpPr/>
-          <p:nvPr/>
-        </p:nvSpPr>
-        <p:spPr>
-          <a:xfrm>
-            <a:off x="5803392" y="2258568"/>
+          <p:cNvPr id="20" name="Text 18"/>
+          <p:cNvSpPr/>
+          <p:nvPr/>
+        </p:nvSpPr>
+        <p:spPr>
+          <a:xfrm>
+            <a:off x="4370832" y="2258568"/>
             <a:ext cx="1828800" cy="292608"/>
           </a:xfrm>
           <a:prstGeom prst="rect">
@@ -25905,7 +26580,7 @@
                 <a:ea typeface="Trebuchet MS" pitchFamily="34" charset="-122"/>
                 <a:cs typeface="Trebuchet MS" pitchFamily="34" charset="-120"/>
               </a:rPr>
-              <a:t>ed</a:t>
+              <a:t>ful</a:t>
             </a:r>
             <a:endParaRPr lang="en-US" sz="1300" dirty="0"/>
           </a:p>
@@ -25913,13 +26588,13 @@
       </p:sp>
       <p:sp>
         <p:nvSpPr>
-          <p:cNvPr id="22" name="Text 20"/>
-          <p:cNvSpPr/>
-          <p:nvPr/>
-        </p:nvSpPr>
-        <p:spPr>
-          <a:xfrm>
-            <a:off x="5803392" y="2569464"/>
+          <p:cNvPr id="21" name="Text 19"/>
+          <p:cNvSpPr/>
+          <p:nvPr/>
+        </p:nvSpPr>
+        <p:spPr>
+          <a:xfrm>
+            <a:off x="4370832" y="2569464"/>
             <a:ext cx="1828800" cy="201168"/>
           </a:xfrm>
           <a:prstGeom prst="rect">
@@ -25944,7 +26619,7 @@
                 <a:ea typeface="Calibri" pitchFamily="34" charset="-122"/>
                 <a:cs typeface="Calibri" pitchFamily="34" charset="-120"/>
               </a:rPr>
-              <a:t>in the past</a:t>
+              <a:t>full of</a:t>
             </a:r>
             <a:endParaRPr lang="en-US" sz="850" dirty="0"/>
           </a:p>
@@ -25952,7 +26627,119 @@
       </p:sp>
       <p:sp>
         <p:nvSpPr>
-          <p:cNvPr id="23" name="Shape 21"/>
+          <p:cNvPr id="22" name="Shape 20"/>
+          <p:cNvSpPr/>
+          <p:nvPr/>
+        </p:nvSpPr>
+        <p:spPr>
+          <a:xfrm>
+            <a:off x="6519672" y="2258568"/>
+            <a:ext cx="1828800" cy="292608"/>
+          </a:xfrm>
+          <a:prstGeom prst="rect">
+            <a:avLst>
+              <a:gd name="adj" fmla="val 25000"/>
+            </a:avLst>
+          </a:prstGeom>
+          <a:solidFill>
+            <a:srgbClr val="FCE7F3"/>
+          </a:solidFill>
+          <a:ln w="19050">
+            <a:solidFill>
+              <a:srgbClr val="DB2777"/>
+            </a:solidFill>
+            <a:prstDash val="solid"/>
+          </a:ln>
+          <a:effectLst>
+            <a:outerShdw sx="100000" sy="100000" kx="0" ky="0" algn="bl" rotWithShape="0" blurRad="101600" dist="38100" dir="8100000">
+              <a:srgbClr val="000000">
+                <a:alpha val="12000"/>
+              </a:srgbClr>
+            </a:outerShdw>
+          </a:effectLst>
+        </p:spPr>
+      </p:sp>
+      <p:sp>
+        <p:nvSpPr>
+          <p:cNvPr id="23" name="Text 21"/>
+          <p:cNvSpPr/>
+          <p:nvPr/>
+        </p:nvSpPr>
+        <p:spPr>
+          <a:xfrm>
+            <a:off x="6519672" y="2258568"/>
+            <a:ext cx="1828800" cy="292608"/>
+          </a:xfrm>
+          <a:prstGeom prst="rect">
+            <a:avLst/>
+          </a:prstGeom>
+          <a:noFill/>
+          <a:ln/>
+        </p:spPr>
+        <p:txBody>
+          <a:bodyPr wrap="square" lIns="0" tIns="0" rIns="0" bIns="0" rtlCol="0" anchor="ctr"/>
+          <a:lstStyle/>
+          <a:p>
+            <a:pPr algn="ctr" indent="0" marL="0">
+              <a:buNone/>
+            </a:pPr>
+            <a:r>
+              <a:rPr lang="en-US" sz="1300" b="1" dirty="0">
+                <a:solidFill>
+                  <a:srgbClr val="9D174D"/>
+                </a:solidFill>
+                <a:latin typeface="Trebuchet MS" pitchFamily="34" charset="0"/>
+                <a:ea typeface="Trebuchet MS" pitchFamily="34" charset="-122"/>
+                <a:cs typeface="Trebuchet MS" pitchFamily="34" charset="-120"/>
+              </a:rPr>
+              <a:t>ness</a:t>
+            </a:r>
+            <a:endParaRPr lang="en-US" sz="1300" dirty="0"/>
+          </a:p>
+        </p:txBody>
+      </p:sp>
+      <p:sp>
+        <p:nvSpPr>
+          <p:cNvPr id="24" name="Text 22"/>
+          <p:cNvSpPr/>
+          <p:nvPr/>
+        </p:nvSpPr>
+        <p:spPr>
+          <a:xfrm>
+            <a:off x="6519672" y="2569464"/>
+            <a:ext cx="1828800" cy="201168"/>
+          </a:xfrm>
+          <a:prstGeom prst="rect">
+            <a:avLst/>
+          </a:prstGeom>
+          <a:noFill/>
+          <a:ln/>
+        </p:spPr>
+        <p:txBody>
+          <a:bodyPr wrap="square" lIns="0" tIns="0" rIns="0" bIns="0" rtlCol="0" anchor="t"/>
+          <a:lstStyle/>
+          <a:p>
+            <a:pPr algn="ctr" indent="0" marL="0">
+              <a:buNone/>
+            </a:pPr>
+            <a:r>
+              <a:rPr lang="en-US" sz="850" dirty="0">
+                <a:solidFill>
+                  <a:srgbClr val="475569"/>
+                </a:solidFill>
+                <a:latin typeface="Calibri" pitchFamily="34" charset="0"/>
+                <a:ea typeface="Calibri" pitchFamily="34" charset="-122"/>
+                <a:cs typeface="Calibri" pitchFamily="34" charset="-120"/>
+              </a:rPr>
+              <a:t>state of</a:t>
+            </a:r>
+            <a:endParaRPr lang="en-US" sz="850" dirty="0"/>
+          </a:p>
+        </p:txBody>
+      </p:sp>
+      <p:sp>
+        <p:nvSpPr>
+          <p:cNvPr id="25" name="Shape 23"/>
           <p:cNvSpPr/>
           <p:nvPr/>
         </p:nvSpPr>
@@ -25979,7 +26766,7 @@
       </p:sp>
       <p:sp>
         <p:nvSpPr>
-          <p:cNvPr id="24" name="Text 22"/>
+          <p:cNvPr id="26" name="Text 24"/>
           <p:cNvSpPr/>
           <p:nvPr/>
         </p:nvSpPr>
@@ -26018,7 +26805,7 @@
       </p:sp>
       <p:sp>
         <p:nvSpPr>
-          <p:cNvPr id="25" name="Shape 23"/>
+          <p:cNvPr id="27" name="Shape 25"/>
           <p:cNvSpPr/>
           <p:nvPr/>
         </p:nvSpPr>
@@ -26045,13 +26832,13 @@
       </p:sp>
       <p:sp>
         <p:nvSpPr>
-          <p:cNvPr id="26" name="Shape 24"/>
-          <p:cNvSpPr/>
-          <p:nvPr/>
-        </p:nvSpPr>
-        <p:spPr>
-          <a:xfrm>
-            <a:off x="4370832" y="3364992"/>
+          <p:cNvPr id="28" name="Shape 26"/>
+          <p:cNvSpPr/>
+          <p:nvPr/>
+        </p:nvSpPr>
+        <p:spPr>
+          <a:xfrm>
+            <a:off x="2313432" y="3364992"/>
             <a:ext cx="1645920" cy="475488"/>
           </a:xfrm>
           <a:prstGeom prst="rect">
@@ -26072,13 +26859,13 @@
       </p:sp>
       <p:sp>
         <p:nvSpPr>
-          <p:cNvPr id="27" name="Text 25"/>
-          <p:cNvSpPr/>
-          <p:nvPr/>
-        </p:nvSpPr>
-        <p:spPr>
-          <a:xfrm>
-            <a:off x="4370832" y="3364992"/>
+          <p:cNvPr id="29" name="Text 27"/>
+          <p:cNvSpPr/>
+          <p:nvPr/>
+        </p:nvSpPr>
+        <p:spPr>
+          <a:xfrm>
+            <a:off x="2313432" y="3364992"/>
             <a:ext cx="1645920" cy="475488"/>
           </a:xfrm>
           <a:prstGeom prst="rect">
@@ -26103,7 +26890,7 @@
                 <a:ea typeface="Trebuchet MS" pitchFamily="34" charset="-122"/>
                 <a:cs typeface="Trebuchet MS" pitchFamily="34" charset="-120"/>
               </a:rPr>
-              <a:t>hoped</a:t>
+              <a:t>hope</a:t>
             </a:r>
             <a:endParaRPr lang="en-US" sz="1400" dirty="0"/>
           </a:p>
@@ -26111,7 +26898,217 @@
       </p:sp>
       <p:sp>
         <p:nvSpPr>
-          <p:cNvPr id="28" name="Shape 26"/>
+          <p:cNvPr id="30" name="Text 28"/>
+          <p:cNvSpPr/>
+          <p:nvPr/>
+        </p:nvSpPr>
+        <p:spPr>
+          <a:xfrm>
+            <a:off x="3959352" y="3364992"/>
+            <a:ext cx="411480" cy="475488"/>
+          </a:xfrm>
+          <a:prstGeom prst="rect">
+            <a:avLst/>
+          </a:prstGeom>
+          <a:noFill/>
+          <a:ln/>
+        </p:spPr>
+        <p:txBody>
+          <a:bodyPr wrap="square" lIns="0" tIns="0" rIns="0" bIns="0" rtlCol="0" anchor="ctr"/>
+          <a:lstStyle/>
+          <a:p>
+            <a:pPr algn="ctr" indent="0" marL="0">
+              <a:buNone/>
+            </a:pPr>
+            <a:r>
+              <a:rPr lang="en-US" sz="1600" b="1" dirty="0">
+                <a:solidFill>
+                  <a:srgbClr val="0D9488"/>
+                </a:solidFill>
+                <a:latin typeface="Trebuchet MS" pitchFamily="34" charset="0"/>
+                <a:ea typeface="Trebuchet MS" pitchFamily="34" charset="-122"/>
+                <a:cs typeface="Trebuchet MS" pitchFamily="34" charset="-120"/>
+              </a:rPr>
+              <a:t>·</a:t>
+            </a:r>
+            <a:endParaRPr lang="en-US" sz="1600" dirty="0"/>
+          </a:p>
+        </p:txBody>
+      </p:sp>
+      <p:sp>
+        <p:nvSpPr>
+          <p:cNvPr id="31" name="Shape 29"/>
+          <p:cNvSpPr/>
+          <p:nvPr/>
+        </p:nvSpPr>
+        <p:spPr>
+          <a:xfrm>
+            <a:off x="4370832" y="3364992"/>
+            <a:ext cx="1645920" cy="475488"/>
+          </a:xfrm>
+          <a:prstGeom prst="rect">
+            <a:avLst>
+              <a:gd name="adj" fmla="val 9615"/>
+            </a:avLst>
+          </a:prstGeom>
+          <a:solidFill>
+            <a:srgbClr val="FFFFFF"/>
+          </a:solidFill>
+          <a:ln w="12700">
+            <a:solidFill>
+              <a:srgbClr val="0D9488"/>
+            </a:solidFill>
+            <a:prstDash val="solid"/>
+          </a:ln>
+        </p:spPr>
+      </p:sp>
+      <p:sp>
+        <p:nvSpPr>
+          <p:cNvPr id="32" name="Text 30"/>
+          <p:cNvSpPr/>
+          <p:nvPr/>
+        </p:nvSpPr>
+        <p:spPr>
+          <a:xfrm>
+            <a:off x="4370832" y="3364992"/>
+            <a:ext cx="1645920" cy="475488"/>
+          </a:xfrm>
+          <a:prstGeom prst="rect">
+            <a:avLst/>
+          </a:prstGeom>
+          <a:noFill/>
+          <a:ln/>
+        </p:spPr>
+        <p:txBody>
+          <a:bodyPr wrap="square" lIns="0" tIns="0" rIns="0" bIns="0" rtlCol="0" anchor="ctr"/>
+          <a:lstStyle/>
+          <a:p>
+            <a:pPr algn="ctr" indent="0" marL="0">
+              <a:buNone/>
+            </a:pPr>
+            <a:r>
+              <a:rPr lang="en-US" sz="1400" b="1" dirty="0">
+                <a:solidFill>
+                  <a:srgbClr val="0D9488"/>
+                </a:solidFill>
+                <a:latin typeface="Trebuchet MS" pitchFamily="34" charset="0"/>
+                <a:ea typeface="Trebuchet MS" pitchFamily="34" charset="-122"/>
+                <a:cs typeface="Trebuchet MS" pitchFamily="34" charset="-120"/>
+              </a:rPr>
+              <a:t>ful</a:t>
+            </a:r>
+            <a:endParaRPr lang="en-US" sz="1400" dirty="0"/>
+          </a:p>
+        </p:txBody>
+      </p:sp>
+      <p:sp>
+        <p:nvSpPr>
+          <p:cNvPr id="33" name="Text 31"/>
+          <p:cNvSpPr/>
+          <p:nvPr/>
+        </p:nvSpPr>
+        <p:spPr>
+          <a:xfrm>
+            <a:off x="6016752" y="3364992"/>
+            <a:ext cx="411480" cy="475488"/>
+          </a:xfrm>
+          <a:prstGeom prst="rect">
+            <a:avLst/>
+          </a:prstGeom>
+          <a:noFill/>
+          <a:ln/>
+        </p:spPr>
+        <p:txBody>
+          <a:bodyPr wrap="square" lIns="0" tIns="0" rIns="0" bIns="0" rtlCol="0" anchor="ctr"/>
+          <a:lstStyle/>
+          <a:p>
+            <a:pPr algn="ctr" indent="0" marL="0">
+              <a:buNone/>
+            </a:pPr>
+            <a:r>
+              <a:rPr lang="en-US" sz="1600" b="1" dirty="0">
+                <a:solidFill>
+                  <a:srgbClr val="0D9488"/>
+                </a:solidFill>
+                <a:latin typeface="Trebuchet MS" pitchFamily="34" charset="0"/>
+                <a:ea typeface="Trebuchet MS" pitchFamily="34" charset="-122"/>
+                <a:cs typeface="Trebuchet MS" pitchFamily="34" charset="-120"/>
+              </a:rPr>
+              <a:t>·</a:t>
+            </a:r>
+            <a:endParaRPr lang="en-US" sz="1600" dirty="0"/>
+          </a:p>
+        </p:txBody>
+      </p:sp>
+      <p:sp>
+        <p:nvSpPr>
+          <p:cNvPr id="34" name="Shape 32"/>
+          <p:cNvSpPr/>
+          <p:nvPr/>
+        </p:nvSpPr>
+        <p:spPr>
+          <a:xfrm>
+            <a:off x="6428232" y="3364992"/>
+            <a:ext cx="1645920" cy="475488"/>
+          </a:xfrm>
+          <a:prstGeom prst="rect">
+            <a:avLst>
+              <a:gd name="adj" fmla="val 9615"/>
+            </a:avLst>
+          </a:prstGeom>
+          <a:solidFill>
+            <a:srgbClr val="FFFFFF"/>
+          </a:solidFill>
+          <a:ln w="12700">
+            <a:solidFill>
+              <a:srgbClr val="0D9488"/>
+            </a:solidFill>
+            <a:prstDash val="solid"/>
+          </a:ln>
+        </p:spPr>
+      </p:sp>
+      <p:sp>
+        <p:nvSpPr>
+          <p:cNvPr id="35" name="Text 33"/>
+          <p:cNvSpPr/>
+          <p:nvPr/>
+        </p:nvSpPr>
+        <p:spPr>
+          <a:xfrm>
+            <a:off x="6428232" y="3364992"/>
+            <a:ext cx="1645920" cy="475488"/>
+          </a:xfrm>
+          <a:prstGeom prst="rect">
+            <a:avLst/>
+          </a:prstGeom>
+          <a:noFill/>
+          <a:ln/>
+        </p:spPr>
+        <p:txBody>
+          <a:bodyPr wrap="square" lIns="0" tIns="0" rIns="0" bIns="0" rtlCol="0" anchor="ctr"/>
+          <a:lstStyle/>
+          <a:p>
+            <a:pPr algn="ctr" indent="0" marL="0">
+              <a:buNone/>
+            </a:pPr>
+            <a:r>
+              <a:rPr lang="en-US" sz="1400" b="1" dirty="0">
+                <a:solidFill>
+                  <a:srgbClr val="0D9488"/>
+                </a:solidFill>
+                <a:latin typeface="Trebuchet MS" pitchFamily="34" charset="0"/>
+                <a:ea typeface="Trebuchet MS" pitchFamily="34" charset="-122"/>
+                <a:cs typeface="Trebuchet MS" pitchFamily="34" charset="-120"/>
+              </a:rPr>
+              <a:t>ness</a:t>
+            </a:r>
+            <a:endParaRPr lang="en-US" sz="1400" dirty="0"/>
+          </a:p>
+        </p:txBody>
+      </p:sp>
+      <p:sp>
+        <p:nvSpPr>
+          <p:cNvPr id="36" name="Shape 34"/>
           <p:cNvSpPr/>
           <p:nvPr/>
         </p:nvSpPr>
@@ -26138,7 +27135,7 @@
       </p:sp>
       <p:sp>
         <p:nvSpPr>
-          <p:cNvPr id="29" name="Text 27"/>
+          <p:cNvPr id="37" name="Text 35"/>
           <p:cNvSpPr/>
           <p:nvPr/>
         </p:nvSpPr>
@@ -26177,7 +27174,7 @@
       </p:sp>
       <p:sp>
         <p:nvSpPr>
-          <p:cNvPr id="30" name="Shape 28"/>
+          <p:cNvPr id="38" name="Shape 36"/>
           <p:cNvSpPr/>
           <p:nvPr/>
         </p:nvSpPr>
@@ -26204,7 +27201,7 @@
       </p:sp>
       <p:sp>
         <p:nvSpPr>
-          <p:cNvPr id="31" name="Text 29"/>
+          <p:cNvPr id="39" name="Text 37"/>
           <p:cNvSpPr/>
           <p:nvPr/>
         </p:nvSpPr>
@@ -26527,7 +27524,7 @@
                 <a:ea typeface="Calibri" pitchFamily="34" charset="-122"/>
                 <a:cs typeface="Calibri" pitchFamily="34" charset="-120"/>
               </a:rPr>
-              <a:t>Word Labs  •  wordlabs.app  •  Root: 'hope' = wish for something good</a:t>
+              <a:t>Word Labs  •  wordlabs.app  •  Root: 'hope' = to wish for something good</a:t>
             </a:r>
             <a:endParaRPr lang="en-US" sz="800" dirty="0"/>
           </a:p>
@@ -26666,7 +27663,7 @@
                 <a:ea typeface="Trebuchet MS" pitchFamily="34" charset="-122"/>
                 <a:cs typeface="Trebuchet MS" pitchFamily="34" charset="-120"/>
               </a:rPr>
-              <a:t>hoped</a:t>
+              <a:t>hopefulness</a:t>
             </a:r>
             <a:endParaRPr lang="en-US" sz="2800" dirty="0"/>
           </a:p>
@@ -26746,7 +27743,7 @@
         </p:nvSpPr>
         <p:spPr>
           <a:xfrm>
-            <a:off x="2938272" y="2258568"/>
+            <a:off x="2221992" y="2258568"/>
             <a:ext cx="1828800" cy="292608"/>
           </a:xfrm>
           <a:prstGeom prst="rect">
@@ -26780,7 +27777,7 @@
         </p:nvSpPr>
         <p:spPr>
           <a:xfrm>
-            <a:off x="2938272" y="2258568"/>
+            <a:off x="2221992" y="2258568"/>
             <a:ext cx="1828800" cy="292608"/>
           </a:xfrm>
           <a:prstGeom prst="rect">
@@ -26819,7 +27816,7 @@
         </p:nvSpPr>
         <p:spPr>
           <a:xfrm>
-            <a:off x="2938272" y="2569464"/>
+            <a:off x="2221992" y="2569464"/>
             <a:ext cx="1828800" cy="201168"/>
           </a:xfrm>
           <a:prstGeom prst="rect">
@@ -26844,7 +27841,7 @@
                 <a:ea typeface="Calibri" pitchFamily="34" charset="-122"/>
                 <a:cs typeface="Calibri" pitchFamily="34" charset="-120"/>
               </a:rPr>
-              <a:t>wish for something good</a:t>
+              <a:t>to wish for something good</a:t>
             </a:r>
             <a:endParaRPr lang="en-US" sz="850" dirty="0"/>
           </a:p>
@@ -26852,52 +27849,13 @@
       </p:sp>
       <p:sp>
         <p:nvSpPr>
-          <p:cNvPr id="19" name="Text 17"/>
-          <p:cNvSpPr/>
-          <p:nvPr/>
-        </p:nvSpPr>
-        <p:spPr>
-          <a:xfrm>
-            <a:off x="2938272" y="2752344"/>
-            <a:ext cx="1828800" cy="182880"/>
-          </a:xfrm>
-          <a:prstGeom prst="rect">
-            <a:avLst/>
-          </a:prstGeom>
-          <a:noFill/>
-          <a:ln/>
-        </p:spPr>
-        <p:txBody>
-          <a:bodyPr wrap="square" lIns="0" tIns="0" rIns="0" bIns="0" rtlCol="0" anchor="t"/>
-          <a:lstStyle/>
-          <a:p>
-            <a:pPr algn="ctr" indent="0" marL="0">
-              <a:buNone/>
-            </a:pPr>
-            <a:r>
-              <a:rPr lang="en-US" sz="700" i="1" dirty="0">
-                <a:solidFill>
-                  <a:srgbClr val="94A3B8"/>
-                </a:solidFill>
-                <a:latin typeface="Calibri" pitchFamily="34" charset="0"/>
-                <a:ea typeface="Calibri" pitchFamily="34" charset="-122"/>
-                <a:cs typeface="Calibri" pitchFamily="34" charset="-120"/>
-              </a:rPr>
-              <a:t>'e' dropped before vowel suffix</a:t>
-            </a:r>
-            <a:endParaRPr lang="en-US" sz="700" dirty="0"/>
-          </a:p>
-        </p:txBody>
-      </p:sp>
-      <p:sp>
-        <p:nvSpPr>
-          <p:cNvPr id="20" name="Shape 18"/>
-          <p:cNvSpPr/>
-          <p:nvPr/>
-        </p:nvSpPr>
-        <p:spPr>
-          <a:xfrm>
-            <a:off x="5803392" y="2258568"/>
+          <p:cNvPr id="19" name="Shape 17"/>
+          <p:cNvSpPr/>
+          <p:nvPr/>
+        </p:nvSpPr>
+        <p:spPr>
+          <a:xfrm>
+            <a:off x="4370832" y="2258568"/>
             <a:ext cx="1828800" cy="292608"/>
           </a:xfrm>
           <a:prstGeom prst="rect">
@@ -26925,13 +27883,13 @@
       </p:sp>
       <p:sp>
         <p:nvSpPr>
-          <p:cNvPr id="21" name="Text 19"/>
-          <p:cNvSpPr/>
-          <p:nvPr/>
-        </p:nvSpPr>
-        <p:spPr>
-          <a:xfrm>
-            <a:off x="5803392" y="2258568"/>
+          <p:cNvPr id="20" name="Text 18"/>
+          <p:cNvSpPr/>
+          <p:nvPr/>
+        </p:nvSpPr>
+        <p:spPr>
+          <a:xfrm>
+            <a:off x="4370832" y="2258568"/>
             <a:ext cx="1828800" cy="292608"/>
           </a:xfrm>
           <a:prstGeom prst="rect">
@@ -26956,7 +27914,7 @@
                 <a:ea typeface="Trebuchet MS" pitchFamily="34" charset="-122"/>
                 <a:cs typeface="Trebuchet MS" pitchFamily="34" charset="-120"/>
               </a:rPr>
-              <a:t>ed</a:t>
+              <a:t>ful</a:t>
             </a:r>
             <a:endParaRPr lang="en-US" sz="1300" dirty="0"/>
           </a:p>
@@ -26964,13 +27922,13 @@
       </p:sp>
       <p:sp>
         <p:nvSpPr>
-          <p:cNvPr id="22" name="Text 20"/>
-          <p:cNvSpPr/>
-          <p:nvPr/>
-        </p:nvSpPr>
-        <p:spPr>
-          <a:xfrm>
-            <a:off x="5803392" y="2569464"/>
+          <p:cNvPr id="21" name="Text 19"/>
+          <p:cNvSpPr/>
+          <p:nvPr/>
+        </p:nvSpPr>
+        <p:spPr>
+          <a:xfrm>
+            <a:off x="4370832" y="2569464"/>
             <a:ext cx="1828800" cy="201168"/>
           </a:xfrm>
           <a:prstGeom prst="rect">
@@ -26995,7 +27953,7 @@
                 <a:ea typeface="Calibri" pitchFamily="34" charset="-122"/>
                 <a:cs typeface="Calibri" pitchFamily="34" charset="-120"/>
               </a:rPr>
-              <a:t>in the past</a:t>
+              <a:t>full of</a:t>
             </a:r>
             <a:endParaRPr lang="en-US" sz="850" dirty="0"/>
           </a:p>
@@ -27003,7 +27961,119 @@
       </p:sp>
       <p:sp>
         <p:nvSpPr>
-          <p:cNvPr id="23" name="Shape 21"/>
+          <p:cNvPr id="22" name="Shape 20"/>
+          <p:cNvSpPr/>
+          <p:nvPr/>
+        </p:nvSpPr>
+        <p:spPr>
+          <a:xfrm>
+            <a:off x="6519672" y="2258568"/>
+            <a:ext cx="1828800" cy="292608"/>
+          </a:xfrm>
+          <a:prstGeom prst="rect">
+            <a:avLst>
+              <a:gd name="adj" fmla="val 25000"/>
+            </a:avLst>
+          </a:prstGeom>
+          <a:solidFill>
+            <a:srgbClr val="FCE7F3"/>
+          </a:solidFill>
+          <a:ln w="19050">
+            <a:solidFill>
+              <a:srgbClr val="DB2777"/>
+            </a:solidFill>
+            <a:prstDash val="solid"/>
+          </a:ln>
+          <a:effectLst>
+            <a:outerShdw sx="100000" sy="100000" kx="0" ky="0" algn="bl" rotWithShape="0" blurRad="101600" dist="38100" dir="8100000">
+              <a:srgbClr val="000000">
+                <a:alpha val="12000"/>
+              </a:srgbClr>
+            </a:outerShdw>
+          </a:effectLst>
+        </p:spPr>
+      </p:sp>
+      <p:sp>
+        <p:nvSpPr>
+          <p:cNvPr id="23" name="Text 21"/>
+          <p:cNvSpPr/>
+          <p:nvPr/>
+        </p:nvSpPr>
+        <p:spPr>
+          <a:xfrm>
+            <a:off x="6519672" y="2258568"/>
+            <a:ext cx="1828800" cy="292608"/>
+          </a:xfrm>
+          <a:prstGeom prst="rect">
+            <a:avLst/>
+          </a:prstGeom>
+          <a:noFill/>
+          <a:ln/>
+        </p:spPr>
+        <p:txBody>
+          <a:bodyPr wrap="square" lIns="0" tIns="0" rIns="0" bIns="0" rtlCol="0" anchor="ctr"/>
+          <a:lstStyle/>
+          <a:p>
+            <a:pPr algn="ctr" indent="0" marL="0">
+              <a:buNone/>
+            </a:pPr>
+            <a:r>
+              <a:rPr lang="en-US" sz="1300" b="1" dirty="0">
+                <a:solidFill>
+                  <a:srgbClr val="9D174D"/>
+                </a:solidFill>
+                <a:latin typeface="Trebuchet MS" pitchFamily="34" charset="0"/>
+                <a:ea typeface="Trebuchet MS" pitchFamily="34" charset="-122"/>
+                <a:cs typeface="Trebuchet MS" pitchFamily="34" charset="-120"/>
+              </a:rPr>
+              <a:t>ness</a:t>
+            </a:r>
+            <a:endParaRPr lang="en-US" sz="1300" dirty="0"/>
+          </a:p>
+        </p:txBody>
+      </p:sp>
+      <p:sp>
+        <p:nvSpPr>
+          <p:cNvPr id="24" name="Text 22"/>
+          <p:cNvSpPr/>
+          <p:nvPr/>
+        </p:nvSpPr>
+        <p:spPr>
+          <a:xfrm>
+            <a:off x="6519672" y="2569464"/>
+            <a:ext cx="1828800" cy="201168"/>
+          </a:xfrm>
+          <a:prstGeom prst="rect">
+            <a:avLst/>
+          </a:prstGeom>
+          <a:noFill/>
+          <a:ln/>
+        </p:spPr>
+        <p:txBody>
+          <a:bodyPr wrap="square" lIns="0" tIns="0" rIns="0" bIns="0" rtlCol="0" anchor="t"/>
+          <a:lstStyle/>
+          <a:p>
+            <a:pPr algn="ctr" indent="0" marL="0">
+              <a:buNone/>
+            </a:pPr>
+            <a:r>
+              <a:rPr lang="en-US" sz="850" dirty="0">
+                <a:solidFill>
+                  <a:srgbClr val="475569"/>
+                </a:solidFill>
+                <a:latin typeface="Calibri" pitchFamily="34" charset="0"/>
+                <a:ea typeface="Calibri" pitchFamily="34" charset="-122"/>
+                <a:cs typeface="Calibri" pitchFamily="34" charset="-120"/>
+              </a:rPr>
+              <a:t>state of</a:t>
+            </a:r>
+            <a:endParaRPr lang="en-US" sz="850" dirty="0"/>
+          </a:p>
+        </p:txBody>
+      </p:sp>
+      <p:sp>
+        <p:nvSpPr>
+          <p:cNvPr id="25" name="Shape 23"/>
           <p:cNvSpPr/>
           <p:nvPr/>
         </p:nvSpPr>
@@ -27030,7 +28100,7 @@
       </p:sp>
       <p:sp>
         <p:nvSpPr>
-          <p:cNvPr id="24" name="Text 22"/>
+          <p:cNvPr id="26" name="Text 24"/>
           <p:cNvSpPr/>
           <p:nvPr/>
         </p:nvSpPr>
@@ -27069,7 +28139,7 @@
       </p:sp>
       <p:sp>
         <p:nvSpPr>
-          <p:cNvPr id="25" name="Shape 23"/>
+          <p:cNvPr id="27" name="Shape 25"/>
           <p:cNvSpPr/>
           <p:nvPr/>
         </p:nvSpPr>
@@ -27096,13 +28166,13 @@
       </p:sp>
       <p:sp>
         <p:nvSpPr>
-          <p:cNvPr id="26" name="Shape 24"/>
-          <p:cNvSpPr/>
-          <p:nvPr/>
-        </p:nvSpPr>
-        <p:spPr>
-          <a:xfrm>
-            <a:off x="4370832" y="3364992"/>
+          <p:cNvPr id="28" name="Shape 26"/>
+          <p:cNvSpPr/>
+          <p:nvPr/>
+        </p:nvSpPr>
+        <p:spPr>
+          <a:xfrm>
+            <a:off x="2313432" y="3364992"/>
             <a:ext cx="1645920" cy="475488"/>
           </a:xfrm>
           <a:prstGeom prst="rect">
@@ -27123,13 +28193,13 @@
       </p:sp>
       <p:sp>
         <p:nvSpPr>
-          <p:cNvPr id="27" name="Text 25"/>
-          <p:cNvSpPr/>
-          <p:nvPr/>
-        </p:nvSpPr>
-        <p:spPr>
-          <a:xfrm>
-            <a:off x="4370832" y="3364992"/>
+          <p:cNvPr id="29" name="Text 27"/>
+          <p:cNvSpPr/>
+          <p:nvPr/>
+        </p:nvSpPr>
+        <p:spPr>
+          <a:xfrm>
+            <a:off x="2313432" y="3364992"/>
             <a:ext cx="1645920" cy="475488"/>
           </a:xfrm>
           <a:prstGeom prst="rect">
@@ -27154,7 +28224,7 @@
                 <a:ea typeface="Trebuchet MS" pitchFamily="34" charset="-122"/>
                 <a:cs typeface="Trebuchet MS" pitchFamily="34" charset="-120"/>
               </a:rPr>
-              <a:t>hoped</a:t>
+              <a:t>hope</a:t>
             </a:r>
             <a:endParaRPr lang="en-US" sz="1400" dirty="0"/>
           </a:p>
@@ -27162,7 +28232,217 @@
       </p:sp>
       <p:sp>
         <p:nvSpPr>
-          <p:cNvPr id="28" name="Shape 26"/>
+          <p:cNvPr id="30" name="Text 28"/>
+          <p:cNvSpPr/>
+          <p:nvPr/>
+        </p:nvSpPr>
+        <p:spPr>
+          <a:xfrm>
+            <a:off x="3959352" y="3364992"/>
+            <a:ext cx="411480" cy="475488"/>
+          </a:xfrm>
+          <a:prstGeom prst="rect">
+            <a:avLst/>
+          </a:prstGeom>
+          <a:noFill/>
+          <a:ln/>
+        </p:spPr>
+        <p:txBody>
+          <a:bodyPr wrap="square" lIns="0" tIns="0" rIns="0" bIns="0" rtlCol="0" anchor="ctr"/>
+          <a:lstStyle/>
+          <a:p>
+            <a:pPr algn="ctr" indent="0" marL="0">
+              <a:buNone/>
+            </a:pPr>
+            <a:r>
+              <a:rPr lang="en-US" sz="1600" b="1" dirty="0">
+                <a:solidFill>
+                  <a:srgbClr val="0D9488"/>
+                </a:solidFill>
+                <a:latin typeface="Trebuchet MS" pitchFamily="34" charset="0"/>
+                <a:ea typeface="Trebuchet MS" pitchFamily="34" charset="-122"/>
+                <a:cs typeface="Trebuchet MS" pitchFamily="34" charset="-120"/>
+              </a:rPr>
+              <a:t>·</a:t>
+            </a:r>
+            <a:endParaRPr lang="en-US" sz="1600" dirty="0"/>
+          </a:p>
+        </p:txBody>
+      </p:sp>
+      <p:sp>
+        <p:nvSpPr>
+          <p:cNvPr id="31" name="Shape 29"/>
+          <p:cNvSpPr/>
+          <p:nvPr/>
+        </p:nvSpPr>
+        <p:spPr>
+          <a:xfrm>
+            <a:off x="4370832" y="3364992"/>
+            <a:ext cx="1645920" cy="475488"/>
+          </a:xfrm>
+          <a:prstGeom prst="rect">
+            <a:avLst>
+              <a:gd name="adj" fmla="val 9615"/>
+            </a:avLst>
+          </a:prstGeom>
+          <a:solidFill>
+            <a:srgbClr val="FFFFFF"/>
+          </a:solidFill>
+          <a:ln w="12700">
+            <a:solidFill>
+              <a:srgbClr val="0D9488"/>
+            </a:solidFill>
+            <a:prstDash val="solid"/>
+          </a:ln>
+        </p:spPr>
+      </p:sp>
+      <p:sp>
+        <p:nvSpPr>
+          <p:cNvPr id="32" name="Text 30"/>
+          <p:cNvSpPr/>
+          <p:nvPr/>
+        </p:nvSpPr>
+        <p:spPr>
+          <a:xfrm>
+            <a:off x="4370832" y="3364992"/>
+            <a:ext cx="1645920" cy="475488"/>
+          </a:xfrm>
+          <a:prstGeom prst="rect">
+            <a:avLst/>
+          </a:prstGeom>
+          <a:noFill/>
+          <a:ln/>
+        </p:spPr>
+        <p:txBody>
+          <a:bodyPr wrap="square" lIns="0" tIns="0" rIns="0" bIns="0" rtlCol="0" anchor="ctr"/>
+          <a:lstStyle/>
+          <a:p>
+            <a:pPr algn="ctr" indent="0" marL="0">
+              <a:buNone/>
+            </a:pPr>
+            <a:r>
+              <a:rPr lang="en-US" sz="1400" b="1" dirty="0">
+                <a:solidFill>
+                  <a:srgbClr val="0D9488"/>
+                </a:solidFill>
+                <a:latin typeface="Trebuchet MS" pitchFamily="34" charset="0"/>
+                <a:ea typeface="Trebuchet MS" pitchFamily="34" charset="-122"/>
+                <a:cs typeface="Trebuchet MS" pitchFamily="34" charset="-120"/>
+              </a:rPr>
+              <a:t>ful</a:t>
+            </a:r>
+            <a:endParaRPr lang="en-US" sz="1400" dirty="0"/>
+          </a:p>
+        </p:txBody>
+      </p:sp>
+      <p:sp>
+        <p:nvSpPr>
+          <p:cNvPr id="33" name="Text 31"/>
+          <p:cNvSpPr/>
+          <p:nvPr/>
+        </p:nvSpPr>
+        <p:spPr>
+          <a:xfrm>
+            <a:off x="6016752" y="3364992"/>
+            <a:ext cx="411480" cy="475488"/>
+          </a:xfrm>
+          <a:prstGeom prst="rect">
+            <a:avLst/>
+          </a:prstGeom>
+          <a:noFill/>
+          <a:ln/>
+        </p:spPr>
+        <p:txBody>
+          <a:bodyPr wrap="square" lIns="0" tIns="0" rIns="0" bIns="0" rtlCol="0" anchor="ctr"/>
+          <a:lstStyle/>
+          <a:p>
+            <a:pPr algn="ctr" indent="0" marL="0">
+              <a:buNone/>
+            </a:pPr>
+            <a:r>
+              <a:rPr lang="en-US" sz="1600" b="1" dirty="0">
+                <a:solidFill>
+                  <a:srgbClr val="0D9488"/>
+                </a:solidFill>
+                <a:latin typeface="Trebuchet MS" pitchFamily="34" charset="0"/>
+                <a:ea typeface="Trebuchet MS" pitchFamily="34" charset="-122"/>
+                <a:cs typeface="Trebuchet MS" pitchFamily="34" charset="-120"/>
+              </a:rPr>
+              <a:t>·</a:t>
+            </a:r>
+            <a:endParaRPr lang="en-US" sz="1600" dirty="0"/>
+          </a:p>
+        </p:txBody>
+      </p:sp>
+      <p:sp>
+        <p:nvSpPr>
+          <p:cNvPr id="34" name="Shape 32"/>
+          <p:cNvSpPr/>
+          <p:nvPr/>
+        </p:nvSpPr>
+        <p:spPr>
+          <a:xfrm>
+            <a:off x="6428232" y="3364992"/>
+            <a:ext cx="1645920" cy="475488"/>
+          </a:xfrm>
+          <a:prstGeom prst="rect">
+            <a:avLst>
+              <a:gd name="adj" fmla="val 9615"/>
+            </a:avLst>
+          </a:prstGeom>
+          <a:solidFill>
+            <a:srgbClr val="FFFFFF"/>
+          </a:solidFill>
+          <a:ln w="12700">
+            <a:solidFill>
+              <a:srgbClr val="0D9488"/>
+            </a:solidFill>
+            <a:prstDash val="solid"/>
+          </a:ln>
+        </p:spPr>
+      </p:sp>
+      <p:sp>
+        <p:nvSpPr>
+          <p:cNvPr id="35" name="Text 33"/>
+          <p:cNvSpPr/>
+          <p:nvPr/>
+        </p:nvSpPr>
+        <p:spPr>
+          <a:xfrm>
+            <a:off x="6428232" y="3364992"/>
+            <a:ext cx="1645920" cy="475488"/>
+          </a:xfrm>
+          <a:prstGeom prst="rect">
+            <a:avLst/>
+          </a:prstGeom>
+          <a:noFill/>
+          <a:ln/>
+        </p:spPr>
+        <p:txBody>
+          <a:bodyPr wrap="square" lIns="0" tIns="0" rIns="0" bIns="0" rtlCol="0" anchor="ctr"/>
+          <a:lstStyle/>
+          <a:p>
+            <a:pPr algn="ctr" indent="0" marL="0">
+              <a:buNone/>
+            </a:pPr>
+            <a:r>
+              <a:rPr lang="en-US" sz="1400" b="1" dirty="0">
+                <a:solidFill>
+                  <a:srgbClr val="0D9488"/>
+                </a:solidFill>
+                <a:latin typeface="Trebuchet MS" pitchFamily="34" charset="0"/>
+                <a:ea typeface="Trebuchet MS" pitchFamily="34" charset="-122"/>
+                <a:cs typeface="Trebuchet MS" pitchFamily="34" charset="-120"/>
+              </a:rPr>
+              <a:t>ness</a:t>
+            </a:r>
+            <a:endParaRPr lang="en-US" sz="1400" dirty="0"/>
+          </a:p>
+        </p:txBody>
+      </p:sp>
+      <p:sp>
+        <p:nvSpPr>
+          <p:cNvPr id="36" name="Shape 34"/>
           <p:cNvSpPr/>
           <p:nvPr/>
         </p:nvSpPr>
@@ -27189,7 +28469,7 @@
       </p:sp>
       <p:sp>
         <p:nvSpPr>
-          <p:cNvPr id="29" name="Text 27"/>
+          <p:cNvPr id="37" name="Text 35"/>
           <p:cNvSpPr/>
           <p:nvPr/>
         </p:nvSpPr>
@@ -27228,7 +28508,7 @@
       </p:sp>
       <p:sp>
         <p:nvSpPr>
-          <p:cNvPr id="30" name="Shape 28"/>
+          <p:cNvPr id="38" name="Shape 36"/>
           <p:cNvSpPr/>
           <p:nvPr/>
         </p:nvSpPr>
@@ -27255,14 +28535,14 @@
       </p:sp>
       <p:sp>
         <p:nvSpPr>
-          <p:cNvPr id="31" name="Shape 29"/>
-          <p:cNvSpPr/>
-          <p:nvPr/>
-        </p:nvSpPr>
-        <p:spPr>
-          <a:xfrm>
-            <a:off x="2427732" y="4169664"/>
-            <a:ext cx="685800" cy="475488"/>
+          <p:cNvPr id="39" name="Shape 37"/>
+          <p:cNvSpPr/>
+          <p:nvPr/>
+        </p:nvSpPr>
+        <p:spPr>
+          <a:xfrm>
+            <a:off x="1951828" y="4169664"/>
+            <a:ext cx="603504" cy="475488"/>
           </a:xfrm>
           <a:prstGeom prst="rect">
             <a:avLst>
@@ -27282,14 +28562,14 @@
       </p:sp>
       <p:sp>
         <p:nvSpPr>
-          <p:cNvPr id="32" name="Text 30"/>
-          <p:cNvSpPr/>
-          <p:nvPr/>
-        </p:nvSpPr>
-        <p:spPr>
-          <a:xfrm>
-            <a:off x="2427732" y="4169664"/>
-            <a:ext cx="685800" cy="475488"/>
+          <p:cNvPr id="40" name="Text 38"/>
+          <p:cNvSpPr/>
+          <p:nvPr/>
+        </p:nvSpPr>
+        <p:spPr>
+          <a:xfrm>
+            <a:off x="1951828" y="4169664"/>
+            <a:ext cx="603504" cy="475488"/>
           </a:xfrm>
           <a:prstGeom prst="rect">
             <a:avLst/>
@@ -27321,14 +28601,14 @@
       </p:sp>
       <p:sp>
         <p:nvSpPr>
-          <p:cNvPr id="33" name="Shape 31"/>
-          <p:cNvSpPr/>
-          <p:nvPr/>
-        </p:nvSpPr>
-        <p:spPr>
-          <a:xfrm>
-            <a:off x="3639312" y="4169664"/>
-            <a:ext cx="685800" cy="475488"/>
+          <p:cNvPr id="41" name="Shape 39"/>
+          <p:cNvSpPr/>
+          <p:nvPr/>
+        </p:nvSpPr>
+        <p:spPr>
+          <a:xfrm>
+            <a:off x="2605209" y="4169664"/>
+            <a:ext cx="603504" cy="475488"/>
           </a:xfrm>
           <a:prstGeom prst="rect">
             <a:avLst>
@@ -27348,14 +28628,14 @@
       </p:sp>
       <p:sp>
         <p:nvSpPr>
-          <p:cNvPr id="34" name="Text 32"/>
-          <p:cNvSpPr/>
-          <p:nvPr/>
-        </p:nvSpPr>
-        <p:spPr>
-          <a:xfrm>
-            <a:off x="3639312" y="4169664"/>
-            <a:ext cx="685800" cy="475488"/>
+          <p:cNvPr id="42" name="Text 40"/>
+          <p:cNvSpPr/>
+          <p:nvPr/>
+        </p:nvSpPr>
+        <p:spPr>
+          <a:xfrm>
+            <a:off x="2605209" y="4169664"/>
+            <a:ext cx="603504" cy="475488"/>
           </a:xfrm>
           <a:prstGeom prst="rect">
             <a:avLst/>
@@ -27379,7 +28659,7 @@
                 <a:ea typeface="Trebuchet MS" pitchFamily="34" charset="-122"/>
                 <a:cs typeface="Trebuchet MS" pitchFamily="34" charset="-120"/>
               </a:rPr>
-              <a:t>o</a:t>
+              <a:t>o_e</a:t>
             </a:r>
             <a:endParaRPr lang="en-US" sz="900" dirty="0"/>
           </a:p>
@@ -27387,14 +28667,14 @@
       </p:sp>
       <p:sp>
         <p:nvSpPr>
-          <p:cNvPr id="35" name="Shape 33"/>
-          <p:cNvSpPr/>
-          <p:nvPr/>
-        </p:nvSpPr>
-        <p:spPr>
-          <a:xfrm>
-            <a:off x="4850892" y="4169664"/>
-            <a:ext cx="685800" cy="475488"/>
+          <p:cNvPr id="43" name="Shape 41"/>
+          <p:cNvSpPr/>
+          <p:nvPr/>
+        </p:nvSpPr>
+        <p:spPr>
+          <a:xfrm>
+            <a:off x="3258589" y="4169664"/>
+            <a:ext cx="603504" cy="475488"/>
           </a:xfrm>
           <a:prstGeom prst="rect">
             <a:avLst>
@@ -27414,14 +28694,14 @@
       </p:sp>
       <p:sp>
         <p:nvSpPr>
-          <p:cNvPr id="36" name="Text 34"/>
-          <p:cNvSpPr/>
-          <p:nvPr/>
-        </p:nvSpPr>
-        <p:spPr>
-          <a:xfrm>
-            <a:off x="4850892" y="4169664"/>
-            <a:ext cx="685800" cy="475488"/>
+          <p:cNvPr id="44" name="Text 42"/>
+          <p:cNvSpPr/>
+          <p:nvPr/>
+        </p:nvSpPr>
+        <p:spPr>
+          <a:xfrm>
+            <a:off x="3258589" y="4169664"/>
+            <a:ext cx="603504" cy="475488"/>
           </a:xfrm>
           <a:prstGeom prst="rect">
             <a:avLst/>
@@ -27453,14 +28733,14 @@
       </p:sp>
       <p:sp>
         <p:nvSpPr>
-          <p:cNvPr id="37" name="Shape 35"/>
-          <p:cNvSpPr/>
-          <p:nvPr/>
-        </p:nvSpPr>
-        <p:spPr>
-          <a:xfrm>
-            <a:off x="6062472" y="4169664"/>
-            <a:ext cx="685800" cy="475488"/>
+          <p:cNvPr id="45" name="Shape 43"/>
+          <p:cNvSpPr/>
+          <p:nvPr/>
+        </p:nvSpPr>
+        <p:spPr>
+          <a:xfrm>
+            <a:off x="3911969" y="4169664"/>
+            <a:ext cx="603504" cy="475488"/>
           </a:xfrm>
           <a:prstGeom prst="rect">
             <a:avLst>
@@ -27480,14 +28760,14 @@
       </p:sp>
       <p:sp>
         <p:nvSpPr>
-          <p:cNvPr id="38" name="Text 36"/>
-          <p:cNvSpPr/>
-          <p:nvPr/>
-        </p:nvSpPr>
-        <p:spPr>
-          <a:xfrm>
-            <a:off x="6062472" y="4169664"/>
-            <a:ext cx="685800" cy="475488"/>
+          <p:cNvPr id="46" name="Text 44"/>
+          <p:cNvSpPr/>
+          <p:nvPr/>
+        </p:nvSpPr>
+        <p:spPr>
+          <a:xfrm>
+            <a:off x="3911969" y="4169664"/>
+            <a:ext cx="603504" cy="475488"/>
           </a:xfrm>
           <a:prstGeom prst="rect">
             <a:avLst/>
@@ -27511,7 +28791,7 @@
                 <a:ea typeface="Trebuchet MS" pitchFamily="34" charset="-122"/>
                 <a:cs typeface="Trebuchet MS" pitchFamily="34" charset="-120"/>
               </a:rPr>
-              <a:t>e</a:t>
+              <a:t>f</a:t>
             </a:r>
             <a:endParaRPr lang="en-US" sz="900" dirty="0"/>
           </a:p>
@@ -27519,14 +28799,14 @@
       </p:sp>
       <p:sp>
         <p:nvSpPr>
-          <p:cNvPr id="39" name="Shape 37"/>
-          <p:cNvSpPr/>
-          <p:nvPr/>
-        </p:nvSpPr>
-        <p:spPr>
-          <a:xfrm>
-            <a:off x="7274052" y="4169664"/>
-            <a:ext cx="685800" cy="475488"/>
+          <p:cNvPr id="47" name="Shape 45"/>
+          <p:cNvSpPr/>
+          <p:nvPr/>
+        </p:nvSpPr>
+        <p:spPr>
+          <a:xfrm>
+            <a:off x="4565350" y="4169664"/>
+            <a:ext cx="603504" cy="475488"/>
           </a:xfrm>
           <a:prstGeom prst="rect">
             <a:avLst>
@@ -27546,14 +28826,14 @@
       </p:sp>
       <p:sp>
         <p:nvSpPr>
-          <p:cNvPr id="40" name="Text 38"/>
-          <p:cNvSpPr/>
-          <p:nvPr/>
-        </p:nvSpPr>
-        <p:spPr>
-          <a:xfrm>
-            <a:off x="7274052" y="4169664"/>
-            <a:ext cx="685800" cy="475488"/>
+          <p:cNvPr id="48" name="Text 46"/>
+          <p:cNvSpPr/>
+          <p:nvPr/>
+        </p:nvSpPr>
+        <p:spPr>
+          <a:xfrm>
+            <a:off x="4565350" y="4169664"/>
+            <a:ext cx="603504" cy="475488"/>
           </a:xfrm>
           <a:prstGeom prst="rect">
             <a:avLst/>
@@ -27577,7 +28857,337 @@
                 <a:ea typeface="Trebuchet MS" pitchFamily="34" charset="-122"/>
                 <a:cs typeface="Trebuchet MS" pitchFamily="34" charset="-120"/>
               </a:rPr>
-              <a:t>d</a:t>
+              <a:t>u</a:t>
+            </a:r>
+            <a:endParaRPr lang="en-US" sz="900" dirty="0"/>
+          </a:p>
+        </p:txBody>
+      </p:sp>
+      <p:sp>
+        <p:nvSpPr>
+          <p:cNvPr id="49" name="Shape 47"/>
+          <p:cNvSpPr/>
+          <p:nvPr/>
+        </p:nvSpPr>
+        <p:spPr>
+          <a:xfrm>
+            <a:off x="5218730" y="4169664"/>
+            <a:ext cx="603504" cy="475488"/>
+          </a:xfrm>
+          <a:prstGeom prst="rect">
+            <a:avLst>
+              <a:gd name="adj" fmla="val 7692"/>
+            </a:avLst>
+          </a:prstGeom>
+          <a:solidFill>
+            <a:srgbClr val="FFFFFF"/>
+          </a:solidFill>
+          <a:ln w="12700">
+            <a:solidFill>
+              <a:srgbClr val="DB2777"/>
+            </a:solidFill>
+            <a:prstDash val="solid"/>
+          </a:ln>
+        </p:spPr>
+      </p:sp>
+      <p:sp>
+        <p:nvSpPr>
+          <p:cNvPr id="50" name="Text 48"/>
+          <p:cNvSpPr/>
+          <p:nvPr/>
+        </p:nvSpPr>
+        <p:spPr>
+          <a:xfrm>
+            <a:off x="5218730" y="4169664"/>
+            <a:ext cx="603504" cy="475488"/>
+          </a:xfrm>
+          <a:prstGeom prst="rect">
+            <a:avLst/>
+          </a:prstGeom>
+          <a:noFill/>
+          <a:ln/>
+        </p:spPr>
+        <p:txBody>
+          <a:bodyPr wrap="square" lIns="0" tIns="0" rIns="0" bIns="0" rtlCol="0" anchor="ctr"/>
+          <a:lstStyle/>
+          <a:p>
+            <a:pPr algn="ctr" indent="0" marL="0">
+              <a:buNone/>
+            </a:pPr>
+            <a:r>
+              <a:rPr lang="en-US" sz="900" b="1" dirty="0">
+                <a:solidFill>
+                  <a:srgbClr val="9D174D"/>
+                </a:solidFill>
+                <a:latin typeface="Trebuchet MS" pitchFamily="34" charset="0"/>
+                <a:ea typeface="Trebuchet MS" pitchFamily="34" charset="-122"/>
+                <a:cs typeface="Trebuchet MS" pitchFamily="34" charset="-120"/>
+              </a:rPr>
+              <a:t>l</a:t>
+            </a:r>
+            <a:endParaRPr lang="en-US" sz="900" dirty="0"/>
+          </a:p>
+        </p:txBody>
+      </p:sp>
+      <p:sp>
+        <p:nvSpPr>
+          <p:cNvPr id="51" name="Shape 49"/>
+          <p:cNvSpPr/>
+          <p:nvPr/>
+        </p:nvSpPr>
+        <p:spPr>
+          <a:xfrm>
+            <a:off x="5872111" y="4169664"/>
+            <a:ext cx="603504" cy="475488"/>
+          </a:xfrm>
+          <a:prstGeom prst="rect">
+            <a:avLst>
+              <a:gd name="adj" fmla="val 7692"/>
+            </a:avLst>
+          </a:prstGeom>
+          <a:solidFill>
+            <a:srgbClr val="FFFFFF"/>
+          </a:solidFill>
+          <a:ln w="12700">
+            <a:solidFill>
+              <a:srgbClr val="DB2777"/>
+            </a:solidFill>
+            <a:prstDash val="solid"/>
+          </a:ln>
+        </p:spPr>
+      </p:sp>
+      <p:sp>
+        <p:nvSpPr>
+          <p:cNvPr id="52" name="Text 50"/>
+          <p:cNvSpPr/>
+          <p:nvPr/>
+        </p:nvSpPr>
+        <p:spPr>
+          <a:xfrm>
+            <a:off x="5872111" y="4169664"/>
+            <a:ext cx="603504" cy="475488"/>
+          </a:xfrm>
+          <a:prstGeom prst="rect">
+            <a:avLst/>
+          </a:prstGeom>
+          <a:noFill/>
+          <a:ln/>
+        </p:spPr>
+        <p:txBody>
+          <a:bodyPr wrap="square" lIns="0" tIns="0" rIns="0" bIns="0" rtlCol="0" anchor="ctr"/>
+          <a:lstStyle/>
+          <a:p>
+            <a:pPr algn="ctr" indent="0" marL="0">
+              <a:buNone/>
+            </a:pPr>
+            <a:r>
+              <a:rPr lang="en-US" sz="900" b="1" dirty="0">
+                <a:solidFill>
+                  <a:srgbClr val="9D174D"/>
+                </a:solidFill>
+                <a:latin typeface="Trebuchet MS" pitchFamily="34" charset="0"/>
+                <a:ea typeface="Trebuchet MS" pitchFamily="34" charset="-122"/>
+                <a:cs typeface="Trebuchet MS" pitchFamily="34" charset="-120"/>
+              </a:rPr>
+              <a:t>n</a:t>
+            </a:r>
+            <a:endParaRPr lang="en-US" sz="900" dirty="0"/>
+          </a:p>
+        </p:txBody>
+      </p:sp>
+      <p:sp>
+        <p:nvSpPr>
+          <p:cNvPr id="53" name="Shape 51"/>
+          <p:cNvSpPr/>
+          <p:nvPr/>
+        </p:nvSpPr>
+        <p:spPr>
+          <a:xfrm>
+            <a:off x="6525491" y="4169664"/>
+            <a:ext cx="603504" cy="475488"/>
+          </a:xfrm>
+          <a:prstGeom prst="rect">
+            <a:avLst>
+              <a:gd name="adj" fmla="val 7692"/>
+            </a:avLst>
+          </a:prstGeom>
+          <a:solidFill>
+            <a:srgbClr val="FFFFFF"/>
+          </a:solidFill>
+          <a:ln w="12700">
+            <a:solidFill>
+              <a:srgbClr val="DB2777"/>
+            </a:solidFill>
+            <a:prstDash val="solid"/>
+          </a:ln>
+        </p:spPr>
+      </p:sp>
+      <p:sp>
+        <p:nvSpPr>
+          <p:cNvPr id="54" name="Text 52"/>
+          <p:cNvSpPr/>
+          <p:nvPr/>
+        </p:nvSpPr>
+        <p:spPr>
+          <a:xfrm>
+            <a:off x="6525491" y="4169664"/>
+            <a:ext cx="603504" cy="475488"/>
+          </a:xfrm>
+          <a:prstGeom prst="rect">
+            <a:avLst/>
+          </a:prstGeom>
+          <a:noFill/>
+          <a:ln/>
+        </p:spPr>
+        <p:txBody>
+          <a:bodyPr wrap="square" lIns="0" tIns="0" rIns="0" bIns="0" rtlCol="0" anchor="ctr"/>
+          <a:lstStyle/>
+          <a:p>
+            <a:pPr algn="ctr" indent="0" marL="0">
+              <a:buNone/>
+            </a:pPr>
+            <a:r>
+              <a:rPr lang="en-US" sz="900" b="1" dirty="0">
+                <a:solidFill>
+                  <a:srgbClr val="9D174D"/>
+                </a:solidFill>
+                <a:latin typeface="Trebuchet MS" pitchFamily="34" charset="0"/>
+                <a:ea typeface="Trebuchet MS" pitchFamily="34" charset="-122"/>
+                <a:cs typeface="Trebuchet MS" pitchFamily="34" charset="-120"/>
+              </a:rPr>
+              <a:t>e</a:t>
+            </a:r>
+            <a:endParaRPr lang="en-US" sz="900" dirty="0"/>
+          </a:p>
+        </p:txBody>
+      </p:sp>
+      <p:sp>
+        <p:nvSpPr>
+          <p:cNvPr id="55" name="Shape 53"/>
+          <p:cNvSpPr/>
+          <p:nvPr/>
+        </p:nvSpPr>
+        <p:spPr>
+          <a:xfrm>
+            <a:off x="7178871" y="4169664"/>
+            <a:ext cx="603504" cy="475488"/>
+          </a:xfrm>
+          <a:prstGeom prst="rect">
+            <a:avLst>
+              <a:gd name="adj" fmla="val 7692"/>
+            </a:avLst>
+          </a:prstGeom>
+          <a:solidFill>
+            <a:srgbClr val="FFFFFF"/>
+          </a:solidFill>
+          <a:ln w="12700">
+            <a:solidFill>
+              <a:srgbClr val="DB2777"/>
+            </a:solidFill>
+            <a:prstDash val="solid"/>
+          </a:ln>
+        </p:spPr>
+      </p:sp>
+      <p:sp>
+        <p:nvSpPr>
+          <p:cNvPr id="56" name="Text 54"/>
+          <p:cNvSpPr/>
+          <p:nvPr/>
+        </p:nvSpPr>
+        <p:spPr>
+          <a:xfrm>
+            <a:off x="7178871" y="4169664"/>
+            <a:ext cx="603504" cy="475488"/>
+          </a:xfrm>
+          <a:prstGeom prst="rect">
+            <a:avLst/>
+          </a:prstGeom>
+          <a:noFill/>
+          <a:ln/>
+        </p:spPr>
+        <p:txBody>
+          <a:bodyPr wrap="square" lIns="0" tIns="0" rIns="0" bIns="0" rtlCol="0" anchor="ctr"/>
+          <a:lstStyle/>
+          <a:p>
+            <a:pPr algn="ctr" indent="0" marL="0">
+              <a:buNone/>
+            </a:pPr>
+            <a:r>
+              <a:rPr lang="en-US" sz="900" b="1" dirty="0">
+                <a:solidFill>
+                  <a:srgbClr val="9D174D"/>
+                </a:solidFill>
+                <a:latin typeface="Trebuchet MS" pitchFamily="34" charset="0"/>
+                <a:ea typeface="Trebuchet MS" pitchFamily="34" charset="-122"/>
+                <a:cs typeface="Trebuchet MS" pitchFamily="34" charset="-120"/>
+              </a:rPr>
+              <a:t>s</a:t>
+            </a:r>
+            <a:endParaRPr lang="en-US" sz="900" dirty="0"/>
+          </a:p>
+        </p:txBody>
+      </p:sp>
+      <p:sp>
+        <p:nvSpPr>
+          <p:cNvPr id="57" name="Shape 55"/>
+          <p:cNvSpPr/>
+          <p:nvPr/>
+        </p:nvSpPr>
+        <p:spPr>
+          <a:xfrm>
+            <a:off x="7832252" y="4169664"/>
+            <a:ext cx="603504" cy="475488"/>
+          </a:xfrm>
+          <a:prstGeom prst="rect">
+            <a:avLst>
+              <a:gd name="adj" fmla="val 7692"/>
+            </a:avLst>
+          </a:prstGeom>
+          <a:solidFill>
+            <a:srgbClr val="FFFFFF"/>
+          </a:solidFill>
+          <a:ln w="12700">
+            <a:solidFill>
+              <a:srgbClr val="DB2777"/>
+            </a:solidFill>
+            <a:prstDash val="solid"/>
+          </a:ln>
+        </p:spPr>
+      </p:sp>
+      <p:sp>
+        <p:nvSpPr>
+          <p:cNvPr id="58" name="Text 56"/>
+          <p:cNvSpPr/>
+          <p:nvPr/>
+        </p:nvSpPr>
+        <p:spPr>
+          <a:xfrm>
+            <a:off x="7832252" y="4169664"/>
+            <a:ext cx="603504" cy="475488"/>
+          </a:xfrm>
+          <a:prstGeom prst="rect">
+            <a:avLst/>
+          </a:prstGeom>
+          <a:noFill/>
+          <a:ln/>
+        </p:spPr>
+        <p:txBody>
+          <a:bodyPr wrap="square" lIns="0" tIns="0" rIns="0" bIns="0" rtlCol="0" anchor="ctr"/>
+          <a:lstStyle/>
+          <a:p>
+            <a:pPr algn="ctr" indent="0" marL="0">
+              <a:buNone/>
+            </a:pPr>
+            <a:r>
+              <a:rPr lang="en-US" sz="900" b="1" dirty="0">
+                <a:solidFill>
+                  <a:srgbClr val="9D174D"/>
+                </a:solidFill>
+                <a:latin typeface="Trebuchet MS" pitchFamily="34" charset="0"/>
+                <a:ea typeface="Trebuchet MS" pitchFamily="34" charset="-122"/>
+                <a:cs typeface="Trebuchet MS" pitchFamily="34" charset="-120"/>
+              </a:rPr>
+              <a:t>s</a:t>
             </a:r>
             <a:endParaRPr lang="en-US" sz="900" dirty="0"/>
           </a:p>
@@ -27869,7 +29479,7 @@
                 <a:ea typeface="Calibri" pitchFamily="34" charset="-122"/>
                 <a:cs typeface="Calibri" pitchFamily="34" charset="-120"/>
               </a:rPr>
-              <a:t>Word Labs  •  wordlabs.app  •  Root: 'hope' = wish for something good</a:t>
+              <a:t>Word Labs  •  wordlabs.app  •  Root: 'hope' = to wish for something good</a:t>
             </a:r>
             <a:endParaRPr lang="en-US" sz="800" dirty="0"/>
           </a:p>
@@ -28696,7 +30306,7 @@
                 <a:ea typeface="Calibri" pitchFamily="34" charset="-122"/>
                 <a:cs typeface="Calibri" pitchFamily="34" charset="-120"/>
               </a:rPr>
-              <a:t>Word Labs  •  wordlabs.app  •  Root: 'hope' = wish for something good</a:t>
+              <a:t>Word Labs  •  wordlabs.app  •  Root: 'hope' = to wish for something good</a:t>
             </a:r>
             <a:endParaRPr lang="en-US" sz="800" dirty="0"/>
           </a:p>
@@ -29013,7 +30623,7 @@
                 <a:ea typeface="Calibri" pitchFamily="34" charset="-122"/>
                 <a:cs typeface="Calibri" pitchFamily="34" charset="-120"/>
               </a:rPr>
-              <a:t>wish for something good</a:t>
+              <a:t>to wish for something good</a:t>
             </a:r>
             <a:endParaRPr lang="en-US" sz="850" dirty="0"/>
           </a:p>
@@ -29237,7 +30847,7 @@
                 <a:ea typeface="Calibri" pitchFamily="34" charset="-122"/>
                 <a:cs typeface="Calibri" pitchFamily="34" charset="-120"/>
               </a:rPr>
-              <a:t>state or quality of</a:t>
+              <a:t>state of</a:t>
             </a:r>
             <a:endParaRPr lang="en-US" sz="850" dirty="0"/>
           </a:p>
@@ -29793,7 +31403,7 @@
                 <a:ea typeface="Calibri" pitchFamily="34" charset="-122"/>
                 <a:cs typeface="Calibri" pitchFamily="34" charset="-120"/>
               </a:rPr>
-              <a:t>Word Labs  •  wordlabs.app  •  Root: 'hope' = wish for something good</a:t>
+              <a:t>Word Labs  •  wordlabs.app  •  Root: 'hope' = to wish for something good</a:t>
             </a:r>
             <a:endParaRPr lang="en-US" sz="800" dirty="0"/>
           </a:p>
@@ -30110,7 +31720,7 @@
                 <a:ea typeface="Calibri" pitchFamily="34" charset="-122"/>
                 <a:cs typeface="Calibri" pitchFamily="34" charset="-120"/>
               </a:rPr>
-              <a:t>wish for something good</a:t>
+              <a:t>to wish for something good</a:t>
             </a:r>
             <a:endParaRPr lang="en-US" sz="850" dirty="0"/>
           </a:p>
@@ -30334,7 +31944,7 @@
                 <a:ea typeface="Calibri" pitchFamily="34" charset="-122"/>
                 <a:cs typeface="Calibri" pitchFamily="34" charset="-120"/>
               </a:rPr>
-              <a:t>state or quality of</a:t>
+              <a:t>state of</a:t>
             </a:r>
             <a:endParaRPr lang="en-US" sz="850" dirty="0"/>
           </a:p>
@@ -31127,7 +32737,7 @@
                 <a:ea typeface="Calibri" pitchFamily="34" charset="-122"/>
                 <a:cs typeface="Calibri" pitchFamily="34" charset="-120"/>
               </a:rPr>
-              <a:t>Word Labs  •  wordlabs.app  •  Root: 'hope' = wish for something good</a:t>
+              <a:t>Word Labs  •  wordlabs.app  •  Root: 'hope' = to wish for something good</a:t>
             </a:r>
             <a:endParaRPr lang="en-US" sz="800" dirty="0"/>
           </a:p>
@@ -31444,7 +33054,7 @@
                 <a:ea typeface="Calibri" pitchFamily="34" charset="-122"/>
                 <a:cs typeface="Calibri" pitchFamily="34" charset="-120"/>
               </a:rPr>
-              <a:t>wish for something good</a:t>
+              <a:t>to wish for something good</a:t>
             </a:r>
             <a:endParaRPr lang="en-US" sz="850" dirty="0"/>
           </a:p>
@@ -31668,7 +33278,7 @@
                 <a:ea typeface="Calibri" pitchFamily="34" charset="-122"/>
                 <a:cs typeface="Calibri" pitchFamily="34" charset="-120"/>
               </a:rPr>
-              <a:t>state or quality of</a:t>
+              <a:t>state of</a:t>
             </a:r>
             <a:endParaRPr lang="en-US" sz="850" dirty="0"/>
           </a:p>
@@ -32144,8 +33754,8 @@
         </p:nvSpPr>
         <p:spPr>
           <a:xfrm>
-            <a:off x="1951828" y="4169664"/>
-            <a:ext cx="603504" cy="475488"/>
+            <a:off x="1952244" y="4169664"/>
+            <a:ext cx="543652" cy="475488"/>
           </a:xfrm>
           <a:prstGeom prst="rect">
             <a:avLst>
@@ -32171,8 +33781,8 @@
         </p:nvSpPr>
         <p:spPr>
           <a:xfrm>
-            <a:off x="1951828" y="4169664"/>
-            <a:ext cx="603504" cy="475488"/>
+            <a:off x="1952244" y="4169664"/>
+            <a:ext cx="543652" cy="475488"/>
           </a:xfrm>
           <a:prstGeom prst="rect">
             <a:avLst/>
@@ -32210,8 +33820,8 @@
         </p:nvSpPr>
         <p:spPr>
           <a:xfrm>
-            <a:off x="2605209" y="4169664"/>
-            <a:ext cx="603504" cy="475488"/>
+            <a:off x="2546188" y="4169664"/>
+            <a:ext cx="543652" cy="475488"/>
           </a:xfrm>
           <a:prstGeom prst="rect">
             <a:avLst>
@@ -32237,8 +33847,8 @@
         </p:nvSpPr>
         <p:spPr>
           <a:xfrm>
-            <a:off x="2605209" y="4169664"/>
-            <a:ext cx="603504" cy="475488"/>
+            <a:off x="2546188" y="4169664"/>
+            <a:ext cx="543652" cy="475488"/>
           </a:xfrm>
           <a:prstGeom prst="rect">
             <a:avLst/>
@@ -32262,7 +33872,7 @@
                 <a:ea typeface="Trebuchet MS" pitchFamily="34" charset="-122"/>
                 <a:cs typeface="Trebuchet MS" pitchFamily="34" charset="-120"/>
               </a:rPr>
-              <a:t>o</a:t>
+              <a:t>o_e</a:t>
             </a:r>
             <a:endParaRPr lang="en-US" sz="900" dirty="0"/>
           </a:p>
@@ -32276,8 +33886,8 @@
         </p:nvSpPr>
         <p:spPr>
           <a:xfrm>
-            <a:off x="3258589" y="4169664"/>
-            <a:ext cx="603504" cy="475488"/>
+            <a:off x="3140133" y="4169664"/>
+            <a:ext cx="543652" cy="475488"/>
           </a:xfrm>
           <a:prstGeom prst="rect">
             <a:avLst>
@@ -32303,8 +33913,8 @@
         </p:nvSpPr>
         <p:spPr>
           <a:xfrm>
-            <a:off x="3258589" y="4169664"/>
-            <a:ext cx="603504" cy="475488"/>
+            <a:off x="3140133" y="4169664"/>
+            <a:ext cx="543652" cy="475488"/>
           </a:xfrm>
           <a:prstGeom prst="rect">
             <a:avLst/>
@@ -32342,8 +33952,8 @@
         </p:nvSpPr>
         <p:spPr>
           <a:xfrm>
-            <a:off x="3911969" y="4169664"/>
-            <a:ext cx="603504" cy="475488"/>
+            <a:off x="3734077" y="4169664"/>
+            <a:ext cx="543652" cy="475488"/>
           </a:xfrm>
           <a:prstGeom prst="rect">
             <a:avLst>
@@ -32369,8 +33979,8 @@
         </p:nvSpPr>
         <p:spPr>
           <a:xfrm>
-            <a:off x="3911969" y="4169664"/>
-            <a:ext cx="603504" cy="475488"/>
+            <a:off x="3734077" y="4169664"/>
+            <a:ext cx="543652" cy="475488"/>
           </a:xfrm>
           <a:prstGeom prst="rect">
             <a:avLst/>
@@ -32394,7 +34004,7 @@
                 <a:ea typeface="Trebuchet MS" pitchFamily="34" charset="-122"/>
                 <a:cs typeface="Trebuchet MS" pitchFamily="34" charset="-120"/>
               </a:rPr>
-              <a:t>e</a:t>
+              <a:t>l</a:t>
             </a:r>
             <a:endParaRPr lang="en-US" sz="900" dirty="0"/>
           </a:p>
@@ -32408,8 +34018,8 @@
         </p:nvSpPr>
         <p:spPr>
           <a:xfrm>
-            <a:off x="4565350" y="4169664"/>
-            <a:ext cx="603504" cy="475488"/>
+            <a:off x="4328021" y="4169664"/>
+            <a:ext cx="543652" cy="475488"/>
           </a:xfrm>
           <a:prstGeom prst="rect">
             <a:avLst>
@@ -32435,8 +34045,8 @@
         </p:nvSpPr>
         <p:spPr>
           <a:xfrm>
-            <a:off x="4565350" y="4169664"/>
-            <a:ext cx="603504" cy="475488"/>
+            <a:off x="4328021" y="4169664"/>
+            <a:ext cx="543652" cy="475488"/>
           </a:xfrm>
           <a:prstGeom prst="rect">
             <a:avLst/>
@@ -32460,7 +34070,7 @@
                 <a:ea typeface="Trebuchet MS" pitchFamily="34" charset="-122"/>
                 <a:cs typeface="Trebuchet MS" pitchFamily="34" charset="-120"/>
               </a:rPr>
-              <a:t>l</a:t>
+              <a:t>e</a:t>
             </a:r>
             <a:endParaRPr lang="en-US" sz="900" dirty="0"/>
           </a:p>
@@ -32474,8 +34084,8 @@
         </p:nvSpPr>
         <p:spPr>
           <a:xfrm>
-            <a:off x="5218730" y="4169664"/>
-            <a:ext cx="603504" cy="475488"/>
+            <a:off x="4921966" y="4169664"/>
+            <a:ext cx="543652" cy="475488"/>
           </a:xfrm>
           <a:prstGeom prst="rect">
             <a:avLst>
@@ -32501,8 +34111,8 @@
         </p:nvSpPr>
         <p:spPr>
           <a:xfrm>
-            <a:off x="5218730" y="4169664"/>
-            <a:ext cx="603504" cy="475488"/>
+            <a:off x="4921966" y="4169664"/>
+            <a:ext cx="543652" cy="475488"/>
           </a:xfrm>
           <a:prstGeom prst="rect">
             <a:avLst/>
@@ -32526,7 +34136,7 @@
                 <a:ea typeface="Trebuchet MS" pitchFamily="34" charset="-122"/>
                 <a:cs typeface="Trebuchet MS" pitchFamily="34" charset="-120"/>
               </a:rPr>
-              <a:t>e</a:t>
+              <a:t>s</a:t>
             </a:r>
             <a:endParaRPr lang="en-US" sz="900" dirty="0"/>
           </a:p>
@@ -32540,8 +34150,8 @@
         </p:nvSpPr>
         <p:spPr>
           <a:xfrm>
-            <a:off x="5872111" y="4169664"/>
-            <a:ext cx="603504" cy="475488"/>
+            <a:off x="5515910" y="4169664"/>
+            <a:ext cx="543652" cy="475488"/>
           </a:xfrm>
           <a:prstGeom prst="rect">
             <a:avLst>
@@ -32567,8 +34177,8 @@
         </p:nvSpPr>
         <p:spPr>
           <a:xfrm>
-            <a:off x="5872111" y="4169664"/>
-            <a:ext cx="603504" cy="475488"/>
+            <a:off x="5515910" y="4169664"/>
+            <a:ext cx="543652" cy="475488"/>
           </a:xfrm>
           <a:prstGeom prst="rect">
             <a:avLst/>
@@ -32592,7 +34202,7 @@
                 <a:ea typeface="Trebuchet MS" pitchFamily="34" charset="-122"/>
                 <a:cs typeface="Trebuchet MS" pitchFamily="34" charset="-120"/>
               </a:rPr>
-              <a:t>ss</a:t>
+              <a:t>s</a:t>
             </a:r>
             <a:endParaRPr lang="en-US" sz="900" dirty="0"/>
           </a:p>
@@ -32606,8 +34216,8 @@
         </p:nvSpPr>
         <p:spPr>
           <a:xfrm>
-            <a:off x="6525491" y="4169664"/>
-            <a:ext cx="603504" cy="475488"/>
+            <a:off x="6109855" y="4169664"/>
+            <a:ext cx="543652" cy="475488"/>
           </a:xfrm>
           <a:prstGeom prst="rect">
             <a:avLst>
@@ -32633,8 +34243,8 @@
         </p:nvSpPr>
         <p:spPr>
           <a:xfrm>
-            <a:off x="6525491" y="4169664"/>
-            <a:ext cx="603504" cy="475488"/>
+            <a:off x="6109855" y="4169664"/>
+            <a:ext cx="543652" cy="475488"/>
           </a:xfrm>
           <a:prstGeom prst="rect">
             <a:avLst/>
@@ -32672,8 +34282,8 @@
         </p:nvSpPr>
         <p:spPr>
           <a:xfrm>
-            <a:off x="7178871" y="4169664"/>
-            <a:ext cx="603504" cy="475488"/>
+            <a:off x="6703799" y="4169664"/>
+            <a:ext cx="543652" cy="475488"/>
           </a:xfrm>
           <a:prstGeom prst="rect">
             <a:avLst>
@@ -32699,8 +34309,8 @@
         </p:nvSpPr>
         <p:spPr>
           <a:xfrm>
-            <a:off x="7178871" y="4169664"/>
-            <a:ext cx="603504" cy="475488"/>
+            <a:off x="6703799" y="4169664"/>
+            <a:ext cx="543652" cy="475488"/>
           </a:xfrm>
           <a:prstGeom prst="rect">
             <a:avLst/>
@@ -32738,8 +34348,8 @@
         </p:nvSpPr>
         <p:spPr>
           <a:xfrm>
-            <a:off x="7832252" y="4169664"/>
-            <a:ext cx="603504" cy="475488"/>
+            <a:off x="7297743" y="4169664"/>
+            <a:ext cx="543652" cy="475488"/>
           </a:xfrm>
           <a:prstGeom prst="rect">
             <a:avLst>
@@ -32765,8 +34375,8 @@
         </p:nvSpPr>
         <p:spPr>
           <a:xfrm>
-            <a:off x="7832252" y="4169664"/>
-            <a:ext cx="603504" cy="475488"/>
+            <a:off x="7297743" y="4169664"/>
+            <a:ext cx="543652" cy="475488"/>
           </a:xfrm>
           <a:prstGeom prst="rect">
             <a:avLst/>
@@ -32790,7 +34400,73 @@
                 <a:ea typeface="Trebuchet MS" pitchFamily="34" charset="-122"/>
                 <a:cs typeface="Trebuchet MS" pitchFamily="34" charset="-120"/>
               </a:rPr>
-              <a:t>ss</a:t>
+              <a:t>s</a:t>
+            </a:r>
+            <a:endParaRPr lang="en-US" sz="900" dirty="0"/>
+          </a:p>
+        </p:txBody>
+      </p:sp>
+      <p:sp>
+        <p:nvSpPr>
+          <p:cNvPr id="59" name="Shape 57"/>
+          <p:cNvSpPr/>
+          <p:nvPr/>
+        </p:nvSpPr>
+        <p:spPr>
+          <a:xfrm>
+            <a:off x="7891688" y="4169664"/>
+            <a:ext cx="543652" cy="475488"/>
+          </a:xfrm>
+          <a:prstGeom prst="rect">
+            <a:avLst>
+              <a:gd name="adj" fmla="val 7692"/>
+            </a:avLst>
+          </a:prstGeom>
+          <a:solidFill>
+            <a:srgbClr val="FFFFFF"/>
+          </a:solidFill>
+          <a:ln w="12700">
+            <a:solidFill>
+              <a:srgbClr val="DB2777"/>
+            </a:solidFill>
+            <a:prstDash val="solid"/>
+          </a:ln>
+        </p:spPr>
+      </p:sp>
+      <p:sp>
+        <p:nvSpPr>
+          <p:cNvPr id="60" name="Text 58"/>
+          <p:cNvSpPr/>
+          <p:nvPr/>
+        </p:nvSpPr>
+        <p:spPr>
+          <a:xfrm>
+            <a:off x="7891688" y="4169664"/>
+            <a:ext cx="543652" cy="475488"/>
+          </a:xfrm>
+          <a:prstGeom prst="rect">
+            <a:avLst/>
+          </a:prstGeom>
+          <a:noFill/>
+          <a:ln/>
+        </p:spPr>
+        <p:txBody>
+          <a:bodyPr wrap="square" lIns="0" tIns="0" rIns="0" bIns="0" rtlCol="0" anchor="ctr"/>
+          <a:lstStyle/>
+          <a:p>
+            <a:pPr algn="ctr" indent="0" marL="0">
+              <a:buNone/>
+            </a:pPr>
+            <a:r>
+              <a:rPr lang="en-US" sz="900" b="1" dirty="0">
+                <a:solidFill>
+                  <a:srgbClr val="9D174D"/>
+                </a:solidFill>
+                <a:latin typeface="Trebuchet MS" pitchFamily="34" charset="0"/>
+                <a:ea typeface="Trebuchet MS" pitchFamily="34" charset="-122"/>
+                <a:cs typeface="Trebuchet MS" pitchFamily="34" charset="-120"/>
+              </a:rPr>
+              <a:t>s</a:t>
             </a:r>
             <a:endParaRPr lang="en-US" sz="900" dirty="0"/>
           </a:p>
@@ -33082,7 +34758,7 @@
                 <a:ea typeface="Calibri" pitchFamily="34" charset="-122"/>
                 <a:cs typeface="Calibri" pitchFamily="34" charset="-120"/>
               </a:rPr>
-              <a:t>Word Labs  •  wordlabs.app  •  Root: 'hope' = wish for something good</a:t>
+              <a:t>Word Labs  •  wordlabs.app  •  Root: 'hope' = to wish for something good</a:t>
             </a:r>
             <a:endParaRPr lang="en-US" sz="800" dirty="0"/>
           </a:p>
@@ -34251,7 +35927,7 @@
                 <a:ea typeface="Calibri" pitchFamily="34" charset="-122"/>
                 <a:cs typeface="Calibri" pitchFamily="34" charset="-120"/>
               </a:rPr>
-              <a:t>Word Labs  •  wordlabs.app  •  Root: 'hope' = wish for something good</a:t>
+              <a:t>Word Labs  •  wordlabs.app  •  Root: 'hope' = to wish for something good</a:t>
             </a:r>
             <a:endParaRPr lang="en-US" sz="800" dirty="0"/>
           </a:p>
@@ -34509,7 +36185,7 @@
             <a:avLst/>
           </a:prstGeom>
           <a:solidFill>
-            <a:srgbClr val="DDD6FE"/>
+            <a:srgbClr val="F8FAFC"/>
           </a:solidFill>
           <a:ln w="12700">
             <a:solidFill>
@@ -34521,14 +36197,39 @@
       </p:sp>
       <p:sp>
         <p:nvSpPr>
-          <p:cNvPr id="18" name="Text 16"/>
-          <p:cNvSpPr/>
-          <p:nvPr/>
-        </p:nvSpPr>
-        <p:spPr>
-          <a:xfrm>
-            <a:off x="365760" y="1563624"/>
-            <a:ext cx="2468880" cy="402336"/>
+          <p:cNvPr id="18" name="Shape 16"/>
+          <p:cNvSpPr/>
+          <p:nvPr/>
+        </p:nvSpPr>
+        <p:spPr>
+          <a:xfrm>
+            <a:off x="2971800" y="1563624"/>
+            <a:ext cx="2834640" cy="402336"/>
+          </a:xfrm>
+          <a:prstGeom prst="rect">
+            <a:avLst/>
+          </a:prstGeom>
+          <a:solidFill>
+            <a:srgbClr val="CCFBF1"/>
+          </a:solidFill>
+          <a:ln w="12700">
+            <a:solidFill>
+              <a:srgbClr val="E2E8F0"/>
+            </a:solidFill>
+            <a:prstDash val="solid"/>
+          </a:ln>
+        </p:spPr>
+      </p:sp>
+      <p:sp>
+        <p:nvSpPr>
+          <p:cNvPr id="19" name="Text 17"/>
+          <p:cNvSpPr/>
+          <p:nvPr/>
+        </p:nvSpPr>
+        <p:spPr>
+          <a:xfrm>
+            <a:off x="2971800" y="1563624"/>
+            <a:ext cx="2834640" cy="402336"/>
           </a:xfrm>
           <a:prstGeom prst="rect">
             <a:avLst/>
@@ -34546,13 +36247,13 @@
             <a:r>
               <a:rPr lang="en-US" sz="1300" b="1" dirty="0">
                 <a:solidFill>
-                  <a:srgbClr val="4C1D95"/>
+                  <a:srgbClr val="0F766E"/>
                 </a:solidFill>
                 <a:latin typeface="Trebuchet MS" pitchFamily="34" charset="0"/>
                 <a:ea typeface="Trebuchet MS" pitchFamily="34" charset="-122"/>
                 <a:cs typeface="Trebuchet MS" pitchFamily="34" charset="-120"/>
               </a:rPr>
-              <a:t>un-</a:t>
+              <a:t>hope</a:t>
             </a:r>
             <a:endParaRPr lang="en-US" sz="1300" dirty="0"/>
           </a:p>
@@ -34560,20 +36261,20 @@
       </p:sp>
       <p:sp>
         <p:nvSpPr>
-          <p:cNvPr id="19" name="Shape 17"/>
-          <p:cNvSpPr/>
-          <p:nvPr/>
-        </p:nvSpPr>
-        <p:spPr>
-          <a:xfrm>
-            <a:off x="2971800" y="1563624"/>
+          <p:cNvPr id="20" name="Shape 18"/>
+          <p:cNvSpPr/>
+          <p:nvPr/>
+        </p:nvSpPr>
+        <p:spPr>
+          <a:xfrm>
+            <a:off x="5943600" y="1563624"/>
             <a:ext cx="2834640" cy="402336"/>
           </a:xfrm>
           <a:prstGeom prst="rect">
             <a:avLst/>
           </a:prstGeom>
           <a:solidFill>
-            <a:srgbClr val="CCFBF1"/>
+            <a:srgbClr val="FCE7F3"/>
           </a:solidFill>
           <a:ln w="12700">
             <a:solidFill>
@@ -34585,13 +36286,13 @@
       </p:sp>
       <p:sp>
         <p:nvSpPr>
-          <p:cNvPr id="20" name="Text 18"/>
-          <p:cNvSpPr/>
-          <p:nvPr/>
-        </p:nvSpPr>
-        <p:spPr>
-          <a:xfrm>
-            <a:off x="2971800" y="1563624"/>
+          <p:cNvPr id="21" name="Text 19"/>
+          <p:cNvSpPr/>
+          <p:nvPr/>
+        </p:nvSpPr>
+        <p:spPr>
+          <a:xfrm>
+            <a:off x="5943600" y="1563624"/>
             <a:ext cx="2834640" cy="402336"/>
           </a:xfrm>
           <a:prstGeom prst="rect">
@@ -34610,13 +36311,13 @@
             <a:r>
               <a:rPr lang="en-US" sz="1300" b="1" dirty="0">
                 <a:solidFill>
-                  <a:srgbClr val="0F766E"/>
+                  <a:srgbClr val="9D174D"/>
                 </a:solidFill>
                 <a:latin typeface="Trebuchet MS" pitchFamily="34" charset="0"/>
                 <a:ea typeface="Trebuchet MS" pitchFamily="34" charset="-122"/>
                 <a:cs typeface="Trebuchet MS" pitchFamily="34" charset="-120"/>
               </a:rPr>
-              <a:t>hope</a:t>
+              <a:t>-ed</a:t>
             </a:r>
             <a:endParaRPr lang="en-US" sz="1300" dirty="0"/>
           </a:p>
@@ -34624,19 +36325,69 @@
       </p:sp>
       <p:sp>
         <p:nvSpPr>
-          <p:cNvPr id="21" name="Shape 19"/>
-          <p:cNvSpPr/>
-          <p:nvPr/>
-        </p:nvSpPr>
-        <p:spPr>
-          <a:xfrm>
-            <a:off x="5943600" y="1563624"/>
+          <p:cNvPr id="22" name="Shape 20"/>
+          <p:cNvSpPr/>
+          <p:nvPr/>
+        </p:nvSpPr>
+        <p:spPr>
+          <a:xfrm>
+            <a:off x="365760" y="1984248"/>
+            <a:ext cx="2468880" cy="402336"/>
+          </a:xfrm>
+          <a:prstGeom prst="rect">
+            <a:avLst/>
+          </a:prstGeom>
+          <a:solidFill>
+            <a:srgbClr val="F1F5F9"/>
+          </a:solidFill>
+          <a:ln w="12700">
+            <a:solidFill>
+              <a:srgbClr val="E2E8F0"/>
+            </a:solidFill>
+            <a:prstDash val="solid"/>
+          </a:ln>
+        </p:spPr>
+      </p:sp>
+      <p:sp>
+        <p:nvSpPr>
+          <p:cNvPr id="23" name="Shape 21"/>
+          <p:cNvSpPr/>
+          <p:nvPr/>
+        </p:nvSpPr>
+        <p:spPr>
+          <a:xfrm>
+            <a:off x="2971800" y="1984248"/>
             <a:ext cx="2834640" cy="402336"/>
           </a:xfrm>
           <a:prstGeom prst="rect">
             <a:avLst/>
           </a:prstGeom>
           <a:solidFill>
+            <a:srgbClr val="F1F5F9"/>
+          </a:solidFill>
+          <a:ln w="12700">
+            <a:solidFill>
+              <a:srgbClr val="E2E8F0"/>
+            </a:solidFill>
+            <a:prstDash val="solid"/>
+          </a:ln>
+        </p:spPr>
+      </p:sp>
+      <p:sp>
+        <p:nvSpPr>
+          <p:cNvPr id="24" name="Shape 22"/>
+          <p:cNvSpPr/>
+          <p:nvPr/>
+        </p:nvSpPr>
+        <p:spPr>
+          <a:xfrm>
+            <a:off x="5943600" y="1984248"/>
+            <a:ext cx="2834640" cy="402336"/>
+          </a:xfrm>
+          <a:prstGeom prst="rect">
+            <a:avLst/>
+          </a:prstGeom>
+          <a:solidFill>
             <a:srgbClr val="FCE7F3"/>
           </a:solidFill>
           <a:ln w="12700">
@@ -34649,13 +36400,13 @@
       </p:sp>
       <p:sp>
         <p:nvSpPr>
-          <p:cNvPr id="22" name="Text 20"/>
-          <p:cNvSpPr/>
-          <p:nvPr/>
-        </p:nvSpPr>
-        <p:spPr>
-          <a:xfrm>
-            <a:off x="5943600" y="1563624"/>
+          <p:cNvPr id="25" name="Text 23"/>
+          <p:cNvSpPr/>
+          <p:nvPr/>
+        </p:nvSpPr>
+        <p:spPr>
+          <a:xfrm>
+            <a:off x="5943600" y="1984248"/>
             <a:ext cx="2834640" cy="402336"/>
           </a:xfrm>
           <a:prstGeom prst="rect">
@@ -34688,20 +36439,20 @@
       </p:sp>
       <p:sp>
         <p:nvSpPr>
-          <p:cNvPr id="23" name="Shape 21"/>
-          <p:cNvSpPr/>
-          <p:nvPr/>
-        </p:nvSpPr>
-        <p:spPr>
-          <a:xfrm>
-            <a:off x="365760" y="1984248"/>
+          <p:cNvPr id="26" name="Shape 24"/>
+          <p:cNvSpPr/>
+          <p:nvPr/>
+        </p:nvSpPr>
+        <p:spPr>
+          <a:xfrm>
+            <a:off x="365760" y="2404872"/>
             <a:ext cx="2468880" cy="402336"/>
           </a:xfrm>
           <a:prstGeom prst="rect">
             <a:avLst/>
           </a:prstGeom>
           <a:solidFill>
-            <a:srgbClr val="DDD6FE"/>
+            <a:srgbClr val="F8FAFC"/>
           </a:solidFill>
           <a:ln w="12700">
             <a:solidFill>
@@ -34713,14 +36464,64 @@
       </p:sp>
       <p:sp>
         <p:nvSpPr>
-          <p:cNvPr id="24" name="Text 22"/>
-          <p:cNvSpPr/>
-          <p:nvPr/>
-        </p:nvSpPr>
-        <p:spPr>
-          <a:xfrm>
-            <a:off x="365760" y="1984248"/>
-            <a:ext cx="2468880" cy="402336"/>
+          <p:cNvPr id="27" name="Shape 25"/>
+          <p:cNvSpPr/>
+          <p:nvPr/>
+        </p:nvSpPr>
+        <p:spPr>
+          <a:xfrm>
+            <a:off x="2971800" y="2404872"/>
+            <a:ext cx="2834640" cy="402336"/>
+          </a:xfrm>
+          <a:prstGeom prst="rect">
+            <a:avLst/>
+          </a:prstGeom>
+          <a:solidFill>
+            <a:srgbClr val="F8FAFC"/>
+          </a:solidFill>
+          <a:ln w="12700">
+            <a:solidFill>
+              <a:srgbClr val="E2E8F0"/>
+            </a:solidFill>
+            <a:prstDash val="solid"/>
+          </a:ln>
+        </p:spPr>
+      </p:sp>
+      <p:sp>
+        <p:nvSpPr>
+          <p:cNvPr id="28" name="Shape 26"/>
+          <p:cNvSpPr/>
+          <p:nvPr/>
+        </p:nvSpPr>
+        <p:spPr>
+          <a:xfrm>
+            <a:off x="5943600" y="2404872"/>
+            <a:ext cx="2834640" cy="402336"/>
+          </a:xfrm>
+          <a:prstGeom prst="rect">
+            <a:avLst/>
+          </a:prstGeom>
+          <a:solidFill>
+            <a:srgbClr val="FCE7F3"/>
+          </a:solidFill>
+          <a:ln w="12700">
+            <a:solidFill>
+              <a:srgbClr val="E2E8F0"/>
+            </a:solidFill>
+            <a:prstDash val="solid"/>
+          </a:ln>
+        </p:spPr>
+      </p:sp>
+      <p:sp>
+        <p:nvSpPr>
+          <p:cNvPr id="29" name="Text 27"/>
+          <p:cNvSpPr/>
+          <p:nvPr/>
+        </p:nvSpPr>
+        <p:spPr>
+          <a:xfrm>
+            <a:off x="5943600" y="2404872"/>
+            <a:ext cx="2834640" cy="402336"/>
           </a:xfrm>
           <a:prstGeom prst="rect">
             <a:avLst/>
@@ -34738,13 +36539,13 @@
             <a:r>
               <a:rPr lang="en-US" sz="1300" b="1" dirty="0">
                 <a:solidFill>
-                  <a:srgbClr val="4C1D95"/>
+                  <a:srgbClr val="9D174D"/>
                 </a:solidFill>
                 <a:latin typeface="Trebuchet MS" pitchFamily="34" charset="0"/>
                 <a:ea typeface="Trebuchet MS" pitchFamily="34" charset="-122"/>
                 <a:cs typeface="Trebuchet MS" pitchFamily="34" charset="-120"/>
               </a:rPr>
-              <a:t>dis-</a:t>
+              <a:t>-less</a:t>
             </a:r>
             <a:endParaRPr lang="en-US" sz="1300" dirty="0"/>
           </a:p>
@@ -34752,13 +36553,38 @@
       </p:sp>
       <p:sp>
         <p:nvSpPr>
-          <p:cNvPr id="25" name="Shape 23"/>
-          <p:cNvSpPr/>
-          <p:nvPr/>
-        </p:nvSpPr>
-        <p:spPr>
-          <a:xfrm>
-            <a:off x="2971800" y="1984248"/>
+          <p:cNvPr id="30" name="Shape 28"/>
+          <p:cNvSpPr/>
+          <p:nvPr/>
+        </p:nvSpPr>
+        <p:spPr>
+          <a:xfrm>
+            <a:off x="365760" y="2825496"/>
+            <a:ext cx="2468880" cy="402336"/>
+          </a:xfrm>
+          <a:prstGeom prst="rect">
+            <a:avLst/>
+          </a:prstGeom>
+          <a:solidFill>
+            <a:srgbClr val="F1F5F9"/>
+          </a:solidFill>
+          <a:ln w="12700">
+            <a:solidFill>
+              <a:srgbClr val="E2E8F0"/>
+            </a:solidFill>
+            <a:prstDash val="solid"/>
+          </a:ln>
+        </p:spPr>
+      </p:sp>
+      <p:sp>
+        <p:nvSpPr>
+          <p:cNvPr id="31" name="Shape 29"/>
+          <p:cNvSpPr/>
+          <p:nvPr/>
+        </p:nvSpPr>
+        <p:spPr>
+          <a:xfrm>
+            <a:off x="2971800" y="2825496"/>
             <a:ext cx="2834640" cy="402336"/>
           </a:xfrm>
           <a:prstGeom prst="rect">
@@ -34777,13 +36603,13 @@
       </p:sp>
       <p:sp>
         <p:nvSpPr>
-          <p:cNvPr id="26" name="Shape 24"/>
-          <p:cNvSpPr/>
-          <p:nvPr/>
-        </p:nvSpPr>
-        <p:spPr>
-          <a:xfrm>
-            <a:off x="5943600" y="1984248"/>
+          <p:cNvPr id="32" name="Shape 30"/>
+          <p:cNvSpPr/>
+          <p:nvPr/>
+        </p:nvSpPr>
+        <p:spPr>
+          <a:xfrm>
+            <a:off x="5943600" y="2825496"/>
             <a:ext cx="2834640" cy="402336"/>
           </a:xfrm>
           <a:prstGeom prst="rect">
@@ -34802,13 +36628,13 @@
       </p:sp>
       <p:sp>
         <p:nvSpPr>
-          <p:cNvPr id="27" name="Text 25"/>
-          <p:cNvSpPr/>
-          <p:nvPr/>
-        </p:nvSpPr>
-        <p:spPr>
-          <a:xfrm>
-            <a:off x="5943600" y="1984248"/>
+          <p:cNvPr id="33" name="Text 31"/>
+          <p:cNvSpPr/>
+          <p:nvPr/>
+        </p:nvSpPr>
+        <p:spPr>
+          <a:xfrm>
+            <a:off x="5943600" y="2825496"/>
             <a:ext cx="2834640" cy="402336"/>
           </a:xfrm>
           <a:prstGeom prst="rect">
@@ -34833,7 +36659,7 @@
                 <a:ea typeface="Trebuchet MS" pitchFamily="34" charset="-122"/>
                 <a:cs typeface="Trebuchet MS" pitchFamily="34" charset="-120"/>
               </a:rPr>
-              <a:t>-less</a:t>
+              <a:t>-s</a:t>
             </a:r>
             <a:endParaRPr lang="en-US" sz="1300" dirty="0"/>
           </a:p>
@@ -34841,20 +36667,20 @@
       </p:sp>
       <p:sp>
         <p:nvSpPr>
-          <p:cNvPr id="28" name="Shape 26"/>
-          <p:cNvSpPr/>
-          <p:nvPr/>
-        </p:nvSpPr>
-        <p:spPr>
-          <a:xfrm>
-            <a:off x="365760" y="2404872"/>
+          <p:cNvPr id="34" name="Shape 32"/>
+          <p:cNvSpPr/>
+          <p:nvPr/>
+        </p:nvSpPr>
+        <p:spPr>
+          <a:xfrm>
+            <a:off x="365760" y="3246120"/>
             <a:ext cx="2468880" cy="402336"/>
           </a:xfrm>
           <a:prstGeom prst="rect">
             <a:avLst/>
           </a:prstGeom>
           <a:solidFill>
-            <a:srgbClr val="DDD6FE"/>
+            <a:srgbClr val="F8FAFC"/>
           </a:solidFill>
           <a:ln w="12700">
             <a:solidFill>
@@ -34866,14 +36692,64 @@
       </p:sp>
       <p:sp>
         <p:nvSpPr>
-          <p:cNvPr id="29" name="Text 27"/>
-          <p:cNvSpPr/>
-          <p:nvPr/>
-        </p:nvSpPr>
-        <p:spPr>
-          <a:xfrm>
-            <a:off x="365760" y="2404872"/>
-            <a:ext cx="2468880" cy="402336"/>
+          <p:cNvPr id="35" name="Shape 33"/>
+          <p:cNvSpPr/>
+          <p:nvPr/>
+        </p:nvSpPr>
+        <p:spPr>
+          <a:xfrm>
+            <a:off x="2971800" y="3246120"/>
+            <a:ext cx="2834640" cy="402336"/>
+          </a:xfrm>
+          <a:prstGeom prst="rect">
+            <a:avLst/>
+          </a:prstGeom>
+          <a:solidFill>
+            <a:srgbClr val="F8FAFC"/>
+          </a:solidFill>
+          <a:ln w="12700">
+            <a:solidFill>
+              <a:srgbClr val="E2E8F0"/>
+            </a:solidFill>
+            <a:prstDash val="solid"/>
+          </a:ln>
+        </p:spPr>
+      </p:sp>
+      <p:sp>
+        <p:nvSpPr>
+          <p:cNvPr id="36" name="Shape 34"/>
+          <p:cNvSpPr/>
+          <p:nvPr/>
+        </p:nvSpPr>
+        <p:spPr>
+          <a:xfrm>
+            <a:off x="5943600" y="3246120"/>
+            <a:ext cx="2834640" cy="402336"/>
+          </a:xfrm>
+          <a:prstGeom prst="rect">
+            <a:avLst/>
+          </a:prstGeom>
+          <a:solidFill>
+            <a:srgbClr val="FCE7F3"/>
+          </a:solidFill>
+          <a:ln w="12700">
+            <a:solidFill>
+              <a:srgbClr val="E2E8F0"/>
+            </a:solidFill>
+            <a:prstDash val="solid"/>
+          </a:ln>
+        </p:spPr>
+      </p:sp>
+      <p:sp>
+        <p:nvSpPr>
+          <p:cNvPr id="37" name="Text 35"/>
+          <p:cNvSpPr/>
+          <p:nvPr/>
+        </p:nvSpPr>
+        <p:spPr>
+          <a:xfrm>
+            <a:off x="5943600" y="3246120"/>
+            <a:ext cx="2834640" cy="402336"/>
           </a:xfrm>
           <a:prstGeom prst="rect">
             <a:avLst/>
@@ -34891,13 +36767,13 @@
             <a:r>
               <a:rPr lang="en-US" sz="1300" b="1" dirty="0">
                 <a:solidFill>
-                  <a:srgbClr val="4C1D95"/>
+                  <a:srgbClr val="9D174D"/>
                 </a:solidFill>
                 <a:latin typeface="Trebuchet MS" pitchFamily="34" charset="0"/>
                 <a:ea typeface="Trebuchet MS" pitchFamily="34" charset="-122"/>
                 <a:cs typeface="Trebuchet MS" pitchFamily="34" charset="-120"/>
               </a:rPr>
-              <a:t>re-</a:t>
+              <a:t>-ing</a:t>
             </a:r>
             <a:endParaRPr lang="en-US" sz="1300" dirty="0"/>
           </a:p>
@@ -34905,64 +36781,14 @@
       </p:sp>
       <p:sp>
         <p:nvSpPr>
-          <p:cNvPr id="30" name="Shape 28"/>
-          <p:cNvSpPr/>
-          <p:nvPr/>
-        </p:nvSpPr>
-        <p:spPr>
-          <a:xfrm>
-            <a:off x="2971800" y="2404872"/>
-            <a:ext cx="2834640" cy="402336"/>
-          </a:xfrm>
-          <a:prstGeom prst="rect">
-            <a:avLst/>
-          </a:prstGeom>
-          <a:solidFill>
-            <a:srgbClr val="F8FAFC"/>
-          </a:solidFill>
-          <a:ln w="12700">
-            <a:solidFill>
-              <a:srgbClr val="E2E8F0"/>
-            </a:solidFill>
-            <a:prstDash val="solid"/>
-          </a:ln>
-        </p:spPr>
-      </p:sp>
-      <p:sp>
-        <p:nvSpPr>
-          <p:cNvPr id="31" name="Shape 29"/>
-          <p:cNvSpPr/>
-          <p:nvPr/>
-        </p:nvSpPr>
-        <p:spPr>
-          <a:xfrm>
-            <a:off x="5943600" y="2404872"/>
-            <a:ext cx="2834640" cy="402336"/>
-          </a:xfrm>
-          <a:prstGeom prst="rect">
-            <a:avLst/>
-          </a:prstGeom>
-          <a:solidFill>
-            <a:srgbClr val="FCE7F3"/>
-          </a:solidFill>
-          <a:ln w="12700">
-            <a:solidFill>
-              <a:srgbClr val="E2E8F0"/>
-            </a:solidFill>
-            <a:prstDash val="solid"/>
-          </a:ln>
-        </p:spPr>
-      </p:sp>
-      <p:sp>
-        <p:nvSpPr>
-          <p:cNvPr id="32" name="Text 30"/>
-          <p:cNvSpPr/>
-          <p:nvPr/>
-        </p:nvSpPr>
-        <p:spPr>
-          <a:xfrm>
-            <a:off x="5943600" y="2404872"/>
-            <a:ext cx="2834640" cy="402336"/>
+          <p:cNvPr id="38" name="Text 36"/>
+          <p:cNvSpPr/>
+          <p:nvPr/>
+        </p:nvSpPr>
+        <p:spPr>
+          <a:xfrm>
+            <a:off x="365760" y="3611880"/>
+            <a:ext cx="1828800" cy="347472"/>
           </a:xfrm>
           <a:prstGeom prst="rect">
             <a:avLst/>
@@ -34974,59 +36800,61 @@
           <a:bodyPr wrap="square" lIns="0" tIns="0" rIns="0" bIns="0" rtlCol="0" anchor="ctr"/>
           <a:lstStyle/>
           <a:p>
-            <a:pPr algn="ctr" indent="0" marL="0">
-              <a:buNone/>
-            </a:pPr>
-            <a:r>
-              <a:rPr lang="en-US" sz="1300" b="1" dirty="0">
-                <a:solidFill>
-                  <a:srgbClr val="9D174D"/>
+            <a:pPr algn="l" indent="0" marL="0">
+              <a:buNone/>
+            </a:pPr>
+            <a:r>
+              <a:rPr lang="en-US" sz="1200" b="1" dirty="0">
+                <a:solidFill>
+                  <a:srgbClr val="0F172A"/>
                 </a:solidFill>
                 <a:latin typeface="Trebuchet MS" pitchFamily="34" charset="0"/>
                 <a:ea typeface="Trebuchet MS" pitchFamily="34" charset="-122"/>
                 <a:cs typeface="Trebuchet MS" pitchFamily="34" charset="-120"/>
               </a:rPr>
-              <a:t>-ing</a:t>
-            </a:r>
-            <a:endParaRPr lang="en-US" sz="1300" dirty="0"/>
-          </a:p>
-        </p:txBody>
-      </p:sp>
-      <p:sp>
-        <p:nvSpPr>
-          <p:cNvPr id="33" name="Shape 31"/>
-          <p:cNvSpPr/>
-          <p:nvPr/>
-        </p:nvSpPr>
-        <p:spPr>
-          <a:xfrm>
-            <a:off x="365760" y="2825496"/>
-            <a:ext cx="2468880" cy="402336"/>
-          </a:xfrm>
-          <a:prstGeom prst="rect">
-            <a:avLst/>
-          </a:prstGeom>
-          <a:solidFill>
-            <a:srgbClr val="DDD6FE"/>
-          </a:solidFill>
-          <a:ln w="12700">
-            <a:solidFill>
-              <a:srgbClr val="E2E8F0"/>
-            </a:solidFill>
-            <a:prstDash val="solid"/>
-          </a:ln>
-        </p:spPr>
-      </p:sp>
-      <p:sp>
-        <p:nvSpPr>
-          <p:cNvPr id="34" name="Text 32"/>
-          <p:cNvSpPr/>
-          <p:nvPr/>
-        </p:nvSpPr>
-        <p:spPr>
-          <a:xfrm>
-            <a:off x="365760" y="2825496"/>
-            <a:ext cx="2468880" cy="402336"/>
+              <a:t>Sample words:</a:t>
+            </a:r>
+            <a:endParaRPr lang="en-US" sz="1200" dirty="0"/>
+          </a:p>
+        </p:txBody>
+      </p:sp>
+      <p:sp>
+        <p:nvSpPr>
+          <p:cNvPr id="39" name="Shape 37"/>
+          <p:cNvSpPr/>
+          <p:nvPr/>
+        </p:nvSpPr>
+        <p:spPr>
+          <a:xfrm>
+            <a:off x="365760" y="4023360"/>
+            <a:ext cx="2011680" cy="402336"/>
+          </a:xfrm>
+          <a:prstGeom prst="rect">
+            <a:avLst>
+              <a:gd name="adj" fmla="val 13636"/>
+            </a:avLst>
+          </a:prstGeom>
+          <a:solidFill>
+            <a:srgbClr val="EEF2FF"/>
+          </a:solidFill>
+          <a:ln w="12700">
+            <a:solidFill>
+              <a:srgbClr val="6366F1"/>
+            </a:solidFill>
+            <a:prstDash val="solid"/>
+          </a:ln>
+        </p:spPr>
+      </p:sp>
+      <p:sp>
+        <p:nvSpPr>
+          <p:cNvPr id="40" name="Text 38"/>
+          <p:cNvSpPr/>
+          <p:nvPr/>
+        </p:nvSpPr>
+        <p:spPr>
+          <a:xfrm>
+            <a:off x="365760" y="4023360"/>
+            <a:ext cx="2011680" cy="402336"/>
           </a:xfrm>
           <a:prstGeom prst="rect">
             <a:avLst/>
@@ -35042,80 +36870,57 @@
               <a:buNone/>
             </a:pPr>
             <a:r>
-              <a:rPr lang="en-US" sz="1300" b="1" dirty="0">
-                <a:solidFill>
-                  <a:srgbClr val="4C1D95"/>
+              <a:rPr lang="en-US" sz="1200" b="1" dirty="0">
+                <a:solidFill>
+                  <a:srgbClr val="4338CA"/>
                 </a:solidFill>
                 <a:latin typeface="Trebuchet MS" pitchFamily="34" charset="0"/>
                 <a:ea typeface="Trebuchet MS" pitchFamily="34" charset="-122"/>
                 <a:cs typeface="Trebuchet MS" pitchFamily="34" charset="-120"/>
               </a:rPr>
-              <a:t>mis-</a:t>
-            </a:r>
-            <a:endParaRPr lang="en-US" sz="1300" dirty="0"/>
-          </a:p>
-        </p:txBody>
-      </p:sp>
-      <p:sp>
-        <p:nvSpPr>
-          <p:cNvPr id="35" name="Shape 33"/>
-          <p:cNvSpPr/>
-          <p:nvPr/>
-        </p:nvSpPr>
-        <p:spPr>
-          <a:xfrm>
-            <a:off x="2971800" y="2825496"/>
-            <a:ext cx="2834640" cy="402336"/>
-          </a:xfrm>
-          <a:prstGeom prst="rect">
-            <a:avLst/>
-          </a:prstGeom>
-          <a:solidFill>
-            <a:srgbClr val="F1F5F9"/>
-          </a:solidFill>
-          <a:ln w="12700">
-            <a:solidFill>
-              <a:srgbClr val="E2E8F0"/>
-            </a:solidFill>
-            <a:prstDash val="solid"/>
-          </a:ln>
-        </p:spPr>
-      </p:sp>
-      <p:sp>
-        <p:nvSpPr>
-          <p:cNvPr id="36" name="Shape 34"/>
-          <p:cNvSpPr/>
-          <p:nvPr/>
-        </p:nvSpPr>
-        <p:spPr>
-          <a:xfrm>
-            <a:off x="5943600" y="2825496"/>
-            <a:ext cx="2834640" cy="402336"/>
-          </a:xfrm>
-          <a:prstGeom prst="rect">
-            <a:avLst/>
-          </a:prstGeom>
-          <a:solidFill>
-            <a:srgbClr val="FCE7F3"/>
-          </a:solidFill>
-          <a:ln w="12700">
-            <a:solidFill>
-              <a:srgbClr val="E2E8F0"/>
-            </a:solidFill>
-            <a:prstDash val="solid"/>
-          </a:ln>
-        </p:spPr>
-      </p:sp>
-      <p:sp>
-        <p:nvSpPr>
-          <p:cNvPr id="37" name="Text 35"/>
-          <p:cNvSpPr/>
-          <p:nvPr/>
-        </p:nvSpPr>
-        <p:spPr>
-          <a:xfrm>
-            <a:off x="5943600" y="2825496"/>
-            <a:ext cx="2834640" cy="402336"/>
+              <a:t>hope</a:t>
+            </a:r>
+            <a:endParaRPr lang="en-US" sz="1200" dirty="0"/>
+          </a:p>
+        </p:txBody>
+      </p:sp>
+      <p:sp>
+        <p:nvSpPr>
+          <p:cNvPr id="41" name="Shape 39"/>
+          <p:cNvSpPr/>
+          <p:nvPr/>
+        </p:nvSpPr>
+        <p:spPr>
+          <a:xfrm>
+            <a:off x="2542032" y="4023360"/>
+            <a:ext cx="2011680" cy="402336"/>
+          </a:xfrm>
+          <a:prstGeom prst="rect">
+            <a:avLst>
+              <a:gd name="adj" fmla="val 13636"/>
+            </a:avLst>
+          </a:prstGeom>
+          <a:solidFill>
+            <a:srgbClr val="EEF2FF"/>
+          </a:solidFill>
+          <a:ln w="12700">
+            <a:solidFill>
+              <a:srgbClr val="6366F1"/>
+            </a:solidFill>
+            <a:prstDash val="solid"/>
+          </a:ln>
+        </p:spPr>
+      </p:sp>
+      <p:sp>
+        <p:nvSpPr>
+          <p:cNvPr id="42" name="Text 40"/>
+          <p:cNvSpPr/>
+          <p:nvPr/>
+        </p:nvSpPr>
+        <p:spPr>
+          <a:xfrm>
+            <a:off x="2542032" y="4023360"/>
+            <a:ext cx="2011680" cy="402336"/>
           </a:xfrm>
           <a:prstGeom prst="rect">
             <a:avLst/>
@@ -35131,55 +36936,57 @@
               <a:buNone/>
             </a:pPr>
             <a:r>
-              <a:rPr lang="en-US" sz="1300" b="1" dirty="0">
-                <a:solidFill>
-                  <a:srgbClr val="9D174D"/>
+              <a:rPr lang="en-US" sz="1200" b="1" dirty="0">
+                <a:solidFill>
+                  <a:srgbClr val="4338CA"/>
                 </a:solidFill>
                 <a:latin typeface="Trebuchet MS" pitchFamily="34" charset="0"/>
                 <a:ea typeface="Trebuchet MS" pitchFamily="34" charset="-122"/>
                 <a:cs typeface="Trebuchet MS" pitchFamily="34" charset="-120"/>
               </a:rPr>
-              <a:t>-ed</a:t>
-            </a:r>
-            <a:endParaRPr lang="en-US" sz="1300" dirty="0"/>
-          </a:p>
-        </p:txBody>
-      </p:sp>
-      <p:sp>
-        <p:nvSpPr>
-          <p:cNvPr id="38" name="Shape 36"/>
-          <p:cNvSpPr/>
-          <p:nvPr/>
-        </p:nvSpPr>
-        <p:spPr>
-          <a:xfrm>
-            <a:off x="365760" y="3246120"/>
-            <a:ext cx="2468880" cy="402336"/>
-          </a:xfrm>
-          <a:prstGeom prst="rect">
-            <a:avLst/>
-          </a:prstGeom>
-          <a:solidFill>
-            <a:srgbClr val="DDD6FE"/>
-          </a:solidFill>
-          <a:ln w="12700">
-            <a:solidFill>
-              <a:srgbClr val="E2E8F0"/>
-            </a:solidFill>
-            <a:prstDash val="solid"/>
-          </a:ln>
-        </p:spPr>
-      </p:sp>
-      <p:sp>
-        <p:nvSpPr>
-          <p:cNvPr id="39" name="Text 37"/>
-          <p:cNvSpPr/>
-          <p:nvPr/>
-        </p:nvSpPr>
-        <p:spPr>
-          <a:xfrm>
-            <a:off x="365760" y="3246120"/>
-            <a:ext cx="2468880" cy="402336"/>
+              <a:t>hoped</a:t>
+            </a:r>
+            <a:endParaRPr lang="en-US" sz="1200" dirty="0"/>
+          </a:p>
+        </p:txBody>
+      </p:sp>
+      <p:sp>
+        <p:nvSpPr>
+          <p:cNvPr id="43" name="Shape 41"/>
+          <p:cNvSpPr/>
+          <p:nvPr/>
+        </p:nvSpPr>
+        <p:spPr>
+          <a:xfrm>
+            <a:off x="4718304" y="4023360"/>
+            <a:ext cx="2011680" cy="402336"/>
+          </a:xfrm>
+          <a:prstGeom prst="rect">
+            <a:avLst>
+              <a:gd name="adj" fmla="val 13636"/>
+            </a:avLst>
+          </a:prstGeom>
+          <a:solidFill>
+            <a:srgbClr val="EEF2FF"/>
+          </a:solidFill>
+          <a:ln w="12700">
+            <a:solidFill>
+              <a:srgbClr val="6366F1"/>
+            </a:solidFill>
+            <a:prstDash val="solid"/>
+          </a:ln>
+        </p:spPr>
+      </p:sp>
+      <p:sp>
+        <p:nvSpPr>
+          <p:cNvPr id="44" name="Text 42"/>
+          <p:cNvSpPr/>
+          <p:nvPr/>
+        </p:nvSpPr>
+        <p:spPr>
+          <a:xfrm>
+            <a:off x="4718304" y="4023360"/>
+            <a:ext cx="2011680" cy="402336"/>
           </a:xfrm>
           <a:prstGeom prst="rect">
             <a:avLst/>
@@ -35195,80 +37002,57 @@
               <a:buNone/>
             </a:pPr>
             <a:r>
-              <a:rPr lang="en-US" sz="1300" b="1" dirty="0">
-                <a:solidFill>
-                  <a:srgbClr val="4C1D95"/>
+              <a:rPr lang="en-US" sz="1200" b="1" dirty="0">
+                <a:solidFill>
+                  <a:srgbClr val="4338CA"/>
                 </a:solidFill>
                 <a:latin typeface="Trebuchet MS" pitchFamily="34" charset="0"/>
                 <a:ea typeface="Trebuchet MS" pitchFamily="34" charset="-122"/>
                 <a:cs typeface="Trebuchet MS" pitchFamily="34" charset="-120"/>
               </a:rPr>
-              <a:t>over-</a:t>
-            </a:r>
-            <a:endParaRPr lang="en-US" sz="1300" dirty="0"/>
-          </a:p>
-        </p:txBody>
-      </p:sp>
-      <p:sp>
-        <p:nvSpPr>
-          <p:cNvPr id="40" name="Shape 38"/>
-          <p:cNvSpPr/>
-          <p:nvPr/>
-        </p:nvSpPr>
-        <p:spPr>
-          <a:xfrm>
-            <a:off x="2971800" y="3246120"/>
-            <a:ext cx="2834640" cy="402336"/>
-          </a:xfrm>
-          <a:prstGeom prst="rect">
-            <a:avLst/>
-          </a:prstGeom>
-          <a:solidFill>
-            <a:srgbClr val="F8FAFC"/>
-          </a:solidFill>
-          <a:ln w="12700">
-            <a:solidFill>
-              <a:srgbClr val="E2E8F0"/>
-            </a:solidFill>
-            <a:prstDash val="solid"/>
-          </a:ln>
-        </p:spPr>
-      </p:sp>
-      <p:sp>
-        <p:nvSpPr>
-          <p:cNvPr id="41" name="Shape 39"/>
-          <p:cNvSpPr/>
-          <p:nvPr/>
-        </p:nvSpPr>
-        <p:spPr>
-          <a:xfrm>
-            <a:off x="5943600" y="3246120"/>
-            <a:ext cx="2834640" cy="402336"/>
-          </a:xfrm>
-          <a:prstGeom prst="rect">
-            <a:avLst/>
-          </a:prstGeom>
-          <a:solidFill>
-            <a:srgbClr val="FCE7F3"/>
-          </a:solidFill>
-          <a:ln w="12700">
-            <a:solidFill>
-              <a:srgbClr val="E2E8F0"/>
-            </a:solidFill>
-            <a:prstDash val="solid"/>
-          </a:ln>
-        </p:spPr>
-      </p:sp>
-      <p:sp>
-        <p:nvSpPr>
-          <p:cNvPr id="42" name="Text 40"/>
-          <p:cNvSpPr/>
-          <p:nvPr/>
-        </p:nvSpPr>
-        <p:spPr>
-          <a:xfrm>
-            <a:off x="5943600" y="3246120"/>
-            <a:ext cx="2834640" cy="402336"/>
+              <a:t>hopes</a:t>
+            </a:r>
+            <a:endParaRPr lang="en-US" sz="1200" dirty="0"/>
+          </a:p>
+        </p:txBody>
+      </p:sp>
+      <p:sp>
+        <p:nvSpPr>
+          <p:cNvPr id="45" name="Shape 43"/>
+          <p:cNvSpPr/>
+          <p:nvPr/>
+        </p:nvSpPr>
+        <p:spPr>
+          <a:xfrm>
+            <a:off x="6894576" y="4023360"/>
+            <a:ext cx="2011680" cy="402336"/>
+          </a:xfrm>
+          <a:prstGeom prst="rect">
+            <a:avLst>
+              <a:gd name="adj" fmla="val 13636"/>
+            </a:avLst>
+          </a:prstGeom>
+          <a:solidFill>
+            <a:srgbClr val="EEF2FF"/>
+          </a:solidFill>
+          <a:ln w="12700">
+            <a:solidFill>
+              <a:srgbClr val="6366F1"/>
+            </a:solidFill>
+            <a:prstDash val="solid"/>
+          </a:ln>
+        </p:spPr>
+      </p:sp>
+      <p:sp>
+        <p:nvSpPr>
+          <p:cNvPr id="46" name="Text 44"/>
+          <p:cNvSpPr/>
+          <p:nvPr/>
+        </p:nvSpPr>
+        <p:spPr>
+          <a:xfrm>
+            <a:off x="6894576" y="4023360"/>
+            <a:ext cx="2011680" cy="402336"/>
           </a:xfrm>
           <a:prstGeom prst="rect">
             <a:avLst/>
@@ -35284,30 +37068,57 @@
               <a:buNone/>
             </a:pPr>
             <a:r>
-              <a:rPr lang="en-US" sz="1300" b="1" dirty="0">
-                <a:solidFill>
-                  <a:srgbClr val="9D174D"/>
+              <a:rPr lang="en-US" sz="1200" b="1" dirty="0">
+                <a:solidFill>
+                  <a:srgbClr val="4338CA"/>
                 </a:solidFill>
                 <a:latin typeface="Trebuchet MS" pitchFamily="34" charset="0"/>
                 <a:ea typeface="Trebuchet MS" pitchFamily="34" charset="-122"/>
                 <a:cs typeface="Trebuchet MS" pitchFamily="34" charset="-120"/>
               </a:rPr>
-              <a:t>-fully</a:t>
-            </a:r>
-            <a:endParaRPr lang="en-US" sz="1300" dirty="0"/>
-          </a:p>
-        </p:txBody>
-      </p:sp>
-      <p:sp>
-        <p:nvSpPr>
-          <p:cNvPr id="43" name="Text 41"/>
-          <p:cNvSpPr/>
-          <p:nvPr/>
-        </p:nvSpPr>
-        <p:spPr>
-          <a:xfrm>
-            <a:off x="365760" y="3611880"/>
-            <a:ext cx="1828800" cy="347472"/>
+              <a:t>hoping</a:t>
+            </a:r>
+            <a:endParaRPr lang="en-US" sz="1200" dirty="0"/>
+          </a:p>
+        </p:txBody>
+      </p:sp>
+      <p:sp>
+        <p:nvSpPr>
+          <p:cNvPr id="47" name="Shape 45"/>
+          <p:cNvSpPr/>
+          <p:nvPr/>
+        </p:nvSpPr>
+        <p:spPr>
+          <a:xfrm>
+            <a:off x="365760" y="4498848"/>
+            <a:ext cx="2011680" cy="402336"/>
+          </a:xfrm>
+          <a:prstGeom prst="rect">
+            <a:avLst>
+              <a:gd name="adj" fmla="val 13636"/>
+            </a:avLst>
+          </a:prstGeom>
+          <a:solidFill>
+            <a:srgbClr val="EEF2FF"/>
+          </a:solidFill>
+          <a:ln w="12700">
+            <a:solidFill>
+              <a:srgbClr val="6366F1"/>
+            </a:solidFill>
+            <a:prstDash val="solid"/>
+          </a:ln>
+        </p:spPr>
+      </p:sp>
+      <p:sp>
+        <p:nvSpPr>
+          <p:cNvPr id="48" name="Text 46"/>
+          <p:cNvSpPr/>
+          <p:nvPr/>
+        </p:nvSpPr>
+        <p:spPr>
+          <a:xfrm>
+            <a:off x="365760" y="4498848"/>
+            <a:ext cx="2011680" cy="402336"/>
           </a:xfrm>
           <a:prstGeom prst="rect">
             <a:avLst/>
@@ -35319,547 +37130,19 @@
           <a:bodyPr wrap="square" lIns="0" tIns="0" rIns="0" bIns="0" rtlCol="0" anchor="ctr"/>
           <a:lstStyle/>
           <a:p>
-            <a:pPr algn="l" indent="0" marL="0">
+            <a:pPr algn="ctr" indent="0" marL="0">
               <a:buNone/>
             </a:pPr>
             <a:r>
               <a:rPr lang="en-US" sz="1200" b="1" dirty="0">
                 <a:solidFill>
-                  <a:srgbClr val="0F172A"/>
+                  <a:srgbClr val="4338CA"/>
                 </a:solidFill>
                 <a:latin typeface="Trebuchet MS" pitchFamily="34" charset="0"/>
                 <a:ea typeface="Trebuchet MS" pitchFamily="34" charset="-122"/>
                 <a:cs typeface="Trebuchet MS" pitchFamily="34" charset="-120"/>
               </a:rPr>
-              <a:t>Sample words:</a:t>
-            </a:r>
-            <a:endParaRPr lang="en-US" sz="1200" dirty="0"/>
-          </a:p>
-        </p:txBody>
-      </p:sp>
-      <p:sp>
-        <p:nvSpPr>
-          <p:cNvPr id="44" name="Shape 42"/>
-          <p:cNvSpPr/>
-          <p:nvPr/>
-        </p:nvSpPr>
-        <p:spPr>
-          <a:xfrm>
-            <a:off x="365760" y="4023360"/>
-            <a:ext cx="2011680" cy="402336"/>
-          </a:xfrm>
-          <a:prstGeom prst="rect">
-            <a:avLst>
-              <a:gd name="adj" fmla="val 13636"/>
-            </a:avLst>
-          </a:prstGeom>
-          <a:solidFill>
-            <a:srgbClr val="EEF2FF"/>
-          </a:solidFill>
-          <a:ln w="12700">
-            <a:solidFill>
-              <a:srgbClr val="6366F1"/>
-            </a:solidFill>
-            <a:prstDash val="solid"/>
-          </a:ln>
-        </p:spPr>
-      </p:sp>
-      <p:sp>
-        <p:nvSpPr>
-          <p:cNvPr id="45" name="Text 43"/>
-          <p:cNvSpPr/>
-          <p:nvPr/>
-        </p:nvSpPr>
-        <p:spPr>
-          <a:xfrm>
-            <a:off x="365760" y="4023360"/>
-            <a:ext cx="2011680" cy="402336"/>
-          </a:xfrm>
-          <a:prstGeom prst="rect">
-            <a:avLst/>
-          </a:prstGeom>
-          <a:noFill/>
-          <a:ln/>
-        </p:spPr>
-        <p:txBody>
-          <a:bodyPr wrap="square" lIns="0" tIns="0" rIns="0" bIns="0" rtlCol="0" anchor="ctr"/>
-          <a:lstStyle/>
-          <a:p>
-            <a:pPr algn="ctr" indent="0" marL="0">
-              <a:buNone/>
-            </a:pPr>
-            <a:r>
-              <a:rPr lang="en-US" sz="1200" b="1" dirty="0">
-                <a:solidFill>
-                  <a:srgbClr val="4338CA"/>
-                </a:solidFill>
-                <a:latin typeface="Trebuchet MS" pitchFamily="34" charset="0"/>
-                <a:ea typeface="Trebuchet MS" pitchFamily="34" charset="-122"/>
-                <a:cs typeface="Trebuchet MS" pitchFamily="34" charset="-120"/>
-              </a:rPr>
               <a:t>hopeful</a:t>
-            </a:r>
-            <a:endParaRPr lang="en-US" sz="1200" dirty="0"/>
-          </a:p>
-        </p:txBody>
-      </p:sp>
-      <p:sp>
-        <p:nvSpPr>
-          <p:cNvPr id="46" name="Shape 44"/>
-          <p:cNvSpPr/>
-          <p:nvPr/>
-        </p:nvSpPr>
-        <p:spPr>
-          <a:xfrm>
-            <a:off x="2542032" y="4023360"/>
-            <a:ext cx="2011680" cy="402336"/>
-          </a:xfrm>
-          <a:prstGeom prst="rect">
-            <a:avLst>
-              <a:gd name="adj" fmla="val 13636"/>
-            </a:avLst>
-          </a:prstGeom>
-          <a:solidFill>
-            <a:srgbClr val="EEF2FF"/>
-          </a:solidFill>
-          <a:ln w="12700">
-            <a:solidFill>
-              <a:srgbClr val="6366F1"/>
-            </a:solidFill>
-            <a:prstDash val="solid"/>
-          </a:ln>
-        </p:spPr>
-      </p:sp>
-      <p:sp>
-        <p:nvSpPr>
-          <p:cNvPr id="47" name="Text 45"/>
-          <p:cNvSpPr/>
-          <p:nvPr/>
-        </p:nvSpPr>
-        <p:spPr>
-          <a:xfrm>
-            <a:off x="2542032" y="4023360"/>
-            <a:ext cx="2011680" cy="402336"/>
-          </a:xfrm>
-          <a:prstGeom prst="rect">
-            <a:avLst/>
-          </a:prstGeom>
-          <a:noFill/>
-          <a:ln/>
-        </p:spPr>
-        <p:txBody>
-          <a:bodyPr wrap="square" lIns="0" tIns="0" rIns="0" bIns="0" rtlCol="0" anchor="ctr"/>
-          <a:lstStyle/>
-          <a:p>
-            <a:pPr algn="ctr" indent="0" marL="0">
-              <a:buNone/>
-            </a:pPr>
-            <a:r>
-              <a:rPr lang="en-US" sz="1200" b="1" dirty="0">
-                <a:solidFill>
-                  <a:srgbClr val="4338CA"/>
-                </a:solidFill>
-                <a:latin typeface="Trebuchet MS" pitchFamily="34" charset="0"/>
-                <a:ea typeface="Trebuchet MS" pitchFamily="34" charset="-122"/>
-                <a:cs typeface="Trebuchet MS" pitchFamily="34" charset="-120"/>
-              </a:rPr>
-              <a:t>hopeless</a:t>
-            </a:r>
-            <a:endParaRPr lang="en-US" sz="1200" dirty="0"/>
-          </a:p>
-        </p:txBody>
-      </p:sp>
-      <p:sp>
-        <p:nvSpPr>
-          <p:cNvPr id="48" name="Shape 46"/>
-          <p:cNvSpPr/>
-          <p:nvPr/>
-        </p:nvSpPr>
-        <p:spPr>
-          <a:xfrm>
-            <a:off x="4718304" y="4023360"/>
-            <a:ext cx="2011680" cy="402336"/>
-          </a:xfrm>
-          <a:prstGeom prst="rect">
-            <a:avLst>
-              <a:gd name="adj" fmla="val 13636"/>
-            </a:avLst>
-          </a:prstGeom>
-          <a:solidFill>
-            <a:srgbClr val="EEF2FF"/>
-          </a:solidFill>
-          <a:ln w="12700">
-            <a:solidFill>
-              <a:srgbClr val="6366F1"/>
-            </a:solidFill>
-            <a:prstDash val="solid"/>
-          </a:ln>
-        </p:spPr>
-      </p:sp>
-      <p:sp>
-        <p:nvSpPr>
-          <p:cNvPr id="49" name="Text 47"/>
-          <p:cNvSpPr/>
-          <p:nvPr/>
-        </p:nvSpPr>
-        <p:spPr>
-          <a:xfrm>
-            <a:off x="4718304" y="4023360"/>
-            <a:ext cx="2011680" cy="402336"/>
-          </a:xfrm>
-          <a:prstGeom prst="rect">
-            <a:avLst/>
-          </a:prstGeom>
-          <a:noFill/>
-          <a:ln/>
-        </p:spPr>
-        <p:txBody>
-          <a:bodyPr wrap="square" lIns="0" tIns="0" rIns="0" bIns="0" rtlCol="0" anchor="ctr"/>
-          <a:lstStyle/>
-          <a:p>
-            <a:pPr algn="ctr" indent="0" marL="0">
-              <a:buNone/>
-            </a:pPr>
-            <a:r>
-              <a:rPr lang="en-US" sz="1200" b="1" dirty="0">
-                <a:solidFill>
-                  <a:srgbClr val="4338CA"/>
-                </a:solidFill>
-                <a:latin typeface="Trebuchet MS" pitchFamily="34" charset="0"/>
-                <a:ea typeface="Trebuchet MS" pitchFamily="34" charset="-122"/>
-                <a:cs typeface="Trebuchet MS" pitchFamily="34" charset="-120"/>
-              </a:rPr>
-              <a:t>hopefully</a:t>
-            </a:r>
-            <a:endParaRPr lang="en-US" sz="1200" dirty="0"/>
-          </a:p>
-        </p:txBody>
-      </p:sp>
-      <p:sp>
-        <p:nvSpPr>
-          <p:cNvPr id="50" name="Shape 48"/>
-          <p:cNvSpPr/>
-          <p:nvPr/>
-        </p:nvSpPr>
-        <p:spPr>
-          <a:xfrm>
-            <a:off x="6894576" y="4023360"/>
-            <a:ext cx="2011680" cy="402336"/>
-          </a:xfrm>
-          <a:prstGeom prst="rect">
-            <a:avLst>
-              <a:gd name="adj" fmla="val 13636"/>
-            </a:avLst>
-          </a:prstGeom>
-          <a:solidFill>
-            <a:srgbClr val="EEF2FF"/>
-          </a:solidFill>
-          <a:ln w="12700">
-            <a:solidFill>
-              <a:srgbClr val="6366F1"/>
-            </a:solidFill>
-            <a:prstDash val="solid"/>
-          </a:ln>
-        </p:spPr>
-      </p:sp>
-      <p:sp>
-        <p:nvSpPr>
-          <p:cNvPr id="51" name="Text 49"/>
-          <p:cNvSpPr/>
-          <p:nvPr/>
-        </p:nvSpPr>
-        <p:spPr>
-          <a:xfrm>
-            <a:off x="6894576" y="4023360"/>
-            <a:ext cx="2011680" cy="402336"/>
-          </a:xfrm>
-          <a:prstGeom prst="rect">
-            <a:avLst/>
-          </a:prstGeom>
-          <a:noFill/>
-          <a:ln/>
-        </p:spPr>
-        <p:txBody>
-          <a:bodyPr wrap="square" lIns="0" tIns="0" rIns="0" bIns="0" rtlCol="0" anchor="ctr"/>
-          <a:lstStyle/>
-          <a:p>
-            <a:pPr algn="ctr" indent="0" marL="0">
-              <a:buNone/>
-            </a:pPr>
-            <a:r>
-              <a:rPr lang="en-US" sz="1200" b="1" dirty="0">
-                <a:solidFill>
-                  <a:srgbClr val="4338CA"/>
-                </a:solidFill>
-                <a:latin typeface="Trebuchet MS" pitchFamily="34" charset="0"/>
-                <a:ea typeface="Trebuchet MS" pitchFamily="34" charset="-122"/>
-                <a:cs typeface="Trebuchet MS" pitchFamily="34" charset="-120"/>
-              </a:rPr>
-              <a:t>hopelessly</a:t>
-            </a:r>
-            <a:endParaRPr lang="en-US" sz="1200" dirty="0"/>
-          </a:p>
-        </p:txBody>
-      </p:sp>
-      <p:sp>
-        <p:nvSpPr>
-          <p:cNvPr id="52" name="Shape 50"/>
-          <p:cNvSpPr/>
-          <p:nvPr/>
-        </p:nvSpPr>
-        <p:spPr>
-          <a:xfrm>
-            <a:off x="365760" y="4498848"/>
-            <a:ext cx="2011680" cy="402336"/>
-          </a:xfrm>
-          <a:prstGeom prst="rect">
-            <a:avLst>
-              <a:gd name="adj" fmla="val 13636"/>
-            </a:avLst>
-          </a:prstGeom>
-          <a:solidFill>
-            <a:srgbClr val="EEF2FF"/>
-          </a:solidFill>
-          <a:ln w="12700">
-            <a:solidFill>
-              <a:srgbClr val="6366F1"/>
-            </a:solidFill>
-            <a:prstDash val="solid"/>
-          </a:ln>
-        </p:spPr>
-      </p:sp>
-      <p:sp>
-        <p:nvSpPr>
-          <p:cNvPr id="53" name="Text 51"/>
-          <p:cNvSpPr/>
-          <p:nvPr/>
-        </p:nvSpPr>
-        <p:spPr>
-          <a:xfrm>
-            <a:off x="365760" y="4498848"/>
-            <a:ext cx="2011680" cy="402336"/>
-          </a:xfrm>
-          <a:prstGeom prst="rect">
-            <a:avLst/>
-          </a:prstGeom>
-          <a:noFill/>
-          <a:ln/>
-        </p:spPr>
-        <p:txBody>
-          <a:bodyPr wrap="square" lIns="0" tIns="0" rIns="0" bIns="0" rtlCol="0" anchor="ctr"/>
-          <a:lstStyle/>
-          <a:p>
-            <a:pPr algn="ctr" indent="0" marL="0">
-              <a:buNone/>
-            </a:pPr>
-            <a:r>
-              <a:rPr lang="en-US" sz="1200" b="1" dirty="0">
-                <a:solidFill>
-                  <a:srgbClr val="4338CA"/>
-                </a:solidFill>
-                <a:latin typeface="Trebuchet MS" pitchFamily="34" charset="0"/>
-                <a:ea typeface="Trebuchet MS" pitchFamily="34" charset="-122"/>
-                <a:cs typeface="Trebuchet MS" pitchFamily="34" charset="-120"/>
-              </a:rPr>
-              <a:t>unhoped</a:t>
-            </a:r>
-            <a:endParaRPr lang="en-US" sz="1200" dirty="0"/>
-          </a:p>
-        </p:txBody>
-      </p:sp>
-      <p:sp>
-        <p:nvSpPr>
-          <p:cNvPr id="54" name="Shape 52"/>
-          <p:cNvSpPr/>
-          <p:nvPr/>
-        </p:nvSpPr>
-        <p:spPr>
-          <a:xfrm>
-            <a:off x="2542032" y="4498848"/>
-            <a:ext cx="2011680" cy="402336"/>
-          </a:xfrm>
-          <a:prstGeom prst="rect">
-            <a:avLst>
-              <a:gd name="adj" fmla="val 13636"/>
-            </a:avLst>
-          </a:prstGeom>
-          <a:solidFill>
-            <a:srgbClr val="EEF2FF"/>
-          </a:solidFill>
-          <a:ln w="12700">
-            <a:solidFill>
-              <a:srgbClr val="6366F1"/>
-            </a:solidFill>
-            <a:prstDash val="solid"/>
-          </a:ln>
-        </p:spPr>
-      </p:sp>
-      <p:sp>
-        <p:nvSpPr>
-          <p:cNvPr id="55" name="Text 53"/>
-          <p:cNvSpPr/>
-          <p:nvPr/>
-        </p:nvSpPr>
-        <p:spPr>
-          <a:xfrm>
-            <a:off x="2542032" y="4498848"/>
-            <a:ext cx="2011680" cy="402336"/>
-          </a:xfrm>
-          <a:prstGeom prst="rect">
-            <a:avLst/>
-          </a:prstGeom>
-          <a:noFill/>
-          <a:ln/>
-        </p:spPr>
-        <p:txBody>
-          <a:bodyPr wrap="square" lIns="0" tIns="0" rIns="0" bIns="0" rtlCol="0" anchor="ctr"/>
-          <a:lstStyle/>
-          <a:p>
-            <a:pPr algn="ctr" indent="0" marL="0">
-              <a:buNone/>
-            </a:pPr>
-            <a:r>
-              <a:rPr lang="en-US" sz="1200" b="1" dirty="0">
-                <a:solidFill>
-                  <a:srgbClr val="4338CA"/>
-                </a:solidFill>
-                <a:latin typeface="Trebuchet MS" pitchFamily="34" charset="0"/>
-                <a:ea typeface="Trebuchet MS" pitchFamily="34" charset="-122"/>
-                <a:cs typeface="Trebuchet MS" pitchFamily="34" charset="-120"/>
-              </a:rPr>
-              <a:t>hoping</a:t>
-            </a:r>
-            <a:endParaRPr lang="en-US" sz="1200" dirty="0"/>
-          </a:p>
-        </p:txBody>
-      </p:sp>
-      <p:sp>
-        <p:nvSpPr>
-          <p:cNvPr id="56" name="Shape 54"/>
-          <p:cNvSpPr/>
-          <p:nvPr/>
-        </p:nvSpPr>
-        <p:spPr>
-          <a:xfrm>
-            <a:off x="4718304" y="4498848"/>
-            <a:ext cx="2011680" cy="402336"/>
-          </a:xfrm>
-          <a:prstGeom prst="rect">
-            <a:avLst>
-              <a:gd name="adj" fmla="val 13636"/>
-            </a:avLst>
-          </a:prstGeom>
-          <a:solidFill>
-            <a:srgbClr val="EEF2FF"/>
-          </a:solidFill>
-          <a:ln w="12700">
-            <a:solidFill>
-              <a:srgbClr val="6366F1"/>
-            </a:solidFill>
-            <a:prstDash val="solid"/>
-          </a:ln>
-        </p:spPr>
-      </p:sp>
-      <p:sp>
-        <p:nvSpPr>
-          <p:cNvPr id="57" name="Text 55"/>
-          <p:cNvSpPr/>
-          <p:nvPr/>
-        </p:nvSpPr>
-        <p:spPr>
-          <a:xfrm>
-            <a:off x="4718304" y="4498848"/>
-            <a:ext cx="2011680" cy="402336"/>
-          </a:xfrm>
-          <a:prstGeom prst="rect">
-            <a:avLst/>
-          </a:prstGeom>
-          <a:noFill/>
-          <a:ln/>
-        </p:spPr>
-        <p:txBody>
-          <a:bodyPr wrap="square" lIns="0" tIns="0" rIns="0" bIns="0" rtlCol="0" anchor="ctr"/>
-          <a:lstStyle/>
-          <a:p>
-            <a:pPr algn="ctr" indent="0" marL="0">
-              <a:buNone/>
-            </a:pPr>
-            <a:r>
-              <a:rPr lang="en-US" sz="1200" b="1" dirty="0">
-                <a:solidFill>
-                  <a:srgbClr val="4338CA"/>
-                </a:solidFill>
-                <a:latin typeface="Trebuchet MS" pitchFamily="34" charset="0"/>
-                <a:ea typeface="Trebuchet MS" pitchFamily="34" charset="-122"/>
-                <a:cs typeface="Trebuchet MS" pitchFamily="34" charset="-120"/>
-              </a:rPr>
-              <a:t>hoped</a:t>
-            </a:r>
-            <a:endParaRPr lang="en-US" sz="1200" dirty="0"/>
-          </a:p>
-        </p:txBody>
-      </p:sp>
-      <p:sp>
-        <p:nvSpPr>
-          <p:cNvPr id="58" name="Shape 56"/>
-          <p:cNvSpPr/>
-          <p:nvPr/>
-        </p:nvSpPr>
-        <p:spPr>
-          <a:xfrm>
-            <a:off x="6894576" y="4498848"/>
-            <a:ext cx="2011680" cy="402336"/>
-          </a:xfrm>
-          <a:prstGeom prst="rect">
-            <a:avLst>
-              <a:gd name="adj" fmla="val 13636"/>
-            </a:avLst>
-          </a:prstGeom>
-          <a:solidFill>
-            <a:srgbClr val="EEF2FF"/>
-          </a:solidFill>
-          <a:ln w="12700">
-            <a:solidFill>
-              <a:srgbClr val="6366F1"/>
-            </a:solidFill>
-            <a:prstDash val="solid"/>
-          </a:ln>
-        </p:spPr>
-      </p:sp>
-      <p:sp>
-        <p:nvSpPr>
-          <p:cNvPr id="59" name="Text 57"/>
-          <p:cNvSpPr/>
-          <p:nvPr/>
-        </p:nvSpPr>
-        <p:spPr>
-          <a:xfrm>
-            <a:off x="6894576" y="4498848"/>
-            <a:ext cx="2011680" cy="402336"/>
-          </a:xfrm>
-          <a:prstGeom prst="rect">
-            <a:avLst/>
-          </a:prstGeom>
-          <a:noFill/>
-          <a:ln/>
-        </p:spPr>
-        <p:txBody>
-          <a:bodyPr wrap="square" lIns="0" tIns="0" rIns="0" bIns="0" rtlCol="0" anchor="ctr"/>
-          <a:lstStyle/>
-          <a:p>
-            <a:pPr algn="ctr" indent="0" marL="0">
-              <a:buNone/>
-            </a:pPr>
-            <a:r>
-              <a:rPr lang="en-US" sz="1200" b="1" dirty="0">
-                <a:solidFill>
-                  <a:srgbClr val="4338CA"/>
-                </a:solidFill>
-                <a:latin typeface="Trebuchet MS" pitchFamily="34" charset="0"/>
-                <a:ea typeface="Trebuchet MS" pitchFamily="34" charset="-122"/>
-                <a:cs typeface="Trebuchet MS" pitchFamily="34" charset="-120"/>
-              </a:rPr>
-              <a:t>hopelessness</a:t>
             </a:r>
             <a:endParaRPr lang="en-US" sz="1200" dirty="0"/>
           </a:p>
@@ -36151,7 +37434,7 @@
                 <a:ea typeface="Calibri" pitchFamily="34" charset="-122"/>
                 <a:cs typeface="Calibri" pitchFamily="34" charset="-120"/>
               </a:rPr>
-              <a:t>Word Labs  •  wordlabs.app  •  Root: 'hope' = wish for something good</a:t>
+              <a:t>Word Labs  •  wordlabs.app  •  Root: 'hope' = to wish for something good</a:t>
             </a:r>
             <a:endParaRPr lang="en-US" sz="800" dirty="0"/>
           </a:p>
@@ -36315,7 +37598,7 @@
                 <a:ea typeface="Calibri" pitchFamily="34" charset="-122"/>
                 <a:cs typeface="Calibri" pitchFamily="34" charset="-120"/>
               </a:rPr>
-              <a:t>The core part of a word carrying its basic meaning. For example, 'hope' means 'wish for something good'.</a:t>
+              <a:t>The core part of a word carrying its basic meaning. For example, 'hope' means 'to wish for something good'.</a:t>
             </a:r>
             <a:endParaRPr lang="en-US" sz="1350" dirty="0"/>
           </a:p>
@@ -36935,7 +38218,7 @@
                 <a:ea typeface="Calibri" pitchFamily="34" charset="-122"/>
                 <a:cs typeface="Calibri" pitchFamily="34" charset="-120"/>
               </a:rPr>
-              <a:t>Word Labs  •  wordlabs.app  •  Root: 'hope' = wish for something good</a:t>
+              <a:t>Word Labs  •  wordlabs.app  •  Root: 'hope' = to wish for something good</a:t>
             </a:r>
             <a:endParaRPr lang="en-US" sz="800" dirty="0"/>
           </a:p>
@@ -37047,7 +38330,7 @@
                 <a:ea typeface="Calibri" pitchFamily="34" charset="-122"/>
                 <a:cs typeface="Calibri" pitchFamily="34" charset="-120"/>
               </a:rPr>
-              <a:t>1.  'Hopeless' means there is no hope at all.</a:t>
+              <a:t>1.  'hope' means 'a feeling of being very tired'.</a:t>
             </a:r>
             <a:endParaRPr lang="en-US" sz="1300" dirty="0"/>
           </a:p>
@@ -37070,11 +38353,11 @@
             </a:avLst>
           </a:prstGeom>
           <a:solidFill>
-            <a:srgbClr val="DCFCE7"/>
-          </a:solidFill>
-          <a:ln w="12700">
-            <a:solidFill>
-              <a:srgbClr val="16A34A"/>
+            <a:srgbClr val="FEE2E2"/>
+          </a:solidFill>
+          <a:ln w="12700">
+            <a:solidFill>
+              <a:srgbClr val="DC2626"/>
             </a:solidFill>
             <a:prstDash val="solid"/>
           </a:ln>
@@ -37107,13 +38390,13 @@
             <a:r>
               <a:rPr lang="en-US" sz="1100" b="1" dirty="0">
                 <a:solidFill>
-                  <a:srgbClr val="16A34A"/>
+                  <a:srgbClr val="DC2626"/>
                 </a:solidFill>
                 <a:latin typeface="Trebuchet MS" pitchFamily="34" charset="0"/>
                 <a:ea typeface="Trebuchet MS" pitchFamily="34" charset="-122"/>
                 <a:cs typeface="Trebuchet MS" pitchFamily="34" charset="-120"/>
               </a:rPr>
-              <a:t>TRUE</a:t>
+              <a:t>FALSE</a:t>
             </a:r>
             <a:endParaRPr lang="en-US" sz="1100" dirty="0"/>
           </a:p>
@@ -37186,7 +38469,7 @@
                 <a:ea typeface="Calibri" pitchFamily="34" charset="-122"/>
                 <a:cs typeface="Calibri" pitchFamily="34" charset="-120"/>
               </a:rPr>
-              <a:t>2.  The word 'hopefully' contains both a root and two suffixes.</a:t>
+              <a:t>2.  'hope' means 'to wish for something good'.</a:t>
             </a:r>
             <a:endParaRPr lang="en-US" sz="1300" dirty="0"/>
           </a:p>
@@ -37325,7 +38608,7 @@
                 <a:ea typeface="Calibri" pitchFamily="34" charset="-122"/>
                 <a:cs typeface="Calibri" pitchFamily="34" charset="-120"/>
               </a:rPr>
-              <a:t>3.  The word 'hopeful' contains the root 'hope'.</a:t>
+              <a:t>3.  'hoped' means 'wished for something good to happen, in the past'.</a:t>
             </a:r>
             <a:endParaRPr lang="en-US" sz="1300" dirty="0"/>
           </a:p>
@@ -37464,7 +38747,7 @@
                 <a:ea typeface="Calibri" pitchFamily="34" charset="-122"/>
                 <a:cs typeface="Calibri" pitchFamily="34" charset="-120"/>
               </a:rPr>
-              <a:t>4.  The suffix '-less' means full of something.</a:t>
+              <a:t>4.  'hoped' means 'carried something heavy in the past'.</a:t>
             </a:r>
             <a:endParaRPr lang="en-US" sz="1300" dirty="0"/>
           </a:p>
@@ -37603,7 +38886,7 @@
                 <a:ea typeface="Calibri" pitchFamily="34" charset="-122"/>
                 <a:cs typeface="Calibri" pitchFamily="34" charset="-120"/>
               </a:rPr>
-              <a:t>5.  The root 'hope' comes from the ancient Greek word for light.</a:t>
+              <a:t>5.  'hope' means 'a feeling that something good will happen'.</a:t>
             </a:r>
             <a:endParaRPr lang="en-US" sz="1300" dirty="0"/>
           </a:p>
@@ -37626,11 +38909,11 @@
             </a:avLst>
           </a:prstGeom>
           <a:solidFill>
-            <a:srgbClr val="FEE2E2"/>
-          </a:solidFill>
-          <a:ln w="12700">
-            <a:solidFill>
-              <a:srgbClr val="DC2626"/>
+            <a:srgbClr val="DCFCE7"/>
+          </a:solidFill>
+          <a:ln w="12700">
+            <a:solidFill>
+              <a:srgbClr val="16A34A"/>
             </a:solidFill>
             <a:prstDash val="solid"/>
           </a:ln>
@@ -37663,13 +38946,13 @@
             <a:r>
               <a:rPr lang="en-US" sz="1100" b="1" dirty="0">
                 <a:solidFill>
-                  <a:srgbClr val="DC2626"/>
+                  <a:srgbClr val="16A34A"/>
                 </a:solidFill>
                 <a:latin typeface="Trebuchet MS" pitchFamily="34" charset="0"/>
                 <a:ea typeface="Trebuchet MS" pitchFamily="34" charset="-122"/>
                 <a:cs typeface="Trebuchet MS" pitchFamily="34" charset="-120"/>
               </a:rPr>
-              <a:t>FALSE</a:t>
+              <a:t>TRUE</a:t>
             </a:r>
             <a:endParaRPr lang="en-US" sz="1100" dirty="0"/>
           </a:p>
@@ -37961,7 +39244,7 @@
                 <a:ea typeface="Calibri" pitchFamily="34" charset="-122"/>
                 <a:cs typeface="Calibri" pitchFamily="34" charset="-120"/>
               </a:rPr>
-              <a:t>Word Labs  •  wordlabs.app  •  Root: 'hope' = wish for something good</a:t>
+              <a:t>Word Labs  •  wordlabs.app  •  Root: 'hope' = to wish for something good</a:t>
             </a:r>
             <a:endParaRPr lang="en-US" sz="800" dirty="0"/>
           </a:p>
@@ -38098,7 +39381,7 @@
                 <a:ea typeface="Trebuchet MS" pitchFamily="34" charset="-122"/>
                 <a:cs typeface="Trebuchet MS" pitchFamily="34" charset="-120"/>
               </a:rPr>
-              <a:t>wish for something good</a:t>
+              <a:t>to wish for something good</a:t>
             </a:r>
             <a:endParaRPr lang="en-US" sz="2000" dirty="0"/>
           </a:p>
@@ -38137,7 +39420,7 @@
                 <a:ea typeface="Calibri" pitchFamily="34" charset="-122"/>
                 <a:cs typeface="Calibri" pitchFamily="34" charset="-120"/>
               </a:rPr>
-              <a:t>Origin: Latin: sperare</a:t>
+              <a:t>Origin: Anglo-Saxon (Old English) root</a:t>
             </a:r>
             <a:endParaRPr lang="en-US" sz="1100" dirty="0"/>
           </a:p>
@@ -38242,7 +39525,7 @@
                 <a:ea typeface="Trebuchet MS" pitchFamily="34" charset="-122"/>
                 <a:cs typeface="Trebuchet MS" pitchFamily="34" charset="-120"/>
               </a:rPr>
-              <a:t>hopeful</a:t>
+              <a:t>hope</a:t>
             </a:r>
             <a:endParaRPr lang="en-US" sz="1300" dirty="0"/>
           </a:p>
@@ -38308,7 +39591,7 @@
                 <a:ea typeface="Trebuchet MS" pitchFamily="34" charset="-122"/>
                 <a:cs typeface="Trebuchet MS" pitchFamily="34" charset="-120"/>
               </a:rPr>
-              <a:t>hopeless</a:t>
+              <a:t>hoped</a:t>
             </a:r>
             <a:endParaRPr lang="en-US" sz="1300" dirty="0"/>
           </a:p>
@@ -38374,7 +39657,7 @@
                 <a:ea typeface="Trebuchet MS" pitchFamily="34" charset="-122"/>
                 <a:cs typeface="Trebuchet MS" pitchFamily="34" charset="-120"/>
               </a:rPr>
-              <a:t>hopefully</a:t>
+              <a:t>hopes</a:t>
             </a:r>
             <a:endParaRPr lang="en-US" sz="1300" dirty="0"/>
           </a:p>
@@ -38440,7 +39723,7 @@
                 <a:ea typeface="Trebuchet MS" pitchFamily="34" charset="-122"/>
                 <a:cs typeface="Trebuchet MS" pitchFamily="34" charset="-120"/>
               </a:rPr>
-              <a:t>hopelessly</a:t>
+              <a:t>hoping</a:t>
             </a:r>
             <a:endParaRPr lang="en-US" sz="1300" dirty="0"/>
           </a:p>
@@ -38506,139 +39789,7 @@
                 <a:ea typeface="Trebuchet MS" pitchFamily="34" charset="-122"/>
                 <a:cs typeface="Trebuchet MS" pitchFamily="34" charset="-120"/>
               </a:rPr>
-              <a:t>unhoped</a:t>
-            </a:r>
-            <a:endParaRPr lang="en-US" sz="1300" dirty="0"/>
-          </a:p>
-        </p:txBody>
-      </p:sp>
-      <p:sp>
-        <p:nvSpPr>
-          <p:cNvPr id="26" name="Shape 24"/>
-          <p:cNvSpPr/>
-          <p:nvPr/>
-        </p:nvSpPr>
-        <p:spPr>
-          <a:xfrm>
-            <a:off x="2514600" y="3401568"/>
-            <a:ext cx="2011680" cy="502920"/>
-          </a:xfrm>
-          <a:prstGeom prst="rect">
-            <a:avLst>
-              <a:gd name="adj" fmla="val 14545"/>
-            </a:avLst>
-          </a:prstGeom>
-          <a:solidFill>
-            <a:srgbClr val="EEF2FF"/>
-          </a:solidFill>
-          <a:ln w="12700">
-            <a:solidFill>
-              <a:srgbClr val="6366F1"/>
-            </a:solidFill>
-            <a:prstDash val="solid"/>
-          </a:ln>
-        </p:spPr>
-      </p:sp>
-      <p:sp>
-        <p:nvSpPr>
-          <p:cNvPr id="27" name="Text 25"/>
-          <p:cNvSpPr/>
-          <p:nvPr/>
-        </p:nvSpPr>
-        <p:spPr>
-          <a:xfrm>
-            <a:off x="2514600" y="3401568"/>
-            <a:ext cx="2011680" cy="502920"/>
-          </a:xfrm>
-          <a:prstGeom prst="rect">
-            <a:avLst/>
-          </a:prstGeom>
-          <a:noFill/>
-          <a:ln/>
-        </p:spPr>
-        <p:txBody>
-          <a:bodyPr wrap="square" lIns="0" tIns="0" rIns="0" bIns="0" rtlCol="0" anchor="ctr"/>
-          <a:lstStyle/>
-          <a:p>
-            <a:pPr algn="ctr" indent="0" marL="0">
-              <a:buNone/>
-            </a:pPr>
-            <a:r>
-              <a:rPr lang="en-US" sz="1300" b="1" dirty="0">
-                <a:solidFill>
-                  <a:srgbClr val="4338CA"/>
-                </a:solidFill>
-                <a:latin typeface="Trebuchet MS" pitchFamily="34" charset="0"/>
-                <a:ea typeface="Trebuchet MS" pitchFamily="34" charset="-122"/>
-                <a:cs typeface="Trebuchet MS" pitchFamily="34" charset="-120"/>
-              </a:rPr>
-              <a:t>hoping</a:t>
-            </a:r>
-            <a:endParaRPr lang="en-US" sz="1300" dirty="0"/>
-          </a:p>
-        </p:txBody>
-      </p:sp>
-      <p:sp>
-        <p:nvSpPr>
-          <p:cNvPr id="28" name="Shape 26"/>
-          <p:cNvSpPr/>
-          <p:nvPr/>
-        </p:nvSpPr>
-        <p:spPr>
-          <a:xfrm>
-            <a:off x="4663440" y="3401568"/>
-            <a:ext cx="2011680" cy="502920"/>
-          </a:xfrm>
-          <a:prstGeom prst="rect">
-            <a:avLst>
-              <a:gd name="adj" fmla="val 14545"/>
-            </a:avLst>
-          </a:prstGeom>
-          <a:solidFill>
-            <a:srgbClr val="EEF2FF"/>
-          </a:solidFill>
-          <a:ln w="12700">
-            <a:solidFill>
-              <a:srgbClr val="6366F1"/>
-            </a:solidFill>
-            <a:prstDash val="solid"/>
-          </a:ln>
-        </p:spPr>
-      </p:sp>
-      <p:sp>
-        <p:nvSpPr>
-          <p:cNvPr id="29" name="Text 27"/>
-          <p:cNvSpPr/>
-          <p:nvPr/>
-        </p:nvSpPr>
-        <p:spPr>
-          <a:xfrm>
-            <a:off x="4663440" y="3401568"/>
-            <a:ext cx="2011680" cy="502920"/>
-          </a:xfrm>
-          <a:prstGeom prst="rect">
-            <a:avLst/>
-          </a:prstGeom>
-          <a:noFill/>
-          <a:ln/>
-        </p:spPr>
-        <p:txBody>
-          <a:bodyPr wrap="square" lIns="0" tIns="0" rIns="0" bIns="0" rtlCol="0" anchor="ctr"/>
-          <a:lstStyle/>
-          <a:p>
-            <a:pPr algn="ctr" indent="0" marL="0">
-              <a:buNone/>
-            </a:pPr>
-            <a:r>
-              <a:rPr lang="en-US" sz="1300" b="1" dirty="0">
-                <a:solidFill>
-                  <a:srgbClr val="4338CA"/>
-                </a:solidFill>
-                <a:latin typeface="Trebuchet MS" pitchFamily="34" charset="0"/>
-                <a:ea typeface="Trebuchet MS" pitchFamily="34" charset="-122"/>
-                <a:cs typeface="Trebuchet MS" pitchFamily="34" charset="-120"/>
-              </a:rPr>
-              <a:t>hoped</a:t>
+              <a:t>hopeful</a:t>
             </a:r>
             <a:endParaRPr lang="en-US" sz="1300" dirty="0"/>
           </a:p>
@@ -38930,7 +40081,7 @@
                 <a:ea typeface="Calibri" pitchFamily="34" charset="-122"/>
                 <a:cs typeface="Calibri" pitchFamily="34" charset="-120"/>
               </a:rPr>
-              <a:t>Word Labs  •  wordlabs.app  •  Root: 'hope' = wish for something good</a:t>
+              <a:t>Word Labs  •  wordlabs.app  •  Root: 'hope' = to wish for something good</a:t>
             </a:r>
             <a:endParaRPr lang="en-US" sz="800" dirty="0"/>
           </a:p>
@@ -39188,7 +40339,7 @@
             <a:avLst/>
           </a:prstGeom>
           <a:solidFill>
-            <a:srgbClr val="DDD6FE"/>
+            <a:srgbClr val="F8FAFC"/>
           </a:solidFill>
           <a:ln w="12700">
             <a:solidFill>
@@ -39200,14 +40351,39 @@
       </p:sp>
       <p:sp>
         <p:nvSpPr>
-          <p:cNvPr id="18" name="Text 16"/>
-          <p:cNvSpPr/>
-          <p:nvPr/>
-        </p:nvSpPr>
-        <p:spPr>
-          <a:xfrm>
-            <a:off x="640080" y="1755648"/>
-            <a:ext cx="1463040" cy="420624"/>
+          <p:cNvPr id="18" name="Shape 16"/>
+          <p:cNvSpPr/>
+          <p:nvPr/>
+        </p:nvSpPr>
+        <p:spPr>
+          <a:xfrm>
+            <a:off x="3291840" y="1755648"/>
+            <a:ext cx="1645920" cy="420624"/>
+          </a:xfrm>
+          <a:prstGeom prst="rect">
+            <a:avLst/>
+          </a:prstGeom>
+          <a:solidFill>
+            <a:srgbClr val="CCFBF1"/>
+          </a:solidFill>
+          <a:ln w="12700">
+            <a:solidFill>
+              <a:srgbClr val="E5E7EB"/>
+            </a:solidFill>
+            <a:prstDash val="solid"/>
+          </a:ln>
+        </p:spPr>
+      </p:sp>
+      <p:sp>
+        <p:nvSpPr>
+          <p:cNvPr id="19" name="Text 17"/>
+          <p:cNvSpPr/>
+          <p:nvPr/>
+        </p:nvSpPr>
+        <p:spPr>
+          <a:xfrm>
+            <a:off x="3291840" y="1755648"/>
+            <a:ext cx="1645920" cy="420624"/>
           </a:xfrm>
           <a:prstGeom prst="rect">
             <a:avLst/>
@@ -39225,13 +40401,13 @@
             <a:r>
               <a:rPr lang="en-US" sz="1300" b="1" dirty="0">
                 <a:solidFill>
-                  <a:srgbClr val="4C1D95"/>
+                  <a:srgbClr val="0F766E"/>
                 </a:solidFill>
                 <a:latin typeface="Trebuchet MS" pitchFamily="34" charset="0"/>
                 <a:ea typeface="Trebuchet MS" pitchFamily="34" charset="-122"/>
                 <a:cs typeface="Trebuchet MS" pitchFamily="34" charset="-120"/>
               </a:rPr>
-              <a:t>un-</a:t>
+              <a:t>hope</a:t>
             </a:r>
             <a:endParaRPr lang="en-US" sz="1300" dirty="0"/>
           </a:p>
@@ -39239,20 +40415,20 @@
       </p:sp>
       <p:sp>
         <p:nvSpPr>
-          <p:cNvPr id="19" name="Shape 17"/>
-          <p:cNvSpPr/>
-          <p:nvPr/>
-        </p:nvSpPr>
-        <p:spPr>
-          <a:xfrm>
-            <a:off x="3291840" y="1755648"/>
-            <a:ext cx="1645920" cy="420624"/>
-          </a:xfrm>
-          <a:prstGeom prst="rect">
-            <a:avLst/>
-          </a:prstGeom>
-          <a:solidFill>
-            <a:srgbClr val="CCFBF1"/>
+          <p:cNvPr id="20" name="Shape 18"/>
+          <p:cNvSpPr/>
+          <p:nvPr/>
+        </p:nvSpPr>
+        <p:spPr>
+          <a:xfrm>
+            <a:off x="5943600" y="1755648"/>
+            <a:ext cx="1463040" cy="420624"/>
+          </a:xfrm>
+          <a:prstGeom prst="rect">
+            <a:avLst/>
+          </a:prstGeom>
+          <a:solidFill>
+            <a:srgbClr val="FCE7F3"/>
           </a:solidFill>
           <a:ln w="12700">
             <a:solidFill>
@@ -39264,14 +40440,14 @@
       </p:sp>
       <p:sp>
         <p:nvSpPr>
-          <p:cNvPr id="20" name="Text 18"/>
-          <p:cNvSpPr/>
-          <p:nvPr/>
-        </p:nvSpPr>
-        <p:spPr>
-          <a:xfrm>
-            <a:off x="3291840" y="1755648"/>
-            <a:ext cx="1645920" cy="420624"/>
+          <p:cNvPr id="21" name="Text 19"/>
+          <p:cNvSpPr/>
+          <p:nvPr/>
+        </p:nvSpPr>
+        <p:spPr>
+          <a:xfrm>
+            <a:off x="5943600" y="1755648"/>
+            <a:ext cx="1463040" cy="420624"/>
           </a:xfrm>
           <a:prstGeom prst="rect">
             <a:avLst/>
@@ -39289,13 +40465,13 @@
             <a:r>
               <a:rPr lang="en-US" sz="1300" b="1" dirty="0">
                 <a:solidFill>
-                  <a:srgbClr val="0F766E"/>
+                  <a:srgbClr val="9D174D"/>
                 </a:solidFill>
                 <a:latin typeface="Trebuchet MS" pitchFamily="34" charset="0"/>
                 <a:ea typeface="Trebuchet MS" pitchFamily="34" charset="-122"/>
                 <a:cs typeface="Trebuchet MS" pitchFamily="34" charset="-120"/>
               </a:rPr>
-              <a:t>hope</a:t>
+              <a:t>-ed</a:t>
             </a:r>
             <a:endParaRPr lang="en-US" sz="1300" dirty="0"/>
           </a:p>
@@ -39303,19 +40479,69 @@
       </p:sp>
       <p:sp>
         <p:nvSpPr>
-          <p:cNvPr id="21" name="Shape 19"/>
-          <p:cNvSpPr/>
-          <p:nvPr/>
-        </p:nvSpPr>
-        <p:spPr>
-          <a:xfrm>
-            <a:off x="5943600" y="1755648"/>
+          <p:cNvPr id="22" name="Shape 20"/>
+          <p:cNvSpPr/>
+          <p:nvPr/>
+        </p:nvSpPr>
+        <p:spPr>
+          <a:xfrm>
+            <a:off x="640080" y="2212848"/>
             <a:ext cx="1463040" cy="420624"/>
           </a:xfrm>
           <a:prstGeom prst="rect">
             <a:avLst/>
           </a:prstGeom>
           <a:solidFill>
+            <a:srgbClr val="F1F5F9"/>
+          </a:solidFill>
+          <a:ln w="12700">
+            <a:solidFill>
+              <a:srgbClr val="E5E7EB"/>
+            </a:solidFill>
+            <a:prstDash val="solid"/>
+          </a:ln>
+        </p:spPr>
+      </p:sp>
+      <p:sp>
+        <p:nvSpPr>
+          <p:cNvPr id="23" name="Shape 21"/>
+          <p:cNvSpPr/>
+          <p:nvPr/>
+        </p:nvSpPr>
+        <p:spPr>
+          <a:xfrm>
+            <a:off x="3291840" y="2212848"/>
+            <a:ext cx="1645920" cy="420624"/>
+          </a:xfrm>
+          <a:prstGeom prst="rect">
+            <a:avLst/>
+          </a:prstGeom>
+          <a:solidFill>
+            <a:srgbClr val="F1F5F9"/>
+          </a:solidFill>
+          <a:ln w="12700">
+            <a:solidFill>
+              <a:srgbClr val="E5E7EB"/>
+            </a:solidFill>
+            <a:prstDash val="solid"/>
+          </a:ln>
+        </p:spPr>
+      </p:sp>
+      <p:sp>
+        <p:nvSpPr>
+          <p:cNvPr id="24" name="Shape 22"/>
+          <p:cNvSpPr/>
+          <p:nvPr/>
+        </p:nvSpPr>
+        <p:spPr>
+          <a:xfrm>
+            <a:off x="5943600" y="2212848"/>
+            <a:ext cx="1463040" cy="420624"/>
+          </a:xfrm>
+          <a:prstGeom prst="rect">
+            <a:avLst/>
+          </a:prstGeom>
+          <a:solidFill>
             <a:srgbClr val="FCE7F3"/>
           </a:solidFill>
           <a:ln w="12700">
@@ -39328,13 +40554,13 @@
       </p:sp>
       <p:sp>
         <p:nvSpPr>
-          <p:cNvPr id="22" name="Text 20"/>
-          <p:cNvSpPr/>
-          <p:nvPr/>
-        </p:nvSpPr>
-        <p:spPr>
-          <a:xfrm>
-            <a:off x="5943600" y="1755648"/>
+          <p:cNvPr id="25" name="Text 23"/>
+          <p:cNvSpPr/>
+          <p:nvPr/>
+        </p:nvSpPr>
+        <p:spPr>
+          <a:xfrm>
+            <a:off x="5943600" y="2212848"/>
             <a:ext cx="1463040" cy="420624"/>
           </a:xfrm>
           <a:prstGeom prst="rect">
@@ -39367,20 +40593,20 @@
       </p:sp>
       <p:sp>
         <p:nvSpPr>
-          <p:cNvPr id="23" name="Shape 21"/>
-          <p:cNvSpPr/>
-          <p:nvPr/>
-        </p:nvSpPr>
-        <p:spPr>
-          <a:xfrm>
-            <a:off x="640080" y="2212848"/>
+          <p:cNvPr id="26" name="Shape 24"/>
+          <p:cNvSpPr/>
+          <p:nvPr/>
+        </p:nvSpPr>
+        <p:spPr>
+          <a:xfrm>
+            <a:off x="640080" y="2670048"/>
             <a:ext cx="1463040" cy="420624"/>
           </a:xfrm>
           <a:prstGeom prst="rect">
             <a:avLst/>
           </a:prstGeom>
           <a:solidFill>
-            <a:srgbClr val="DDD6FE"/>
+            <a:srgbClr val="F8FAFC"/>
           </a:solidFill>
           <a:ln w="12700">
             <a:solidFill>
@@ -39392,18 +40618,68 @@
       </p:sp>
       <p:sp>
         <p:nvSpPr>
-          <p:cNvPr id="24" name="Text 22"/>
-          <p:cNvSpPr/>
-          <p:nvPr/>
-        </p:nvSpPr>
-        <p:spPr>
-          <a:xfrm>
-            <a:off x="640080" y="2212848"/>
+          <p:cNvPr id="27" name="Shape 25"/>
+          <p:cNvSpPr/>
+          <p:nvPr/>
+        </p:nvSpPr>
+        <p:spPr>
+          <a:xfrm>
+            <a:off x="3291840" y="2670048"/>
+            <a:ext cx="1645920" cy="420624"/>
+          </a:xfrm>
+          <a:prstGeom prst="rect">
+            <a:avLst/>
+          </a:prstGeom>
+          <a:solidFill>
+            <a:srgbClr val="F8FAFC"/>
+          </a:solidFill>
+          <a:ln w="12700">
+            <a:solidFill>
+              <a:srgbClr val="E5E7EB"/>
+            </a:solidFill>
+            <a:prstDash val="solid"/>
+          </a:ln>
+        </p:spPr>
+      </p:sp>
+      <p:sp>
+        <p:nvSpPr>
+          <p:cNvPr id="28" name="Shape 26"/>
+          <p:cNvSpPr/>
+          <p:nvPr/>
+        </p:nvSpPr>
+        <p:spPr>
+          <a:xfrm>
+            <a:off x="5943600" y="2670048"/>
             <a:ext cx="1463040" cy="420624"/>
           </a:xfrm>
           <a:prstGeom prst="rect">
             <a:avLst/>
           </a:prstGeom>
+          <a:solidFill>
+            <a:srgbClr val="FCE7F3"/>
+          </a:solidFill>
+          <a:ln w="12700">
+            <a:solidFill>
+              <a:srgbClr val="E5E7EB"/>
+            </a:solidFill>
+            <a:prstDash val="solid"/>
+          </a:ln>
+        </p:spPr>
+      </p:sp>
+      <p:sp>
+        <p:nvSpPr>
+          <p:cNvPr id="29" name="Text 27"/>
+          <p:cNvSpPr/>
+          <p:nvPr/>
+        </p:nvSpPr>
+        <p:spPr>
+          <a:xfrm>
+            <a:off x="5943600" y="2670048"/>
+            <a:ext cx="1463040" cy="420624"/>
+          </a:xfrm>
+          <a:prstGeom prst="rect">
+            <a:avLst/>
+          </a:prstGeom>
           <a:noFill/>
           <a:ln/>
         </p:spPr>
@@ -39417,13 +40693,13 @@
             <a:r>
               <a:rPr lang="en-US" sz="1300" b="1" dirty="0">
                 <a:solidFill>
-                  <a:srgbClr val="4C1D95"/>
+                  <a:srgbClr val="9D174D"/>
                 </a:solidFill>
                 <a:latin typeface="Trebuchet MS" pitchFamily="34" charset="0"/>
                 <a:ea typeface="Trebuchet MS" pitchFamily="34" charset="-122"/>
                 <a:cs typeface="Trebuchet MS" pitchFamily="34" charset="-120"/>
               </a:rPr>
-              <a:t>dis-</a:t>
+              <a:t>-less</a:t>
             </a:r>
             <a:endParaRPr lang="en-US" sz="1300" dirty="0"/>
           </a:p>
@@ -39431,13 +40707,38 @@
       </p:sp>
       <p:sp>
         <p:nvSpPr>
-          <p:cNvPr id="25" name="Shape 23"/>
-          <p:cNvSpPr/>
-          <p:nvPr/>
-        </p:nvSpPr>
-        <p:spPr>
-          <a:xfrm>
-            <a:off x="3291840" y="2212848"/>
+          <p:cNvPr id="30" name="Shape 28"/>
+          <p:cNvSpPr/>
+          <p:nvPr/>
+        </p:nvSpPr>
+        <p:spPr>
+          <a:xfrm>
+            <a:off x="640080" y="3127248"/>
+            <a:ext cx="1463040" cy="420624"/>
+          </a:xfrm>
+          <a:prstGeom prst="rect">
+            <a:avLst/>
+          </a:prstGeom>
+          <a:solidFill>
+            <a:srgbClr val="F1F5F9"/>
+          </a:solidFill>
+          <a:ln w="12700">
+            <a:solidFill>
+              <a:srgbClr val="E5E7EB"/>
+            </a:solidFill>
+            <a:prstDash val="solid"/>
+          </a:ln>
+        </p:spPr>
+      </p:sp>
+      <p:sp>
+        <p:nvSpPr>
+          <p:cNvPr id="31" name="Shape 29"/>
+          <p:cNvSpPr/>
+          <p:nvPr/>
+        </p:nvSpPr>
+        <p:spPr>
+          <a:xfrm>
+            <a:off x="3291840" y="3127248"/>
             <a:ext cx="1645920" cy="420624"/>
           </a:xfrm>
           <a:prstGeom prst="rect">
@@ -39456,13 +40757,13 @@
       </p:sp>
       <p:sp>
         <p:nvSpPr>
-          <p:cNvPr id="26" name="Shape 24"/>
-          <p:cNvSpPr/>
-          <p:nvPr/>
-        </p:nvSpPr>
-        <p:spPr>
-          <a:xfrm>
-            <a:off x="5943600" y="2212848"/>
+          <p:cNvPr id="32" name="Shape 30"/>
+          <p:cNvSpPr/>
+          <p:nvPr/>
+        </p:nvSpPr>
+        <p:spPr>
+          <a:xfrm>
+            <a:off x="5943600" y="3127248"/>
             <a:ext cx="1463040" cy="420624"/>
           </a:xfrm>
           <a:prstGeom prst="rect">
@@ -39481,13 +40782,13 @@
       </p:sp>
       <p:sp>
         <p:nvSpPr>
-          <p:cNvPr id="27" name="Text 25"/>
-          <p:cNvSpPr/>
-          <p:nvPr/>
-        </p:nvSpPr>
-        <p:spPr>
-          <a:xfrm>
-            <a:off x="5943600" y="2212848"/>
+          <p:cNvPr id="33" name="Text 31"/>
+          <p:cNvSpPr/>
+          <p:nvPr/>
+        </p:nvSpPr>
+        <p:spPr>
+          <a:xfrm>
+            <a:off x="5943600" y="3127248"/>
             <a:ext cx="1463040" cy="420624"/>
           </a:xfrm>
           <a:prstGeom prst="rect">
@@ -39512,7 +40813,7 @@
                 <a:ea typeface="Trebuchet MS" pitchFamily="34" charset="-122"/>
                 <a:cs typeface="Trebuchet MS" pitchFamily="34" charset="-120"/>
               </a:rPr>
-              <a:t>-less</a:t>
+              <a:t>-s</a:t>
             </a:r>
             <a:endParaRPr lang="en-US" sz="1300" dirty="0"/>
           </a:p>
@@ -39520,20 +40821,20 @@
       </p:sp>
       <p:sp>
         <p:nvSpPr>
-          <p:cNvPr id="28" name="Shape 26"/>
-          <p:cNvSpPr/>
-          <p:nvPr/>
-        </p:nvSpPr>
-        <p:spPr>
-          <a:xfrm>
-            <a:off x="640080" y="2670048"/>
+          <p:cNvPr id="34" name="Shape 32"/>
+          <p:cNvSpPr/>
+          <p:nvPr/>
+        </p:nvSpPr>
+        <p:spPr>
+          <a:xfrm>
+            <a:off x="640080" y="3584448"/>
             <a:ext cx="1463040" cy="420624"/>
           </a:xfrm>
           <a:prstGeom prst="rect">
             <a:avLst/>
           </a:prstGeom>
           <a:solidFill>
-            <a:srgbClr val="DDD6FE"/>
+            <a:srgbClr val="F8FAFC"/>
           </a:solidFill>
           <a:ln w="12700">
             <a:solidFill>
@@ -39545,18 +40846,68 @@
       </p:sp>
       <p:sp>
         <p:nvSpPr>
-          <p:cNvPr id="29" name="Text 27"/>
-          <p:cNvSpPr/>
-          <p:nvPr/>
-        </p:nvSpPr>
-        <p:spPr>
-          <a:xfrm>
-            <a:off x="640080" y="2670048"/>
+          <p:cNvPr id="35" name="Shape 33"/>
+          <p:cNvSpPr/>
+          <p:nvPr/>
+        </p:nvSpPr>
+        <p:spPr>
+          <a:xfrm>
+            <a:off x="3291840" y="3584448"/>
+            <a:ext cx="1645920" cy="420624"/>
+          </a:xfrm>
+          <a:prstGeom prst="rect">
+            <a:avLst/>
+          </a:prstGeom>
+          <a:solidFill>
+            <a:srgbClr val="F8FAFC"/>
+          </a:solidFill>
+          <a:ln w="12700">
+            <a:solidFill>
+              <a:srgbClr val="E5E7EB"/>
+            </a:solidFill>
+            <a:prstDash val="solid"/>
+          </a:ln>
+        </p:spPr>
+      </p:sp>
+      <p:sp>
+        <p:nvSpPr>
+          <p:cNvPr id="36" name="Shape 34"/>
+          <p:cNvSpPr/>
+          <p:nvPr/>
+        </p:nvSpPr>
+        <p:spPr>
+          <a:xfrm>
+            <a:off x="5943600" y="3584448"/>
             <a:ext cx="1463040" cy="420624"/>
           </a:xfrm>
           <a:prstGeom prst="rect">
             <a:avLst/>
           </a:prstGeom>
+          <a:solidFill>
+            <a:srgbClr val="FCE7F3"/>
+          </a:solidFill>
+          <a:ln w="12700">
+            <a:solidFill>
+              <a:srgbClr val="E5E7EB"/>
+            </a:solidFill>
+            <a:prstDash val="solid"/>
+          </a:ln>
+        </p:spPr>
+      </p:sp>
+      <p:sp>
+        <p:nvSpPr>
+          <p:cNvPr id="37" name="Text 35"/>
+          <p:cNvSpPr/>
+          <p:nvPr/>
+        </p:nvSpPr>
+        <p:spPr>
+          <a:xfrm>
+            <a:off x="5943600" y="3584448"/>
+            <a:ext cx="1463040" cy="420624"/>
+          </a:xfrm>
+          <a:prstGeom prst="rect">
+            <a:avLst/>
+          </a:prstGeom>
           <a:noFill/>
           <a:ln/>
         </p:spPr>
@@ -39570,13 +40921,13 @@
             <a:r>
               <a:rPr lang="en-US" sz="1300" b="1" dirty="0">
                 <a:solidFill>
-                  <a:srgbClr val="4C1D95"/>
+                  <a:srgbClr val="9D174D"/>
                 </a:solidFill>
                 <a:latin typeface="Trebuchet MS" pitchFamily="34" charset="0"/>
                 <a:ea typeface="Trebuchet MS" pitchFamily="34" charset="-122"/>
                 <a:cs typeface="Trebuchet MS" pitchFamily="34" charset="-120"/>
               </a:rPr>
-              <a:t>re-</a:t>
+              <a:t>-ing</a:t>
             </a:r>
             <a:endParaRPr lang="en-US" sz="1300" dirty="0"/>
           </a:p>
@@ -39584,402 +40935,7 @@
       </p:sp>
       <p:sp>
         <p:nvSpPr>
-          <p:cNvPr id="30" name="Shape 28"/>
-          <p:cNvSpPr/>
-          <p:nvPr/>
-        </p:nvSpPr>
-        <p:spPr>
-          <a:xfrm>
-            <a:off x="3291840" y="2670048"/>
-            <a:ext cx="1645920" cy="420624"/>
-          </a:xfrm>
-          <a:prstGeom prst="rect">
-            <a:avLst/>
-          </a:prstGeom>
-          <a:solidFill>
-            <a:srgbClr val="F8FAFC"/>
-          </a:solidFill>
-          <a:ln w="12700">
-            <a:solidFill>
-              <a:srgbClr val="E5E7EB"/>
-            </a:solidFill>
-            <a:prstDash val="solid"/>
-          </a:ln>
-        </p:spPr>
-      </p:sp>
-      <p:sp>
-        <p:nvSpPr>
-          <p:cNvPr id="31" name="Shape 29"/>
-          <p:cNvSpPr/>
-          <p:nvPr/>
-        </p:nvSpPr>
-        <p:spPr>
-          <a:xfrm>
-            <a:off x="5943600" y="2670048"/>
-            <a:ext cx="1463040" cy="420624"/>
-          </a:xfrm>
-          <a:prstGeom prst="rect">
-            <a:avLst/>
-          </a:prstGeom>
-          <a:solidFill>
-            <a:srgbClr val="FCE7F3"/>
-          </a:solidFill>
-          <a:ln w="12700">
-            <a:solidFill>
-              <a:srgbClr val="E5E7EB"/>
-            </a:solidFill>
-            <a:prstDash val="solid"/>
-          </a:ln>
-        </p:spPr>
-      </p:sp>
-      <p:sp>
-        <p:nvSpPr>
-          <p:cNvPr id="32" name="Text 30"/>
-          <p:cNvSpPr/>
-          <p:nvPr/>
-        </p:nvSpPr>
-        <p:spPr>
-          <a:xfrm>
-            <a:off x="5943600" y="2670048"/>
-            <a:ext cx="1463040" cy="420624"/>
-          </a:xfrm>
-          <a:prstGeom prst="rect">
-            <a:avLst/>
-          </a:prstGeom>
-          <a:noFill/>
-          <a:ln/>
-        </p:spPr>
-        <p:txBody>
-          <a:bodyPr wrap="square" lIns="0" tIns="0" rIns="0" bIns="0" rtlCol="0" anchor="ctr"/>
-          <a:lstStyle/>
-          <a:p>
-            <a:pPr algn="ctr" indent="0" marL="0">
-              <a:buNone/>
-            </a:pPr>
-            <a:r>
-              <a:rPr lang="en-US" sz="1300" b="1" dirty="0">
-                <a:solidFill>
-                  <a:srgbClr val="9D174D"/>
-                </a:solidFill>
-                <a:latin typeface="Trebuchet MS" pitchFamily="34" charset="0"/>
-                <a:ea typeface="Trebuchet MS" pitchFamily="34" charset="-122"/>
-                <a:cs typeface="Trebuchet MS" pitchFamily="34" charset="-120"/>
-              </a:rPr>
-              <a:t>-ing</a:t>
-            </a:r>
-            <a:endParaRPr lang="en-US" sz="1300" dirty="0"/>
-          </a:p>
-        </p:txBody>
-      </p:sp>
-      <p:sp>
-        <p:nvSpPr>
-          <p:cNvPr id="33" name="Shape 31"/>
-          <p:cNvSpPr/>
-          <p:nvPr/>
-        </p:nvSpPr>
-        <p:spPr>
-          <a:xfrm>
-            <a:off x="640080" y="3127248"/>
-            <a:ext cx="1463040" cy="420624"/>
-          </a:xfrm>
-          <a:prstGeom prst="rect">
-            <a:avLst/>
-          </a:prstGeom>
-          <a:solidFill>
-            <a:srgbClr val="DDD6FE"/>
-          </a:solidFill>
-          <a:ln w="12700">
-            <a:solidFill>
-              <a:srgbClr val="E5E7EB"/>
-            </a:solidFill>
-            <a:prstDash val="solid"/>
-          </a:ln>
-        </p:spPr>
-      </p:sp>
-      <p:sp>
-        <p:nvSpPr>
-          <p:cNvPr id="34" name="Text 32"/>
-          <p:cNvSpPr/>
-          <p:nvPr/>
-        </p:nvSpPr>
-        <p:spPr>
-          <a:xfrm>
-            <a:off x="640080" y="3127248"/>
-            <a:ext cx="1463040" cy="420624"/>
-          </a:xfrm>
-          <a:prstGeom prst="rect">
-            <a:avLst/>
-          </a:prstGeom>
-          <a:noFill/>
-          <a:ln/>
-        </p:spPr>
-        <p:txBody>
-          <a:bodyPr wrap="square" lIns="0" tIns="0" rIns="0" bIns="0" rtlCol="0" anchor="ctr"/>
-          <a:lstStyle/>
-          <a:p>
-            <a:pPr algn="ctr" indent="0" marL="0">
-              <a:buNone/>
-            </a:pPr>
-            <a:r>
-              <a:rPr lang="en-US" sz="1300" b="1" dirty="0">
-                <a:solidFill>
-                  <a:srgbClr val="4C1D95"/>
-                </a:solidFill>
-                <a:latin typeface="Trebuchet MS" pitchFamily="34" charset="0"/>
-                <a:ea typeface="Trebuchet MS" pitchFamily="34" charset="-122"/>
-                <a:cs typeface="Trebuchet MS" pitchFamily="34" charset="-120"/>
-              </a:rPr>
-              <a:t>mis-</a:t>
-            </a:r>
-            <a:endParaRPr lang="en-US" sz="1300" dirty="0"/>
-          </a:p>
-        </p:txBody>
-      </p:sp>
-      <p:sp>
-        <p:nvSpPr>
-          <p:cNvPr id="35" name="Shape 33"/>
-          <p:cNvSpPr/>
-          <p:nvPr/>
-        </p:nvSpPr>
-        <p:spPr>
-          <a:xfrm>
-            <a:off x="3291840" y="3127248"/>
-            <a:ext cx="1645920" cy="420624"/>
-          </a:xfrm>
-          <a:prstGeom prst="rect">
-            <a:avLst/>
-          </a:prstGeom>
-          <a:solidFill>
-            <a:srgbClr val="F1F5F9"/>
-          </a:solidFill>
-          <a:ln w="12700">
-            <a:solidFill>
-              <a:srgbClr val="E5E7EB"/>
-            </a:solidFill>
-            <a:prstDash val="solid"/>
-          </a:ln>
-        </p:spPr>
-      </p:sp>
-      <p:sp>
-        <p:nvSpPr>
-          <p:cNvPr id="36" name="Shape 34"/>
-          <p:cNvSpPr/>
-          <p:nvPr/>
-        </p:nvSpPr>
-        <p:spPr>
-          <a:xfrm>
-            <a:off x="5943600" y="3127248"/>
-            <a:ext cx="1463040" cy="420624"/>
-          </a:xfrm>
-          <a:prstGeom prst="rect">
-            <a:avLst/>
-          </a:prstGeom>
-          <a:solidFill>
-            <a:srgbClr val="FCE7F3"/>
-          </a:solidFill>
-          <a:ln w="12700">
-            <a:solidFill>
-              <a:srgbClr val="E5E7EB"/>
-            </a:solidFill>
-            <a:prstDash val="solid"/>
-          </a:ln>
-        </p:spPr>
-      </p:sp>
-      <p:sp>
-        <p:nvSpPr>
-          <p:cNvPr id="37" name="Text 35"/>
-          <p:cNvSpPr/>
-          <p:nvPr/>
-        </p:nvSpPr>
-        <p:spPr>
-          <a:xfrm>
-            <a:off x="5943600" y="3127248"/>
-            <a:ext cx="1463040" cy="420624"/>
-          </a:xfrm>
-          <a:prstGeom prst="rect">
-            <a:avLst/>
-          </a:prstGeom>
-          <a:noFill/>
-          <a:ln/>
-        </p:spPr>
-        <p:txBody>
-          <a:bodyPr wrap="square" lIns="0" tIns="0" rIns="0" bIns="0" rtlCol="0" anchor="ctr"/>
-          <a:lstStyle/>
-          <a:p>
-            <a:pPr algn="ctr" indent="0" marL="0">
-              <a:buNone/>
-            </a:pPr>
-            <a:r>
-              <a:rPr lang="en-US" sz="1300" b="1" dirty="0">
-                <a:solidFill>
-                  <a:srgbClr val="9D174D"/>
-                </a:solidFill>
-                <a:latin typeface="Trebuchet MS" pitchFamily="34" charset="0"/>
-                <a:ea typeface="Trebuchet MS" pitchFamily="34" charset="-122"/>
-                <a:cs typeface="Trebuchet MS" pitchFamily="34" charset="-120"/>
-              </a:rPr>
-              <a:t>-ed</a:t>
-            </a:r>
-            <a:endParaRPr lang="en-US" sz="1300" dirty="0"/>
-          </a:p>
-        </p:txBody>
-      </p:sp>
-      <p:sp>
-        <p:nvSpPr>
-          <p:cNvPr id="38" name="Shape 36"/>
-          <p:cNvSpPr/>
-          <p:nvPr/>
-        </p:nvSpPr>
-        <p:spPr>
-          <a:xfrm>
-            <a:off x="640080" y="3584448"/>
-            <a:ext cx="1463040" cy="420624"/>
-          </a:xfrm>
-          <a:prstGeom prst="rect">
-            <a:avLst/>
-          </a:prstGeom>
-          <a:solidFill>
-            <a:srgbClr val="DDD6FE"/>
-          </a:solidFill>
-          <a:ln w="12700">
-            <a:solidFill>
-              <a:srgbClr val="E5E7EB"/>
-            </a:solidFill>
-            <a:prstDash val="solid"/>
-          </a:ln>
-        </p:spPr>
-      </p:sp>
-      <p:sp>
-        <p:nvSpPr>
-          <p:cNvPr id="39" name="Text 37"/>
-          <p:cNvSpPr/>
-          <p:nvPr/>
-        </p:nvSpPr>
-        <p:spPr>
-          <a:xfrm>
-            <a:off x="640080" y="3584448"/>
-            <a:ext cx="1463040" cy="420624"/>
-          </a:xfrm>
-          <a:prstGeom prst="rect">
-            <a:avLst/>
-          </a:prstGeom>
-          <a:noFill/>
-          <a:ln/>
-        </p:spPr>
-        <p:txBody>
-          <a:bodyPr wrap="square" lIns="0" tIns="0" rIns="0" bIns="0" rtlCol="0" anchor="ctr"/>
-          <a:lstStyle/>
-          <a:p>
-            <a:pPr algn="ctr" indent="0" marL="0">
-              <a:buNone/>
-            </a:pPr>
-            <a:r>
-              <a:rPr lang="en-US" sz="1300" b="1" dirty="0">
-                <a:solidFill>
-                  <a:srgbClr val="4C1D95"/>
-                </a:solidFill>
-                <a:latin typeface="Trebuchet MS" pitchFamily="34" charset="0"/>
-                <a:ea typeface="Trebuchet MS" pitchFamily="34" charset="-122"/>
-                <a:cs typeface="Trebuchet MS" pitchFamily="34" charset="-120"/>
-              </a:rPr>
-              <a:t>over-</a:t>
-            </a:r>
-            <a:endParaRPr lang="en-US" sz="1300" dirty="0"/>
-          </a:p>
-        </p:txBody>
-      </p:sp>
-      <p:sp>
-        <p:nvSpPr>
-          <p:cNvPr id="40" name="Shape 38"/>
-          <p:cNvSpPr/>
-          <p:nvPr/>
-        </p:nvSpPr>
-        <p:spPr>
-          <a:xfrm>
-            <a:off x="3291840" y="3584448"/>
-            <a:ext cx="1645920" cy="420624"/>
-          </a:xfrm>
-          <a:prstGeom prst="rect">
-            <a:avLst/>
-          </a:prstGeom>
-          <a:solidFill>
-            <a:srgbClr val="F8FAFC"/>
-          </a:solidFill>
-          <a:ln w="12700">
-            <a:solidFill>
-              <a:srgbClr val="E5E7EB"/>
-            </a:solidFill>
-            <a:prstDash val="solid"/>
-          </a:ln>
-        </p:spPr>
-      </p:sp>
-      <p:sp>
-        <p:nvSpPr>
-          <p:cNvPr id="41" name="Shape 39"/>
-          <p:cNvSpPr/>
-          <p:nvPr/>
-        </p:nvSpPr>
-        <p:spPr>
-          <a:xfrm>
-            <a:off x="5943600" y="3584448"/>
-            <a:ext cx="1463040" cy="420624"/>
-          </a:xfrm>
-          <a:prstGeom prst="rect">
-            <a:avLst/>
-          </a:prstGeom>
-          <a:solidFill>
-            <a:srgbClr val="FCE7F3"/>
-          </a:solidFill>
-          <a:ln w="12700">
-            <a:solidFill>
-              <a:srgbClr val="E5E7EB"/>
-            </a:solidFill>
-            <a:prstDash val="solid"/>
-          </a:ln>
-        </p:spPr>
-      </p:sp>
-      <p:sp>
-        <p:nvSpPr>
-          <p:cNvPr id="42" name="Text 40"/>
-          <p:cNvSpPr/>
-          <p:nvPr/>
-        </p:nvSpPr>
-        <p:spPr>
-          <a:xfrm>
-            <a:off x="5943600" y="3584448"/>
-            <a:ext cx="1463040" cy="420624"/>
-          </a:xfrm>
-          <a:prstGeom prst="rect">
-            <a:avLst/>
-          </a:prstGeom>
-          <a:noFill/>
-          <a:ln/>
-        </p:spPr>
-        <p:txBody>
-          <a:bodyPr wrap="square" lIns="0" tIns="0" rIns="0" bIns="0" rtlCol="0" anchor="ctr"/>
-          <a:lstStyle/>
-          <a:p>
-            <a:pPr algn="ctr" indent="0" marL="0">
-              <a:buNone/>
-            </a:pPr>
-            <a:r>
-              <a:rPr lang="en-US" sz="1300" b="1" dirty="0">
-                <a:solidFill>
-                  <a:srgbClr val="9D174D"/>
-                </a:solidFill>
-                <a:latin typeface="Trebuchet MS" pitchFamily="34" charset="0"/>
-                <a:ea typeface="Trebuchet MS" pitchFamily="34" charset="-122"/>
-                <a:cs typeface="Trebuchet MS" pitchFamily="34" charset="-120"/>
-              </a:rPr>
-              <a:t>-fully</a:t>
-            </a:r>
-            <a:endParaRPr lang="en-US" sz="1300" dirty="0"/>
-          </a:p>
-        </p:txBody>
-      </p:sp>
-      <p:sp>
-        <p:nvSpPr>
-          <p:cNvPr id="43" name="Text 41"/>
+          <p:cNvPr id="38" name="Text 36"/>
           <p:cNvSpPr/>
           <p:nvPr/>
         </p:nvSpPr>
@@ -40018,14 +40974,14 @@
       </p:sp>
       <p:sp>
         <p:nvSpPr>
-          <p:cNvPr id="44" name="Shape 42"/>
+          <p:cNvPr id="39" name="Shape 37"/>
           <p:cNvSpPr/>
           <p:nvPr/>
         </p:nvSpPr>
         <p:spPr>
           <a:xfrm>
             <a:off x="1508760" y="4178808"/>
-            <a:ext cx="822960" cy="420624"/>
+            <a:ext cx="1243584" cy="420624"/>
           </a:xfrm>
           <a:prstGeom prst="rect">
             <a:avLst>
@@ -40033,11 +40989,11 @@
             </a:avLst>
           </a:prstGeom>
           <a:solidFill>
-            <a:srgbClr val="DDD6FE"/>
+            <a:srgbClr val="CCFBF1"/>
           </a:solidFill>
           <a:ln w="19050">
             <a:solidFill>
-              <a:srgbClr val="7C3AED"/>
+              <a:srgbClr val="0D9488"/>
             </a:solidFill>
             <a:prstDash val="solid"/>
           </a:ln>
@@ -40052,14 +41008,14 @@
       </p:sp>
       <p:sp>
         <p:nvSpPr>
-          <p:cNvPr id="45" name="Text 43"/>
+          <p:cNvPr id="40" name="Text 38"/>
           <p:cNvSpPr/>
           <p:nvPr/>
         </p:nvSpPr>
         <p:spPr>
           <a:xfrm>
             <a:off x="1508760" y="4178808"/>
-            <a:ext cx="822960" cy="420624"/>
+            <a:ext cx="1243584" cy="420624"/>
           </a:xfrm>
           <a:prstGeom prst="rect">
             <a:avLst/>
@@ -40077,13 +41033,13 @@
             <a:r>
               <a:rPr lang="en-US" sz="1300" b="1" dirty="0">
                 <a:solidFill>
-                  <a:srgbClr val="4C1D95"/>
+                  <a:srgbClr val="0F766E"/>
                 </a:solidFill>
                 <a:latin typeface="Trebuchet MS" pitchFamily="34" charset="0"/>
                 <a:ea typeface="Trebuchet MS" pitchFamily="34" charset="-122"/>
                 <a:cs typeface="Trebuchet MS" pitchFamily="34" charset="-120"/>
               </a:rPr>
-              <a:t>un-</a:t>
+              <a:t>'hope'</a:t>
             </a:r>
             <a:endParaRPr lang="en-US" sz="1300" dirty="0"/>
           </a:p>
@@ -40091,13 +41047,13 @@
       </p:sp>
       <p:sp>
         <p:nvSpPr>
-          <p:cNvPr id="46" name="Text 44"/>
-          <p:cNvSpPr/>
-          <p:nvPr/>
-        </p:nvSpPr>
-        <p:spPr>
-          <a:xfrm>
-            <a:off x="2359152" y="4178808"/>
+          <p:cNvPr id="41" name="Text 39"/>
+          <p:cNvSpPr/>
+          <p:nvPr/>
+        </p:nvSpPr>
+        <p:spPr>
+          <a:xfrm>
+            <a:off x="2779776" y="4178808"/>
             <a:ext cx="320040" cy="420624"/>
           </a:xfrm>
           <a:prstGeom prst="rect">
@@ -40130,14 +41086,14 @@
       </p:sp>
       <p:sp>
         <p:nvSpPr>
-          <p:cNvPr id="47" name="Shape 45"/>
-          <p:cNvSpPr/>
-          <p:nvPr/>
-        </p:nvSpPr>
-        <p:spPr>
-          <a:xfrm>
-            <a:off x="2706624" y="4178808"/>
-            <a:ext cx="1243584" cy="420624"/>
+          <p:cNvPr id="42" name="Shape 40"/>
+          <p:cNvSpPr/>
+          <p:nvPr/>
+        </p:nvSpPr>
+        <p:spPr>
+          <a:xfrm>
+            <a:off x="3127248" y="4178808"/>
+            <a:ext cx="822960" cy="420624"/>
           </a:xfrm>
           <a:prstGeom prst="rect">
             <a:avLst>
@@ -40145,11 +41101,11 @@
             </a:avLst>
           </a:prstGeom>
           <a:solidFill>
-            <a:srgbClr val="CCFBF1"/>
+            <a:srgbClr val="FCE7F3"/>
           </a:solidFill>
           <a:ln w="19050">
             <a:solidFill>
-              <a:srgbClr val="0D9488"/>
+              <a:srgbClr val="DB2777"/>
             </a:solidFill>
             <a:prstDash val="solid"/>
           </a:ln>
@@ -40164,14 +41120,14 @@
       </p:sp>
       <p:sp>
         <p:nvSpPr>
-          <p:cNvPr id="48" name="Text 46"/>
-          <p:cNvSpPr/>
-          <p:nvPr/>
-        </p:nvSpPr>
-        <p:spPr>
-          <a:xfrm>
-            <a:off x="2706624" y="4178808"/>
-            <a:ext cx="1243584" cy="420624"/>
+          <p:cNvPr id="43" name="Text 41"/>
+          <p:cNvSpPr/>
+          <p:nvPr/>
+        </p:nvSpPr>
+        <p:spPr>
+          <a:xfrm>
+            <a:off x="3127248" y="4178808"/>
+            <a:ext cx="822960" cy="420624"/>
           </a:xfrm>
           <a:prstGeom prst="rect">
             <a:avLst/>
@@ -40189,13 +41145,13 @@
             <a:r>
               <a:rPr lang="en-US" sz="1300" b="1" dirty="0">
                 <a:solidFill>
-                  <a:srgbClr val="0F766E"/>
+                  <a:srgbClr val="9D174D"/>
                 </a:solidFill>
                 <a:latin typeface="Trebuchet MS" pitchFamily="34" charset="0"/>
                 <a:ea typeface="Trebuchet MS" pitchFamily="34" charset="-122"/>
                 <a:cs typeface="Trebuchet MS" pitchFamily="34" charset="-120"/>
               </a:rPr>
-              <a:t>'hope'</a:t>
+              <a:t>-ed</a:t>
             </a:r>
             <a:endParaRPr lang="en-US" sz="1300" dirty="0"/>
           </a:p>
@@ -40203,14 +41159,14 @@
       </p:sp>
       <p:sp>
         <p:nvSpPr>
-          <p:cNvPr id="49" name="Text 47"/>
-          <p:cNvSpPr/>
-          <p:nvPr/>
-        </p:nvSpPr>
-        <p:spPr>
-          <a:xfrm>
-            <a:off x="3977640" y="4178808"/>
-            <a:ext cx="320040" cy="420624"/>
+          <p:cNvPr id="44" name="Text 42"/>
+          <p:cNvSpPr/>
+          <p:nvPr/>
+        </p:nvSpPr>
+        <p:spPr>
+          <a:xfrm>
+            <a:off x="4023360" y="4178808"/>
+            <a:ext cx="365760" cy="420624"/>
           </a:xfrm>
           <a:prstGeom prst="rect">
             <a:avLst/>
@@ -40226,30 +41182,30 @@
               <a:buNone/>
             </a:pPr>
             <a:r>
-              <a:rPr lang="en-US" sz="1400" dirty="0">
-                <a:solidFill>
-                  <a:srgbClr val="475569"/>
+              <a:rPr lang="en-US" sz="1800" b="1" dirty="0">
+                <a:solidFill>
+                  <a:srgbClr val="0D9488"/>
                 </a:solidFill>
                 <a:latin typeface="Trebuchet MS" pitchFamily="34" charset="0"/>
                 <a:ea typeface="Trebuchet MS" pitchFamily="34" charset="-122"/>
                 <a:cs typeface="Trebuchet MS" pitchFamily="34" charset="-120"/>
               </a:rPr>
-              <a:t>+</a:t>
-            </a:r>
-            <a:endParaRPr lang="en-US" sz="1400" dirty="0"/>
-          </a:p>
-        </p:txBody>
-      </p:sp>
-      <p:sp>
-        <p:nvSpPr>
-          <p:cNvPr id="50" name="Shape 48"/>
-          <p:cNvSpPr/>
-          <p:nvPr/>
-        </p:nvSpPr>
-        <p:spPr>
-          <a:xfrm>
-            <a:off x="4325112" y="4178808"/>
-            <a:ext cx="950976" cy="420624"/>
+              <a:t>=</a:t>
+            </a:r>
+            <a:endParaRPr lang="en-US" sz="1800" dirty="0"/>
+          </a:p>
+        </p:txBody>
+      </p:sp>
+      <p:sp>
+        <p:nvSpPr>
+          <p:cNvPr id="45" name="Shape 43"/>
+          <p:cNvSpPr/>
+          <p:nvPr/>
+        </p:nvSpPr>
+        <p:spPr>
+          <a:xfrm>
+            <a:off x="4434840" y="4178808"/>
+            <a:ext cx="2194560" cy="420624"/>
           </a:xfrm>
           <a:prstGeom prst="rect">
             <a:avLst>
@@ -40257,33 +41213,26 @@
             </a:avLst>
           </a:prstGeom>
           <a:solidFill>
-            <a:srgbClr val="FCE7F3"/>
-          </a:solidFill>
-          <a:ln w="19050">
-            <a:solidFill>
-              <a:srgbClr val="DB2777"/>
-            </a:solidFill>
-            <a:prstDash val="solid"/>
-          </a:ln>
-          <a:effectLst>
-            <a:outerShdw sx="100000" sy="100000" kx="0" ky="0" algn="bl" rotWithShape="0" blurRad="101600" dist="38100" dir="8100000">
-              <a:srgbClr val="000000">
-                <a:alpha val="12000"/>
-              </a:srgbClr>
-            </a:outerShdw>
-          </a:effectLst>
-        </p:spPr>
-      </p:sp>
-      <p:sp>
-        <p:nvSpPr>
-          <p:cNvPr id="51" name="Text 49"/>
-          <p:cNvSpPr/>
-          <p:nvPr/>
-        </p:nvSpPr>
-        <p:spPr>
-          <a:xfrm>
-            <a:off x="4325112" y="4178808"/>
-            <a:ext cx="950976" cy="420624"/>
+            <a:srgbClr val="0D9488"/>
+          </a:solidFill>
+          <a:ln w="12700">
+            <a:solidFill>
+              <a:srgbClr val="0D9488"/>
+            </a:solidFill>
+            <a:prstDash val="solid"/>
+          </a:ln>
+        </p:spPr>
+      </p:sp>
+      <p:sp>
+        <p:nvSpPr>
+          <p:cNvPr id="46" name="Text 44"/>
+          <p:cNvSpPr/>
+          <p:nvPr/>
+        </p:nvSpPr>
+        <p:spPr>
+          <a:xfrm>
+            <a:off x="4434840" y="4178808"/>
+            <a:ext cx="2194560" cy="420624"/>
           </a:xfrm>
           <a:prstGeom prst="rect">
             <a:avLst/>
@@ -40299,120 +41248,15 @@
               <a:buNone/>
             </a:pPr>
             <a:r>
-              <a:rPr lang="en-US" sz="1300" b="1" dirty="0">
-                <a:solidFill>
-                  <a:srgbClr val="9D174D"/>
+              <a:rPr lang="en-US" sz="1400" b="1" dirty="0">
+                <a:solidFill>
+                  <a:srgbClr val="FFFFFF"/>
                 </a:solidFill>
                 <a:latin typeface="Trebuchet MS" pitchFamily="34" charset="0"/>
                 <a:ea typeface="Trebuchet MS" pitchFamily="34" charset="-122"/>
                 <a:cs typeface="Trebuchet MS" pitchFamily="34" charset="-120"/>
               </a:rPr>
-              <a:t>-ful</a:t>
-            </a:r>
-            <a:endParaRPr lang="en-US" sz="1300" dirty="0"/>
-          </a:p>
-        </p:txBody>
-      </p:sp>
-      <p:sp>
-        <p:nvSpPr>
-          <p:cNvPr id="52" name="Text 50"/>
-          <p:cNvSpPr/>
-          <p:nvPr/>
-        </p:nvSpPr>
-        <p:spPr>
-          <a:xfrm>
-            <a:off x="5349240" y="4178808"/>
-            <a:ext cx="365760" cy="420624"/>
-          </a:xfrm>
-          <a:prstGeom prst="rect">
-            <a:avLst/>
-          </a:prstGeom>
-          <a:noFill/>
-          <a:ln/>
-        </p:spPr>
-        <p:txBody>
-          <a:bodyPr wrap="square" lIns="0" tIns="0" rIns="0" bIns="0" rtlCol="0" anchor="ctr"/>
-          <a:lstStyle/>
-          <a:p>
-            <a:pPr algn="ctr" indent="0" marL="0">
-              <a:buNone/>
-            </a:pPr>
-            <a:r>
-              <a:rPr lang="en-US" sz="1800" b="1" dirty="0">
-                <a:solidFill>
-                  <a:srgbClr val="0D9488"/>
-                </a:solidFill>
-                <a:latin typeface="Trebuchet MS" pitchFamily="34" charset="0"/>
-                <a:ea typeface="Trebuchet MS" pitchFamily="34" charset="-122"/>
-                <a:cs typeface="Trebuchet MS" pitchFamily="34" charset="-120"/>
-              </a:rPr>
-              <a:t>=</a:t>
-            </a:r>
-            <a:endParaRPr lang="en-US" sz="1800" dirty="0"/>
-          </a:p>
-        </p:txBody>
-      </p:sp>
-      <p:sp>
-        <p:nvSpPr>
-          <p:cNvPr id="53" name="Shape 51"/>
-          <p:cNvSpPr/>
-          <p:nvPr/>
-        </p:nvSpPr>
-        <p:spPr>
-          <a:xfrm>
-            <a:off x="5760720" y="4178808"/>
-            <a:ext cx="2194560" cy="420624"/>
-          </a:xfrm>
-          <a:prstGeom prst="rect">
-            <a:avLst>
-              <a:gd name="adj" fmla="val 17391"/>
-            </a:avLst>
-          </a:prstGeom>
-          <a:solidFill>
-            <a:srgbClr val="0D9488"/>
-          </a:solidFill>
-          <a:ln w="12700">
-            <a:solidFill>
-              <a:srgbClr val="0D9488"/>
-            </a:solidFill>
-            <a:prstDash val="solid"/>
-          </a:ln>
-        </p:spPr>
-      </p:sp>
-      <p:sp>
-        <p:nvSpPr>
-          <p:cNvPr id="54" name="Text 52"/>
-          <p:cNvSpPr/>
-          <p:nvPr/>
-        </p:nvSpPr>
-        <p:spPr>
-          <a:xfrm>
-            <a:off x="5760720" y="4178808"/>
-            <a:ext cx="2194560" cy="420624"/>
-          </a:xfrm>
-          <a:prstGeom prst="rect">
-            <a:avLst/>
-          </a:prstGeom>
-          <a:noFill/>
-          <a:ln/>
-        </p:spPr>
-        <p:txBody>
-          <a:bodyPr wrap="square" lIns="0" tIns="0" rIns="0" bIns="0" rtlCol="0" anchor="ctr"/>
-          <a:lstStyle/>
-          <a:p>
-            <a:pPr algn="ctr" indent="0" marL="0">
-              <a:buNone/>
-            </a:pPr>
-            <a:r>
-              <a:rPr lang="en-US" sz="1400" b="1" dirty="0">
-                <a:solidFill>
-                  <a:srgbClr val="FFFFFF"/>
-                </a:solidFill>
-                <a:latin typeface="Trebuchet MS" pitchFamily="34" charset="0"/>
-                <a:ea typeface="Trebuchet MS" pitchFamily="34" charset="-122"/>
-                <a:cs typeface="Trebuchet MS" pitchFamily="34" charset="-120"/>
-              </a:rPr>
-              <a:t>hopeful</a:t>
+              <a:t>hope</a:t>
             </a:r>
             <a:endParaRPr lang="en-US" sz="1400" dirty="0"/>
           </a:p>
@@ -40704,7 +41548,7 @@
                 <a:ea typeface="Calibri" pitchFamily="34" charset="-122"/>
                 <a:cs typeface="Calibri" pitchFamily="34" charset="-120"/>
               </a:rPr>
-              <a:t>Word Labs  •  wordlabs.app  •  Root: 'hope' = wish for something good</a:t>
+              <a:t>Word Labs  •  wordlabs.app  •  Root: 'hope' = to wish for something good</a:t>
             </a:r>
             <a:endParaRPr lang="en-US" sz="800" dirty="0"/>
           </a:p>
@@ -40816,7 +41660,7 @@
                 <a:ea typeface="Trebuchet MS" pitchFamily="34" charset="-122"/>
                 <a:cs typeface="Trebuchet MS" pitchFamily="34" charset="-120"/>
               </a:rPr>
-              <a:t>hopeful</a:t>
+              <a:t>hope</a:t>
             </a:r>
             <a:endParaRPr lang="en-US" sz="1200" dirty="0"/>
           </a:p>
@@ -40882,7 +41726,7 @@
                 <a:ea typeface="Calibri" pitchFamily="34" charset="-122"/>
                 <a:cs typeface="Calibri" pitchFamily="34" charset="-120"/>
               </a:rPr>
-              <a:t>Something that was not expected or wished for.</a:t>
+              <a:t>feeling or showing hope that something good will happen</a:t>
             </a:r>
             <a:endParaRPr lang="en-US" sz="1200" dirty="0"/>
           </a:p>
@@ -40955,7 +41799,7 @@
                 <a:ea typeface="Trebuchet MS" pitchFamily="34" charset="-122"/>
                 <a:cs typeface="Trebuchet MS" pitchFamily="34" charset="-120"/>
               </a:rPr>
-              <a:t>hopeless</a:t>
+              <a:t>hoped</a:t>
             </a:r>
             <a:endParaRPr lang="en-US" sz="1200" dirty="0"/>
           </a:p>
@@ -41021,7 +41865,7 @@
                 <a:ea typeface="Calibri" pitchFamily="34" charset="-122"/>
                 <a:cs typeface="Calibri" pitchFamily="34" charset="-120"/>
               </a:rPr>
-              <a:t>In a way that shows you want something good to happen.</a:t>
+              <a:t>wishes that something good will happen</a:t>
             </a:r>
             <a:endParaRPr lang="en-US" sz="1200" dirty="0"/>
           </a:p>
@@ -41094,7 +41938,7 @@
                 <a:ea typeface="Trebuchet MS" pitchFamily="34" charset="-122"/>
                 <a:cs typeface="Trebuchet MS" pitchFamily="34" charset="-120"/>
               </a:rPr>
-              <a:t>hopefully</a:t>
+              <a:t>hopes</a:t>
             </a:r>
             <a:endParaRPr lang="en-US" sz="1200" dirty="0"/>
           </a:p>
@@ -41160,7 +42004,7 @@
                 <a:ea typeface="Calibri" pitchFamily="34" charset="-122"/>
                 <a:cs typeface="Calibri" pitchFamily="34" charset="-120"/>
               </a:rPr>
-              <a:t>Wishing that something good will happen.</a:t>
+              <a:t>wished for something good to happen, in the past</a:t>
             </a:r>
             <a:endParaRPr lang="en-US" sz="1200" dirty="0"/>
           </a:p>
@@ -41233,7 +42077,7 @@
                 <a:ea typeface="Trebuchet MS" pitchFamily="34" charset="-122"/>
                 <a:cs typeface="Trebuchet MS" pitchFamily="34" charset="-120"/>
               </a:rPr>
-              <a:t>hopelessly</a:t>
+              <a:t>hoping</a:t>
             </a:r>
             <a:endParaRPr lang="en-US" sz="1200" dirty="0"/>
           </a:p>
@@ -41299,7 +42143,7 @@
                 <a:ea typeface="Calibri" pitchFamily="34" charset="-122"/>
                 <a:cs typeface="Calibri" pitchFamily="34" charset="-120"/>
               </a:rPr>
-              <a:t>In a way that shows there is no chance of things getting better.</a:t>
+              <a:t>wishing for something good to happen</a:t>
             </a:r>
             <a:endParaRPr lang="en-US" sz="1200" dirty="0"/>
           </a:p>
@@ -41372,7 +42216,7 @@
                 <a:ea typeface="Trebuchet MS" pitchFamily="34" charset="-122"/>
                 <a:cs typeface="Trebuchet MS" pitchFamily="34" charset="-120"/>
               </a:rPr>
-              <a:t>unhoped</a:t>
+              <a:t>hopeful</a:t>
             </a:r>
             <a:endParaRPr lang="en-US" sz="1200" dirty="0"/>
           </a:p>
@@ -41438,285 +42282,7 @@
                 <a:ea typeface="Calibri" pitchFamily="34" charset="-122"/>
                 <a:cs typeface="Calibri" pitchFamily="34" charset="-120"/>
               </a:rPr>
-              <a:t>Feeling like something good might happen.</a:t>
-            </a:r>
-            <a:endParaRPr lang="en-US" sz="1200" dirty="0"/>
-          </a:p>
-        </p:txBody>
-      </p:sp>
-      <p:sp>
-        <p:nvSpPr>
-          <p:cNvPr id="31" name="Shape 29"/>
-          <p:cNvSpPr/>
-          <p:nvPr/>
-        </p:nvSpPr>
-        <p:spPr>
-          <a:xfrm>
-            <a:off x="365760" y="3840480"/>
-            <a:ext cx="2011680" cy="457200"/>
-          </a:xfrm>
-          <a:prstGeom prst="rect">
-            <a:avLst>
-              <a:gd name="adj" fmla="val 12000"/>
-            </a:avLst>
-          </a:prstGeom>
-          <a:solidFill>
-            <a:srgbClr val="EEF2FF"/>
-          </a:solidFill>
-          <a:ln w="12700">
-            <a:solidFill>
-              <a:srgbClr val="6366F1"/>
-            </a:solidFill>
-            <a:prstDash val="solid"/>
-          </a:ln>
-          <a:effectLst>
-            <a:outerShdw sx="100000" sy="100000" kx="0" ky="0" algn="bl" rotWithShape="0" blurRad="101600" dist="38100" dir="8100000">
-              <a:srgbClr val="000000">
-                <a:alpha val="12000"/>
-              </a:srgbClr>
-            </a:outerShdw>
-          </a:effectLst>
-        </p:spPr>
-      </p:sp>
-      <p:sp>
-        <p:nvSpPr>
-          <p:cNvPr id="32" name="Text 30"/>
-          <p:cNvSpPr/>
-          <p:nvPr/>
-        </p:nvSpPr>
-        <p:spPr>
-          <a:xfrm>
-            <a:off x="365760" y="3840480"/>
-            <a:ext cx="2011680" cy="457200"/>
-          </a:xfrm>
-          <a:prstGeom prst="rect">
-            <a:avLst/>
-          </a:prstGeom>
-          <a:noFill/>
-          <a:ln/>
-        </p:spPr>
-        <p:txBody>
-          <a:bodyPr wrap="square" lIns="0" tIns="0" rIns="0" bIns="0" rtlCol="0" anchor="ctr"/>
-          <a:lstStyle/>
-          <a:p>
-            <a:pPr algn="ctr" indent="0" marL="0">
-              <a:buNone/>
-            </a:pPr>
-            <a:r>
-              <a:rPr lang="en-US" sz="1200" b="1" dirty="0">
-                <a:solidFill>
-                  <a:srgbClr val="4338CA"/>
-                </a:solidFill>
-                <a:latin typeface="Trebuchet MS" pitchFamily="34" charset="0"/>
-                <a:ea typeface="Trebuchet MS" pitchFamily="34" charset="-122"/>
-                <a:cs typeface="Trebuchet MS" pitchFamily="34" charset="-120"/>
-              </a:rPr>
-              <a:t>hoping</a:t>
-            </a:r>
-            <a:endParaRPr lang="en-US" sz="1200" dirty="0"/>
-          </a:p>
-        </p:txBody>
-      </p:sp>
-      <p:sp>
-        <p:nvSpPr>
-          <p:cNvPr id="33" name="Shape 31"/>
-          <p:cNvSpPr/>
-          <p:nvPr/>
-        </p:nvSpPr>
-        <p:spPr>
-          <a:xfrm>
-            <a:off x="2514600" y="3840480"/>
-            <a:ext cx="6263640" cy="457200"/>
-          </a:xfrm>
-          <a:prstGeom prst="rect">
-            <a:avLst>
-              <a:gd name="adj" fmla="val 12000"/>
-            </a:avLst>
-          </a:prstGeom>
-          <a:solidFill>
-            <a:srgbClr val="F8FAFC"/>
-          </a:solidFill>
-          <a:ln w="12700">
-            <a:solidFill>
-              <a:srgbClr val="E2E8F0"/>
-            </a:solidFill>
-            <a:prstDash val="solid"/>
-          </a:ln>
-        </p:spPr>
-      </p:sp>
-      <p:sp>
-        <p:nvSpPr>
-          <p:cNvPr id="34" name="Text 32"/>
-          <p:cNvSpPr/>
-          <p:nvPr/>
-        </p:nvSpPr>
-        <p:spPr>
-          <a:xfrm>
-            <a:off x="2651760" y="3840480"/>
-            <a:ext cx="6035040" cy="457200"/>
-          </a:xfrm>
-          <a:prstGeom prst="rect">
-            <a:avLst/>
-          </a:prstGeom>
-          <a:noFill/>
-          <a:ln/>
-        </p:spPr>
-        <p:txBody>
-          <a:bodyPr wrap="square" rtlCol="0" anchor="ctr"/>
-          <a:lstStyle/>
-          <a:p>
-            <a:pPr algn="l" indent="0" marL="0">
-              <a:buNone/>
-            </a:pPr>
-            <a:r>
-              <a:rPr lang="en-US" sz="1200" dirty="0">
-                <a:solidFill>
-                  <a:srgbClr val="0F172A"/>
-                </a:solidFill>
-                <a:latin typeface="Calibri" pitchFamily="34" charset="0"/>
-                <a:ea typeface="Calibri" pitchFamily="34" charset="-122"/>
-                <a:cs typeface="Calibri" pitchFamily="34" charset="-120"/>
-              </a:rPr>
-              <a:t>Wished that something good would happen in the past.</a:t>
-            </a:r>
-            <a:endParaRPr lang="en-US" sz="1200" dirty="0"/>
-          </a:p>
-        </p:txBody>
-      </p:sp>
-      <p:sp>
-        <p:nvSpPr>
-          <p:cNvPr id="35" name="Shape 33"/>
-          <p:cNvSpPr/>
-          <p:nvPr/>
-        </p:nvSpPr>
-        <p:spPr>
-          <a:xfrm>
-            <a:off x="365760" y="4370832"/>
-            <a:ext cx="2011680" cy="457200"/>
-          </a:xfrm>
-          <a:prstGeom prst="rect">
-            <a:avLst>
-              <a:gd name="adj" fmla="val 12000"/>
-            </a:avLst>
-          </a:prstGeom>
-          <a:solidFill>
-            <a:srgbClr val="EEF2FF"/>
-          </a:solidFill>
-          <a:ln w="12700">
-            <a:solidFill>
-              <a:srgbClr val="6366F1"/>
-            </a:solidFill>
-            <a:prstDash val="solid"/>
-          </a:ln>
-          <a:effectLst>
-            <a:outerShdw sx="100000" sy="100000" kx="0" ky="0" algn="bl" rotWithShape="0" blurRad="101600" dist="38100" dir="8100000">
-              <a:srgbClr val="000000">
-                <a:alpha val="12000"/>
-              </a:srgbClr>
-            </a:outerShdw>
-          </a:effectLst>
-        </p:spPr>
-      </p:sp>
-      <p:sp>
-        <p:nvSpPr>
-          <p:cNvPr id="36" name="Text 34"/>
-          <p:cNvSpPr/>
-          <p:nvPr/>
-        </p:nvSpPr>
-        <p:spPr>
-          <a:xfrm>
-            <a:off x="365760" y="4370832"/>
-            <a:ext cx="2011680" cy="457200"/>
-          </a:xfrm>
-          <a:prstGeom prst="rect">
-            <a:avLst/>
-          </a:prstGeom>
-          <a:noFill/>
-          <a:ln/>
-        </p:spPr>
-        <p:txBody>
-          <a:bodyPr wrap="square" lIns="0" tIns="0" rIns="0" bIns="0" rtlCol="0" anchor="ctr"/>
-          <a:lstStyle/>
-          <a:p>
-            <a:pPr algn="ctr" indent="0" marL="0">
-              <a:buNone/>
-            </a:pPr>
-            <a:r>
-              <a:rPr lang="en-US" sz="1200" b="1" dirty="0">
-                <a:solidFill>
-                  <a:srgbClr val="4338CA"/>
-                </a:solidFill>
-                <a:latin typeface="Trebuchet MS" pitchFamily="34" charset="0"/>
-                <a:ea typeface="Trebuchet MS" pitchFamily="34" charset="-122"/>
-                <a:cs typeface="Trebuchet MS" pitchFamily="34" charset="-120"/>
-              </a:rPr>
-              <a:t>hoped</a:t>
-            </a:r>
-            <a:endParaRPr lang="en-US" sz="1200" dirty="0"/>
-          </a:p>
-        </p:txBody>
-      </p:sp>
-      <p:sp>
-        <p:nvSpPr>
-          <p:cNvPr id="37" name="Shape 35"/>
-          <p:cNvSpPr/>
-          <p:nvPr/>
-        </p:nvSpPr>
-        <p:spPr>
-          <a:xfrm>
-            <a:off x="2514600" y="4370832"/>
-            <a:ext cx="6263640" cy="457200"/>
-          </a:xfrm>
-          <a:prstGeom prst="rect">
-            <a:avLst>
-              <a:gd name="adj" fmla="val 12000"/>
-            </a:avLst>
-          </a:prstGeom>
-          <a:solidFill>
-            <a:srgbClr val="F8FAFC"/>
-          </a:solidFill>
-          <a:ln w="12700">
-            <a:solidFill>
-              <a:srgbClr val="E2E8F0"/>
-            </a:solidFill>
-            <a:prstDash val="solid"/>
-          </a:ln>
-        </p:spPr>
-      </p:sp>
-      <p:sp>
-        <p:nvSpPr>
-          <p:cNvPr id="38" name="Text 36"/>
-          <p:cNvSpPr/>
-          <p:nvPr/>
-        </p:nvSpPr>
-        <p:spPr>
-          <a:xfrm>
-            <a:off x="2651760" y="4370832"/>
-            <a:ext cx="6035040" cy="457200"/>
-          </a:xfrm>
-          <a:prstGeom prst="rect">
-            <a:avLst/>
-          </a:prstGeom>
-          <a:noFill/>
-          <a:ln/>
-        </p:spPr>
-        <p:txBody>
-          <a:bodyPr wrap="square" rtlCol="0" anchor="ctr"/>
-          <a:lstStyle/>
-          <a:p>
-            <a:pPr algn="l" indent="0" marL="0">
-              <a:buNone/>
-            </a:pPr>
-            <a:r>
-              <a:rPr lang="en-US" sz="1200" dirty="0">
-                <a:solidFill>
-                  <a:srgbClr val="0F172A"/>
-                </a:solidFill>
-                <a:latin typeface="Calibri" pitchFamily="34" charset="0"/>
-                <a:ea typeface="Calibri" pitchFamily="34" charset="-122"/>
-                <a:cs typeface="Calibri" pitchFamily="34" charset="-120"/>
-              </a:rPr>
-              <a:t>Having no chance of success or improvement.</a:t>
+              <a:t>a feeling that something good will happen</a:t>
             </a:r>
             <a:endParaRPr lang="en-US" sz="1200" dirty="0"/>
           </a:p>
@@ -42008,7 +42574,7 @@
                 <a:ea typeface="Calibri" pitchFamily="34" charset="-122"/>
                 <a:cs typeface="Calibri" pitchFamily="34" charset="-120"/>
               </a:rPr>
-              <a:t>Word Labs  •  wordlabs.app  •  Root: 'hope' = wish for something good</a:t>
+              <a:t>Word Labs  •  wordlabs.app  •  Root: 'hope' = to wish for something good</a:t>
             </a:r>
             <a:endParaRPr lang="en-US" sz="800" dirty="0"/>
           </a:p>
@@ -42211,7 +42777,7 @@
                 <a:ea typeface="Calibri" pitchFamily="34" charset="-122"/>
                 <a:cs typeface="Calibri" pitchFamily="34" charset="-120"/>
               </a:rPr>
-              <a:t>The hopeful students waited nervously to hear who had won the science competition.</a:t>
+              <a:t>She held onto the hope that her team would win the final.</a:t>
             </a:r>
             <a:endParaRPr lang="en-US" sz="1500" dirty="0"/>
           </a:p>
@@ -42375,7 +42941,7 @@
                 <a:ea typeface="Calibri" pitchFamily="34" charset="-122"/>
                 <a:cs typeface="Calibri" pitchFamily="34" charset="-120"/>
               </a:rPr>
-              <a:t>After weeks of rain, the farmers were hoping that the sunny weather would last.</a:t>
+              <a:t>She hoped the rain would stop before the match started.</a:t>
             </a:r>
             <a:endParaRPr lang="en-US" sz="1500" dirty="0"/>
           </a:p>
@@ -42539,7 +43105,7 @@
                 <a:ea typeface="Calibri" pitchFamily="34" charset="-122"/>
                 <a:cs typeface="Calibri" pitchFamily="34" charset="-120"/>
               </a:rPr>
-              <a:t>The coach gave a hopeless sigh when the team missed another goal in the final minutes.</a:t>
+              <a:t>She hopes to visit her grandparents these school holidays.</a:t>
             </a:r>
             <a:endParaRPr lang="en-US" sz="1500" dirty="0"/>
           </a:p>
